--- a/Ch02_Christian_Church.pptx
+++ b/Ch02_Christian_Church.pptx
@@ -2186,7 +2186,7 @@
               <a:buNone/>
             </a:pPr>
             <a:r>
-              <a:rPr lang="en-US" sz="1100" spc="300" kern="0" dirty="0">
+              <a:rPr lang="en-US" sz="1400" spc="300" kern="0" dirty="0">
                 <a:solidFill>
                   <a:srgbClr val="E8D8A8"/>
                 </a:solidFill>
@@ -2196,7 +2196,7 @@
               </a:rPr>
               <a:t>A HISTORY OF WESTERN MUSIC · TENTH EDITION</a:t>
             </a:r>
-            <a:endParaRPr lang="en-US" sz="1100" dirty="0"/>
+            <a:endParaRPr lang="en-US" sz="1400" dirty="0"/>
           </a:p>
         </p:txBody>
       </p:sp>
@@ -2372,14 +2372,14 @@
           <a:ln/>
         </p:spPr>
         <p:txBody>
-          <a:bodyPr wrap="square" rtlCol="0" anchor="ctr"/>
+          <a:bodyPr wrap="square" rtlCol="0" anchor="t"/>
           <a:lstStyle/>
           <a:p>
             <a:pPr algn="ctr" indent="0" marL="0">
               <a:buNone/>
             </a:pPr>
             <a:r>
-              <a:rPr lang="en-US" sz="1100" dirty="0">
+              <a:rPr lang="en-US" sz="1400" dirty="0">
                 <a:solidFill>
                   <a:srgbClr val="C8A020"/>
                 </a:solidFill>
@@ -2389,7 +2389,7 @@
               </a:rPr>
               <a:t>Textbook pp. 20–41</a:t>
             </a:r>
-            <a:endParaRPr lang="en-US" sz="1100" dirty="0"/>
+            <a:endParaRPr lang="en-US" sz="1400" dirty="0"/>
           </a:p>
         </p:txBody>
       </p:sp>
@@ -2542,14 +2542,14 @@
           <a:ln/>
         </p:spPr>
         <p:txBody>
-          <a:bodyPr wrap="square" rtlCol="0" anchor="ctr"/>
-          <a:lstStyle/>
-          <a:p>
-            <a:pPr indent="0" marL="0">
-              <a:buNone/>
-            </a:pPr>
-            <a:r>
-              <a:rPr lang="en-US" sz="1200" i="1" dirty="0">
+          <a:bodyPr wrap="square" rtlCol="0" anchor="t"/>
+          <a:lstStyle/>
+          <a:p>
+            <a:pPr indent="0" marL="0">
+              <a:buNone/>
+            </a:pPr>
+            <a:r>
+              <a:rPr lang="en-US" sz="1400" i="1" dirty="0">
                 <a:solidFill>
                   <a:srgbClr val="4A3828"/>
                 </a:solidFill>
@@ -2559,14 +2559,14 @@
               </a:rPr>
               <a:t>「除非被記住，否則聲音就消逝了；它們無法寫下。」—— 塞維利亞的伊西多爾 (ca. 560–636)</a:t>
             </a:r>
-            <a:endParaRPr lang="en-US" sz="1200" dirty="0"/>
-          </a:p>
-          <a:p>
-            <a:pPr indent="0" marL="0">
-              <a:buNone/>
-            </a:pPr>
-            <a:r>
-              <a:rPr lang="en-US" sz="1200" i="1" dirty="0">
+            <a:endParaRPr lang="en-US" sz="1400" dirty="0"/>
+          </a:p>
+          <a:p>
+            <a:pPr indent="0" marL="0">
+              <a:buNone/>
+            </a:pPr>
+            <a:r>
+              <a:rPr lang="en-US" sz="1400" i="1" dirty="0">
                 <a:solidFill>
                   <a:srgbClr val="4A3828"/>
                 </a:solidFill>
@@ -2576,7 +2576,7 @@
               </a:rPr>
               <a:t>Unless sounds are remembered by man, they perish, for they cannot be written down. — Isidore of Seville</a:t>
             </a:r>
-            <a:endParaRPr lang="en-US" sz="1200" dirty="0"/>
+            <a:endParaRPr lang="en-US" sz="1400" dirty="0"/>
           </a:p>
         </p:txBody>
       </p:sp>
@@ -2625,7 +2625,7 @@
               <a:buNone/>
             </a:pPr>
             <a:r>
-              <a:rPr lang="en-US" sz="1200" b="1" dirty="0">
+              <a:rPr lang="en-US" sz="1400" b="1" dirty="0">
                 <a:solidFill>
                   <a:srgbClr val="C8A020"/>
                 </a:solidFill>
@@ -2635,14 +2635,14 @@
               </a:rPr>
               <a:t>① 口耳相傳</a:t>
             </a:r>
-            <a:endParaRPr lang="en-US" sz="1200" dirty="0"/>
-          </a:p>
-          <a:p>
-            <a:pPr indent="0" marL="0">
-              <a:buNone/>
-            </a:pPr>
-            <a:r>
-              <a:rPr lang="en-US" sz="1200" b="1" dirty="0">
+            <a:endParaRPr lang="en-US" sz="1400" dirty="0"/>
+          </a:p>
+          <a:p>
+            <a:pPr indent="0" marL="0">
+              <a:buNone/>
+            </a:pPr>
+            <a:r>
+              <a:rPr lang="en-US" sz="1400" b="1" dirty="0">
                 <a:solidFill>
                   <a:srgbClr val="C8A020"/>
                 </a:solidFill>
@@ -2652,7 +2652,7 @@
               </a:rPr>
               <a:t>Oral Transmission</a:t>
             </a:r>
-            <a:endParaRPr lang="en-US" sz="1200" dirty="0"/>
+            <a:endParaRPr lang="en-US" sz="1400" dirty="0"/>
           </a:p>
         </p:txBody>
       </p:sp>
@@ -2694,14 +2694,14 @@
           <a:ln/>
         </p:spPr>
         <p:txBody>
-          <a:bodyPr wrap="square" lIns="0" tIns="0" rIns="0" bIns="0" rtlCol="0" anchor="ctr"/>
-          <a:lstStyle/>
-          <a:p>
-            <a:pPr indent="0" marL="0">
-              <a:buNone/>
-            </a:pPr>
-            <a:r>
-              <a:rPr lang="en-US" sz="1150" dirty="0">
+          <a:bodyPr wrap="square" lIns="0" tIns="0" rIns="0" bIns="0" rtlCol="0" anchor="t"/>
+          <a:lstStyle/>
+          <a:p>
+            <a:pPr indent="0" marL="0">
+              <a:buNone/>
+            </a:pPr>
+            <a:r>
+              <a:rPr lang="en-US" sz="1400" dirty="0">
                 <a:solidFill>
                   <a:srgbClr val="FBF5E6"/>
                 </a:solidFill>
@@ -2711,14 +2711,14 @@
               </a:rPr>
               <a:t>記譜法出現前，聖詠靠口傳記憶；歌手學習數以百計的旋律，全靠記憶</a:t>
             </a:r>
-            <a:endParaRPr lang="en-US" sz="1150" dirty="0"/>
-          </a:p>
-          <a:p>
-            <a:pPr indent="0" marL="0">
-              <a:buNone/>
-            </a:pPr>
-            <a:r>
-              <a:rPr lang="en-US" sz="1150" dirty="0">
+            <a:endParaRPr lang="en-US" sz="1400" dirty="0"/>
+          </a:p>
+          <a:p>
+            <a:pPr indent="0" marL="0">
+              <a:buNone/>
+            </a:pPr>
+            <a:r>
+              <a:rPr lang="en-US" sz="1400" dirty="0">
                 <a:solidFill>
                   <a:srgbClr val="FBF5E6"/>
                 </a:solidFill>
@@ -2728,7 +2728,7 @@
               </a:rPr>
               <a:t>Before notation, chants were memorized through oral transmission; singers memorized hundreds of melodies</a:t>
             </a:r>
-            <a:endParaRPr lang="en-US" sz="1150" dirty="0"/>
+            <a:endParaRPr lang="en-US" sz="1400" dirty="0"/>
           </a:p>
         </p:txBody>
       </p:sp>
@@ -2777,7 +2777,7 @@
               <a:buNone/>
             </a:pPr>
             <a:r>
-              <a:rPr lang="en-US" sz="1200" b="1" dirty="0">
+              <a:rPr lang="en-US" sz="1400" b="1" dirty="0">
                 <a:solidFill>
                   <a:srgbClr val="C8A020"/>
                 </a:solidFill>
@@ -2787,14 +2787,14 @@
               </a:rPr>
               <a:t>② 紐姆符號</a:t>
             </a:r>
-            <a:endParaRPr lang="en-US" sz="1200" dirty="0"/>
-          </a:p>
-          <a:p>
-            <a:pPr indent="0" marL="0">
-              <a:buNone/>
-            </a:pPr>
-            <a:r>
-              <a:rPr lang="en-US" sz="1200" b="1" dirty="0">
+            <a:endParaRPr lang="en-US" sz="1400" dirty="0"/>
+          </a:p>
+          <a:p>
+            <a:pPr indent="0" marL="0">
+              <a:buNone/>
+            </a:pPr>
+            <a:r>
+              <a:rPr lang="en-US" sz="1400" b="1" dirty="0">
                 <a:solidFill>
                   <a:srgbClr val="C8A020"/>
                 </a:solidFill>
@@ -2804,7 +2804,7 @@
               </a:rPr>
               <a:t>Neumes (9th c.)</a:t>
             </a:r>
-            <a:endParaRPr lang="en-US" sz="1200" dirty="0"/>
+            <a:endParaRPr lang="en-US" sz="1400" dirty="0"/>
           </a:p>
         </p:txBody>
       </p:sp>
@@ -2846,14 +2846,14 @@
           <a:ln/>
         </p:spPr>
         <p:txBody>
-          <a:bodyPr wrap="square" lIns="0" tIns="0" rIns="0" bIns="0" rtlCol="0" anchor="ctr"/>
-          <a:lstStyle/>
-          <a:p>
-            <a:pPr indent="0" marL="0">
-              <a:buNone/>
-            </a:pPr>
-            <a:r>
-              <a:rPr lang="en-US" sz="1150" dirty="0">
+          <a:bodyPr wrap="square" lIns="0" tIns="0" rIns="0" bIns="0" rtlCol="0" anchor="t"/>
+          <a:lstStyle/>
+          <a:p>
+            <a:pPr indent="0" marL="0">
+              <a:buNone/>
+            </a:pPr>
+            <a:r>
+              <a:rPr lang="en-US" sz="1400" dirty="0">
                 <a:solidFill>
                   <a:srgbClr val="FBF5E6"/>
                 </a:solidFill>
@@ -2863,14 +2863,14 @@
               </a:rPr>
               <a:t>寫在文字上方的記號（gesture/shape），提示旋律輪廓——但不指定確切音高</a:t>
             </a:r>
-            <a:endParaRPr lang="en-US" sz="1150" dirty="0"/>
-          </a:p>
-          <a:p>
-            <a:pPr indent="0" marL="0">
-              <a:buNone/>
-            </a:pPr>
-            <a:r>
-              <a:rPr lang="en-US" sz="1150" dirty="0">
+            <a:endParaRPr lang="en-US" sz="1400" dirty="0"/>
+          </a:p>
+          <a:p>
+            <a:pPr indent="0" marL="0">
+              <a:buNone/>
+            </a:pPr>
+            <a:r>
+              <a:rPr lang="en-US" sz="1400" dirty="0">
                 <a:solidFill>
                   <a:srgbClr val="FBF5E6"/>
                 </a:solidFill>
@@ -2880,7 +2880,7 @@
               </a:rPr>
               <a:t>Signs placed above text to indicate melodic contour—direction, shape—but not precise pitches or intervals</a:t>
             </a:r>
-            <a:endParaRPr lang="en-US" sz="1150" dirty="0"/>
+            <a:endParaRPr lang="en-US" sz="1400" dirty="0"/>
           </a:p>
         </p:txBody>
       </p:sp>
@@ -2929,7 +2929,7 @@
               <a:buNone/>
             </a:pPr>
             <a:r>
-              <a:rPr lang="en-US" sz="1200" b="1" dirty="0">
+              <a:rPr lang="en-US" sz="1400" b="1" dirty="0">
                 <a:solidFill>
                   <a:srgbClr val="C8A020"/>
                 </a:solidFill>
@@ -2939,14 +2939,14 @@
               </a:rPr>
               <a:t>③ 有高度紐姆</a:t>
             </a:r>
-            <a:endParaRPr lang="en-US" sz="1200" dirty="0"/>
-          </a:p>
-          <a:p>
-            <a:pPr indent="0" marL="0">
-              <a:buNone/>
-            </a:pPr>
-            <a:r>
-              <a:rPr lang="en-US" sz="1200" b="1" dirty="0">
+            <a:endParaRPr lang="en-US" sz="1400" dirty="0"/>
+          </a:p>
+          <a:p>
+            <a:pPr indent="0" marL="0">
+              <a:buNone/>
+            </a:pPr>
+            <a:r>
+              <a:rPr lang="en-US" sz="1400" b="1" dirty="0">
                 <a:solidFill>
                   <a:srgbClr val="C8A020"/>
                 </a:solidFill>
@@ -2956,7 +2956,7 @@
               </a:rPr>
               <a:t>Heighted Neumes (10–11th c.)</a:t>
             </a:r>
-            <a:endParaRPr lang="en-US" sz="1200" dirty="0"/>
+            <a:endParaRPr lang="en-US" sz="1400" dirty="0"/>
           </a:p>
         </p:txBody>
       </p:sp>
@@ -2998,14 +2998,14 @@
           <a:ln/>
         </p:spPr>
         <p:txBody>
-          <a:bodyPr wrap="square" lIns="0" tIns="0" rIns="0" bIns="0" rtlCol="0" anchor="ctr"/>
-          <a:lstStyle/>
-          <a:p>
-            <a:pPr indent="0" marL="0">
-              <a:buNone/>
-            </a:pPr>
-            <a:r>
-              <a:rPr lang="en-US" sz="1150" dirty="0">
+          <a:bodyPr wrap="square" lIns="0" tIns="0" rIns="0" bIns="0" rtlCol="0" anchor="t"/>
+          <a:lstStyle/>
+          <a:p>
+            <a:pPr indent="0" marL="0">
+              <a:buNone/>
+            </a:pPr>
+            <a:r>
+              <a:rPr lang="en-US" sz="1400" dirty="0">
                 <a:solidFill>
                   <a:srgbClr val="FBF5E6"/>
                 </a:solidFill>
@@ -3015,14 +3015,14 @@
               </a:rPr>
               <a:t>紐姆符號寫在不同高度以指示音高；加一條橫線輔助辨識音高（音高相對但仍不確定）</a:t>
             </a:r>
-            <a:endParaRPr lang="en-US" sz="1150" dirty="0"/>
-          </a:p>
-          <a:p>
-            <a:pPr indent="0" marL="0">
-              <a:buNone/>
-            </a:pPr>
-            <a:r>
-              <a:rPr lang="en-US" sz="1150" dirty="0">
+            <a:endParaRPr lang="en-US" sz="1400" dirty="0"/>
+          </a:p>
+          <a:p>
+            <a:pPr indent="0" marL="0">
+              <a:buNone/>
+            </a:pPr>
+            <a:r>
+              <a:rPr lang="en-US" sz="1400" dirty="0">
                 <a:solidFill>
                   <a:srgbClr val="FBF5E6"/>
                 </a:solidFill>
@@ -3032,7 +3032,7 @@
               </a:rPr>
               <a:t>Neumes placed at varying heights above text to indicate relative pitch; a scratched line helped identify one note</a:t>
             </a:r>
-            <a:endParaRPr lang="en-US" sz="1150" dirty="0"/>
+            <a:endParaRPr lang="en-US" sz="1400" dirty="0"/>
           </a:p>
         </p:txBody>
       </p:sp>
@@ -3081,7 +3081,7 @@
               <a:buNone/>
             </a:pPr>
             <a:r>
-              <a:rPr lang="en-US" sz="1200" b="1" dirty="0">
+              <a:rPr lang="en-US" sz="1400" b="1" dirty="0">
                 <a:solidFill>
                   <a:srgbClr val="C8A020"/>
                 </a:solidFill>
@@ -3091,14 +3091,14 @@
               </a:rPr>
               <a:t>④ 線譜與音符</a:t>
             </a:r>
-            <a:endParaRPr lang="en-US" sz="1200" dirty="0"/>
-          </a:p>
-          <a:p>
-            <a:pPr indent="0" marL="0">
-              <a:buNone/>
-            </a:pPr>
-            <a:r>
-              <a:rPr lang="en-US" sz="1200" b="1" dirty="0">
+            <a:endParaRPr lang="en-US" sz="1400" dirty="0"/>
+          </a:p>
+          <a:p>
+            <a:pPr indent="0" marL="0">
+              <a:buNone/>
+            </a:pPr>
+            <a:r>
+              <a:rPr lang="en-US" sz="1400" b="1" dirty="0">
                 <a:solidFill>
                   <a:srgbClr val="C8A020"/>
                 </a:solidFill>
@@ -3108,7 +3108,7 @@
               </a:rPr>
               <a:t>Lines, Clef &amp; Staff</a:t>
             </a:r>
-            <a:endParaRPr lang="en-US" sz="1200" dirty="0"/>
+            <a:endParaRPr lang="en-US" sz="1400" dirty="0"/>
           </a:p>
         </p:txBody>
       </p:sp>
@@ -3150,14 +3150,14 @@
           <a:ln/>
         </p:spPr>
         <p:txBody>
-          <a:bodyPr wrap="square" lIns="0" tIns="0" rIns="0" bIns="0" rtlCol="0" anchor="ctr"/>
-          <a:lstStyle/>
-          <a:p>
-            <a:pPr indent="0" marL="0">
-              <a:buNone/>
-            </a:pPr>
-            <a:r>
-              <a:rPr lang="en-US" sz="1150" dirty="0">
+          <a:bodyPr wrap="square" lIns="0" tIns="0" rIns="0" bIns="0" rtlCol="0" anchor="t"/>
+          <a:lstStyle/>
+          <a:p>
+            <a:pPr indent="0" marL="0">
+              <a:buNone/>
+            </a:pPr>
+            <a:r>
+              <a:rPr lang="en-US" sz="1400" dirty="0">
                 <a:solidFill>
                   <a:srgbClr val="FBF5E6"/>
                 </a:solidFill>
@@ -3167,14 +3167,14 @@
               </a:rPr>
               <a:t>阿雷佐的桂多（ca. 991–1033）：四線譜，F、C 譜號，紐姆符號改良為精確音符</a:t>
             </a:r>
-            <a:endParaRPr lang="en-US" sz="1150" dirty="0"/>
-          </a:p>
-          <a:p>
-            <a:pPr indent="0" marL="0">
-              <a:buNone/>
-            </a:pPr>
-            <a:r>
-              <a:rPr lang="en-US" sz="1150" dirty="0">
+            <a:endParaRPr lang="en-US" sz="1400" dirty="0"/>
+          </a:p>
+          <a:p>
+            <a:pPr indent="0" marL="0">
+              <a:buNone/>
+            </a:pPr>
+            <a:r>
+              <a:rPr lang="en-US" sz="1400" dirty="0">
                 <a:solidFill>
                   <a:srgbClr val="FBF5E6"/>
                 </a:solidFill>
@@ -3184,7 +3184,7 @@
               </a:rPr>
               <a:t>Guido of Arezzo: four-line staff with F and C clefs; neumes reshaped to indicate pitch exactly; music could now be read at sight</a:t>
             </a:r>
-            <a:endParaRPr lang="en-US" sz="1150" dirty="0"/>
+            <a:endParaRPr lang="en-US" sz="1400" dirty="0"/>
           </a:p>
         </p:txBody>
       </p:sp>
@@ -3376,74 +3376,110 @@
           <a:ln/>
         </p:spPr>
         <p:txBody>
+          <a:bodyPr wrap="square" rtlCol="0" anchor="t"/>
+          <a:lstStyle/>
+          <a:p>
+            <a:pPr indent="0" marL="0">
+              <a:buNone/>
+            </a:pPr>
+            <a:r>
+              <a:rPr lang="en-US" sz="1400" dirty="0">
+                <a:solidFill>
+                  <a:srgbClr val="E8D8A8"/>
+                </a:solidFill>
+                <a:latin typeface="Calibri" pitchFamily="34" charset="0"/>
+                <a:ea typeface="Calibri" pitchFamily="34" charset="-122"/>
+                <a:cs typeface="Calibri" pitchFamily="34" charset="-120"/>
+              </a:rPr>
+              <a:t>波愛修斯生於羅馬貴族，後受哥德統治者狄奧多里克任命，依據希臘文獻（畢達哥拉斯、托勒密）撰寫《音樂基礎》。此書在中世紀被奉為最高音樂理論權威超過一千年。</a:t>
+            </a:r>
+            <a:endParaRPr lang="en-US" sz="1400" dirty="0"/>
+          </a:p>
+          <a:p>
+            <a:pPr indent="0" marL="0">
+              <a:buNone/>
+            </a:pPr>
+            <a:r>
+              <a:rPr lang="en-US" sz="1400" dirty="0">
+                <a:solidFill>
+                  <a:srgbClr val="E8D8A8"/>
+                </a:solidFill>
+                <a:latin typeface="Calibri" pitchFamily="34" charset="0"/>
+                <a:ea typeface="Calibri" pitchFamily="34" charset="-122"/>
+                <a:cs typeface="Calibri" pitchFamily="34" charset="-120"/>
+              </a:rPr>
+              <a:t>Boethius, born into Roman nobility, compiled De institutione musica from Greek sources (Pythagoras, Ptolemy). It was the authoritative text on music theory for over a thousand years.</a:t>
+            </a:r>
+            <a:endParaRPr lang="en-US" sz="1400" dirty="0"/>
+          </a:p>
+        </p:txBody>
+      </p:sp>
+      <p:sp>
+        <p:nvSpPr>
+          <p:cNvPr id="8" name="Shape 6"/>
+          <p:cNvSpPr/>
+          <p:nvPr/>
+        </p:nvSpPr>
+        <p:spPr>
+          <a:xfrm>
+            <a:off x="274320" y="1874520"/>
+            <a:ext cx="2788920" cy="2514600"/>
+          </a:xfrm>
+          <a:prstGeom prst="rect">
+            <a:avLst/>
+          </a:prstGeom>
+          <a:solidFill>
+            <a:srgbClr val="1A3A5C"/>
+          </a:solidFill>
+          <a:ln/>
+        </p:spPr>
+      </p:sp>
+      <p:sp>
+        <p:nvSpPr>
+          <p:cNvPr id="9" name="Text 7"/>
+          <p:cNvSpPr/>
+          <p:nvPr/>
+        </p:nvSpPr>
+        <p:spPr>
+          <a:xfrm>
+            <a:off x="274320" y="1920240"/>
+            <a:ext cx="2788920" cy="411480"/>
+          </a:xfrm>
+          <a:prstGeom prst="rect">
+            <a:avLst/>
+          </a:prstGeom>
+          <a:noFill/>
+          <a:ln/>
+        </p:spPr>
+        <p:txBody>
           <a:bodyPr wrap="square" rtlCol="0" anchor="ctr"/>
           <a:lstStyle/>
           <a:p>
-            <a:pPr indent="0" marL="0">
-              <a:buNone/>
-            </a:pPr>
-            <a:r>
-              <a:rPr lang="en-US" sz="1200" dirty="0">
-                <a:solidFill>
-                  <a:srgbClr val="E8D8A8"/>
-                </a:solidFill>
-                <a:latin typeface="Calibri" pitchFamily="34" charset="0"/>
-                <a:ea typeface="Calibri" pitchFamily="34" charset="-122"/>
-                <a:cs typeface="Calibri" pitchFamily="34" charset="-120"/>
-              </a:rPr>
-              <a:t>波愛修斯生於羅馬貴族，後受哥德統治者狄奧多里克任命，依據希臘文獻（畢達哥拉斯、托勒密）撰寫《音樂基礎》。此書在中世紀被奉為最高音樂理論權威超過一千年。</a:t>
-            </a:r>
-            <a:endParaRPr lang="en-US" sz="1200" dirty="0"/>
-          </a:p>
-          <a:p>
-            <a:pPr indent="0" marL="0">
-              <a:buNone/>
-            </a:pPr>
-            <a:r>
-              <a:rPr lang="en-US" sz="1200" dirty="0">
-                <a:solidFill>
-                  <a:srgbClr val="E8D8A8"/>
-                </a:solidFill>
-                <a:latin typeface="Calibri" pitchFamily="34" charset="0"/>
-                <a:ea typeface="Calibri" pitchFamily="34" charset="-122"/>
-                <a:cs typeface="Calibri" pitchFamily="34" charset="-120"/>
-              </a:rPr>
-              <a:t>Boethius, born into Roman nobility, compiled De institutione musica from Greek sources (Pythagoras, Ptolemy). It was the authoritative text on music theory for over a thousand years.</a:t>
-            </a:r>
-            <a:endParaRPr lang="en-US" sz="1200" dirty="0"/>
-          </a:p>
-        </p:txBody>
-      </p:sp>
-      <p:sp>
-        <p:nvSpPr>
-          <p:cNvPr id="8" name="Shape 6"/>
-          <p:cNvSpPr/>
-          <p:nvPr/>
-        </p:nvSpPr>
-        <p:spPr>
-          <a:xfrm>
-            <a:off x="274320" y="1874520"/>
-            <a:ext cx="2788920" cy="2880360"/>
-          </a:xfrm>
-          <a:prstGeom prst="rect">
-            <a:avLst/>
-          </a:prstGeom>
-          <a:solidFill>
-            <a:srgbClr val="1A3A5C"/>
-          </a:solidFill>
-          <a:ln/>
-        </p:spPr>
-      </p:sp>
-      <p:sp>
-        <p:nvSpPr>
-          <p:cNvPr id="9" name="Text 7"/>
-          <p:cNvSpPr/>
-          <p:nvPr/>
-        </p:nvSpPr>
-        <p:spPr>
-          <a:xfrm>
-            <a:off x="274320" y="1938528"/>
-            <a:ext cx="2788920" cy="457200"/>
+            <a:pPr algn="ctr" indent="0" marL="0">
+              <a:buNone/>
+            </a:pPr>
+            <a:r>
+              <a:rPr lang="en-US" sz="2200" dirty="0">
+                <a:solidFill>
+                  <a:srgbClr val="000000"/>
+                </a:solidFill>
+              </a:rPr>
+              <a:t>■</a:t>
+            </a:r>
+            <a:endParaRPr lang="en-US" sz="2200" dirty="0"/>
+          </a:p>
+        </p:txBody>
+      </p:sp>
+      <p:sp>
+        <p:nvSpPr>
+          <p:cNvPr id="10" name="Text 8"/>
+          <p:cNvSpPr/>
+          <p:nvPr/>
+        </p:nvSpPr>
+        <p:spPr>
+          <a:xfrm>
+            <a:off x="365760" y="2331720"/>
+            <a:ext cx="2606040" cy="548640"/>
           </a:xfrm>
           <a:prstGeom prst="rect">
             <a:avLst/>
@@ -3459,43 +3495,7 @@
               <a:buNone/>
             </a:pPr>
             <a:r>
-              <a:rPr lang="en-US" sz="2400" dirty="0">
-                <a:solidFill>
-                  <a:srgbClr val="000000"/>
-                </a:solidFill>
-              </a:rPr>
-              <a:t>🌌</a:t>
-            </a:r>
-            <a:endParaRPr lang="en-US" sz="2400" dirty="0"/>
-          </a:p>
-        </p:txBody>
-      </p:sp>
-      <p:sp>
-        <p:nvSpPr>
-          <p:cNvPr id="10" name="Text 8"/>
-          <p:cNvSpPr/>
-          <p:nvPr/>
-        </p:nvSpPr>
-        <p:spPr>
-          <a:xfrm>
-            <a:off x="365760" y="2423160"/>
-            <a:ext cx="2606040" cy="594360"/>
-          </a:xfrm>
-          <a:prstGeom prst="rect">
-            <a:avLst/>
-          </a:prstGeom>
-          <a:noFill/>
-          <a:ln/>
-        </p:spPr>
-        <p:txBody>
-          <a:bodyPr wrap="square" rtlCol="0" anchor="ctr"/>
-          <a:lstStyle/>
-          <a:p>
-            <a:pPr algn="ctr" indent="0" marL="0">
-              <a:buNone/>
-            </a:pPr>
-            <a:r>
-              <a:rPr lang="en-US" sz="1300" b="1" dirty="0">
+              <a:rPr lang="en-US" sz="1400" b="1" dirty="0">
                 <a:solidFill>
                   <a:srgbClr val="C8A020"/>
                 </a:solidFill>
@@ -3505,14 +3505,14 @@
               </a:rPr>
               <a:t>Musica Mundana</a:t>
             </a:r>
-            <a:endParaRPr lang="en-US" sz="1300" dirty="0"/>
+            <a:endParaRPr lang="en-US" sz="1400" dirty="0"/>
           </a:p>
           <a:p>
             <a:pPr algn="ctr" indent="0" marL="0">
               <a:buNone/>
             </a:pPr>
             <a:r>
-              <a:rPr lang="en-US" sz="1300" b="1" dirty="0">
+              <a:rPr lang="en-US" sz="1400" b="1" dirty="0">
                 <a:solidFill>
                   <a:srgbClr val="C8A020"/>
                 </a:solidFill>
@@ -3522,7 +3522,7 @@
               </a:rPr>
               <a:t>宇宙音樂</a:t>
             </a:r>
-            <a:endParaRPr lang="en-US" sz="1300" dirty="0"/>
+            <a:endParaRPr lang="en-US" sz="1400" dirty="0"/>
           </a:p>
         </p:txBody>
       </p:sp>
@@ -3534,7 +3534,7 @@
         </p:nvSpPr>
         <p:spPr>
           <a:xfrm>
-            <a:off x="548640" y="3035808"/>
+            <a:off x="548640" y="2907792"/>
             <a:ext cx="2240280" cy="27432"/>
           </a:xfrm>
           <a:prstGeom prst="rect">
@@ -3554,8 +3554,84 @@
         </p:nvSpPr>
         <p:spPr>
           <a:xfrm>
-            <a:off x="365760" y="3108960"/>
-            <a:ext cx="2606040" cy="1536192"/>
+            <a:off x="365760" y="3017520"/>
+            <a:ext cx="2606040" cy="1280160"/>
+          </a:xfrm>
+          <a:prstGeom prst="rect">
+            <a:avLst/>
+          </a:prstGeom>
+          <a:noFill/>
+          <a:ln/>
+        </p:spPr>
+        <p:txBody>
+          <a:bodyPr wrap="square" rtlCol="0" anchor="t"/>
+          <a:lstStyle/>
+          <a:p>
+            <a:pPr algn="ctr" indent="0" marL="0">
+              <a:buNone/>
+            </a:pPr>
+            <a:r>
+              <a:rPr lang="en-US" sz="1400" dirty="0">
+                <a:solidFill>
+                  <a:srgbClr val="E8D8A8"/>
+                </a:solidFill>
+                <a:latin typeface="Calibri" pitchFamily="34" charset="0"/>
+                <a:ea typeface="Calibri" pitchFamily="34" charset="-122"/>
+                <a:cs typeface="Calibri" pitchFamily="34" charset="-120"/>
+              </a:rPr>
+              <a:t>天體運行、四季更替的數學比例</a:t>
+            </a:r>
+            <a:endParaRPr lang="en-US" sz="1400" dirty="0"/>
+          </a:p>
+          <a:p>
+            <a:pPr algn="ctr" indent="0" marL="0">
+              <a:buNone/>
+            </a:pPr>
+            <a:r>
+              <a:rPr lang="en-US" sz="1400" dirty="0">
+                <a:solidFill>
+                  <a:srgbClr val="E8D8A8"/>
+                </a:solidFill>
+                <a:latin typeface="Calibri" pitchFamily="34" charset="0"/>
+                <a:ea typeface="Calibri" pitchFamily="34" charset="-122"/>
+                <a:cs typeface="Calibri" pitchFamily="34" charset="-120"/>
+              </a:rPr>
+              <a:t>Numerical ratios of the heavens and seasons</a:t>
+            </a:r>
+            <a:endParaRPr lang="en-US" sz="1400" dirty="0"/>
+          </a:p>
+        </p:txBody>
+      </p:sp>
+      <p:sp>
+        <p:nvSpPr>
+          <p:cNvPr id="13" name="Shape 11"/>
+          <p:cNvSpPr/>
+          <p:nvPr/>
+        </p:nvSpPr>
+        <p:spPr>
+          <a:xfrm>
+            <a:off x="3246120" y="1874520"/>
+            <a:ext cx="2788920" cy="2514600"/>
+          </a:xfrm>
+          <a:prstGeom prst="rect">
+            <a:avLst/>
+          </a:prstGeom>
+          <a:solidFill>
+            <a:srgbClr val="2A5C1A"/>
+          </a:solidFill>
+          <a:ln/>
+        </p:spPr>
+      </p:sp>
+      <p:sp>
+        <p:nvSpPr>
+          <p:cNvPr id="14" name="Text 12"/>
+          <p:cNvSpPr/>
+          <p:nvPr/>
+        </p:nvSpPr>
+        <p:spPr>
+          <a:xfrm>
+            <a:off x="3246120" y="1920240"/>
+            <a:ext cx="2788920" cy="411480"/>
           </a:xfrm>
           <a:prstGeom prst="rect">
             <a:avLst/>
@@ -3571,119 +3647,43 @@
               <a:buNone/>
             </a:pPr>
             <a:r>
-              <a:rPr lang="en-US" sz="1100" dirty="0">
-                <a:solidFill>
-                  <a:srgbClr val="E8D8A8"/>
-                </a:solidFill>
-                <a:latin typeface="Calibri" pitchFamily="34" charset="0"/>
-                <a:ea typeface="Calibri" pitchFamily="34" charset="-122"/>
-                <a:cs typeface="Calibri" pitchFamily="34" charset="-120"/>
-              </a:rPr>
-              <a:t>天體運行、四季更替、元素和諧所產生的數學比例</a:t>
-            </a:r>
-            <a:endParaRPr lang="en-US" sz="1100" dirty="0"/>
-          </a:p>
+              <a:rPr lang="en-US" sz="2200" dirty="0">
+                <a:solidFill>
+                  <a:srgbClr val="000000"/>
+                </a:solidFill>
+              </a:rPr>
+              <a:t>■</a:t>
+            </a:r>
+            <a:endParaRPr lang="en-US" sz="2200" dirty="0"/>
+          </a:p>
+        </p:txBody>
+      </p:sp>
+      <p:sp>
+        <p:nvSpPr>
+          <p:cNvPr id="15" name="Text 13"/>
+          <p:cNvSpPr/>
+          <p:nvPr/>
+        </p:nvSpPr>
+        <p:spPr>
+          <a:xfrm>
+            <a:off x="3337560" y="2331720"/>
+            <a:ext cx="2606040" cy="548640"/>
+          </a:xfrm>
+          <a:prstGeom prst="rect">
+            <a:avLst/>
+          </a:prstGeom>
+          <a:noFill/>
+          <a:ln/>
+        </p:spPr>
+        <p:txBody>
+          <a:bodyPr wrap="square" rtlCol="0" anchor="ctr"/>
+          <a:lstStyle/>
           <a:p>
             <a:pPr algn="ctr" indent="0" marL="0">
               <a:buNone/>
             </a:pPr>
             <a:r>
-              <a:rPr lang="en-US" sz="1100" dirty="0">
-                <a:solidFill>
-                  <a:srgbClr val="E8D8A8"/>
-                </a:solidFill>
-                <a:latin typeface="Calibri" pitchFamily="34" charset="0"/>
-                <a:ea typeface="Calibri" pitchFamily="34" charset="-122"/>
-                <a:cs typeface="Calibri" pitchFamily="34" charset="-120"/>
-              </a:rPr>
-              <a:t>The numerical ratios controlling movement of stars and planets, changing of seasons, and the elements</a:t>
-            </a:r>
-            <a:endParaRPr lang="en-US" sz="1100" dirty="0"/>
-          </a:p>
-        </p:txBody>
-      </p:sp>
-      <p:sp>
-        <p:nvSpPr>
-          <p:cNvPr id="13" name="Shape 11"/>
-          <p:cNvSpPr/>
-          <p:nvPr/>
-        </p:nvSpPr>
-        <p:spPr>
-          <a:xfrm>
-            <a:off x="3246120" y="1874520"/>
-            <a:ext cx="2788920" cy="2880360"/>
-          </a:xfrm>
-          <a:prstGeom prst="rect">
-            <a:avLst/>
-          </a:prstGeom>
-          <a:solidFill>
-            <a:srgbClr val="2A5C1A"/>
-          </a:solidFill>
-          <a:ln/>
-        </p:spPr>
-      </p:sp>
-      <p:sp>
-        <p:nvSpPr>
-          <p:cNvPr id="14" name="Text 12"/>
-          <p:cNvSpPr/>
-          <p:nvPr/>
-        </p:nvSpPr>
-        <p:spPr>
-          <a:xfrm>
-            <a:off x="3246120" y="1938528"/>
-            <a:ext cx="2788920" cy="457200"/>
-          </a:xfrm>
-          <a:prstGeom prst="rect">
-            <a:avLst/>
-          </a:prstGeom>
-          <a:noFill/>
-          <a:ln/>
-        </p:spPr>
-        <p:txBody>
-          <a:bodyPr wrap="square" rtlCol="0" anchor="ctr"/>
-          <a:lstStyle/>
-          <a:p>
-            <a:pPr algn="ctr" indent="0" marL="0">
-              <a:buNone/>
-            </a:pPr>
-            <a:r>
-              <a:rPr lang="en-US" sz="2400" dirty="0">
-                <a:solidFill>
-                  <a:srgbClr val="000000"/>
-                </a:solidFill>
-              </a:rPr>
-              <a:t>🧬</a:t>
-            </a:r>
-            <a:endParaRPr lang="en-US" sz="2400" dirty="0"/>
-          </a:p>
-        </p:txBody>
-      </p:sp>
-      <p:sp>
-        <p:nvSpPr>
-          <p:cNvPr id="15" name="Text 13"/>
-          <p:cNvSpPr/>
-          <p:nvPr/>
-        </p:nvSpPr>
-        <p:spPr>
-          <a:xfrm>
-            <a:off x="3337560" y="2423160"/>
-            <a:ext cx="2606040" cy="594360"/>
-          </a:xfrm>
-          <a:prstGeom prst="rect">
-            <a:avLst/>
-          </a:prstGeom>
-          <a:noFill/>
-          <a:ln/>
-        </p:spPr>
-        <p:txBody>
-          <a:bodyPr wrap="square" rtlCol="0" anchor="ctr"/>
-          <a:lstStyle/>
-          <a:p>
-            <a:pPr algn="ctr" indent="0" marL="0">
-              <a:buNone/>
-            </a:pPr>
-            <a:r>
-              <a:rPr lang="en-US" sz="1300" b="1" dirty="0">
+              <a:rPr lang="en-US" sz="1400" b="1" dirty="0">
                 <a:solidFill>
                   <a:srgbClr val="C8A020"/>
                 </a:solidFill>
@@ -3693,14 +3693,14 @@
               </a:rPr>
               <a:t>Musica Humana</a:t>
             </a:r>
-            <a:endParaRPr lang="en-US" sz="1300" dirty="0"/>
+            <a:endParaRPr lang="en-US" sz="1400" dirty="0"/>
           </a:p>
           <a:p>
             <a:pPr algn="ctr" indent="0" marL="0">
               <a:buNone/>
             </a:pPr>
             <a:r>
-              <a:rPr lang="en-US" sz="1300" b="1" dirty="0">
+              <a:rPr lang="en-US" sz="1400" b="1" dirty="0">
                 <a:solidFill>
                   <a:srgbClr val="C8A020"/>
                 </a:solidFill>
@@ -3710,7 +3710,7 @@
               </a:rPr>
               <a:t>人體音樂</a:t>
             </a:r>
-            <a:endParaRPr lang="en-US" sz="1300" dirty="0"/>
+            <a:endParaRPr lang="en-US" sz="1400" dirty="0"/>
           </a:p>
         </p:txBody>
       </p:sp>
@@ -3722,7 +3722,7 @@
         </p:nvSpPr>
         <p:spPr>
           <a:xfrm>
-            <a:off x="3520440" y="3035808"/>
+            <a:off x="3520440" y="2907792"/>
             <a:ext cx="2240280" cy="27432"/>
           </a:xfrm>
           <a:prstGeom prst="rect">
@@ -3742,8 +3742,84 @@
         </p:nvSpPr>
         <p:spPr>
           <a:xfrm>
-            <a:off x="3337560" y="3108960"/>
-            <a:ext cx="2606040" cy="1536192"/>
+            <a:off x="3337560" y="3017520"/>
+            <a:ext cx="2606040" cy="1280160"/>
+          </a:xfrm>
+          <a:prstGeom prst="rect">
+            <a:avLst/>
+          </a:prstGeom>
+          <a:noFill/>
+          <a:ln/>
+        </p:spPr>
+        <p:txBody>
+          <a:bodyPr wrap="square" rtlCol="0" anchor="t"/>
+          <a:lstStyle/>
+          <a:p>
+            <a:pPr algn="ctr" indent="0" marL="0">
+              <a:buNone/>
+            </a:pPr>
+            <a:r>
+              <a:rPr lang="en-US" sz="1400" dirty="0">
+                <a:solidFill>
+                  <a:srgbClr val="E8D8A8"/>
+                </a:solidFill>
+                <a:latin typeface="Calibri" pitchFamily="34" charset="0"/>
+                <a:ea typeface="Calibri" pitchFamily="34" charset="-122"/>
+                <a:cs typeface="Calibri" pitchFamily="34" charset="-120"/>
+              </a:rPr>
+              <a:t>人體與靈魂之間的和諧</a:t>
+            </a:r>
+            <a:endParaRPr lang="en-US" sz="1400" dirty="0"/>
+          </a:p>
+          <a:p>
+            <a:pPr algn="ctr" indent="0" marL="0">
+              <a:buNone/>
+            </a:pPr>
+            <a:r>
+              <a:rPr lang="en-US" sz="1400" dirty="0">
+                <a:solidFill>
+                  <a:srgbClr val="E8D8A8"/>
+                </a:solidFill>
+                <a:latin typeface="Calibri" pitchFamily="34" charset="0"/>
+                <a:ea typeface="Calibri" pitchFamily="34" charset="-122"/>
+                <a:cs typeface="Calibri" pitchFamily="34" charset="-120"/>
+              </a:rPr>
+              <a:t>Harmony between body and soul</a:t>
+            </a:r>
+            <a:endParaRPr lang="en-US" sz="1400" dirty="0"/>
+          </a:p>
+        </p:txBody>
+      </p:sp>
+      <p:sp>
+        <p:nvSpPr>
+          <p:cNvPr id="18" name="Shape 16"/>
+          <p:cNvSpPr/>
+          <p:nvPr/>
+        </p:nvSpPr>
+        <p:spPr>
+          <a:xfrm>
+            <a:off x="6217920" y="1874520"/>
+            <a:ext cx="2788920" cy="2514600"/>
+          </a:xfrm>
+          <a:prstGeom prst="rect">
+            <a:avLst/>
+          </a:prstGeom>
+          <a:solidFill>
+            <a:srgbClr val="5C2A1A"/>
+          </a:solidFill>
+          <a:ln/>
+        </p:spPr>
+      </p:sp>
+      <p:sp>
+        <p:nvSpPr>
+          <p:cNvPr id="19" name="Text 17"/>
+          <p:cNvSpPr/>
+          <p:nvPr/>
+        </p:nvSpPr>
+        <p:spPr>
+          <a:xfrm>
+            <a:off x="6217920" y="1920240"/>
+            <a:ext cx="2788920" cy="411480"/>
           </a:xfrm>
           <a:prstGeom prst="rect">
             <a:avLst/>
@@ -3759,119 +3835,43 @@
               <a:buNone/>
             </a:pPr>
             <a:r>
-              <a:rPr lang="en-US" sz="1100" dirty="0">
-                <a:solidFill>
-                  <a:srgbClr val="E8D8A8"/>
-                </a:solidFill>
-                <a:latin typeface="Calibri" pitchFamily="34" charset="0"/>
-                <a:ea typeface="Calibri" pitchFamily="34" charset="-122"/>
-                <a:cs typeface="Calibri" pitchFamily="34" charset="-120"/>
-              </a:rPr>
-              <a:t>人體與靈魂、身體各部分之間的和諧</a:t>
-            </a:r>
-            <a:endParaRPr lang="en-US" sz="1100" dirty="0"/>
-          </a:p>
+              <a:rPr lang="en-US" sz="2200" dirty="0">
+                <a:solidFill>
+                  <a:srgbClr val="000000"/>
+                </a:solidFill>
+              </a:rPr>
+              <a:t>■</a:t>
+            </a:r>
+            <a:endParaRPr lang="en-US" sz="2200" dirty="0"/>
+          </a:p>
+        </p:txBody>
+      </p:sp>
+      <p:sp>
+        <p:nvSpPr>
+          <p:cNvPr id="20" name="Text 18"/>
+          <p:cNvSpPr/>
+          <p:nvPr/>
+        </p:nvSpPr>
+        <p:spPr>
+          <a:xfrm>
+            <a:off x="6309360" y="2331720"/>
+            <a:ext cx="2606040" cy="548640"/>
+          </a:xfrm>
+          <a:prstGeom prst="rect">
+            <a:avLst/>
+          </a:prstGeom>
+          <a:noFill/>
+          <a:ln/>
+        </p:spPr>
+        <p:txBody>
+          <a:bodyPr wrap="square" rtlCol="0" anchor="ctr"/>
+          <a:lstStyle/>
           <a:p>
             <a:pPr algn="ctr" indent="0" marL="0">
               <a:buNone/>
             </a:pPr>
             <a:r>
-              <a:rPr lang="en-US" sz="1100" dirty="0">
-                <a:solidFill>
-                  <a:srgbClr val="E8D8A8"/>
-                </a:solidFill>
-                <a:latin typeface="Calibri" pitchFamily="34" charset="0"/>
-                <a:ea typeface="Calibri" pitchFamily="34" charset="-122"/>
-                <a:cs typeface="Calibri" pitchFamily="34" charset="-120"/>
-              </a:rPr>
-              <a:t>Harmonizes the soul and body and their parts; the mathematical harmony of the human body and soul</a:t>
-            </a:r>
-            <a:endParaRPr lang="en-US" sz="1100" dirty="0"/>
-          </a:p>
-        </p:txBody>
-      </p:sp>
-      <p:sp>
-        <p:nvSpPr>
-          <p:cNvPr id="18" name="Shape 16"/>
-          <p:cNvSpPr/>
-          <p:nvPr/>
-        </p:nvSpPr>
-        <p:spPr>
-          <a:xfrm>
-            <a:off x="6217920" y="1874520"/>
-            <a:ext cx="2788920" cy="2880360"/>
-          </a:xfrm>
-          <a:prstGeom prst="rect">
-            <a:avLst/>
-          </a:prstGeom>
-          <a:solidFill>
-            <a:srgbClr val="5C2A1A"/>
-          </a:solidFill>
-          <a:ln/>
-        </p:spPr>
-      </p:sp>
-      <p:sp>
-        <p:nvSpPr>
-          <p:cNvPr id="19" name="Text 17"/>
-          <p:cNvSpPr/>
-          <p:nvPr/>
-        </p:nvSpPr>
-        <p:spPr>
-          <a:xfrm>
-            <a:off x="6217920" y="1938528"/>
-            <a:ext cx="2788920" cy="457200"/>
-          </a:xfrm>
-          <a:prstGeom prst="rect">
-            <a:avLst/>
-          </a:prstGeom>
-          <a:noFill/>
-          <a:ln/>
-        </p:spPr>
-        <p:txBody>
-          <a:bodyPr wrap="square" rtlCol="0" anchor="ctr"/>
-          <a:lstStyle/>
-          <a:p>
-            <a:pPr algn="ctr" indent="0" marL="0">
-              <a:buNone/>
-            </a:pPr>
-            <a:r>
-              <a:rPr lang="en-US" sz="2400" dirty="0">
-                <a:solidFill>
-                  <a:srgbClr val="000000"/>
-                </a:solidFill>
-              </a:rPr>
-              <a:t>🎵</a:t>
-            </a:r>
-            <a:endParaRPr lang="en-US" sz="2400" dirty="0"/>
-          </a:p>
-        </p:txBody>
-      </p:sp>
-      <p:sp>
-        <p:nvSpPr>
-          <p:cNvPr id="20" name="Text 18"/>
-          <p:cNvSpPr/>
-          <p:nvPr/>
-        </p:nvSpPr>
-        <p:spPr>
-          <a:xfrm>
-            <a:off x="6309360" y="2423160"/>
-            <a:ext cx="2606040" cy="594360"/>
-          </a:xfrm>
-          <a:prstGeom prst="rect">
-            <a:avLst/>
-          </a:prstGeom>
-          <a:noFill/>
-          <a:ln/>
-        </p:spPr>
-        <p:txBody>
-          <a:bodyPr wrap="square" rtlCol="0" anchor="ctr"/>
-          <a:lstStyle/>
-          <a:p>
-            <a:pPr algn="ctr" indent="0" marL="0">
-              <a:buNone/>
-            </a:pPr>
-            <a:r>
-              <a:rPr lang="en-US" sz="1300" b="1" dirty="0">
+              <a:rPr lang="en-US" sz="1400" b="1" dirty="0">
                 <a:solidFill>
                   <a:srgbClr val="C8A020"/>
                 </a:solidFill>
@@ -3881,14 +3881,14 @@
               </a:rPr>
               <a:t>Musica Instrumentalis</a:t>
             </a:r>
-            <a:endParaRPr lang="en-US" sz="1300" dirty="0"/>
+            <a:endParaRPr lang="en-US" sz="1400" dirty="0"/>
           </a:p>
           <a:p>
             <a:pPr algn="ctr" indent="0" marL="0">
               <a:buNone/>
             </a:pPr>
             <a:r>
-              <a:rPr lang="en-US" sz="1300" b="1" dirty="0">
+              <a:rPr lang="en-US" sz="1400" b="1" dirty="0">
                 <a:solidFill>
                   <a:srgbClr val="C8A020"/>
                 </a:solidFill>
@@ -3898,7 +3898,7 @@
               </a:rPr>
               <a:t>樂器音樂</a:t>
             </a:r>
-            <a:endParaRPr lang="en-US" sz="1300" dirty="0"/>
+            <a:endParaRPr lang="en-US" sz="1400" dirty="0"/>
           </a:p>
         </p:txBody>
       </p:sp>
@@ -3910,7 +3910,7 @@
         </p:nvSpPr>
         <p:spPr>
           <a:xfrm>
-            <a:off x="6492240" y="3035808"/>
+            <a:off x="6492240" y="2907792"/>
             <a:ext cx="2240280" cy="27432"/>
           </a:xfrm>
           <a:prstGeom prst="rect">
@@ -3930,24 +3930,24 @@
         </p:nvSpPr>
         <p:spPr>
           <a:xfrm>
-            <a:off x="6309360" y="3108960"/>
-            <a:ext cx="2606040" cy="1536192"/>
-          </a:xfrm>
-          <a:prstGeom prst="rect">
-            <a:avLst/>
-          </a:prstGeom>
-          <a:noFill/>
-          <a:ln/>
-        </p:spPr>
-        <p:txBody>
-          <a:bodyPr wrap="square" rtlCol="0" anchor="ctr"/>
+            <a:off x="6309360" y="3017520"/>
+            <a:ext cx="2606040" cy="1280160"/>
+          </a:xfrm>
+          <a:prstGeom prst="rect">
+            <a:avLst/>
+          </a:prstGeom>
+          <a:noFill/>
+          <a:ln/>
+        </p:spPr>
+        <p:txBody>
+          <a:bodyPr wrap="square" rtlCol="0" anchor="t"/>
           <a:lstStyle/>
           <a:p>
             <a:pPr algn="ctr" indent="0" marL="0">
               <a:buNone/>
             </a:pPr>
             <a:r>
-              <a:rPr lang="en-US" sz="1100" dirty="0">
+              <a:rPr lang="en-US" sz="1400" dirty="0">
                 <a:solidFill>
                   <a:srgbClr val="E8D8A8"/>
                 </a:solidFill>
@@ -3955,16 +3955,16 @@
                 <a:ea typeface="Calibri" pitchFamily="34" charset="-122"/>
                 <a:cs typeface="Calibri" pitchFamily="34" charset="-120"/>
               </a:rPr>
-              <a:t>人聲或樂器產生的可聽音樂——最低層，但體現了相同的數學比例</a:t>
-            </a:r>
-            <a:endParaRPr lang="en-US" sz="1100" dirty="0"/>
+              <a:t>人聲或樂器產生的可聽音樂</a:t>
+            </a:r>
+            <a:endParaRPr lang="en-US" sz="1400" dirty="0"/>
           </a:p>
           <a:p>
             <a:pPr algn="ctr" indent="0" marL="0">
               <a:buNone/>
             </a:pPr>
             <a:r>
-              <a:rPr lang="en-US" sz="1100" dirty="0">
+              <a:rPr lang="en-US" sz="1400" dirty="0">
                 <a:solidFill>
                   <a:srgbClr val="E8D8A8"/>
                 </a:solidFill>
@@ -3972,9 +3972,9 @@
                 <a:ea typeface="Calibri" pitchFamily="34" charset="-122"/>
                 <a:cs typeface="Calibri" pitchFamily="34" charset="-120"/>
               </a:rPr>
-              <a:t>Audible music produced by instruments or voices; exemplifies the same principles of numerical ratios</a:t>
-            </a:r>
-            <a:endParaRPr lang="en-US" sz="1100" dirty="0"/>
+              <a:t>Audible music from instruments or voices</a:t>
+            </a:r>
+            <a:endParaRPr lang="en-US" sz="1400" dirty="0"/>
           </a:p>
         </p:txBody>
       </p:sp>
@@ -3986,24 +3986,24 @@
         </p:nvSpPr>
         <p:spPr>
           <a:xfrm>
-            <a:off x="365760" y="4773168"/>
-            <a:ext cx="8412480" cy="201168"/>
-          </a:xfrm>
-          <a:prstGeom prst="rect">
-            <a:avLst/>
-          </a:prstGeom>
-          <a:noFill/>
-          <a:ln/>
-        </p:spPr>
-        <p:txBody>
-          <a:bodyPr wrap="square" rtlCol="0" anchor="ctr"/>
-          <a:lstStyle/>
-          <a:p>
-            <a:pPr indent="0" marL="0">
-              <a:buNone/>
-            </a:pPr>
-            <a:r>
-              <a:rPr lang="en-US" sz="1000" i="1" dirty="0">
+            <a:off x="365760" y="4498848"/>
+            <a:ext cx="8412480" cy="457200"/>
+          </a:xfrm>
+          <a:prstGeom prst="rect">
+            <a:avLst/>
+          </a:prstGeom>
+          <a:noFill/>
+          <a:ln/>
+        </p:spPr>
+        <p:txBody>
+          <a:bodyPr wrap="square" rtlCol="0" anchor="t"/>
+          <a:lstStyle/>
+          <a:p>
+            <a:pPr algn="ctr" indent="0" marL="0">
+              <a:buNone/>
+            </a:pPr>
+            <a:r>
+              <a:rPr lang="en-US" sz="1400" i="1" dirty="0">
                 <a:solidFill>
                   <a:srgbClr val="E8D8A8"/>
                 </a:solidFill>
@@ -4011,16 +4011,16 @@
                 <a:ea typeface="Calibri" pitchFamily="34" charset="-122"/>
                 <a:cs typeface="Calibri" pitchFamily="34" charset="-120"/>
               </a:rPr>
-              <a:t>🔑 對波愛修斯而言，音樂首先是知識的對象，而非實踐技藝。真正的音樂家是「理解」音樂的人，而非演奏者。</a:t>
-            </a:r>
-            <a:endParaRPr lang="en-US" sz="1000" dirty="0"/>
-          </a:p>
-          <a:p>
-            <a:pPr indent="0" marL="0">
-              <a:buNone/>
-            </a:pPr>
-            <a:r>
-              <a:rPr lang="en-US" sz="1000" i="1" dirty="0">
+              <a:t>對波愛修斯而言，音樂首先是知識的對象；真正的音樂家是「理解」音樂的人，而非演奏者</a:t>
+            </a:r>
+            <a:endParaRPr lang="en-US" sz="1400" dirty="0"/>
+          </a:p>
+          <a:p>
+            <a:pPr algn="ctr" indent="0" marL="0">
+              <a:buNone/>
+            </a:pPr>
+            <a:r>
+              <a:rPr lang="en-US" sz="1400" i="1" dirty="0">
                 <a:solidFill>
                   <a:srgbClr val="E8D8A8"/>
                 </a:solidFill>
@@ -4028,9 +4028,9 @@
                 <a:ea typeface="Calibri" pitchFamily="34" charset="-122"/>
                 <a:cs typeface="Calibri" pitchFamily="34" charset="-120"/>
               </a:rPr>
-              <a:t>For Boethius, music was an object of knowledge, not a practical skill. The true musician understands music; the performer plays by instinct.</a:t>
-            </a:r>
-            <a:endParaRPr lang="en-US" sz="1000" dirty="0"/>
+              <a:t>For Boethius, music is knowledge, not practice; the true musician understands, not plays</a:t>
+            </a:r>
+            <a:endParaRPr lang="en-US" sz="1400" dirty="0"/>
           </a:p>
         </p:txBody>
       </p:sp>
@@ -4163,14 +4163,14 @@
           <a:ln/>
         </p:spPr>
         <p:txBody>
-          <a:bodyPr wrap="square" lIns="0" tIns="0" rIns="0" bIns="0" rtlCol="0" anchor="ctr"/>
-          <a:lstStyle/>
-          <a:p>
-            <a:pPr indent="0" marL="0">
-              <a:buNone/>
-            </a:pPr>
-            <a:r>
-              <a:rPr lang="en-US" sz="1200" i="1" dirty="0">
+          <a:bodyPr wrap="square" lIns="0" tIns="0" rIns="0" bIns="0" rtlCol="0" anchor="t"/>
+          <a:lstStyle/>
+          <a:p>
+            <a:pPr indent="0" marL="0">
+              <a:buNone/>
+            </a:pPr>
+            <a:r>
+              <a:rPr lang="en-US" sz="1400" i="1" dirty="0">
                 <a:solidFill>
                   <a:srgbClr val="5C3A28"/>
                 </a:solidFill>
@@ -4180,7 +4180,7 @@
               </a:rPr>
               <a:t>源自拜占庭的八種 echoi，是組織與記憶格里高利聖詠的核心工具 · Adapted from Byzantine echoi; central tool for classifying and memorizing Gregorian chant</a:t>
             </a:r>
-            <a:endParaRPr lang="en-US" sz="1200" dirty="0"/>
+            <a:endParaRPr lang="en-US" sz="1400" dirty="0"/>
           </a:p>
         </p:txBody>
       </p:sp>
@@ -4213,7 +4213,7 @@
         <p:spPr>
           <a:xfrm>
             <a:off x="320040" y="1024128"/>
-            <a:ext cx="1325880" cy="365760"/>
+            <a:ext cx="1920240" cy="365760"/>
           </a:xfrm>
           <a:prstGeom prst="rect">
             <a:avLst/>
@@ -4233,7 +4233,7 @@
         <p:spPr>
           <a:xfrm>
             <a:off x="365760" y="1042416"/>
-            <a:ext cx="1280160" cy="329184"/>
+            <a:ext cx="1874520" cy="329184"/>
           </a:xfrm>
           <a:prstGeom prst="rect">
             <a:avLst/>
@@ -4249,7 +4249,7 @@
               <a:buNone/>
             </a:pPr>
             <a:r>
-              <a:rPr lang="en-US" sz="1100" b="1" dirty="0">
+              <a:rPr lang="en-US" sz="1400" b="1" dirty="0">
                 <a:solidFill>
                   <a:srgbClr val="C8A020"/>
                 </a:solidFill>
@@ -4259,7 +4259,7 @@
               </a:rPr>
               <a:t>調式 Mode</a:t>
             </a:r>
-            <a:endParaRPr lang="en-US" sz="1100" dirty="0"/>
+            <a:endParaRPr lang="en-US" sz="1400" dirty="0"/>
           </a:p>
         </p:txBody>
       </p:sp>
@@ -4271,8 +4271,8 @@
         </p:nvSpPr>
         <p:spPr>
           <a:xfrm>
-            <a:off x="1691640" y="1024128"/>
-            <a:ext cx="1143000" cy="365760"/>
+            <a:off x="2286000" y="1024128"/>
+            <a:ext cx="960120" cy="365760"/>
           </a:xfrm>
           <a:prstGeom prst="rect">
             <a:avLst/>
@@ -4291,8 +4291,8 @@
         </p:nvSpPr>
         <p:spPr>
           <a:xfrm>
-            <a:off x="1737360" y="1042416"/>
-            <a:ext cx="1097280" cy="329184"/>
+            <a:off x="2331720" y="1042416"/>
+            <a:ext cx="914400" cy="329184"/>
           </a:xfrm>
           <a:prstGeom prst="rect">
             <a:avLst/>
@@ -4308,7 +4308,7 @@
               <a:buNone/>
             </a:pPr>
             <a:r>
-              <a:rPr lang="en-US" sz="1100" b="1" dirty="0">
+              <a:rPr lang="en-US" sz="1400" b="1" dirty="0">
                 <a:solidFill>
                   <a:srgbClr val="C8A020"/>
                 </a:solidFill>
@@ -4318,7 +4318,7 @@
               </a:rPr>
               <a:t>最終音 Final</a:t>
             </a:r>
-            <a:endParaRPr lang="en-US" sz="1100" dirty="0"/>
+            <a:endParaRPr lang="en-US" sz="1400" dirty="0"/>
           </a:p>
         </p:txBody>
       </p:sp>
@@ -4330,8 +4330,8 @@
         </p:nvSpPr>
         <p:spPr>
           <a:xfrm>
-            <a:off x="2880360" y="1024128"/>
-            <a:ext cx="1234440" cy="365760"/>
+            <a:off x="3291840" y="1024128"/>
+            <a:ext cx="1280160" cy="365760"/>
           </a:xfrm>
           <a:prstGeom prst="rect">
             <a:avLst/>
@@ -4350,8 +4350,8 @@
         </p:nvSpPr>
         <p:spPr>
           <a:xfrm>
-            <a:off x="2926080" y="1042416"/>
-            <a:ext cx="1188720" cy="329184"/>
+            <a:off x="3337560" y="1042416"/>
+            <a:ext cx="1234440" cy="329184"/>
           </a:xfrm>
           <a:prstGeom prst="rect">
             <a:avLst/>
@@ -4367,7 +4367,7 @@
               <a:buNone/>
             </a:pPr>
             <a:r>
-              <a:rPr lang="en-US" sz="1100" b="1" dirty="0">
+              <a:rPr lang="en-US" sz="1400" b="1" dirty="0">
                 <a:solidFill>
                   <a:srgbClr val="C8A020"/>
                 </a:solidFill>
@@ -4377,7 +4377,7 @@
               </a:rPr>
               <a:t>類型 Type</a:t>
             </a:r>
-            <a:endParaRPr lang="en-US" sz="1100" dirty="0"/>
+            <a:endParaRPr lang="en-US" sz="1400" dirty="0"/>
           </a:p>
         </p:txBody>
       </p:sp>
@@ -4389,8 +4389,8 @@
         </p:nvSpPr>
         <p:spPr>
           <a:xfrm>
-            <a:off x="4160520" y="1024128"/>
-            <a:ext cx="2697480" cy="365760"/>
+            <a:off x="4617720" y="1024128"/>
+            <a:ext cx="2057400" cy="365760"/>
           </a:xfrm>
           <a:prstGeom prst="rect">
             <a:avLst/>
@@ -4409,8 +4409,8 @@
         </p:nvSpPr>
         <p:spPr>
           <a:xfrm>
-            <a:off x="4206240" y="1042416"/>
-            <a:ext cx="2651760" cy="329184"/>
+            <a:off x="4663440" y="1042416"/>
+            <a:ext cx="2011680" cy="329184"/>
           </a:xfrm>
           <a:prstGeom prst="rect">
             <a:avLst/>
@@ -4426,7 +4426,7 @@
               <a:buNone/>
             </a:pPr>
             <a:r>
-              <a:rPr lang="en-US" sz="1100" b="1" dirty="0">
+              <a:rPr lang="en-US" sz="1400" b="1" dirty="0">
                 <a:solidFill>
                   <a:srgbClr val="C8A020"/>
                 </a:solidFill>
@@ -4436,7 +4436,7 @@
               </a:rPr>
               <a:t>音程特徵 Intervals</a:t>
             </a:r>
-            <a:endParaRPr lang="en-US" sz="1100" dirty="0"/>
+            <a:endParaRPr lang="en-US" sz="1400" dirty="0"/>
           </a:p>
         </p:txBody>
       </p:sp>
@@ -4448,8 +4448,8 @@
         </p:nvSpPr>
         <p:spPr>
           <a:xfrm>
-            <a:off x="6903720" y="1024128"/>
-            <a:ext cx="1783080" cy="365760"/>
+            <a:off x="6720840" y="1024128"/>
+            <a:ext cx="1965960" cy="365760"/>
           </a:xfrm>
           <a:prstGeom prst="rect">
             <a:avLst/>
@@ -4468,8 +4468,8 @@
         </p:nvSpPr>
         <p:spPr>
           <a:xfrm>
-            <a:off x="6949440" y="1042416"/>
-            <a:ext cx="1737360" cy="329184"/>
+            <a:off x="6766560" y="1042416"/>
+            <a:ext cx="1920240" cy="329184"/>
           </a:xfrm>
           <a:prstGeom prst="rect">
             <a:avLst/>
@@ -4485,7 +4485,7 @@
               <a:buNone/>
             </a:pPr>
             <a:r>
-              <a:rPr lang="en-US" sz="1100" b="1" dirty="0">
+              <a:rPr lang="en-US" sz="1400" b="1" dirty="0">
                 <a:solidFill>
                   <a:srgbClr val="C8A020"/>
                 </a:solidFill>
@@ -4495,7 +4495,7 @@
               </a:rPr>
               <a:t>調式名 Greek Name</a:t>
             </a:r>
-            <a:endParaRPr lang="en-US" sz="1100" dirty="0"/>
+            <a:endParaRPr lang="en-US" sz="1400" dirty="0"/>
           </a:p>
         </p:txBody>
       </p:sp>
@@ -4507,8 +4507,8 @@
         </p:nvSpPr>
         <p:spPr>
           <a:xfrm>
-            <a:off x="320040" y="1435608"/>
-            <a:ext cx="1325880" cy="384048"/>
+            <a:off x="320040" y="1417320"/>
+            <a:ext cx="1920240" cy="365760"/>
           </a:xfrm>
           <a:prstGeom prst="rect">
             <a:avLst/>
@@ -4527,8 +4527,8 @@
         </p:nvSpPr>
         <p:spPr>
           <a:xfrm>
-            <a:off x="365760" y="1453896"/>
-            <a:ext cx="1280160" cy="347472"/>
+            <a:off x="365760" y="1435608"/>
+            <a:ext cx="1874520" cy="329184"/>
           </a:xfrm>
           <a:prstGeom prst="rect">
             <a:avLst/>
@@ -4544,7 +4544,7 @@
               <a:buNone/>
             </a:pPr>
             <a:r>
-              <a:rPr lang="en-US" sz="1150" b="1" dirty="0">
+              <a:rPr lang="en-US" sz="1400" b="1" dirty="0">
                 <a:solidFill>
                   <a:srgbClr val="7A2830"/>
                 </a:solidFill>
@@ -4554,7 +4554,7 @@
               </a:rPr>
               <a:t>1 Dorian</a:t>
             </a:r>
-            <a:endParaRPr lang="en-US" sz="1150" dirty="0"/>
+            <a:endParaRPr lang="en-US" sz="1400" dirty="0"/>
           </a:p>
         </p:txBody>
       </p:sp>
@@ -4566,8 +4566,8 @@
         </p:nvSpPr>
         <p:spPr>
           <a:xfrm>
-            <a:off x="1691640" y="1435608"/>
-            <a:ext cx="1143000" cy="384048"/>
+            <a:off x="2286000" y="1417320"/>
+            <a:ext cx="960120" cy="365760"/>
           </a:xfrm>
           <a:prstGeom prst="rect">
             <a:avLst/>
@@ -4586,8 +4586,8 @@
         </p:nvSpPr>
         <p:spPr>
           <a:xfrm>
-            <a:off x="1737360" y="1453896"/>
-            <a:ext cx="1097280" cy="347472"/>
+            <a:off x="2331720" y="1435608"/>
+            <a:ext cx="914400" cy="329184"/>
           </a:xfrm>
           <a:prstGeom prst="rect">
             <a:avLst/>
@@ -4603,7 +4603,7 @@
               <a:buNone/>
             </a:pPr>
             <a:r>
-              <a:rPr lang="en-US" sz="1050" dirty="0">
+              <a:rPr lang="en-US" sz="1400" dirty="0">
                 <a:solidFill>
                   <a:srgbClr val="2C1810"/>
                 </a:solidFill>
@@ -4613,7 +4613,7 @@
               </a:rPr>
               <a:t>D</a:t>
             </a:r>
-            <a:endParaRPr lang="en-US" sz="1050" dirty="0"/>
+            <a:endParaRPr lang="en-US" sz="1400" dirty="0"/>
           </a:p>
         </p:txBody>
       </p:sp>
@@ -4625,8 +4625,8 @@
         </p:nvSpPr>
         <p:spPr>
           <a:xfrm>
-            <a:off x="2880360" y="1435608"/>
-            <a:ext cx="1234440" cy="384048"/>
+            <a:off x="3291840" y="1417320"/>
+            <a:ext cx="1280160" cy="365760"/>
           </a:xfrm>
           <a:prstGeom prst="rect">
             <a:avLst/>
@@ -4645,8 +4645,8 @@
         </p:nvSpPr>
         <p:spPr>
           <a:xfrm>
-            <a:off x="2926080" y="1453896"/>
-            <a:ext cx="1188720" cy="347472"/>
+            <a:off x="3337560" y="1435608"/>
+            <a:ext cx="1234440" cy="329184"/>
           </a:xfrm>
           <a:prstGeom prst="rect">
             <a:avLst/>
@@ -4662,7 +4662,7 @@
               <a:buNone/>
             </a:pPr>
             <a:r>
-              <a:rPr lang="en-US" sz="1050" dirty="0">
+              <a:rPr lang="en-US" sz="1400" dirty="0">
                 <a:solidFill>
                   <a:srgbClr val="2C1810"/>
                 </a:solidFill>
@@ -4672,7 +4672,7 @@
               </a:rPr>
               <a:t>正格 Authentic</a:t>
             </a:r>
-            <a:endParaRPr lang="en-US" sz="1050" dirty="0"/>
+            <a:endParaRPr lang="en-US" sz="1400" dirty="0"/>
           </a:p>
         </p:txBody>
       </p:sp>
@@ -4684,8 +4684,8 @@
         </p:nvSpPr>
         <p:spPr>
           <a:xfrm>
-            <a:off x="4160520" y="1435608"/>
-            <a:ext cx="2697480" cy="384048"/>
+            <a:off x="4617720" y="1417320"/>
+            <a:ext cx="2057400" cy="365760"/>
           </a:xfrm>
           <a:prstGeom prst="rect">
             <a:avLst/>
@@ -4704,8 +4704,8 @@
         </p:nvSpPr>
         <p:spPr>
           <a:xfrm>
-            <a:off x="4206240" y="1453896"/>
-            <a:ext cx="2651760" cy="347472"/>
+            <a:off x="4663440" y="1435608"/>
+            <a:ext cx="2011680" cy="329184"/>
           </a:xfrm>
           <a:prstGeom prst="rect">
             <a:avLst/>
@@ -4721,7 +4721,7 @@
               <a:buNone/>
             </a:pPr>
             <a:r>
-              <a:rPr lang="en-US" sz="1050" dirty="0">
+              <a:rPr lang="en-US" sz="1400" dirty="0">
                 <a:solidFill>
                   <a:srgbClr val="2C1810"/>
                 </a:solidFill>
@@ -4731,7 +4731,7 @@
               </a:rPr>
               <a:t>全 全 半 | 全 全 半 全</a:t>
             </a:r>
-            <a:endParaRPr lang="en-US" sz="1050" dirty="0"/>
+            <a:endParaRPr lang="en-US" sz="1400" dirty="0"/>
           </a:p>
         </p:txBody>
       </p:sp>
@@ -4743,8 +4743,8 @@
         </p:nvSpPr>
         <p:spPr>
           <a:xfrm>
-            <a:off x="6903720" y="1435608"/>
-            <a:ext cx="1783080" cy="384048"/>
+            <a:off x="6720840" y="1417320"/>
+            <a:ext cx="1965960" cy="365760"/>
           </a:xfrm>
           <a:prstGeom prst="rect">
             <a:avLst/>
@@ -4763,8 +4763,8 @@
         </p:nvSpPr>
         <p:spPr>
           <a:xfrm>
-            <a:off x="6949440" y="1453896"/>
-            <a:ext cx="1737360" cy="347472"/>
+            <a:off x="6766560" y="1435608"/>
+            <a:ext cx="1920240" cy="329184"/>
           </a:xfrm>
           <a:prstGeom prst="rect">
             <a:avLst/>
@@ -4780,7 +4780,7 @@
               <a:buNone/>
             </a:pPr>
             <a:r>
-              <a:rPr lang="en-US" sz="1050" dirty="0">
+              <a:rPr lang="en-US" sz="1400" dirty="0">
                 <a:solidFill>
                   <a:srgbClr val="2C1810"/>
                 </a:solidFill>
@@ -4790,7 +4790,7 @@
               </a:rPr>
               <a:t>Dorian 多利安</a:t>
             </a:r>
-            <a:endParaRPr lang="en-US" sz="1050" dirty="0"/>
+            <a:endParaRPr lang="en-US" sz="1400" dirty="0"/>
           </a:p>
         </p:txBody>
       </p:sp>
@@ -4802,8 +4802,8 @@
         </p:nvSpPr>
         <p:spPr>
           <a:xfrm>
-            <a:off x="320040" y="1856232"/>
-            <a:ext cx="1325880" cy="384048"/>
+            <a:off x="320040" y="1801368"/>
+            <a:ext cx="1920240" cy="365760"/>
           </a:xfrm>
           <a:prstGeom prst="rect">
             <a:avLst/>
@@ -4822,8 +4822,8 @@
         </p:nvSpPr>
         <p:spPr>
           <a:xfrm>
-            <a:off x="365760" y="1874520"/>
-            <a:ext cx="1280160" cy="347472"/>
+            <a:off x="365760" y="1819656"/>
+            <a:ext cx="1874520" cy="329184"/>
           </a:xfrm>
           <a:prstGeom prst="rect">
             <a:avLst/>
@@ -4839,7 +4839,7 @@
               <a:buNone/>
             </a:pPr>
             <a:r>
-              <a:rPr lang="en-US" sz="1150" b="1" dirty="0">
+              <a:rPr lang="en-US" sz="1400" b="1" dirty="0">
                 <a:solidFill>
                   <a:srgbClr val="7A2830"/>
                 </a:solidFill>
@@ -4849,7 +4849,7 @@
               </a:rPr>
               <a:t>2 Hypodorian</a:t>
             </a:r>
-            <a:endParaRPr lang="en-US" sz="1150" dirty="0"/>
+            <a:endParaRPr lang="en-US" sz="1400" dirty="0"/>
           </a:p>
         </p:txBody>
       </p:sp>
@@ -4861,8 +4861,8 @@
         </p:nvSpPr>
         <p:spPr>
           <a:xfrm>
-            <a:off x="1691640" y="1856232"/>
-            <a:ext cx="1143000" cy="384048"/>
+            <a:off x="2286000" y="1801368"/>
+            <a:ext cx="960120" cy="365760"/>
           </a:xfrm>
           <a:prstGeom prst="rect">
             <a:avLst/>
@@ -4881,8 +4881,8 @@
         </p:nvSpPr>
         <p:spPr>
           <a:xfrm>
-            <a:off x="1737360" y="1874520"/>
-            <a:ext cx="1097280" cy="347472"/>
+            <a:off x="2331720" y="1819656"/>
+            <a:ext cx="914400" cy="329184"/>
           </a:xfrm>
           <a:prstGeom prst="rect">
             <a:avLst/>
@@ -4898,7 +4898,7 @@
               <a:buNone/>
             </a:pPr>
             <a:r>
-              <a:rPr lang="en-US" sz="1050" dirty="0">
+              <a:rPr lang="en-US" sz="1400" dirty="0">
                 <a:solidFill>
                   <a:srgbClr val="2C1810"/>
                 </a:solidFill>
@@ -4908,7 +4908,7 @@
               </a:rPr>
               <a:t>D</a:t>
             </a:r>
-            <a:endParaRPr lang="en-US" sz="1050" dirty="0"/>
+            <a:endParaRPr lang="en-US" sz="1400" dirty="0"/>
           </a:p>
         </p:txBody>
       </p:sp>
@@ -4920,8 +4920,8 @@
         </p:nvSpPr>
         <p:spPr>
           <a:xfrm>
-            <a:off x="2880360" y="1856232"/>
-            <a:ext cx="1234440" cy="384048"/>
+            <a:off x="3291840" y="1801368"/>
+            <a:ext cx="1280160" cy="365760"/>
           </a:xfrm>
           <a:prstGeom prst="rect">
             <a:avLst/>
@@ -4940,8 +4940,8 @@
         </p:nvSpPr>
         <p:spPr>
           <a:xfrm>
-            <a:off x="2926080" y="1874520"/>
-            <a:ext cx="1188720" cy="347472"/>
+            <a:off x="3337560" y="1819656"/>
+            <a:ext cx="1234440" cy="329184"/>
           </a:xfrm>
           <a:prstGeom prst="rect">
             <a:avLst/>
@@ -4957,7 +4957,7 @@
               <a:buNone/>
             </a:pPr>
             <a:r>
-              <a:rPr lang="en-US" sz="1050" dirty="0">
+              <a:rPr lang="en-US" sz="1400" dirty="0">
                 <a:solidFill>
                   <a:srgbClr val="2C1810"/>
                 </a:solidFill>
@@ -4967,7 +4967,7 @@
               </a:rPr>
               <a:t>變格 Plagal</a:t>
             </a:r>
-            <a:endParaRPr lang="en-US" sz="1050" dirty="0"/>
+            <a:endParaRPr lang="en-US" sz="1400" dirty="0"/>
           </a:p>
         </p:txBody>
       </p:sp>
@@ -4979,8 +4979,8 @@
         </p:nvSpPr>
         <p:spPr>
           <a:xfrm>
-            <a:off x="4160520" y="1856232"/>
-            <a:ext cx="2697480" cy="384048"/>
+            <a:off x="4617720" y="1801368"/>
+            <a:ext cx="2057400" cy="365760"/>
           </a:xfrm>
           <a:prstGeom prst="rect">
             <a:avLst/>
@@ -4999,8 +4999,8 @@
         </p:nvSpPr>
         <p:spPr>
           <a:xfrm>
-            <a:off x="4206240" y="1874520"/>
-            <a:ext cx="2651760" cy="347472"/>
+            <a:off x="4663440" y="1819656"/>
+            <a:ext cx="2011680" cy="329184"/>
           </a:xfrm>
           <a:prstGeom prst="rect">
             <a:avLst/>
@@ -5016,7 +5016,7 @@
               <a:buNone/>
             </a:pPr>
             <a:r>
-              <a:rPr lang="en-US" sz="1050" dirty="0">
+              <a:rPr lang="en-US" sz="1400" dirty="0">
                 <a:solidFill>
                   <a:srgbClr val="2C1810"/>
                 </a:solidFill>
@@ -5026,7 +5026,7 @@
               </a:rPr>
               <a:t>全 半 全 | 全 半 全 全</a:t>
             </a:r>
-            <a:endParaRPr lang="en-US" sz="1050" dirty="0"/>
+            <a:endParaRPr lang="en-US" sz="1400" dirty="0"/>
           </a:p>
         </p:txBody>
       </p:sp>
@@ -5038,8 +5038,8 @@
         </p:nvSpPr>
         <p:spPr>
           <a:xfrm>
-            <a:off x="6903720" y="1856232"/>
-            <a:ext cx="1783080" cy="384048"/>
+            <a:off x="6720840" y="1801368"/>
+            <a:ext cx="1965960" cy="365760"/>
           </a:xfrm>
           <a:prstGeom prst="rect">
             <a:avLst/>
@@ -5058,8 +5058,8 @@
         </p:nvSpPr>
         <p:spPr>
           <a:xfrm>
-            <a:off x="6949440" y="1874520"/>
-            <a:ext cx="1737360" cy="347472"/>
+            <a:off x="6766560" y="1819656"/>
+            <a:ext cx="1920240" cy="329184"/>
           </a:xfrm>
           <a:prstGeom prst="rect">
             <a:avLst/>
@@ -5075,7 +5075,7 @@
               <a:buNone/>
             </a:pPr>
             <a:r>
-              <a:rPr lang="en-US" sz="1050" dirty="0">
+              <a:rPr lang="en-US" sz="1400" dirty="0">
                 <a:solidFill>
                   <a:srgbClr val="2C1810"/>
                 </a:solidFill>
@@ -5085,7 +5085,7 @@
               </a:rPr>
               <a:t>Hypodorian</a:t>
             </a:r>
-            <a:endParaRPr lang="en-US" sz="1050" dirty="0"/>
+            <a:endParaRPr lang="en-US" sz="1400" dirty="0"/>
           </a:p>
         </p:txBody>
       </p:sp>
@@ -5097,8 +5097,8 @@
         </p:nvSpPr>
         <p:spPr>
           <a:xfrm>
-            <a:off x="320040" y="2276856"/>
-            <a:ext cx="1325880" cy="384048"/>
+            <a:off x="320040" y="2185416"/>
+            <a:ext cx="1920240" cy="365760"/>
           </a:xfrm>
           <a:prstGeom prst="rect">
             <a:avLst/>
@@ -5117,8 +5117,8 @@
         </p:nvSpPr>
         <p:spPr>
           <a:xfrm>
-            <a:off x="365760" y="2295144"/>
-            <a:ext cx="1280160" cy="347472"/>
+            <a:off x="365760" y="2203704"/>
+            <a:ext cx="1874520" cy="329184"/>
           </a:xfrm>
           <a:prstGeom prst="rect">
             <a:avLst/>
@@ -5134,7 +5134,7 @@
               <a:buNone/>
             </a:pPr>
             <a:r>
-              <a:rPr lang="en-US" sz="1150" b="1" dirty="0">
+              <a:rPr lang="en-US" sz="1400" b="1" dirty="0">
                 <a:solidFill>
                   <a:srgbClr val="7A2830"/>
                 </a:solidFill>
@@ -5144,7 +5144,7 @@
               </a:rPr>
               <a:t>3 Phrygian</a:t>
             </a:r>
-            <a:endParaRPr lang="en-US" sz="1150" dirty="0"/>
+            <a:endParaRPr lang="en-US" sz="1400" dirty="0"/>
           </a:p>
         </p:txBody>
       </p:sp>
@@ -5156,8 +5156,8 @@
         </p:nvSpPr>
         <p:spPr>
           <a:xfrm>
-            <a:off x="1691640" y="2276856"/>
-            <a:ext cx="1143000" cy="384048"/>
+            <a:off x="2286000" y="2185416"/>
+            <a:ext cx="960120" cy="365760"/>
           </a:xfrm>
           <a:prstGeom prst="rect">
             <a:avLst/>
@@ -5176,8 +5176,8 @@
         </p:nvSpPr>
         <p:spPr>
           <a:xfrm>
-            <a:off x="1737360" y="2295144"/>
-            <a:ext cx="1097280" cy="347472"/>
+            <a:off x="2331720" y="2203704"/>
+            <a:ext cx="914400" cy="329184"/>
           </a:xfrm>
           <a:prstGeom prst="rect">
             <a:avLst/>
@@ -5193,7 +5193,7 @@
               <a:buNone/>
             </a:pPr>
             <a:r>
-              <a:rPr lang="en-US" sz="1050" dirty="0">
+              <a:rPr lang="en-US" sz="1400" dirty="0">
                 <a:solidFill>
                   <a:srgbClr val="2C1810"/>
                 </a:solidFill>
@@ -5203,7 +5203,7 @@
               </a:rPr>
               <a:t>E</a:t>
             </a:r>
-            <a:endParaRPr lang="en-US" sz="1050" dirty="0"/>
+            <a:endParaRPr lang="en-US" sz="1400" dirty="0"/>
           </a:p>
         </p:txBody>
       </p:sp>
@@ -5215,8 +5215,8 @@
         </p:nvSpPr>
         <p:spPr>
           <a:xfrm>
-            <a:off x="2880360" y="2276856"/>
-            <a:ext cx="1234440" cy="384048"/>
+            <a:off x="3291840" y="2185416"/>
+            <a:ext cx="1280160" cy="365760"/>
           </a:xfrm>
           <a:prstGeom prst="rect">
             <a:avLst/>
@@ -5235,8 +5235,8 @@
         </p:nvSpPr>
         <p:spPr>
           <a:xfrm>
-            <a:off x="2926080" y="2295144"/>
-            <a:ext cx="1188720" cy="347472"/>
+            <a:off x="3337560" y="2203704"/>
+            <a:ext cx="1234440" cy="329184"/>
           </a:xfrm>
           <a:prstGeom prst="rect">
             <a:avLst/>
@@ -5252,7 +5252,7 @@
               <a:buNone/>
             </a:pPr>
             <a:r>
-              <a:rPr lang="en-US" sz="1050" dirty="0">
+              <a:rPr lang="en-US" sz="1400" dirty="0">
                 <a:solidFill>
                   <a:srgbClr val="2C1810"/>
                 </a:solidFill>
@@ -5262,7 +5262,7 @@
               </a:rPr>
               <a:t>正格 Authentic</a:t>
             </a:r>
-            <a:endParaRPr lang="en-US" sz="1050" dirty="0"/>
+            <a:endParaRPr lang="en-US" sz="1400" dirty="0"/>
           </a:p>
         </p:txBody>
       </p:sp>
@@ -5274,8 +5274,8 @@
         </p:nvSpPr>
         <p:spPr>
           <a:xfrm>
-            <a:off x="4160520" y="2276856"/>
-            <a:ext cx="2697480" cy="384048"/>
+            <a:off x="4617720" y="2185416"/>
+            <a:ext cx="2057400" cy="365760"/>
           </a:xfrm>
           <a:prstGeom prst="rect">
             <a:avLst/>
@@ -5294,8 +5294,8 @@
         </p:nvSpPr>
         <p:spPr>
           <a:xfrm>
-            <a:off x="4206240" y="2295144"/>
-            <a:ext cx="2651760" cy="347472"/>
+            <a:off x="4663440" y="2203704"/>
+            <a:ext cx="2011680" cy="329184"/>
           </a:xfrm>
           <a:prstGeom prst="rect">
             <a:avLst/>
@@ -5311,7 +5311,7 @@
               <a:buNone/>
             </a:pPr>
             <a:r>
-              <a:rPr lang="en-US" sz="1050" dirty="0">
+              <a:rPr lang="en-US" sz="1400" dirty="0">
                 <a:solidFill>
                   <a:srgbClr val="2C1810"/>
                 </a:solidFill>
@@ -5321,7 +5321,7 @@
               </a:rPr>
               <a:t>半 全 全 | 半 全 全 全</a:t>
             </a:r>
-            <a:endParaRPr lang="en-US" sz="1050" dirty="0"/>
+            <a:endParaRPr lang="en-US" sz="1400" dirty="0"/>
           </a:p>
         </p:txBody>
       </p:sp>
@@ -5333,8 +5333,8 @@
         </p:nvSpPr>
         <p:spPr>
           <a:xfrm>
-            <a:off x="6903720" y="2276856"/>
-            <a:ext cx="1783080" cy="384048"/>
+            <a:off x="6720840" y="2185416"/>
+            <a:ext cx="1965960" cy="365760"/>
           </a:xfrm>
           <a:prstGeom prst="rect">
             <a:avLst/>
@@ -5353,8 +5353,8 @@
         </p:nvSpPr>
         <p:spPr>
           <a:xfrm>
-            <a:off x="6949440" y="2295144"/>
-            <a:ext cx="1737360" cy="347472"/>
+            <a:off x="6766560" y="2203704"/>
+            <a:ext cx="1920240" cy="329184"/>
           </a:xfrm>
           <a:prstGeom prst="rect">
             <a:avLst/>
@@ -5370,7 +5370,7 @@
               <a:buNone/>
             </a:pPr>
             <a:r>
-              <a:rPr lang="en-US" sz="1050" dirty="0">
+              <a:rPr lang="en-US" sz="1400" dirty="0">
                 <a:solidFill>
                   <a:srgbClr val="2C1810"/>
                 </a:solidFill>
@@ -5380,7 +5380,7 @@
               </a:rPr>
               <a:t>Phrygian 弗里幾安</a:t>
             </a:r>
-            <a:endParaRPr lang="en-US" sz="1050" dirty="0"/>
+            <a:endParaRPr lang="en-US" sz="1400" dirty="0"/>
           </a:p>
         </p:txBody>
       </p:sp>
@@ -5392,8 +5392,8 @@
         </p:nvSpPr>
         <p:spPr>
           <a:xfrm>
-            <a:off x="320040" y="2697480"/>
-            <a:ext cx="1325880" cy="384048"/>
+            <a:off x="320040" y="2569464"/>
+            <a:ext cx="1920240" cy="365760"/>
           </a:xfrm>
           <a:prstGeom prst="rect">
             <a:avLst/>
@@ -5412,8 +5412,8 @@
         </p:nvSpPr>
         <p:spPr>
           <a:xfrm>
-            <a:off x="365760" y="2715768"/>
-            <a:ext cx="1280160" cy="347472"/>
+            <a:off x="365760" y="2587752"/>
+            <a:ext cx="1874520" cy="329184"/>
           </a:xfrm>
           <a:prstGeom prst="rect">
             <a:avLst/>
@@ -5429,7 +5429,7 @@
               <a:buNone/>
             </a:pPr>
             <a:r>
-              <a:rPr lang="en-US" sz="1150" b="1" dirty="0">
+              <a:rPr lang="en-US" sz="1400" b="1" dirty="0">
                 <a:solidFill>
                   <a:srgbClr val="7A2830"/>
                 </a:solidFill>
@@ -5439,7 +5439,7 @@
               </a:rPr>
               <a:t>4 Hypophrygian</a:t>
             </a:r>
-            <a:endParaRPr lang="en-US" sz="1150" dirty="0"/>
+            <a:endParaRPr lang="en-US" sz="1400" dirty="0"/>
           </a:p>
         </p:txBody>
       </p:sp>
@@ -5451,8 +5451,8 @@
         </p:nvSpPr>
         <p:spPr>
           <a:xfrm>
-            <a:off x="1691640" y="2697480"/>
-            <a:ext cx="1143000" cy="384048"/>
+            <a:off x="2286000" y="2569464"/>
+            <a:ext cx="960120" cy="365760"/>
           </a:xfrm>
           <a:prstGeom prst="rect">
             <a:avLst/>
@@ -5471,8 +5471,8 @@
         </p:nvSpPr>
         <p:spPr>
           <a:xfrm>
-            <a:off x="1737360" y="2715768"/>
-            <a:ext cx="1097280" cy="347472"/>
+            <a:off x="2331720" y="2587752"/>
+            <a:ext cx="914400" cy="329184"/>
           </a:xfrm>
           <a:prstGeom prst="rect">
             <a:avLst/>
@@ -5488,7 +5488,7 @@
               <a:buNone/>
             </a:pPr>
             <a:r>
-              <a:rPr lang="en-US" sz="1050" dirty="0">
+              <a:rPr lang="en-US" sz="1400" dirty="0">
                 <a:solidFill>
                   <a:srgbClr val="2C1810"/>
                 </a:solidFill>
@@ -5498,7 +5498,7 @@
               </a:rPr>
               <a:t>E</a:t>
             </a:r>
-            <a:endParaRPr lang="en-US" sz="1050" dirty="0"/>
+            <a:endParaRPr lang="en-US" sz="1400" dirty="0"/>
           </a:p>
         </p:txBody>
       </p:sp>
@@ -5510,8 +5510,8 @@
         </p:nvSpPr>
         <p:spPr>
           <a:xfrm>
-            <a:off x="2880360" y="2697480"/>
-            <a:ext cx="1234440" cy="384048"/>
+            <a:off x="3291840" y="2569464"/>
+            <a:ext cx="1280160" cy="365760"/>
           </a:xfrm>
           <a:prstGeom prst="rect">
             <a:avLst/>
@@ -5530,8 +5530,8 @@
         </p:nvSpPr>
         <p:spPr>
           <a:xfrm>
-            <a:off x="2926080" y="2715768"/>
-            <a:ext cx="1188720" cy="347472"/>
+            <a:off x="3337560" y="2587752"/>
+            <a:ext cx="1234440" cy="329184"/>
           </a:xfrm>
           <a:prstGeom prst="rect">
             <a:avLst/>
@@ -5547,7 +5547,7 @@
               <a:buNone/>
             </a:pPr>
             <a:r>
-              <a:rPr lang="en-US" sz="1050" dirty="0">
+              <a:rPr lang="en-US" sz="1400" dirty="0">
                 <a:solidFill>
                   <a:srgbClr val="2C1810"/>
                 </a:solidFill>
@@ -5557,7 +5557,7 @@
               </a:rPr>
               <a:t>變格 Plagal</a:t>
             </a:r>
-            <a:endParaRPr lang="en-US" sz="1050" dirty="0"/>
+            <a:endParaRPr lang="en-US" sz="1400" dirty="0"/>
           </a:p>
         </p:txBody>
       </p:sp>
@@ -5569,8 +5569,8 @@
         </p:nvSpPr>
         <p:spPr>
           <a:xfrm>
-            <a:off x="4160520" y="2697480"/>
-            <a:ext cx="2697480" cy="384048"/>
+            <a:off x="4617720" y="2569464"/>
+            <a:ext cx="2057400" cy="365760"/>
           </a:xfrm>
           <a:prstGeom prst="rect">
             <a:avLst/>
@@ -5589,8 +5589,8 @@
         </p:nvSpPr>
         <p:spPr>
           <a:xfrm>
-            <a:off x="4206240" y="2715768"/>
-            <a:ext cx="2651760" cy="347472"/>
+            <a:off x="4663440" y="2587752"/>
+            <a:ext cx="2011680" cy="329184"/>
           </a:xfrm>
           <a:prstGeom prst="rect">
             <a:avLst/>
@@ -5606,7 +5606,7 @@
               <a:buNone/>
             </a:pPr>
             <a:r>
-              <a:rPr lang="en-US" sz="1050" dirty="0">
+              <a:rPr lang="en-US" sz="1400" dirty="0">
                 <a:solidFill>
                   <a:srgbClr val="2C1810"/>
                 </a:solidFill>
@@ -5616,7 +5616,7 @@
               </a:rPr>
               <a:t>半 全 全 | 全 全 全 半</a:t>
             </a:r>
-            <a:endParaRPr lang="en-US" sz="1050" dirty="0"/>
+            <a:endParaRPr lang="en-US" sz="1400" dirty="0"/>
           </a:p>
         </p:txBody>
       </p:sp>
@@ -5628,8 +5628,8 @@
         </p:nvSpPr>
         <p:spPr>
           <a:xfrm>
-            <a:off x="6903720" y="2697480"/>
-            <a:ext cx="1783080" cy="384048"/>
+            <a:off x="6720840" y="2569464"/>
+            <a:ext cx="1965960" cy="365760"/>
           </a:xfrm>
           <a:prstGeom prst="rect">
             <a:avLst/>
@@ -5648,8 +5648,8 @@
         </p:nvSpPr>
         <p:spPr>
           <a:xfrm>
-            <a:off x="6949440" y="2715768"/>
-            <a:ext cx="1737360" cy="347472"/>
+            <a:off x="6766560" y="2587752"/>
+            <a:ext cx="1920240" cy="329184"/>
           </a:xfrm>
           <a:prstGeom prst="rect">
             <a:avLst/>
@@ -5665,7 +5665,7 @@
               <a:buNone/>
             </a:pPr>
             <a:r>
-              <a:rPr lang="en-US" sz="1050" dirty="0">
+              <a:rPr lang="en-US" sz="1400" dirty="0">
                 <a:solidFill>
                   <a:srgbClr val="2C1810"/>
                 </a:solidFill>
@@ -5675,7 +5675,7 @@
               </a:rPr>
               <a:t>Hypophrygian</a:t>
             </a:r>
-            <a:endParaRPr lang="en-US" sz="1050" dirty="0"/>
+            <a:endParaRPr lang="en-US" sz="1400" dirty="0"/>
           </a:p>
         </p:txBody>
       </p:sp>
@@ -5687,8 +5687,8 @@
         </p:nvSpPr>
         <p:spPr>
           <a:xfrm>
-            <a:off x="320040" y="3118104"/>
-            <a:ext cx="1325880" cy="384048"/>
+            <a:off x="320040" y="2953512"/>
+            <a:ext cx="1920240" cy="365760"/>
           </a:xfrm>
           <a:prstGeom prst="rect">
             <a:avLst/>
@@ -5707,8 +5707,8 @@
         </p:nvSpPr>
         <p:spPr>
           <a:xfrm>
-            <a:off x="365760" y="3136392"/>
-            <a:ext cx="1280160" cy="347472"/>
+            <a:off x="365760" y="2971800"/>
+            <a:ext cx="1874520" cy="329184"/>
           </a:xfrm>
           <a:prstGeom prst="rect">
             <a:avLst/>
@@ -5724,7 +5724,7 @@
               <a:buNone/>
             </a:pPr>
             <a:r>
-              <a:rPr lang="en-US" sz="1150" b="1" dirty="0">
+              <a:rPr lang="en-US" sz="1400" b="1" dirty="0">
                 <a:solidFill>
                   <a:srgbClr val="7A2830"/>
                 </a:solidFill>
@@ -5734,7 +5734,7 @@
               </a:rPr>
               <a:t>5 Lydian</a:t>
             </a:r>
-            <a:endParaRPr lang="en-US" sz="1150" dirty="0"/>
+            <a:endParaRPr lang="en-US" sz="1400" dirty="0"/>
           </a:p>
         </p:txBody>
       </p:sp>
@@ -5746,8 +5746,8 @@
         </p:nvSpPr>
         <p:spPr>
           <a:xfrm>
-            <a:off x="1691640" y="3118104"/>
-            <a:ext cx="1143000" cy="384048"/>
+            <a:off x="2286000" y="2953512"/>
+            <a:ext cx="960120" cy="365760"/>
           </a:xfrm>
           <a:prstGeom prst="rect">
             <a:avLst/>
@@ -5766,8 +5766,8 @@
         </p:nvSpPr>
         <p:spPr>
           <a:xfrm>
-            <a:off x="1737360" y="3136392"/>
-            <a:ext cx="1097280" cy="347472"/>
+            <a:off x="2331720" y="2971800"/>
+            <a:ext cx="914400" cy="329184"/>
           </a:xfrm>
           <a:prstGeom prst="rect">
             <a:avLst/>
@@ -5783,7 +5783,7 @@
               <a:buNone/>
             </a:pPr>
             <a:r>
-              <a:rPr lang="en-US" sz="1050" dirty="0">
+              <a:rPr lang="en-US" sz="1400" dirty="0">
                 <a:solidFill>
                   <a:srgbClr val="2C1810"/>
                 </a:solidFill>
@@ -5793,7 +5793,7 @@
               </a:rPr>
               <a:t>F</a:t>
             </a:r>
-            <a:endParaRPr lang="en-US" sz="1050" dirty="0"/>
+            <a:endParaRPr lang="en-US" sz="1400" dirty="0"/>
           </a:p>
         </p:txBody>
       </p:sp>
@@ -5805,8 +5805,8 @@
         </p:nvSpPr>
         <p:spPr>
           <a:xfrm>
-            <a:off x="2880360" y="3118104"/>
-            <a:ext cx="1234440" cy="384048"/>
+            <a:off x="3291840" y="2953512"/>
+            <a:ext cx="1280160" cy="365760"/>
           </a:xfrm>
           <a:prstGeom prst="rect">
             <a:avLst/>
@@ -5825,8 +5825,8 @@
         </p:nvSpPr>
         <p:spPr>
           <a:xfrm>
-            <a:off x="2926080" y="3136392"/>
-            <a:ext cx="1188720" cy="347472"/>
+            <a:off x="3337560" y="2971800"/>
+            <a:ext cx="1234440" cy="329184"/>
           </a:xfrm>
           <a:prstGeom prst="rect">
             <a:avLst/>
@@ -5842,7 +5842,7 @@
               <a:buNone/>
             </a:pPr>
             <a:r>
-              <a:rPr lang="en-US" sz="1050" dirty="0">
+              <a:rPr lang="en-US" sz="1400" dirty="0">
                 <a:solidFill>
                   <a:srgbClr val="2C1810"/>
                 </a:solidFill>
@@ -5852,7 +5852,7 @@
               </a:rPr>
               <a:t>正格 Authentic</a:t>
             </a:r>
-            <a:endParaRPr lang="en-US" sz="1050" dirty="0"/>
+            <a:endParaRPr lang="en-US" sz="1400" dirty="0"/>
           </a:p>
         </p:txBody>
       </p:sp>
@@ -5864,8 +5864,8 @@
         </p:nvSpPr>
         <p:spPr>
           <a:xfrm>
-            <a:off x="4160520" y="3118104"/>
-            <a:ext cx="2697480" cy="384048"/>
+            <a:off x="4617720" y="2953512"/>
+            <a:ext cx="2057400" cy="365760"/>
           </a:xfrm>
           <a:prstGeom prst="rect">
             <a:avLst/>
@@ -5884,8 +5884,8 @@
         </p:nvSpPr>
         <p:spPr>
           <a:xfrm>
-            <a:off x="4206240" y="3136392"/>
-            <a:ext cx="2651760" cy="347472"/>
+            <a:off x="4663440" y="2971800"/>
+            <a:ext cx="2011680" cy="329184"/>
           </a:xfrm>
           <a:prstGeom prst="rect">
             <a:avLst/>
@@ -5901,7 +5901,7 @@
               <a:buNone/>
             </a:pPr>
             <a:r>
-              <a:rPr lang="en-US" sz="1050" dirty="0">
+              <a:rPr lang="en-US" sz="1400" dirty="0">
                 <a:solidFill>
                   <a:srgbClr val="2C1810"/>
                 </a:solidFill>
@@ -5911,7 +5911,7 @@
               </a:rPr>
               <a:t>全 全 全 | 半 全 全 半</a:t>
             </a:r>
-            <a:endParaRPr lang="en-US" sz="1050" dirty="0"/>
+            <a:endParaRPr lang="en-US" sz="1400" dirty="0"/>
           </a:p>
         </p:txBody>
       </p:sp>
@@ -5923,8 +5923,8 @@
         </p:nvSpPr>
         <p:spPr>
           <a:xfrm>
-            <a:off x="6903720" y="3118104"/>
-            <a:ext cx="1783080" cy="384048"/>
+            <a:off x="6720840" y="2953512"/>
+            <a:ext cx="1965960" cy="365760"/>
           </a:xfrm>
           <a:prstGeom prst="rect">
             <a:avLst/>
@@ -5943,8 +5943,8 @@
         </p:nvSpPr>
         <p:spPr>
           <a:xfrm>
-            <a:off x="6949440" y="3136392"/>
-            <a:ext cx="1737360" cy="347472"/>
+            <a:off x="6766560" y="2971800"/>
+            <a:ext cx="1920240" cy="329184"/>
           </a:xfrm>
           <a:prstGeom prst="rect">
             <a:avLst/>
@@ -5960,7 +5960,7 @@
               <a:buNone/>
             </a:pPr>
             <a:r>
-              <a:rPr lang="en-US" sz="1050" dirty="0">
+              <a:rPr lang="en-US" sz="1400" dirty="0">
                 <a:solidFill>
                   <a:srgbClr val="2C1810"/>
                 </a:solidFill>
@@ -5970,7 +5970,7 @@
               </a:rPr>
               <a:t>Lydian 利底安</a:t>
             </a:r>
-            <a:endParaRPr lang="en-US" sz="1050" dirty="0"/>
+            <a:endParaRPr lang="en-US" sz="1400" dirty="0"/>
           </a:p>
         </p:txBody>
       </p:sp>
@@ -5982,8 +5982,8 @@
         </p:nvSpPr>
         <p:spPr>
           <a:xfrm>
-            <a:off x="320040" y="3538728"/>
-            <a:ext cx="1325880" cy="384048"/>
+            <a:off x="320040" y="3337560"/>
+            <a:ext cx="1920240" cy="365760"/>
           </a:xfrm>
           <a:prstGeom prst="rect">
             <a:avLst/>
@@ -6002,8 +6002,8 @@
         </p:nvSpPr>
         <p:spPr>
           <a:xfrm>
-            <a:off x="365760" y="3557016"/>
-            <a:ext cx="1280160" cy="347472"/>
+            <a:off x="365760" y="3355848"/>
+            <a:ext cx="1874520" cy="329184"/>
           </a:xfrm>
           <a:prstGeom prst="rect">
             <a:avLst/>
@@ -6019,7 +6019,7 @@
               <a:buNone/>
             </a:pPr>
             <a:r>
-              <a:rPr lang="en-US" sz="1150" b="1" dirty="0">
+              <a:rPr lang="en-US" sz="1400" b="1" dirty="0">
                 <a:solidFill>
                   <a:srgbClr val="7A2830"/>
                 </a:solidFill>
@@ -6029,7 +6029,7 @@
               </a:rPr>
               <a:t>6 Hypolydian</a:t>
             </a:r>
-            <a:endParaRPr lang="en-US" sz="1150" dirty="0"/>
+            <a:endParaRPr lang="en-US" sz="1400" dirty="0"/>
           </a:p>
         </p:txBody>
       </p:sp>
@@ -6041,8 +6041,8 @@
         </p:nvSpPr>
         <p:spPr>
           <a:xfrm>
-            <a:off x="1691640" y="3538728"/>
-            <a:ext cx="1143000" cy="384048"/>
+            <a:off x="2286000" y="3337560"/>
+            <a:ext cx="960120" cy="365760"/>
           </a:xfrm>
           <a:prstGeom prst="rect">
             <a:avLst/>
@@ -6061,8 +6061,8 @@
         </p:nvSpPr>
         <p:spPr>
           <a:xfrm>
-            <a:off x="1737360" y="3557016"/>
-            <a:ext cx="1097280" cy="347472"/>
+            <a:off x="2331720" y="3355848"/>
+            <a:ext cx="914400" cy="329184"/>
           </a:xfrm>
           <a:prstGeom prst="rect">
             <a:avLst/>
@@ -6078,7 +6078,7 @@
               <a:buNone/>
             </a:pPr>
             <a:r>
-              <a:rPr lang="en-US" sz="1050" dirty="0">
+              <a:rPr lang="en-US" sz="1400" dirty="0">
                 <a:solidFill>
                   <a:srgbClr val="2C1810"/>
                 </a:solidFill>
@@ -6088,7 +6088,7 @@
               </a:rPr>
               <a:t>F</a:t>
             </a:r>
-            <a:endParaRPr lang="en-US" sz="1050" dirty="0"/>
+            <a:endParaRPr lang="en-US" sz="1400" dirty="0"/>
           </a:p>
         </p:txBody>
       </p:sp>
@@ -6100,8 +6100,8 @@
         </p:nvSpPr>
         <p:spPr>
           <a:xfrm>
-            <a:off x="2880360" y="3538728"/>
-            <a:ext cx="1234440" cy="384048"/>
+            <a:off x="3291840" y="3337560"/>
+            <a:ext cx="1280160" cy="365760"/>
           </a:xfrm>
           <a:prstGeom prst="rect">
             <a:avLst/>
@@ -6120,8 +6120,8 @@
         </p:nvSpPr>
         <p:spPr>
           <a:xfrm>
-            <a:off x="2926080" y="3557016"/>
-            <a:ext cx="1188720" cy="347472"/>
+            <a:off x="3337560" y="3355848"/>
+            <a:ext cx="1234440" cy="329184"/>
           </a:xfrm>
           <a:prstGeom prst="rect">
             <a:avLst/>
@@ -6137,7 +6137,7 @@
               <a:buNone/>
             </a:pPr>
             <a:r>
-              <a:rPr lang="en-US" sz="1050" dirty="0">
+              <a:rPr lang="en-US" sz="1400" dirty="0">
                 <a:solidFill>
                   <a:srgbClr val="2C1810"/>
                 </a:solidFill>
@@ -6147,7 +6147,7 @@
               </a:rPr>
               <a:t>變格 Plagal</a:t>
             </a:r>
-            <a:endParaRPr lang="en-US" sz="1050" dirty="0"/>
+            <a:endParaRPr lang="en-US" sz="1400" dirty="0"/>
           </a:p>
         </p:txBody>
       </p:sp>
@@ -6159,8 +6159,8 @@
         </p:nvSpPr>
         <p:spPr>
           <a:xfrm>
-            <a:off x="4160520" y="3538728"/>
-            <a:ext cx="2697480" cy="384048"/>
+            <a:off x="4617720" y="3337560"/>
+            <a:ext cx="2057400" cy="365760"/>
           </a:xfrm>
           <a:prstGeom prst="rect">
             <a:avLst/>
@@ -6179,8 +6179,8 @@
         </p:nvSpPr>
         <p:spPr>
           <a:xfrm>
-            <a:off x="4206240" y="3557016"/>
-            <a:ext cx="2651760" cy="347472"/>
+            <a:off x="4663440" y="3355848"/>
+            <a:ext cx="2011680" cy="329184"/>
           </a:xfrm>
           <a:prstGeom prst="rect">
             <a:avLst/>
@@ -6196,7 +6196,7 @@
               <a:buNone/>
             </a:pPr>
             <a:r>
-              <a:rPr lang="en-US" sz="1050" dirty="0">
+              <a:rPr lang="en-US" sz="1400" dirty="0">
                 <a:solidFill>
                   <a:srgbClr val="2C1810"/>
                 </a:solidFill>
@@ -6206,7 +6206,7 @@
               </a:rPr>
               <a:t>全 全 半 | 全 全 全 半</a:t>
             </a:r>
-            <a:endParaRPr lang="en-US" sz="1050" dirty="0"/>
+            <a:endParaRPr lang="en-US" sz="1400" dirty="0"/>
           </a:p>
         </p:txBody>
       </p:sp>
@@ -6218,8 +6218,8 @@
         </p:nvSpPr>
         <p:spPr>
           <a:xfrm>
-            <a:off x="6903720" y="3538728"/>
-            <a:ext cx="1783080" cy="384048"/>
+            <a:off x="6720840" y="3337560"/>
+            <a:ext cx="1965960" cy="365760"/>
           </a:xfrm>
           <a:prstGeom prst="rect">
             <a:avLst/>
@@ -6238,8 +6238,8 @@
         </p:nvSpPr>
         <p:spPr>
           <a:xfrm>
-            <a:off x="6949440" y="3557016"/>
-            <a:ext cx="1737360" cy="347472"/>
+            <a:off x="6766560" y="3355848"/>
+            <a:ext cx="1920240" cy="329184"/>
           </a:xfrm>
           <a:prstGeom prst="rect">
             <a:avLst/>
@@ -6255,7 +6255,7 @@
               <a:buNone/>
             </a:pPr>
             <a:r>
-              <a:rPr lang="en-US" sz="1050" dirty="0">
+              <a:rPr lang="en-US" sz="1400" dirty="0">
                 <a:solidFill>
                   <a:srgbClr val="2C1810"/>
                 </a:solidFill>
@@ -6265,7 +6265,7 @@
               </a:rPr>
               <a:t>Hypolydian</a:t>
             </a:r>
-            <a:endParaRPr lang="en-US" sz="1050" dirty="0"/>
+            <a:endParaRPr lang="en-US" sz="1400" dirty="0"/>
           </a:p>
         </p:txBody>
       </p:sp>
@@ -6277,8 +6277,8 @@
         </p:nvSpPr>
         <p:spPr>
           <a:xfrm>
-            <a:off x="320040" y="3959352"/>
-            <a:ext cx="1325880" cy="384048"/>
+            <a:off x="320040" y="3721608"/>
+            <a:ext cx="1920240" cy="365760"/>
           </a:xfrm>
           <a:prstGeom prst="rect">
             <a:avLst/>
@@ -6297,8 +6297,8 @@
         </p:nvSpPr>
         <p:spPr>
           <a:xfrm>
-            <a:off x="365760" y="3977640"/>
-            <a:ext cx="1280160" cy="347472"/>
+            <a:off x="365760" y="3739896"/>
+            <a:ext cx="1874520" cy="329184"/>
           </a:xfrm>
           <a:prstGeom prst="rect">
             <a:avLst/>
@@ -6314,7 +6314,7 @@
               <a:buNone/>
             </a:pPr>
             <a:r>
-              <a:rPr lang="en-US" sz="1150" b="1" dirty="0">
+              <a:rPr lang="en-US" sz="1400" b="1" dirty="0">
                 <a:solidFill>
                   <a:srgbClr val="7A2830"/>
                 </a:solidFill>
@@ -6324,7 +6324,7 @@
               </a:rPr>
               <a:t>7 Mixolydian</a:t>
             </a:r>
-            <a:endParaRPr lang="en-US" sz="1150" dirty="0"/>
+            <a:endParaRPr lang="en-US" sz="1400" dirty="0"/>
           </a:p>
         </p:txBody>
       </p:sp>
@@ -6336,8 +6336,8 @@
         </p:nvSpPr>
         <p:spPr>
           <a:xfrm>
-            <a:off x="1691640" y="3959352"/>
-            <a:ext cx="1143000" cy="384048"/>
+            <a:off x="2286000" y="3721608"/>
+            <a:ext cx="960120" cy="365760"/>
           </a:xfrm>
           <a:prstGeom prst="rect">
             <a:avLst/>
@@ -6356,8 +6356,8 @@
         </p:nvSpPr>
         <p:spPr>
           <a:xfrm>
-            <a:off x="1737360" y="3977640"/>
-            <a:ext cx="1097280" cy="347472"/>
+            <a:off x="2331720" y="3739896"/>
+            <a:ext cx="914400" cy="329184"/>
           </a:xfrm>
           <a:prstGeom prst="rect">
             <a:avLst/>
@@ -6373,7 +6373,7 @@
               <a:buNone/>
             </a:pPr>
             <a:r>
-              <a:rPr lang="en-US" sz="1050" dirty="0">
+              <a:rPr lang="en-US" sz="1400" dirty="0">
                 <a:solidFill>
                   <a:srgbClr val="2C1810"/>
                 </a:solidFill>
@@ -6383,7 +6383,7 @@
               </a:rPr>
               <a:t>G</a:t>
             </a:r>
-            <a:endParaRPr lang="en-US" sz="1050" dirty="0"/>
+            <a:endParaRPr lang="en-US" sz="1400" dirty="0"/>
           </a:p>
         </p:txBody>
       </p:sp>
@@ -6395,8 +6395,8 @@
         </p:nvSpPr>
         <p:spPr>
           <a:xfrm>
-            <a:off x="2880360" y="3959352"/>
-            <a:ext cx="1234440" cy="384048"/>
+            <a:off x="3291840" y="3721608"/>
+            <a:ext cx="1280160" cy="365760"/>
           </a:xfrm>
           <a:prstGeom prst="rect">
             <a:avLst/>
@@ -6415,8 +6415,8 @@
         </p:nvSpPr>
         <p:spPr>
           <a:xfrm>
-            <a:off x="2926080" y="3977640"/>
-            <a:ext cx="1188720" cy="347472"/>
+            <a:off x="3337560" y="3739896"/>
+            <a:ext cx="1234440" cy="329184"/>
           </a:xfrm>
           <a:prstGeom prst="rect">
             <a:avLst/>
@@ -6432,7 +6432,7 @@
               <a:buNone/>
             </a:pPr>
             <a:r>
-              <a:rPr lang="en-US" sz="1050" dirty="0">
+              <a:rPr lang="en-US" sz="1400" dirty="0">
                 <a:solidFill>
                   <a:srgbClr val="2C1810"/>
                 </a:solidFill>
@@ -6442,7 +6442,7 @@
               </a:rPr>
               <a:t>正格 Authentic</a:t>
             </a:r>
-            <a:endParaRPr lang="en-US" sz="1050" dirty="0"/>
+            <a:endParaRPr lang="en-US" sz="1400" dirty="0"/>
           </a:p>
         </p:txBody>
       </p:sp>
@@ -6454,8 +6454,8 @@
         </p:nvSpPr>
         <p:spPr>
           <a:xfrm>
-            <a:off x="4160520" y="3959352"/>
-            <a:ext cx="2697480" cy="384048"/>
+            <a:off x="4617720" y="3721608"/>
+            <a:ext cx="2057400" cy="365760"/>
           </a:xfrm>
           <a:prstGeom prst="rect">
             <a:avLst/>
@@ -6474,8 +6474,8 @@
         </p:nvSpPr>
         <p:spPr>
           <a:xfrm>
-            <a:off x="4206240" y="3977640"/>
-            <a:ext cx="2651760" cy="347472"/>
+            <a:off x="4663440" y="3739896"/>
+            <a:ext cx="2011680" cy="329184"/>
           </a:xfrm>
           <a:prstGeom prst="rect">
             <a:avLst/>
@@ -6491,7 +6491,7 @@
               <a:buNone/>
             </a:pPr>
             <a:r>
-              <a:rPr lang="en-US" sz="1050" dirty="0">
+              <a:rPr lang="en-US" sz="1400" dirty="0">
                 <a:solidFill>
                   <a:srgbClr val="2C1810"/>
                 </a:solidFill>
@@ -6501,7 +6501,7 @@
               </a:rPr>
               <a:t>全 全 半 | 全 全 半 全</a:t>
             </a:r>
-            <a:endParaRPr lang="en-US" sz="1050" dirty="0"/>
+            <a:endParaRPr lang="en-US" sz="1400" dirty="0"/>
           </a:p>
         </p:txBody>
       </p:sp>
@@ -6513,8 +6513,8 @@
         </p:nvSpPr>
         <p:spPr>
           <a:xfrm>
-            <a:off x="6903720" y="3959352"/>
-            <a:ext cx="1783080" cy="384048"/>
+            <a:off x="6720840" y="3721608"/>
+            <a:ext cx="1965960" cy="365760"/>
           </a:xfrm>
           <a:prstGeom prst="rect">
             <a:avLst/>
@@ -6533,8 +6533,8 @@
         </p:nvSpPr>
         <p:spPr>
           <a:xfrm>
-            <a:off x="6949440" y="3977640"/>
-            <a:ext cx="1737360" cy="347472"/>
+            <a:off x="6766560" y="3739896"/>
+            <a:ext cx="1920240" cy="329184"/>
           </a:xfrm>
           <a:prstGeom prst="rect">
             <a:avLst/>
@@ -6550,7 +6550,7 @@
               <a:buNone/>
             </a:pPr>
             <a:r>
-              <a:rPr lang="en-US" sz="1050" dirty="0">
+              <a:rPr lang="en-US" sz="1400" dirty="0">
                 <a:solidFill>
                   <a:srgbClr val="2C1810"/>
                 </a:solidFill>
@@ -6560,7 +6560,7 @@
               </a:rPr>
               <a:t>Mixolydian 混利底安</a:t>
             </a:r>
-            <a:endParaRPr lang="en-US" sz="1050" dirty="0"/>
+            <a:endParaRPr lang="en-US" sz="1400" dirty="0"/>
           </a:p>
         </p:txBody>
       </p:sp>
@@ -6572,8 +6572,8 @@
         </p:nvSpPr>
         <p:spPr>
           <a:xfrm>
-            <a:off x="320040" y="4379976"/>
-            <a:ext cx="1325880" cy="384048"/>
+            <a:off x="320040" y="4105656"/>
+            <a:ext cx="1920240" cy="365760"/>
           </a:xfrm>
           <a:prstGeom prst="rect">
             <a:avLst/>
@@ -6592,8 +6592,8 @@
         </p:nvSpPr>
         <p:spPr>
           <a:xfrm>
-            <a:off x="365760" y="4398264"/>
-            <a:ext cx="1280160" cy="347472"/>
+            <a:off x="365760" y="4123944"/>
+            <a:ext cx="1874520" cy="329184"/>
           </a:xfrm>
           <a:prstGeom prst="rect">
             <a:avLst/>
@@ -6609,7 +6609,7 @@
               <a:buNone/>
             </a:pPr>
             <a:r>
-              <a:rPr lang="en-US" sz="1150" b="1" dirty="0">
+              <a:rPr lang="en-US" sz="1400" b="1" dirty="0">
                 <a:solidFill>
                   <a:srgbClr val="7A2830"/>
                 </a:solidFill>
@@ -6619,7 +6619,7 @@
               </a:rPr>
               <a:t>8 Hypomixolydian</a:t>
             </a:r>
-            <a:endParaRPr lang="en-US" sz="1150" dirty="0"/>
+            <a:endParaRPr lang="en-US" sz="1400" dirty="0"/>
           </a:p>
         </p:txBody>
       </p:sp>
@@ -6631,8 +6631,8 @@
         </p:nvSpPr>
         <p:spPr>
           <a:xfrm>
-            <a:off x="1691640" y="4379976"/>
-            <a:ext cx="1143000" cy="384048"/>
+            <a:off x="2286000" y="4105656"/>
+            <a:ext cx="960120" cy="365760"/>
           </a:xfrm>
           <a:prstGeom prst="rect">
             <a:avLst/>
@@ -6651,8 +6651,8 @@
         </p:nvSpPr>
         <p:spPr>
           <a:xfrm>
-            <a:off x="1737360" y="4398264"/>
-            <a:ext cx="1097280" cy="347472"/>
+            <a:off x="2331720" y="4123944"/>
+            <a:ext cx="914400" cy="329184"/>
           </a:xfrm>
           <a:prstGeom prst="rect">
             <a:avLst/>
@@ -6668,7 +6668,7 @@
               <a:buNone/>
             </a:pPr>
             <a:r>
-              <a:rPr lang="en-US" sz="1050" dirty="0">
+              <a:rPr lang="en-US" sz="1400" dirty="0">
                 <a:solidFill>
                   <a:srgbClr val="2C1810"/>
                 </a:solidFill>
@@ -6678,7 +6678,7 @@
               </a:rPr>
               <a:t>G</a:t>
             </a:r>
-            <a:endParaRPr lang="en-US" sz="1050" dirty="0"/>
+            <a:endParaRPr lang="en-US" sz="1400" dirty="0"/>
           </a:p>
         </p:txBody>
       </p:sp>
@@ -6690,8 +6690,8 @@
         </p:nvSpPr>
         <p:spPr>
           <a:xfrm>
-            <a:off x="2880360" y="4379976"/>
-            <a:ext cx="1234440" cy="384048"/>
+            <a:off x="3291840" y="4105656"/>
+            <a:ext cx="1280160" cy="365760"/>
           </a:xfrm>
           <a:prstGeom prst="rect">
             <a:avLst/>
@@ -6710,8 +6710,8 @@
         </p:nvSpPr>
         <p:spPr>
           <a:xfrm>
-            <a:off x="2926080" y="4398264"/>
-            <a:ext cx="1188720" cy="347472"/>
+            <a:off x="3337560" y="4123944"/>
+            <a:ext cx="1234440" cy="329184"/>
           </a:xfrm>
           <a:prstGeom prst="rect">
             <a:avLst/>
@@ -6727,7 +6727,7 @@
               <a:buNone/>
             </a:pPr>
             <a:r>
-              <a:rPr lang="en-US" sz="1050" dirty="0">
+              <a:rPr lang="en-US" sz="1400" dirty="0">
                 <a:solidFill>
                   <a:srgbClr val="2C1810"/>
                 </a:solidFill>
@@ -6737,7 +6737,7 @@
               </a:rPr>
               <a:t>變格 Plagal</a:t>
             </a:r>
-            <a:endParaRPr lang="en-US" sz="1050" dirty="0"/>
+            <a:endParaRPr lang="en-US" sz="1400" dirty="0"/>
           </a:p>
         </p:txBody>
       </p:sp>
@@ -6749,8 +6749,8 @@
         </p:nvSpPr>
         <p:spPr>
           <a:xfrm>
-            <a:off x="4160520" y="4379976"/>
-            <a:ext cx="2697480" cy="384048"/>
+            <a:off x="4617720" y="4105656"/>
+            <a:ext cx="2057400" cy="365760"/>
           </a:xfrm>
           <a:prstGeom prst="rect">
             <a:avLst/>
@@ -6769,8 +6769,8 @@
         </p:nvSpPr>
         <p:spPr>
           <a:xfrm>
-            <a:off x="4206240" y="4398264"/>
-            <a:ext cx="2651760" cy="347472"/>
+            <a:off x="4663440" y="4123944"/>
+            <a:ext cx="2011680" cy="329184"/>
           </a:xfrm>
           <a:prstGeom prst="rect">
             <a:avLst/>
@@ -6786,7 +6786,7 @@
               <a:buNone/>
             </a:pPr>
             <a:r>
-              <a:rPr lang="en-US" sz="1050" dirty="0">
+              <a:rPr lang="en-US" sz="1400" dirty="0">
                 <a:solidFill>
                   <a:srgbClr val="2C1810"/>
                 </a:solidFill>
@@ -6796,7 +6796,7 @@
               </a:rPr>
               <a:t>半 全 全 | 半 全 全 半</a:t>
             </a:r>
-            <a:endParaRPr lang="en-US" sz="1050" dirty="0"/>
+            <a:endParaRPr lang="en-US" sz="1400" dirty="0"/>
           </a:p>
         </p:txBody>
       </p:sp>
@@ -6808,8 +6808,8 @@
         </p:nvSpPr>
         <p:spPr>
           <a:xfrm>
-            <a:off x="6903720" y="4379976"/>
-            <a:ext cx="1783080" cy="384048"/>
+            <a:off x="6720840" y="4105656"/>
+            <a:ext cx="1965960" cy="365760"/>
           </a:xfrm>
           <a:prstGeom prst="rect">
             <a:avLst/>
@@ -6828,8 +6828,8 @@
         </p:nvSpPr>
         <p:spPr>
           <a:xfrm>
-            <a:off x="6949440" y="4398264"/>
-            <a:ext cx="1737360" cy="347472"/>
+            <a:off x="6766560" y="4123944"/>
+            <a:ext cx="1920240" cy="329184"/>
           </a:xfrm>
           <a:prstGeom prst="rect">
             <a:avLst/>
@@ -6845,7 +6845,7 @@
               <a:buNone/>
             </a:pPr>
             <a:r>
-              <a:rPr lang="en-US" sz="1050" dirty="0">
+              <a:rPr lang="en-US" sz="1400" dirty="0">
                 <a:solidFill>
                   <a:srgbClr val="2C1810"/>
                 </a:solidFill>
@@ -6855,7 +6855,7 @@
               </a:rPr>
               <a:t>Hypomixolydian</a:t>
             </a:r>
-            <a:endParaRPr lang="en-US" sz="1050" dirty="0"/>
+            <a:endParaRPr lang="en-US" sz="1400" dirty="0"/>
           </a:p>
         </p:txBody>
       </p:sp>
@@ -6867,24 +6867,24 @@
         </p:nvSpPr>
         <p:spPr>
           <a:xfrm>
-            <a:off x="320040" y="4828032"/>
-            <a:ext cx="8503920" cy="182880"/>
-          </a:xfrm>
-          <a:prstGeom prst="rect">
-            <a:avLst/>
-          </a:prstGeom>
-          <a:noFill/>
-          <a:ln/>
-        </p:spPr>
-        <p:txBody>
-          <a:bodyPr wrap="square" rtlCol="0" anchor="ctr"/>
-          <a:lstStyle/>
-          <a:p>
-            <a:pPr indent="0" marL="0">
-              <a:buNone/>
-            </a:pPr>
-            <a:r>
-              <a:rPr lang="en-US" sz="950" i="1" dirty="0">
+            <a:off x="320040" y="4526280"/>
+            <a:ext cx="8503920" cy="457200"/>
+          </a:xfrm>
+          <a:prstGeom prst="rect">
+            <a:avLst/>
+          </a:prstGeom>
+          <a:noFill/>
+          <a:ln/>
+        </p:spPr>
+        <p:txBody>
+          <a:bodyPr wrap="square" rtlCol="0" anchor="t"/>
+          <a:lstStyle/>
+          <a:p>
+            <a:pPr indent="0" marL="0">
+              <a:buNone/>
+            </a:pPr>
+            <a:r>
+              <a:rPr lang="en-US" sz="1400" i="1" dirty="0">
                 <a:solidFill>
                   <a:srgbClr val="5C3A28"/>
                 </a:solidFill>
@@ -6892,9 +6892,26 @@
                 <a:ea typeface="Calibri" pitchFamily="34" charset="-122"/>
                 <a:cs typeface="Calibri" pitchFamily="34" charset="-120"/>
               </a:rPr>
-              <a:t>🔑 每種調式依「最終音」（final）及音域範圍區別；正格（authentic）音域從 final 上行一個八度；變格（plagal）音域跨越 final 上下</a:t>
-            </a:r>
-            <a:endParaRPr lang="en-US" sz="950" dirty="0"/>
+              <a:t>正格 (authentic)：音域從 final 上行一個八度；變格 (plagal)：音域跨越 final 上下</a:t>
+            </a:r>
+            <a:endParaRPr lang="en-US" sz="1400" dirty="0"/>
+          </a:p>
+          <a:p>
+            <a:pPr indent="0" marL="0">
+              <a:buNone/>
+            </a:pPr>
+            <a:r>
+              <a:rPr lang="en-US" sz="1400" i="1" dirty="0">
+                <a:solidFill>
+                  <a:srgbClr val="5C3A28"/>
+                </a:solidFill>
+                <a:latin typeface="Calibri" pitchFamily="34" charset="0"/>
+                <a:ea typeface="Calibri" pitchFamily="34" charset="-122"/>
+                <a:cs typeface="Calibri" pitchFamily="34" charset="-120"/>
+              </a:rPr>
+              <a:t>Authentic: range extends up an octave from final; Plagal: range spans both sides of final</a:t>
+            </a:r>
+            <a:endParaRPr lang="en-US" sz="1400" dirty="0"/>
           </a:p>
         </p:txBody>
       </p:sp>
@@ -7121,7 +7138,7 @@
                 <a:ea typeface="Georgia" pitchFamily="34" charset="-122"/>
                 <a:cs typeface="Georgia" pitchFamily="34" charset="-120"/>
               </a:rPr>
-              <a:t>🎵 唱名法 Solmization</a:t>
+              <a:t>■ 唱名法 Solmization</a:t>
             </a:r>
             <a:endParaRPr lang="en-US" sz="1600" dirty="0"/>
           </a:p>
@@ -7145,14 +7162,14 @@
           <a:ln/>
         </p:spPr>
         <p:txBody>
-          <a:bodyPr wrap="square" rtlCol="0" anchor="ctr"/>
-          <a:lstStyle/>
-          <a:p>
-            <a:pPr indent="0" marL="0">
-              <a:buNone/>
-            </a:pPr>
-            <a:r>
-              <a:rPr lang="en-US" sz="1150" dirty="0">
+          <a:bodyPr wrap="square" rtlCol="0" anchor="t"/>
+          <a:lstStyle/>
+          <a:p>
+            <a:pPr indent="0" marL="0">
+              <a:buNone/>
+            </a:pPr>
+            <a:r>
+              <a:rPr lang="en-US" sz="1400" dirty="0">
                 <a:solidFill>
                   <a:srgbClr val="E8D8A8"/>
                 </a:solidFill>
@@ -7160,16 +7177,16 @@
                 <a:ea typeface="Calibri" pitchFamily="34" charset="-122"/>
                 <a:cs typeface="Calibri" pitchFamily="34" charset="-120"/>
               </a:rPr>
-              <a:t>桂多從讚美詩《Ut queant laxis》（聖若望讚美詩）每句開頭音節命名六個音：</a:t>
-            </a:r>
-            <a:endParaRPr lang="en-US" sz="1150" dirty="0"/>
-          </a:p>
-          <a:p>
-            <a:pPr indent="0" marL="0">
-              <a:buNone/>
-            </a:pPr>
-            <a:r>
-              <a:rPr lang="en-US" sz="1150" dirty="0">
+              <a:t>桂多從讚美詩《Ut queant laxis》每句開頭音節命名六個音</a:t>
+            </a:r>
+            <a:endParaRPr lang="en-US" sz="1400" dirty="0"/>
+          </a:p>
+          <a:p>
+            <a:pPr indent="0" marL="0">
+              <a:buNone/>
+            </a:pPr>
+            <a:r>
+              <a:rPr lang="en-US" sz="1400" dirty="0">
                 <a:solidFill>
                   <a:srgbClr val="E8D8A8"/>
                 </a:solidFill>
@@ -7177,9 +7194,9 @@
                 <a:ea typeface="Calibri" pitchFamily="34" charset="-122"/>
                 <a:cs typeface="Calibri" pitchFamily="34" charset="-120"/>
               </a:rPr>
-              <a:t>Guido named six syllables from the opening notes of the hymn Ut queant laxis:</a:t>
-            </a:r>
-            <a:endParaRPr lang="en-US" sz="1150" dirty="0"/>
+              <a:t>Guido named six syllables from the hymn Ut queant laxis</a:t>
+            </a:r>
+            <a:endParaRPr lang="en-US" sz="1400" dirty="0"/>
           </a:p>
         </p:txBody>
       </p:sp>
@@ -7236,7 +7253,7 @@
                 <a:ea typeface="Georgia" pitchFamily="34" charset="-122"/>
                 <a:cs typeface="Georgia" pitchFamily="34" charset="-120"/>
               </a:rPr>
-              <a:t>ut</a:t>
+              <a:t>ut*</a:t>
             </a:r>
             <a:endParaRPr lang="en-US" sz="1800" dirty="0"/>
           </a:p>
@@ -7250,7 +7267,7 @@
         </p:nvSpPr>
         <p:spPr>
           <a:xfrm>
-            <a:off x="502920" y="2560320"/>
+            <a:off x="502920" y="2578608"/>
             <a:ext cx="621792" cy="347472"/>
           </a:xfrm>
           <a:prstGeom prst="rect">
@@ -7260,14 +7277,14 @@
           <a:ln/>
         </p:spPr>
         <p:txBody>
-          <a:bodyPr wrap="square" rtlCol="0" anchor="ctr"/>
+          <a:bodyPr wrap="square" rtlCol="0" anchor="t"/>
           <a:lstStyle/>
           <a:p>
             <a:pPr algn="ctr" indent="0" marL="0">
               <a:buNone/>
             </a:pPr>
             <a:r>
-              <a:rPr lang="en-US" sz="1000" dirty="0">
+              <a:rPr lang="en-US" sz="1400" dirty="0">
                 <a:solidFill>
                   <a:srgbClr val="FBF5E6"/>
                 </a:solidFill>
@@ -7275,9 +7292,9 @@
                 <a:ea typeface="Calibri" pitchFamily="34" charset="-122"/>
                 <a:cs typeface="Calibri" pitchFamily="34" charset="-120"/>
               </a:rPr>
-              <a:t>C（後改為 do）</a:t>
-            </a:r>
-            <a:endParaRPr lang="en-US" sz="1000" dirty="0"/>
+              <a:t>C</a:t>
+            </a:r>
+            <a:endParaRPr lang="en-US" sz="1400" dirty="0"/>
           </a:p>
         </p:txBody>
       </p:sp>
@@ -7348,7 +7365,7 @@
         </p:nvSpPr>
         <p:spPr>
           <a:xfrm>
-            <a:off x="1234440" y="2560320"/>
+            <a:off x="1234440" y="2578608"/>
             <a:ext cx="621792" cy="347472"/>
           </a:xfrm>
           <a:prstGeom prst="rect">
@@ -7358,14 +7375,14 @@
           <a:ln/>
         </p:spPr>
         <p:txBody>
-          <a:bodyPr wrap="square" rtlCol="0" anchor="ctr"/>
+          <a:bodyPr wrap="square" rtlCol="0" anchor="t"/>
           <a:lstStyle/>
           <a:p>
             <a:pPr algn="ctr" indent="0" marL="0">
               <a:buNone/>
             </a:pPr>
             <a:r>
-              <a:rPr lang="en-US" sz="1000" dirty="0">
+              <a:rPr lang="en-US" sz="1400" dirty="0">
                 <a:solidFill>
                   <a:srgbClr val="FBF5E6"/>
                 </a:solidFill>
@@ -7375,7 +7392,7 @@
               </a:rPr>
               <a:t>D</a:t>
             </a:r>
-            <a:endParaRPr lang="en-US" sz="1000" dirty="0"/>
+            <a:endParaRPr lang="en-US" sz="1400" dirty="0"/>
           </a:p>
         </p:txBody>
       </p:sp>
@@ -7446,7 +7463,7 @@
         </p:nvSpPr>
         <p:spPr>
           <a:xfrm>
-            <a:off x="1965960" y="2560320"/>
+            <a:off x="1965960" y="2578608"/>
             <a:ext cx="621792" cy="347472"/>
           </a:xfrm>
           <a:prstGeom prst="rect">
@@ -7456,14 +7473,14 @@
           <a:ln/>
         </p:spPr>
         <p:txBody>
-          <a:bodyPr wrap="square" rtlCol="0" anchor="ctr"/>
+          <a:bodyPr wrap="square" rtlCol="0" anchor="t"/>
           <a:lstStyle/>
           <a:p>
             <a:pPr algn="ctr" indent="0" marL="0">
               <a:buNone/>
             </a:pPr>
             <a:r>
-              <a:rPr lang="en-US" sz="1000" dirty="0">
+              <a:rPr lang="en-US" sz="1400" dirty="0">
                 <a:solidFill>
                   <a:srgbClr val="FBF5E6"/>
                 </a:solidFill>
@@ -7473,7 +7490,7 @@
               </a:rPr>
               <a:t>E</a:t>
             </a:r>
-            <a:endParaRPr lang="en-US" sz="1000" dirty="0"/>
+            <a:endParaRPr lang="en-US" sz="1400" dirty="0"/>
           </a:p>
         </p:txBody>
       </p:sp>
@@ -7544,7 +7561,7 @@
         </p:nvSpPr>
         <p:spPr>
           <a:xfrm>
-            <a:off x="2697480" y="2560320"/>
+            <a:off x="2697480" y="2578608"/>
             <a:ext cx="621792" cy="347472"/>
           </a:xfrm>
           <a:prstGeom prst="rect">
@@ -7554,14 +7571,14 @@
           <a:ln/>
         </p:spPr>
         <p:txBody>
-          <a:bodyPr wrap="square" rtlCol="0" anchor="ctr"/>
+          <a:bodyPr wrap="square" rtlCol="0" anchor="t"/>
           <a:lstStyle/>
           <a:p>
             <a:pPr algn="ctr" indent="0" marL="0">
               <a:buNone/>
             </a:pPr>
             <a:r>
-              <a:rPr lang="en-US" sz="1000" dirty="0">
+              <a:rPr lang="en-US" sz="1400" dirty="0">
                 <a:solidFill>
                   <a:srgbClr val="FBF5E6"/>
                 </a:solidFill>
@@ -7571,7 +7588,7 @@
               </a:rPr>
               <a:t>F</a:t>
             </a:r>
-            <a:endParaRPr lang="en-US" sz="1000" dirty="0"/>
+            <a:endParaRPr lang="en-US" sz="1400" dirty="0"/>
           </a:p>
         </p:txBody>
       </p:sp>
@@ -7642,7 +7659,7 @@
         </p:nvSpPr>
         <p:spPr>
           <a:xfrm>
-            <a:off x="3429000" y="2560320"/>
+            <a:off x="3429000" y="2578608"/>
             <a:ext cx="621792" cy="347472"/>
           </a:xfrm>
           <a:prstGeom prst="rect">
@@ -7652,14 +7669,14 @@
           <a:ln/>
         </p:spPr>
         <p:txBody>
-          <a:bodyPr wrap="square" rtlCol="0" anchor="ctr"/>
+          <a:bodyPr wrap="square" rtlCol="0" anchor="t"/>
           <a:lstStyle/>
           <a:p>
             <a:pPr algn="ctr" indent="0" marL="0">
               <a:buNone/>
             </a:pPr>
             <a:r>
-              <a:rPr lang="en-US" sz="1000" dirty="0">
+              <a:rPr lang="en-US" sz="1400" dirty="0">
                 <a:solidFill>
                   <a:srgbClr val="FBF5E6"/>
                 </a:solidFill>
@@ -7669,7 +7686,7 @@
               </a:rPr>
               <a:t>G</a:t>
             </a:r>
-            <a:endParaRPr lang="en-US" sz="1000" dirty="0"/>
+            <a:endParaRPr lang="en-US" sz="1400" dirty="0"/>
           </a:p>
         </p:txBody>
       </p:sp>
@@ -7740,7 +7757,7 @@
         </p:nvSpPr>
         <p:spPr>
           <a:xfrm>
-            <a:off x="4160520" y="2560320"/>
+            <a:off x="4160520" y="2578608"/>
             <a:ext cx="621792" cy="347472"/>
           </a:xfrm>
           <a:prstGeom prst="rect">
@@ -7750,14 +7767,14 @@
           <a:ln/>
         </p:spPr>
         <p:txBody>
-          <a:bodyPr wrap="square" rtlCol="0" anchor="ctr"/>
+          <a:bodyPr wrap="square" rtlCol="0" anchor="t"/>
           <a:lstStyle/>
           <a:p>
             <a:pPr algn="ctr" indent="0" marL="0">
               <a:buNone/>
             </a:pPr>
             <a:r>
-              <a:rPr lang="en-US" sz="1000" dirty="0">
+              <a:rPr lang="en-US" sz="1400" dirty="0">
                 <a:solidFill>
                   <a:srgbClr val="FBF5E6"/>
                 </a:solidFill>
@@ -7767,7 +7784,7 @@
               </a:rPr>
               <a:t>A</a:t>
             </a:r>
-            <a:endParaRPr lang="en-US" sz="1000" dirty="0"/>
+            <a:endParaRPr lang="en-US" sz="1400" dirty="0"/>
           </a:p>
         </p:txBody>
       </p:sp>
@@ -7779,24 +7796,24 @@
         </p:nvSpPr>
         <p:spPr>
           <a:xfrm>
-            <a:off x="411480" y="3035808"/>
-            <a:ext cx="4389120" cy="1645920"/>
-          </a:xfrm>
-          <a:prstGeom prst="rect">
-            <a:avLst/>
-          </a:prstGeom>
-          <a:noFill/>
-          <a:ln/>
-        </p:spPr>
-        <p:txBody>
-          <a:bodyPr wrap="square" rtlCol="0" anchor="ctr"/>
-          <a:lstStyle/>
-          <a:p>
-            <a:pPr indent="0" marL="0">
-              <a:buNone/>
-            </a:pPr>
-            <a:r>
-              <a:rPr lang="en-US" sz="1150" dirty="0">
+            <a:off x="411480" y="3063240"/>
+            <a:ext cx="4389120" cy="1600200"/>
+          </a:xfrm>
+          <a:prstGeom prst="rect">
+            <a:avLst/>
+          </a:prstGeom>
+          <a:noFill/>
+          <a:ln/>
+        </p:spPr>
+        <p:txBody>
+          <a:bodyPr wrap="square" rtlCol="0" anchor="t"/>
+          <a:lstStyle/>
+          <a:p>
+            <a:pPr indent="0" marL="0">
+              <a:buNone/>
+            </a:pPr>
+            <a:r>
+              <a:rPr lang="en-US" sz="1400" dirty="0">
                 <a:solidFill>
                   <a:srgbClr val="E8D8A8"/>
                 </a:solidFill>
@@ -7804,16 +7821,16 @@
                 <a:ea typeface="Calibri" pitchFamily="34" charset="-122"/>
                 <a:cs typeface="Calibri" pitchFamily="34" charset="-120"/>
               </a:rPr>
-              <a:t>唱名法的功能：幫助歌手辨識音程（全音/半音）</a:t>
-            </a:r>
-            <a:endParaRPr lang="en-US" sz="1150" dirty="0"/>
-          </a:p>
-          <a:p>
-            <a:pPr indent="0" marL="0">
-              <a:buNone/>
-            </a:pPr>
-            <a:r>
-              <a:rPr lang="en-US" sz="1150" dirty="0">
+              <a:t>* ut 後改為 do (later changed to do)</a:t>
+            </a:r>
+            <a:endParaRPr lang="en-US" sz="1400" dirty="0"/>
+          </a:p>
+          <a:p>
+            <a:pPr indent="0" marL="0">
+              <a:buNone/>
+            </a:pPr>
+            <a:r>
+              <a:rPr lang="en-US" sz="1400" dirty="0">
                 <a:solidFill>
                   <a:srgbClr val="E8D8A8"/>
                 </a:solidFill>
@@ -7821,16 +7838,16 @@
                 <a:ea typeface="Calibri" pitchFamily="34" charset="-122"/>
                 <a:cs typeface="Calibri" pitchFamily="34" charset="-120"/>
               </a:rPr>
-              <a:t>• mi → fa 之間是半音（semitone）</a:t>
-            </a:r>
-            <a:endParaRPr lang="en-US" sz="1150" dirty="0"/>
-          </a:p>
-          <a:p>
-            <a:pPr indent="0" marL="0">
-              <a:buNone/>
-            </a:pPr>
-            <a:r>
-              <a:rPr lang="en-US" sz="1150" dirty="0">
+              <a:t>唱名法的功能：幫助歌手辨識音程；mi→fa 是半音，其他相鄰音為全音</a:t>
+            </a:r>
+            <a:endParaRPr lang="en-US" sz="1400" dirty="0"/>
+          </a:p>
+          <a:p>
+            <a:pPr indent="0" marL="0">
+              <a:buNone/>
+            </a:pPr>
+            <a:r>
+              <a:rPr lang="en-US" sz="1400" dirty="0">
                 <a:solidFill>
                   <a:srgbClr val="E8D8A8"/>
                 </a:solidFill>
@@ -7838,49 +7855,9 @@
                 <a:ea typeface="Calibri" pitchFamily="34" charset="-122"/>
                 <a:cs typeface="Calibri" pitchFamily="34" charset="-120"/>
               </a:rPr>
-              <a:t>• 其他相鄰音都是全音（whole tone）</a:t>
-            </a:r>
-            <a:endParaRPr lang="en-US" sz="1150" dirty="0"/>
-          </a:p>
-          <a:p>
-            <a:pPr indent="0" marL="0">
-              <a:buNone/>
-            </a:pPr>
-            <a:r>
-              <a:rPr lang="en-US" sz="1150" dirty="0">
-                <a:solidFill>
-                  <a:srgbClr val="E8D8A8"/>
-                </a:solidFill>
-                <a:latin typeface="Calibri" pitchFamily="34" charset="0"/>
-                <a:ea typeface="Calibri" pitchFamily="34" charset="-122"/>
-                <a:cs typeface="Calibri" pitchFamily="34" charset="-120"/>
-              </a:rPr>
-              <a:t>• 這使歌手能正確演唱任何聖詠旋律</a:t>
-            </a:r>
-            <a:endParaRPr lang="en-US" sz="1150" dirty="0"/>
-          </a:p>
-          <a:p>
-            <a:pPr indent="0" marL="0">
-              <a:buNone/>
-            </a:pPr>
-            <a:endParaRPr lang="en-US" sz="1150" dirty="0"/>
-          </a:p>
-          <a:p>
-            <a:pPr indent="0" marL="0">
-              <a:buNone/>
-            </a:pPr>
-            <a:r>
-              <a:rPr lang="en-US" sz="1150" dirty="0">
-                <a:solidFill>
-                  <a:srgbClr val="E8D8A8"/>
-                </a:solidFill>
-                <a:latin typeface="Calibri" pitchFamily="34" charset="0"/>
-                <a:ea typeface="Calibri" pitchFamily="34" charset="-122"/>
-                <a:cs typeface="Calibri" pitchFamily="34" charset="-120"/>
-              </a:rPr>
-              <a:t>Solmization helped singers identify intervals: the step mi–fa is always a semitone; all others are whole tones.</a:t>
-            </a:r>
-            <a:endParaRPr lang="en-US" sz="1150" dirty="0"/>
+              <a:t>Solmization helped singers identify intervals: mi–fa is a semitone, all others are whole tones</a:t>
+            </a:r>
+            <a:endParaRPr lang="en-US" sz="1400" dirty="0"/>
           </a:p>
         </p:txBody>
       </p:sp>
@@ -7937,7 +7914,7 @@
                 <a:ea typeface="Georgia" pitchFamily="34" charset="-122"/>
                 <a:cs typeface="Georgia" pitchFamily="34" charset="-120"/>
               </a:rPr>
-              <a:t>📐 桂多的貢獻</a:t>
+              <a:t>■ 桂多的貢獻</a:t>
             </a:r>
             <a:endParaRPr lang="en-US" sz="1400" dirty="0"/>
           </a:p>
@@ -7988,8 +7965,8 @@
         </p:nvSpPr>
         <p:spPr>
           <a:xfrm>
-            <a:off x="5257800" y="1783080"/>
-            <a:ext cx="3474720" cy="274320"/>
+            <a:off x="5257800" y="1828800"/>
+            <a:ext cx="3474720" cy="292608"/>
           </a:xfrm>
           <a:prstGeom prst="rect">
             <a:avLst/>
@@ -8005,7 +7982,7 @@
               <a:buNone/>
             </a:pPr>
             <a:r>
-              <a:rPr lang="en-US" sz="1200" b="1" dirty="0">
+              <a:rPr lang="en-US" sz="1400" b="1" dirty="0">
                 <a:solidFill>
                   <a:srgbClr val="C8A020"/>
                 </a:solidFill>
@@ -8013,9 +7990,9 @@
                 <a:ea typeface="Georgia" pitchFamily="34" charset="-122"/>
                 <a:cs typeface="Georgia" pitchFamily="34" charset="-120"/>
               </a:rPr>
-              <a:t>🖊 四線譜</a:t>
-            </a:r>
-            <a:endParaRPr lang="en-US" sz="1200" dirty="0"/>
+              <a:t>■ 四線譜 Staff</a:t>
+            </a:r>
+            <a:endParaRPr lang="en-US" sz="1400" dirty="0"/>
           </a:p>
         </p:txBody>
       </p:sp>
@@ -8027,8 +8004,64 @@
         </p:nvSpPr>
         <p:spPr>
           <a:xfrm>
-            <a:off x="5257800" y="2057400"/>
-            <a:ext cx="3474720" cy="384048"/>
+            <a:off x="5257800" y="2139696"/>
+            <a:ext cx="3474720" cy="594360"/>
+          </a:xfrm>
+          <a:prstGeom prst="rect">
+            <a:avLst/>
+          </a:prstGeom>
+          <a:noFill/>
+          <a:ln/>
+        </p:spPr>
+        <p:txBody>
+          <a:bodyPr wrap="square" lIns="0" tIns="0" rIns="0" bIns="0" rtlCol="0" anchor="t"/>
+          <a:lstStyle/>
+          <a:p>
+            <a:pPr indent="0" marL="0">
+              <a:buNone/>
+            </a:pPr>
+            <a:r>
+              <a:rPr lang="en-US" sz="1400" dirty="0">
+                <a:solidFill>
+                  <a:srgbClr val="E8D8A8"/>
+                </a:solidFill>
+                <a:latin typeface="Calibri" pitchFamily="34" charset="0"/>
+                <a:ea typeface="Calibri" pitchFamily="34" charset="-122"/>
+                <a:cs typeface="Calibri" pitchFamily="34" charset="-120"/>
+              </a:rPr>
+              <a:t>發明現代五線譜前身：四線有色譜（F 線紅、C 線黃）</a:t>
+            </a:r>
+            <a:endParaRPr lang="en-US" sz="1400" dirty="0"/>
+          </a:p>
+          <a:p>
+            <a:pPr indent="0" marL="0">
+              <a:buNone/>
+            </a:pPr>
+            <a:r>
+              <a:rPr lang="en-US" sz="1400" dirty="0">
+                <a:solidFill>
+                  <a:srgbClr val="E8D8A8"/>
+                </a:solidFill>
+                <a:latin typeface="Calibri" pitchFamily="34" charset="0"/>
+                <a:ea typeface="Calibri" pitchFamily="34" charset="-122"/>
+                <a:cs typeface="Calibri" pitchFamily="34" charset="-120"/>
+              </a:rPr>
+              <a:t>Four-line staff with colored F and C clef lines</a:t>
+            </a:r>
+            <a:endParaRPr lang="en-US" sz="1400" dirty="0"/>
+          </a:p>
+        </p:txBody>
+      </p:sp>
+      <p:sp>
+        <p:nvSpPr>
+          <p:cNvPr id="34" name="Text 32"/>
+          <p:cNvSpPr/>
+          <p:nvPr/>
+        </p:nvSpPr>
+        <p:spPr>
+          <a:xfrm>
+            <a:off x="5257800" y="2788920"/>
+            <a:ext cx="3474720" cy="292608"/>
           </a:xfrm>
           <a:prstGeom prst="rect">
             <a:avLst/>
@@ -8044,63 +8077,7 @@
               <a:buNone/>
             </a:pPr>
             <a:r>
-              <a:rPr lang="en-US" sz="1050" dirty="0">
-                <a:solidFill>
-                  <a:srgbClr val="E8D8A8"/>
-                </a:solidFill>
-                <a:latin typeface="Calibri" pitchFamily="34" charset="0"/>
-                <a:ea typeface="Calibri" pitchFamily="34" charset="-122"/>
-                <a:cs typeface="Calibri" pitchFamily="34" charset="-120"/>
-              </a:rPr>
-              <a:t>發明現代五線譜前身：四線有色譜（F 線紅色，C 線黃色）</a:t>
-            </a:r>
-            <a:endParaRPr lang="en-US" sz="1050" dirty="0"/>
-          </a:p>
-          <a:p>
-            <a:pPr indent="0" marL="0">
-              <a:buNone/>
-            </a:pPr>
-            <a:r>
-              <a:rPr lang="en-US" sz="1050" dirty="0">
-                <a:solidFill>
-                  <a:srgbClr val="E8D8A8"/>
-                </a:solidFill>
-                <a:latin typeface="Calibri" pitchFamily="34" charset="0"/>
-                <a:ea typeface="Calibri" pitchFamily="34" charset="-122"/>
-                <a:cs typeface="Calibri" pitchFamily="34" charset="-120"/>
-              </a:rPr>
-              <a:t>Four-line staff with colored F and C clef lines</a:t>
-            </a:r>
-            <a:endParaRPr lang="en-US" sz="1050" dirty="0"/>
-          </a:p>
-        </p:txBody>
-      </p:sp>
-      <p:sp>
-        <p:nvSpPr>
-          <p:cNvPr id="34" name="Text 32"/>
-          <p:cNvSpPr/>
-          <p:nvPr/>
-        </p:nvSpPr>
-        <p:spPr>
-          <a:xfrm>
-            <a:off x="5257800" y="2514600"/>
-            <a:ext cx="3474720" cy="274320"/>
-          </a:xfrm>
-          <a:prstGeom prst="rect">
-            <a:avLst/>
-          </a:prstGeom>
-          <a:noFill/>
-          <a:ln/>
-        </p:spPr>
-        <p:txBody>
-          <a:bodyPr wrap="square" lIns="0" tIns="0" rIns="0" bIns="0" rtlCol="0" anchor="ctr"/>
-          <a:lstStyle/>
-          <a:p>
-            <a:pPr indent="0" marL="0">
-              <a:buNone/>
-            </a:pPr>
-            <a:r>
-              <a:rPr lang="en-US" sz="1200" b="1" dirty="0">
+              <a:rPr lang="en-US" sz="1400" b="1" dirty="0">
                 <a:solidFill>
                   <a:srgbClr val="C8A020"/>
                 </a:solidFill>
@@ -8108,9 +8085,9 @@
                 <a:ea typeface="Georgia" pitchFamily="34" charset="-122"/>
                 <a:cs typeface="Georgia" pitchFamily="34" charset="-120"/>
               </a:rPr>
-              <a:t>🔡 字母譜號</a:t>
-            </a:r>
-            <a:endParaRPr lang="en-US" sz="1200" dirty="0"/>
+              <a:t>■ 字母譜號 Clefs</a:t>
+            </a:r>
+            <a:endParaRPr lang="en-US" sz="1400" dirty="0"/>
           </a:p>
         </p:txBody>
       </p:sp>
@@ -8122,8 +8099,64 @@
         </p:nvSpPr>
         <p:spPr>
           <a:xfrm>
-            <a:off x="5257800" y="2788920"/>
-            <a:ext cx="3474720" cy="384048"/>
+            <a:off x="5257800" y="3099816"/>
+            <a:ext cx="3474720" cy="594360"/>
+          </a:xfrm>
+          <a:prstGeom prst="rect">
+            <a:avLst/>
+          </a:prstGeom>
+          <a:noFill/>
+          <a:ln/>
+        </p:spPr>
+        <p:txBody>
+          <a:bodyPr wrap="square" lIns="0" tIns="0" rIns="0" bIns="0" rtlCol="0" anchor="t"/>
+          <a:lstStyle/>
+          <a:p>
+            <a:pPr indent="0" marL="0">
+              <a:buNone/>
+            </a:pPr>
+            <a:r>
+              <a:rPr lang="en-US" sz="1400" dirty="0">
+                <a:solidFill>
+                  <a:srgbClr val="E8D8A8"/>
+                </a:solidFill>
+                <a:latin typeface="Calibri" pitchFamily="34" charset="0"/>
+                <a:ea typeface="Calibri" pitchFamily="34" charset="-122"/>
+                <a:cs typeface="Calibri" pitchFamily="34" charset="-120"/>
+              </a:rPr>
+              <a:t>制訂 A–G 音符字母系統（沿用至今）</a:t>
+            </a:r>
+            <a:endParaRPr lang="en-US" sz="1400" dirty="0"/>
+          </a:p>
+          <a:p>
+            <a:pPr indent="0" marL="0">
+              <a:buNone/>
+            </a:pPr>
+            <a:r>
+              <a:rPr lang="en-US" sz="1400" dirty="0">
+                <a:solidFill>
+                  <a:srgbClr val="E8D8A8"/>
+                </a:solidFill>
+                <a:latin typeface="Calibri" pitchFamily="34" charset="0"/>
+                <a:ea typeface="Calibri" pitchFamily="34" charset="-122"/>
+                <a:cs typeface="Calibri" pitchFamily="34" charset="-120"/>
+              </a:rPr>
+              <a:t>Developed A–G letter names for notes</a:t>
+            </a:r>
+            <a:endParaRPr lang="en-US" sz="1400" dirty="0"/>
+          </a:p>
+        </p:txBody>
+      </p:sp>
+      <p:sp>
+        <p:nvSpPr>
+          <p:cNvPr id="36" name="Text 34"/>
+          <p:cNvSpPr/>
+          <p:nvPr/>
+        </p:nvSpPr>
+        <p:spPr>
+          <a:xfrm>
+            <a:off x="5257800" y="3749040"/>
+            <a:ext cx="3474720" cy="292608"/>
           </a:xfrm>
           <a:prstGeom prst="rect">
             <a:avLst/>
@@ -8139,63 +8172,7 @@
               <a:buNone/>
             </a:pPr>
             <a:r>
-              <a:rPr lang="en-US" sz="1050" dirty="0">
-                <a:solidFill>
-                  <a:srgbClr val="E8D8A8"/>
-                </a:solidFill>
-                <a:latin typeface="Calibri" pitchFamily="34" charset="0"/>
-                <a:ea typeface="Calibri" pitchFamily="34" charset="-122"/>
-                <a:cs typeface="Calibri" pitchFamily="34" charset="-120"/>
-              </a:rPr>
-              <a:t>制訂 A–G 音符字母系統（沿用至今）</a:t>
-            </a:r>
-            <a:endParaRPr lang="en-US" sz="1050" dirty="0"/>
-          </a:p>
-          <a:p>
-            <a:pPr indent="0" marL="0">
-              <a:buNone/>
-            </a:pPr>
-            <a:r>
-              <a:rPr lang="en-US" sz="1050" dirty="0">
-                <a:solidFill>
-                  <a:srgbClr val="E8D8A8"/>
-                </a:solidFill>
-                <a:latin typeface="Calibri" pitchFamily="34" charset="0"/>
-                <a:ea typeface="Calibri" pitchFamily="34" charset="-122"/>
-                <a:cs typeface="Calibri" pitchFamily="34" charset="-120"/>
-              </a:rPr>
-              <a:t>Developed A–G letter names for notes</a:t>
-            </a:r>
-            <a:endParaRPr lang="en-US" sz="1050" dirty="0"/>
-          </a:p>
-        </p:txBody>
-      </p:sp>
-      <p:sp>
-        <p:nvSpPr>
-          <p:cNvPr id="36" name="Text 34"/>
-          <p:cNvSpPr/>
-          <p:nvPr/>
-        </p:nvSpPr>
-        <p:spPr>
-          <a:xfrm>
-            <a:off x="5257800" y="3246120"/>
-            <a:ext cx="3474720" cy="274320"/>
-          </a:xfrm>
-          <a:prstGeom prst="rect">
-            <a:avLst/>
-          </a:prstGeom>
-          <a:noFill/>
-          <a:ln/>
-        </p:spPr>
-        <p:txBody>
-          <a:bodyPr wrap="square" lIns="0" tIns="0" rIns="0" bIns="0" rtlCol="0" anchor="ctr"/>
-          <a:lstStyle/>
-          <a:p>
-            <a:pPr indent="0" marL="0">
-              <a:buNone/>
-            </a:pPr>
-            <a:r>
-              <a:rPr lang="en-US" sz="1200" b="1" dirty="0">
+              <a:rPr lang="en-US" sz="1400" b="1" dirty="0">
                 <a:solidFill>
                   <a:srgbClr val="C8A020"/>
                 </a:solidFill>
@@ -8203,9 +8180,9 @@
                 <a:ea typeface="Georgia" pitchFamily="34" charset="-122"/>
                 <a:cs typeface="Georgia" pitchFamily="34" charset="-120"/>
               </a:rPr>
-              <a:t>✋ 桂多手勢</a:t>
-            </a:r>
-            <a:endParaRPr lang="en-US" sz="1200" dirty="0"/>
+              <a:t>■ 桂多手勢 Hand</a:t>
+            </a:r>
+            <a:endParaRPr lang="en-US" sz="1400" dirty="0"/>
           </a:p>
         </p:txBody>
       </p:sp>
@@ -8217,24 +8194,24 @@
         </p:nvSpPr>
         <p:spPr>
           <a:xfrm>
-            <a:off x="5257800" y="3520440"/>
-            <a:ext cx="3474720" cy="384048"/>
-          </a:xfrm>
-          <a:prstGeom prst="rect">
-            <a:avLst/>
-          </a:prstGeom>
-          <a:noFill/>
-          <a:ln/>
-        </p:spPr>
-        <p:txBody>
-          <a:bodyPr wrap="square" lIns="0" tIns="0" rIns="0" bIns="0" rtlCol="0" anchor="ctr"/>
-          <a:lstStyle/>
-          <a:p>
-            <a:pPr indent="0" marL="0">
-              <a:buNone/>
-            </a:pPr>
-            <a:r>
-              <a:rPr lang="en-US" sz="1050" dirty="0">
+            <a:off x="5257800" y="4059936"/>
+            <a:ext cx="3474720" cy="594360"/>
+          </a:xfrm>
+          <a:prstGeom prst="rect">
+            <a:avLst/>
+          </a:prstGeom>
+          <a:noFill/>
+          <a:ln/>
+        </p:spPr>
+        <p:txBody>
+          <a:bodyPr wrap="square" lIns="0" tIns="0" rIns="0" bIns="0" rtlCol="0" anchor="t"/>
+          <a:lstStyle/>
+          <a:p>
+            <a:pPr indent="0" marL="0">
+              <a:buNone/>
+            </a:pPr>
+            <a:r>
+              <a:rPr lang="en-US" sz="1400" dirty="0">
                 <a:solidFill>
                   <a:srgbClr val="E8D8A8"/>
                 </a:solidFill>
@@ -8242,16 +8219,16 @@
                 <a:ea typeface="Calibri" pitchFamily="34" charset="-122"/>
                 <a:cs typeface="Calibri" pitchFamily="34" charset="-120"/>
               </a:rPr>
-              <a:t>以左手關節代表音符——視覺化教學工具</a:t>
-            </a:r>
-            <a:endParaRPr lang="en-US" sz="1050" dirty="0"/>
-          </a:p>
-          <a:p>
-            <a:pPr indent="0" marL="0">
-              <a:buNone/>
-            </a:pPr>
-            <a:r>
-              <a:rPr lang="en-US" sz="1050" dirty="0">
+              <a:t>以左手關節代表音符，視覺化教學工具</a:t>
+            </a:r>
+            <a:endParaRPr lang="en-US" sz="1400" dirty="0"/>
+          </a:p>
+          <a:p>
+            <a:pPr indent="0" marL="0">
+              <a:buNone/>
+            </a:pPr>
+            <a:r>
+              <a:rPr lang="en-US" sz="1400" dirty="0">
                 <a:solidFill>
                   <a:srgbClr val="E8D8A8"/>
                 </a:solidFill>
@@ -8259,104 +8236,9 @@
                 <a:ea typeface="Calibri" pitchFamily="34" charset="-122"/>
                 <a:cs typeface="Calibri" pitchFamily="34" charset="-120"/>
               </a:rPr>
-              <a:t>Guidonian hand: mnemonic device using finger joints</a:t>
-            </a:r>
-            <a:endParaRPr lang="en-US" sz="1050" dirty="0"/>
-          </a:p>
-        </p:txBody>
-      </p:sp>
-      <p:sp>
-        <p:nvSpPr>
-          <p:cNvPr id="38" name="Text 36"/>
-          <p:cNvSpPr/>
-          <p:nvPr/>
-        </p:nvSpPr>
-        <p:spPr>
-          <a:xfrm>
-            <a:off x="5257800" y="3977640"/>
-            <a:ext cx="3474720" cy="274320"/>
-          </a:xfrm>
-          <a:prstGeom prst="rect">
-            <a:avLst/>
-          </a:prstGeom>
-          <a:noFill/>
-          <a:ln/>
-        </p:spPr>
-        <p:txBody>
-          <a:bodyPr wrap="square" lIns="0" tIns="0" rIns="0" bIns="0" rtlCol="0" anchor="ctr"/>
-          <a:lstStyle/>
-          <a:p>
-            <a:pPr indent="0" marL="0">
-              <a:buNone/>
-            </a:pPr>
-            <a:r>
-              <a:rPr lang="en-US" sz="1200" b="1" dirty="0">
-                <a:solidFill>
-                  <a:srgbClr val="C8A020"/>
-                </a:solidFill>
-                <a:latin typeface="Georgia" pitchFamily="34" charset="0"/>
-                <a:ea typeface="Georgia" pitchFamily="34" charset="-122"/>
-                <a:cs typeface="Georgia" pitchFamily="34" charset="-120"/>
-              </a:rPr>
-              <a:t>⚡ 效率</a:t>
-            </a:r>
-            <a:endParaRPr lang="en-US" sz="1200" dirty="0"/>
-          </a:p>
-        </p:txBody>
-      </p:sp>
-      <p:sp>
-        <p:nvSpPr>
-          <p:cNvPr id="39" name="Text 37"/>
-          <p:cNvSpPr/>
-          <p:nvPr/>
-        </p:nvSpPr>
-        <p:spPr>
-          <a:xfrm>
-            <a:off x="5257800" y="4251960"/>
-            <a:ext cx="3474720" cy="384048"/>
-          </a:xfrm>
-          <a:prstGeom prst="rect">
-            <a:avLst/>
-          </a:prstGeom>
-          <a:noFill/>
-          <a:ln/>
-        </p:spPr>
-        <p:txBody>
-          <a:bodyPr wrap="square" lIns="0" tIns="0" rIns="0" bIns="0" rtlCol="0" anchor="ctr"/>
-          <a:lstStyle/>
-          <a:p>
-            <a:pPr indent="0" marL="0">
-              <a:buNone/>
-            </a:pPr>
-            <a:r>
-              <a:rPr lang="en-US" sz="1050" dirty="0">
-                <a:solidFill>
-                  <a:srgbClr val="E8D8A8"/>
-                </a:solidFill>
-                <a:latin typeface="Calibri" pitchFamily="34" charset="0"/>
-                <a:ea typeface="Calibri" pitchFamily="34" charset="-122"/>
-                <a:cs typeface="Calibri" pitchFamily="34" charset="-120"/>
-              </a:rPr>
-              <a:t>「一年內培養出完美的歌手」——以前需十年</a:t>
-            </a:r>
-            <a:endParaRPr lang="en-US" sz="1050" dirty="0"/>
-          </a:p>
-          <a:p>
-            <a:pPr indent="0" marL="0">
-              <a:buNone/>
-            </a:pPr>
-            <a:r>
-              <a:rPr lang="en-US" sz="1050" dirty="0">
-                <a:solidFill>
-                  <a:srgbClr val="E8D8A8"/>
-                </a:solidFill>
-                <a:latin typeface="Calibri" pitchFamily="34" charset="0"/>
-                <a:ea typeface="Calibri" pitchFamily="34" charset="-122"/>
-                <a:cs typeface="Calibri" pitchFamily="34" charset="-120"/>
-              </a:rPr>
-              <a:t>Could train singers in one year vs. ten previously</a:t>
-            </a:r>
-            <a:endParaRPr lang="en-US" sz="1050" dirty="0"/>
+              <a:t>Guidonian hand: mnemonic using finger joints</a:t>
+            </a:r>
+            <a:endParaRPr lang="en-US" sz="1400" dirty="0"/>
           </a:p>
         </p:txBody>
       </p:sp>
@@ -8499,8 +8381,8 @@
         </p:nvSpPr>
         <p:spPr>
           <a:xfrm>
-            <a:off x="274320" y="822960"/>
-            <a:ext cx="8595360" cy="603504"/>
+            <a:off x="274320" y="804672"/>
+            <a:ext cx="8595360" cy="585216"/>
           </a:xfrm>
           <a:prstGeom prst="rect">
             <a:avLst/>
@@ -8519,7 +8401,7 @@
         </p:nvSpPr>
         <p:spPr>
           <a:xfrm>
-            <a:off x="365760" y="896112"/>
+            <a:off x="365760" y="868680"/>
             <a:ext cx="502920" cy="457200"/>
           </a:xfrm>
           <a:prstGeom prst="rect">
@@ -8541,7 +8423,7 @@
                   <a:srgbClr val="000000"/>
                 </a:solidFill>
               </a:rPr>
-              <a:t>✝</a:t>
+              <a:t>■</a:t>
             </a:r>
             <a:endParaRPr lang="en-US" sz="2000" dirty="0"/>
           </a:p>
@@ -8555,8 +8437,84 @@
         </p:nvSpPr>
         <p:spPr>
           <a:xfrm>
-            <a:off x="960120" y="868680"/>
-            <a:ext cx="7772400" cy="530352"/>
+            <a:off x="960120" y="841248"/>
+            <a:ext cx="7772400" cy="512064"/>
+          </a:xfrm>
+          <a:prstGeom prst="rect">
+            <a:avLst/>
+          </a:prstGeom>
+          <a:noFill/>
+          <a:ln/>
+        </p:spPr>
+        <p:txBody>
+          <a:bodyPr wrap="square" lIns="0" tIns="0" rIns="0" bIns="0" rtlCol="0" anchor="t"/>
+          <a:lstStyle/>
+          <a:p>
+            <a:pPr indent="0" marL="0">
+              <a:buNone/>
+            </a:pPr>
+            <a:r>
+              <a:rPr lang="en-US" sz="1400" dirty="0">
+                <a:solidFill>
+                  <a:srgbClr val="E8D8A8"/>
+                </a:solidFill>
+                <a:latin typeface="Calibri" pitchFamily="34" charset="0"/>
+                <a:ea typeface="Calibri" pitchFamily="34" charset="-122"/>
+                <a:cs typeface="Calibri" pitchFamily="34" charset="-120"/>
+              </a:rPr>
+              <a:t>基督教脫胎於猶太傳統（詩篇、吟誦），在羅馬帝國中傳播，313 CE 合法化，392 CE 成為官方宗教</a:t>
+            </a:r>
+            <a:endParaRPr lang="en-US" sz="1400" dirty="0"/>
+          </a:p>
+          <a:p>
+            <a:pPr indent="0" marL="0">
+              <a:buNone/>
+            </a:pPr>
+            <a:r>
+              <a:rPr lang="en-US" sz="1400" dirty="0">
+                <a:solidFill>
+                  <a:srgbClr val="E8D8A8"/>
+                </a:solidFill>
+                <a:latin typeface="Calibri" pitchFamily="34" charset="0"/>
+                <a:ea typeface="Calibri" pitchFamily="34" charset="-122"/>
+                <a:cs typeface="Calibri" pitchFamily="34" charset="-120"/>
+              </a:rPr>
+              <a:t>Christianity grew from Jewish roots (psalms, cantillation), spread through Rome, legalized 313, official religion 392</a:t>
+            </a:r>
+            <a:endParaRPr lang="en-US" sz="1400" dirty="0"/>
+          </a:p>
+        </p:txBody>
+      </p:sp>
+      <p:sp>
+        <p:nvSpPr>
+          <p:cNvPr id="9" name="Shape 7"/>
+          <p:cNvSpPr/>
+          <p:nvPr/>
+        </p:nvSpPr>
+        <p:spPr>
+          <a:xfrm>
+            <a:off x="274320" y="1481328"/>
+            <a:ext cx="8595360" cy="585216"/>
+          </a:xfrm>
+          <a:prstGeom prst="rect">
+            <a:avLst/>
+          </a:prstGeom>
+          <a:solidFill>
+            <a:srgbClr val="3A2015"/>
+          </a:solidFill>
+          <a:ln/>
+        </p:spPr>
+      </p:sp>
+      <p:sp>
+        <p:nvSpPr>
+          <p:cNvPr id="10" name="Text 8"/>
+          <p:cNvSpPr/>
+          <p:nvPr/>
+        </p:nvSpPr>
+        <p:spPr>
+          <a:xfrm>
+            <a:off x="365760" y="1545336"/>
+            <a:ext cx="502920" cy="457200"/>
           </a:xfrm>
           <a:prstGeom prst="rect">
             <a:avLst/>
@@ -8568,11 +8526,47 @@
           <a:bodyPr wrap="square" lIns="0" tIns="0" rIns="0" bIns="0" rtlCol="0" anchor="ctr"/>
           <a:lstStyle/>
           <a:p>
-            <a:pPr indent="0" marL="0">
-              <a:buNone/>
-            </a:pPr>
-            <a:r>
-              <a:rPr lang="en-US" sz="1150" dirty="0">
+            <a:pPr algn="ctr" indent="0" marL="0">
+              <a:buNone/>
+            </a:pPr>
+            <a:r>
+              <a:rPr lang="en-US" sz="2000" dirty="0">
+                <a:solidFill>
+                  <a:srgbClr val="000000"/>
+                </a:solidFill>
+              </a:rPr>
+              <a:t>■</a:t>
+            </a:r>
+            <a:endParaRPr lang="en-US" sz="2000" dirty="0"/>
+          </a:p>
+        </p:txBody>
+      </p:sp>
+      <p:sp>
+        <p:nvSpPr>
+          <p:cNvPr id="11" name="Text 9"/>
+          <p:cNvSpPr/>
+          <p:nvPr/>
+        </p:nvSpPr>
+        <p:spPr>
+          <a:xfrm>
+            <a:off x="960120" y="1517904"/>
+            <a:ext cx="7772400" cy="512064"/>
+          </a:xfrm>
+          <a:prstGeom prst="rect">
+            <a:avLst/>
+          </a:prstGeom>
+          <a:noFill/>
+          <a:ln/>
+        </p:spPr>
+        <p:txBody>
+          <a:bodyPr wrap="square" lIns="0" tIns="0" rIns="0" bIns="0" rtlCol="0" anchor="t"/>
+          <a:lstStyle/>
+          <a:p>
+            <a:pPr indent="0" marL="0">
+              <a:buNone/>
+            </a:pPr>
+            <a:r>
+              <a:rPr lang="en-US" sz="1400" dirty="0">
                 <a:solidFill>
                   <a:srgbClr val="E8D8A8"/>
                 </a:solidFill>
@@ -8580,16 +8574,16 @@
                 <a:ea typeface="Calibri" pitchFamily="34" charset="-122"/>
                 <a:cs typeface="Calibri" pitchFamily="34" charset="-120"/>
               </a:rPr>
-              <a:t>基督教脫胎於猶太傳統（詩篇、吟誦），在羅馬帝國中傳播，313 CE 合法化，392 CE 成為官方宗教</a:t>
-            </a:r>
-            <a:endParaRPr lang="en-US" sz="1150" dirty="0"/>
-          </a:p>
-          <a:p>
-            <a:pPr indent="0" marL="0">
-              <a:buNone/>
-            </a:pPr>
-            <a:r>
-              <a:rPr lang="en-US" sz="1150" dirty="0">
+              <a:t>早期教會以單聲部演唱為主；樂器被排除在禮拜之外超過一千年</a:t>
+            </a:r>
+            <a:endParaRPr lang="en-US" sz="1400" dirty="0"/>
+          </a:p>
+          <a:p>
+            <a:pPr indent="0" marL="0">
+              <a:buNone/>
+            </a:pPr>
+            <a:r>
+              <a:rPr lang="en-US" sz="1400" dirty="0">
                 <a:solidFill>
                   <a:srgbClr val="E8D8A8"/>
                 </a:solidFill>
@@ -8597,22 +8591,22 @@
                 <a:ea typeface="Calibri" pitchFamily="34" charset="-122"/>
                 <a:cs typeface="Calibri" pitchFamily="34" charset="-120"/>
               </a:rPr>
-              <a:t>Christianity grew from Jewish roots (psalms, cantillation), spread through Rome, legalized 313, official religion 392</a:t>
-            </a:r>
-            <a:endParaRPr lang="en-US" sz="1150" dirty="0"/>
-          </a:p>
-        </p:txBody>
-      </p:sp>
-      <p:sp>
-        <p:nvSpPr>
-          <p:cNvPr id="9" name="Shape 7"/>
-          <p:cNvSpPr/>
-          <p:nvPr/>
-        </p:nvSpPr>
-        <p:spPr>
-          <a:xfrm>
-            <a:off x="274320" y="1527048"/>
-            <a:ext cx="8595360" cy="603504"/>
+              <a:t>Early church favored monophonic singing; instruments excluded from worship for over a millennium</a:t>
+            </a:r>
+            <a:endParaRPr lang="en-US" sz="1400" dirty="0"/>
+          </a:p>
+        </p:txBody>
+      </p:sp>
+      <p:sp>
+        <p:nvSpPr>
+          <p:cNvPr id="12" name="Shape 10"/>
+          <p:cNvSpPr/>
+          <p:nvPr/>
+        </p:nvSpPr>
+        <p:spPr>
+          <a:xfrm>
+            <a:off x="274320" y="2157984"/>
+            <a:ext cx="8595360" cy="585216"/>
           </a:xfrm>
           <a:prstGeom prst="rect">
             <a:avLst/>
@@ -8625,13 +8619,13 @@
       </p:sp>
       <p:sp>
         <p:nvSpPr>
-          <p:cNvPr id="10" name="Text 8"/>
-          <p:cNvSpPr/>
-          <p:nvPr/>
-        </p:nvSpPr>
-        <p:spPr>
-          <a:xfrm>
-            <a:off x="365760" y="1600200"/>
+          <p:cNvPr id="13" name="Text 11"/>
+          <p:cNvSpPr/>
+          <p:nvPr/>
+        </p:nvSpPr>
+        <p:spPr>
+          <a:xfrm>
+            <a:off x="365760" y="2221992"/>
             <a:ext cx="502920" cy="457200"/>
           </a:xfrm>
           <a:prstGeom prst="rect">
@@ -8653,7 +8647,7 @@
                   <a:srgbClr val="000000"/>
                 </a:solidFill>
               </a:rPr>
-              <a:t>🎵</a:t>
+              <a:t>■</a:t>
             </a:r>
             <a:endParaRPr lang="en-US" sz="2000" dirty="0"/>
           </a:p>
@@ -8661,14 +8655,90 @@
       </p:sp>
       <p:sp>
         <p:nvSpPr>
-          <p:cNvPr id="11" name="Text 9"/>
-          <p:cNvSpPr/>
-          <p:nvPr/>
-        </p:nvSpPr>
-        <p:spPr>
-          <a:xfrm>
-            <a:off x="960120" y="1572768"/>
-            <a:ext cx="7772400" cy="530352"/>
+          <p:cNvPr id="14" name="Text 12"/>
+          <p:cNvSpPr/>
+          <p:nvPr/>
+        </p:nvSpPr>
+        <p:spPr>
+          <a:xfrm>
+            <a:off x="960120" y="2194560"/>
+            <a:ext cx="7772400" cy="512064"/>
+          </a:xfrm>
+          <a:prstGeom prst="rect">
+            <a:avLst/>
+          </a:prstGeom>
+          <a:noFill/>
+          <a:ln/>
+        </p:spPr>
+        <p:txBody>
+          <a:bodyPr wrap="square" lIns="0" tIns="0" rIns="0" bIns="0" rtlCol="0" anchor="t"/>
+          <a:lstStyle/>
+          <a:p>
+            <a:pPr indent="0" marL="0">
+              <a:buNone/>
+            </a:pPr>
+            <a:r>
+              <a:rPr lang="en-US" sz="1400" dirty="0">
+                <a:solidFill>
+                  <a:srgbClr val="E8D8A8"/>
+                </a:solidFill>
+                <a:latin typeface="Calibri" pitchFamily="34" charset="0"/>
+                <a:ea typeface="Calibri" pitchFamily="34" charset="-122"/>
+                <a:cs typeface="Calibri" pitchFamily="34" charset="-120"/>
+              </a:rPr>
+              <a:t>東西方教會在儀式、語言（希臘文 vs. 拉丁文）、聖詠方言上逐漸分歧；1054 正式分裂</a:t>
+            </a:r>
+            <a:endParaRPr lang="en-US" sz="1400" dirty="0"/>
+          </a:p>
+          <a:p>
+            <a:pPr indent="0" marL="0">
+              <a:buNone/>
+            </a:pPr>
+            <a:r>
+              <a:rPr lang="en-US" sz="1400" dirty="0">
+                <a:solidFill>
+                  <a:srgbClr val="E8D8A8"/>
+                </a:solidFill>
+                <a:latin typeface="Calibri" pitchFamily="34" charset="0"/>
+                <a:ea typeface="Calibri" pitchFamily="34" charset="-122"/>
+                <a:cs typeface="Calibri" pitchFamily="34" charset="-120"/>
+              </a:rPr>
+              <a:t>Eastern and Western churches diverged in rite, language, and chant dialects; final split 1054</a:t>
+            </a:r>
+            <a:endParaRPr lang="en-US" sz="1400" dirty="0"/>
+          </a:p>
+        </p:txBody>
+      </p:sp>
+      <p:sp>
+        <p:nvSpPr>
+          <p:cNvPr id="15" name="Shape 13"/>
+          <p:cNvSpPr/>
+          <p:nvPr/>
+        </p:nvSpPr>
+        <p:spPr>
+          <a:xfrm>
+            <a:off x="274320" y="2834640"/>
+            <a:ext cx="8595360" cy="585216"/>
+          </a:xfrm>
+          <a:prstGeom prst="rect">
+            <a:avLst/>
+          </a:prstGeom>
+          <a:solidFill>
+            <a:srgbClr val="3A2015"/>
+          </a:solidFill>
+          <a:ln/>
+        </p:spPr>
+      </p:sp>
+      <p:sp>
+        <p:nvSpPr>
+          <p:cNvPr id="16" name="Text 14"/>
+          <p:cNvSpPr/>
+          <p:nvPr/>
+        </p:nvSpPr>
+        <p:spPr>
+          <a:xfrm>
+            <a:off x="365760" y="2898648"/>
+            <a:ext cx="502920" cy="457200"/>
           </a:xfrm>
           <a:prstGeom prst="rect">
             <a:avLst/>
@@ -8680,11 +8750,47 @@
           <a:bodyPr wrap="square" lIns="0" tIns="0" rIns="0" bIns="0" rtlCol="0" anchor="ctr"/>
           <a:lstStyle/>
           <a:p>
-            <a:pPr indent="0" marL="0">
-              <a:buNone/>
-            </a:pPr>
-            <a:r>
-              <a:rPr lang="en-US" sz="1150" dirty="0">
+            <a:pPr algn="ctr" indent="0" marL="0">
+              <a:buNone/>
+            </a:pPr>
+            <a:r>
+              <a:rPr lang="en-US" sz="2000" dirty="0">
+                <a:solidFill>
+                  <a:srgbClr val="000000"/>
+                </a:solidFill>
+              </a:rPr>
+              <a:t>■</a:t>
+            </a:r>
+            <a:endParaRPr lang="en-US" sz="2000" dirty="0"/>
+          </a:p>
+        </p:txBody>
+      </p:sp>
+      <p:sp>
+        <p:nvSpPr>
+          <p:cNvPr id="17" name="Text 15"/>
+          <p:cNvSpPr/>
+          <p:nvPr/>
+        </p:nvSpPr>
+        <p:spPr>
+          <a:xfrm>
+            <a:off x="960120" y="2871216"/>
+            <a:ext cx="7772400" cy="512064"/>
+          </a:xfrm>
+          <a:prstGeom prst="rect">
+            <a:avLst/>
+          </a:prstGeom>
+          <a:noFill/>
+          <a:ln/>
+        </p:spPr>
+        <p:txBody>
+          <a:bodyPr wrap="square" lIns="0" tIns="0" rIns="0" bIns="0" rtlCol="0" anchor="t"/>
+          <a:lstStyle/>
+          <a:p>
+            <a:pPr indent="0" marL="0">
+              <a:buNone/>
+            </a:pPr>
+            <a:r>
+              <a:rPr lang="en-US" sz="1400" dirty="0">
                 <a:solidFill>
                   <a:srgbClr val="E8D8A8"/>
                 </a:solidFill>
@@ -8692,16 +8798,16 @@
                 <a:ea typeface="Calibri" pitchFamily="34" charset="-122"/>
                 <a:cs typeface="Calibri" pitchFamily="34" charset="-120"/>
               </a:rPr>
-              <a:t>早期教會以單聲部演唱為主；樂器被排除在禮拜之外超過一千年</a:t>
-            </a:r>
-            <a:endParaRPr lang="en-US" sz="1150" dirty="0"/>
-          </a:p>
-          <a:p>
-            <a:pPr indent="0" marL="0">
-              <a:buNone/>
-            </a:pPr>
-            <a:r>
-              <a:rPr lang="en-US" sz="1150" dirty="0">
+              <a:t>格里高利聖詠在法蘭克王國支持下統一西歐禮拜音樂，成為西方音樂最重要的基礎</a:t>
+            </a:r>
+            <a:endParaRPr lang="en-US" sz="1400" dirty="0"/>
+          </a:p>
+          <a:p>
+            <a:pPr indent="0" marL="0">
+              <a:buNone/>
+            </a:pPr>
+            <a:r>
+              <a:rPr lang="en-US" sz="1400" dirty="0">
                 <a:solidFill>
                   <a:srgbClr val="E8D8A8"/>
                 </a:solidFill>
@@ -8709,22 +8815,22 @@
                 <a:ea typeface="Calibri" pitchFamily="34" charset="-122"/>
                 <a:cs typeface="Calibri" pitchFamily="34" charset="-120"/>
               </a:rPr>
-              <a:t>Early church favored monophonic singing; instruments excluded from worship for over a millennium</a:t>
-            </a:r>
-            <a:endParaRPr lang="en-US" sz="1150" dirty="0"/>
-          </a:p>
-        </p:txBody>
-      </p:sp>
-      <p:sp>
-        <p:nvSpPr>
-          <p:cNvPr id="12" name="Shape 10"/>
-          <p:cNvSpPr/>
-          <p:nvPr/>
-        </p:nvSpPr>
-        <p:spPr>
-          <a:xfrm>
-            <a:off x="274320" y="2231136"/>
-            <a:ext cx="8595360" cy="603504"/>
+              <a:t>Gregorian chant unified Western church music with Frankish support; became the foundation of Western music</a:t>
+            </a:r>
+            <a:endParaRPr lang="en-US" sz="1400" dirty="0"/>
+          </a:p>
+        </p:txBody>
+      </p:sp>
+      <p:sp>
+        <p:nvSpPr>
+          <p:cNvPr id="18" name="Shape 16"/>
+          <p:cNvSpPr/>
+          <p:nvPr/>
+        </p:nvSpPr>
+        <p:spPr>
+          <a:xfrm>
+            <a:off x="274320" y="3511296"/>
+            <a:ext cx="8595360" cy="585216"/>
           </a:xfrm>
           <a:prstGeom prst="rect">
             <a:avLst/>
@@ -8737,13 +8843,13 @@
       </p:sp>
       <p:sp>
         <p:nvSpPr>
-          <p:cNvPr id="13" name="Text 11"/>
-          <p:cNvSpPr/>
-          <p:nvPr/>
-        </p:nvSpPr>
-        <p:spPr>
-          <a:xfrm>
-            <a:off x="365760" y="2304288"/>
+          <p:cNvPr id="19" name="Text 17"/>
+          <p:cNvSpPr/>
+          <p:nvPr/>
+        </p:nvSpPr>
+        <p:spPr>
+          <a:xfrm>
+            <a:off x="365760" y="3575304"/>
             <a:ext cx="502920" cy="457200"/>
           </a:xfrm>
           <a:prstGeom prst="rect">
@@ -8765,7 +8871,7 @@
                   <a:srgbClr val="000000"/>
                 </a:solidFill>
               </a:rPr>
-              <a:t>🗺</a:t>
+              <a:t>■</a:t>
             </a:r>
             <a:endParaRPr lang="en-US" sz="2000" dirty="0"/>
           </a:p>
@@ -8773,14 +8879,90 @@
       </p:sp>
       <p:sp>
         <p:nvSpPr>
-          <p:cNvPr id="14" name="Text 12"/>
-          <p:cNvSpPr/>
-          <p:nvPr/>
-        </p:nvSpPr>
-        <p:spPr>
-          <a:xfrm>
-            <a:off x="960120" y="2276856"/>
-            <a:ext cx="7772400" cy="530352"/>
+          <p:cNvPr id="20" name="Text 18"/>
+          <p:cNvSpPr/>
+          <p:nvPr/>
+        </p:nvSpPr>
+        <p:spPr>
+          <a:xfrm>
+            <a:off x="960120" y="3547872"/>
+            <a:ext cx="7772400" cy="512064"/>
+          </a:xfrm>
+          <a:prstGeom prst="rect">
+            <a:avLst/>
+          </a:prstGeom>
+          <a:noFill/>
+          <a:ln/>
+        </p:spPr>
+        <p:txBody>
+          <a:bodyPr wrap="square" lIns="0" tIns="0" rIns="0" bIns="0" rtlCol="0" anchor="t"/>
+          <a:lstStyle/>
+          <a:p>
+            <a:pPr indent="0" marL="0">
+              <a:buNone/>
+            </a:pPr>
+            <a:r>
+              <a:rPr lang="en-US" sz="1400" dirty="0">
+                <a:solidFill>
+                  <a:srgbClr val="E8D8A8"/>
+                </a:solidFill>
+                <a:latin typeface="Calibri" pitchFamily="34" charset="0"/>
+                <a:ea typeface="Calibri" pitchFamily="34" charset="-122"/>
+                <a:cs typeface="Calibri" pitchFamily="34" charset="-120"/>
+              </a:rPr>
+              <a:t>記譜法從口傳→紐姆→有高度紐姆→四線譜；桂多的發明使音樂可以「視唱」</a:t>
+            </a:r>
+            <a:endParaRPr lang="en-US" sz="1400" dirty="0"/>
+          </a:p>
+          <a:p>
+            <a:pPr indent="0" marL="0">
+              <a:buNone/>
+            </a:pPr>
+            <a:r>
+              <a:rPr lang="en-US" sz="1400" dirty="0">
+                <a:solidFill>
+                  <a:srgbClr val="E8D8A8"/>
+                </a:solidFill>
+                <a:latin typeface="Calibri" pitchFamily="34" charset="0"/>
+                <a:ea typeface="Calibri" pitchFamily="34" charset="-122"/>
+                <a:cs typeface="Calibri" pitchFamily="34" charset="-120"/>
+              </a:rPr>
+              <a:t>Notation evolved from oral→neumes→heighted neumes→Guido's 4-line staff; sight-reading became possible</a:t>
+            </a:r>
+            <a:endParaRPr lang="en-US" sz="1400" dirty="0"/>
+          </a:p>
+        </p:txBody>
+      </p:sp>
+      <p:sp>
+        <p:nvSpPr>
+          <p:cNvPr id="21" name="Shape 19"/>
+          <p:cNvSpPr/>
+          <p:nvPr/>
+        </p:nvSpPr>
+        <p:spPr>
+          <a:xfrm>
+            <a:off x="274320" y="4187952"/>
+            <a:ext cx="8595360" cy="585216"/>
+          </a:xfrm>
+          <a:prstGeom prst="rect">
+            <a:avLst/>
+          </a:prstGeom>
+          <a:solidFill>
+            <a:srgbClr val="3A2015"/>
+          </a:solidFill>
+          <a:ln/>
+        </p:spPr>
+      </p:sp>
+      <p:sp>
+        <p:nvSpPr>
+          <p:cNvPr id="22" name="Text 20"/>
+          <p:cNvSpPr/>
+          <p:nvPr/>
+        </p:nvSpPr>
+        <p:spPr>
+          <a:xfrm>
+            <a:off x="365760" y="4251960"/>
+            <a:ext cx="502920" cy="457200"/>
           </a:xfrm>
           <a:prstGeom prst="rect">
             <a:avLst/>
@@ -8792,11 +8974,47 @@
           <a:bodyPr wrap="square" lIns="0" tIns="0" rIns="0" bIns="0" rtlCol="0" anchor="ctr"/>
           <a:lstStyle/>
           <a:p>
-            <a:pPr indent="0" marL="0">
-              <a:buNone/>
-            </a:pPr>
-            <a:r>
-              <a:rPr lang="en-US" sz="1150" dirty="0">
+            <a:pPr algn="ctr" indent="0" marL="0">
+              <a:buNone/>
+            </a:pPr>
+            <a:r>
+              <a:rPr lang="en-US" sz="2000" dirty="0">
+                <a:solidFill>
+                  <a:srgbClr val="000000"/>
+                </a:solidFill>
+              </a:rPr>
+              <a:t>■</a:t>
+            </a:r>
+            <a:endParaRPr lang="en-US" sz="2000" dirty="0"/>
+          </a:p>
+        </p:txBody>
+      </p:sp>
+      <p:sp>
+        <p:nvSpPr>
+          <p:cNvPr id="23" name="Text 21"/>
+          <p:cNvSpPr/>
+          <p:nvPr/>
+        </p:nvSpPr>
+        <p:spPr>
+          <a:xfrm>
+            <a:off x="960120" y="4224528"/>
+            <a:ext cx="7772400" cy="512064"/>
+          </a:xfrm>
+          <a:prstGeom prst="rect">
+            <a:avLst/>
+          </a:prstGeom>
+          <a:noFill/>
+          <a:ln/>
+        </p:spPr>
+        <p:txBody>
+          <a:bodyPr wrap="square" lIns="0" tIns="0" rIns="0" bIns="0" rtlCol="0" anchor="t"/>
+          <a:lstStyle/>
+          <a:p>
+            <a:pPr indent="0" marL="0">
+              <a:buNone/>
+            </a:pPr>
+            <a:r>
+              <a:rPr lang="en-US" sz="1400" dirty="0">
                 <a:solidFill>
                   <a:srgbClr val="E8D8A8"/>
                 </a:solidFill>
@@ -8804,16 +9022,16 @@
                 <a:ea typeface="Calibri" pitchFamily="34" charset="-122"/>
                 <a:cs typeface="Calibri" pitchFamily="34" charset="-120"/>
               </a:rPr>
-              <a:t>東西方教會在儀式、語言（希臘文 vs. 拉丁文）、聖詠方言上逐漸分歧；1054 正式分裂</a:t>
-            </a:r>
-            <a:endParaRPr lang="en-US" sz="1150" dirty="0"/>
-          </a:p>
-          <a:p>
-            <a:pPr indent="0" marL="0">
-              <a:buNone/>
-            </a:pPr>
-            <a:r>
-              <a:rPr lang="en-US" sz="1150" dirty="0">
+              <a:t>波愛修斯的三種音樂分類與教會八種調式奠定了中世紀音樂理論的基礎，影響延續到文藝復興</a:t>
+            </a:r>
+            <a:endParaRPr lang="en-US" sz="1400" dirty="0"/>
+          </a:p>
+          <a:p>
+            <a:pPr indent="0" marL="0">
+              <a:buNone/>
+            </a:pPr>
+            <a:r>
+              <a:rPr lang="en-US" sz="1400" dirty="0">
                 <a:solidFill>
                   <a:srgbClr val="E8D8A8"/>
                 </a:solidFill>
@@ -8821,345 +9039,9 @@
                 <a:ea typeface="Calibri" pitchFamily="34" charset="-122"/>
                 <a:cs typeface="Calibri" pitchFamily="34" charset="-120"/>
               </a:rPr>
-              <a:t>Eastern and Western churches diverged in rite, language, and chant dialects; final split 1054</a:t>
-            </a:r>
-            <a:endParaRPr lang="en-US" sz="1150" dirty="0"/>
-          </a:p>
-        </p:txBody>
-      </p:sp>
-      <p:sp>
-        <p:nvSpPr>
-          <p:cNvPr id="15" name="Shape 13"/>
-          <p:cNvSpPr/>
-          <p:nvPr/>
-        </p:nvSpPr>
-        <p:spPr>
-          <a:xfrm>
-            <a:off x="274320" y="2935224"/>
-            <a:ext cx="8595360" cy="603504"/>
-          </a:xfrm>
-          <a:prstGeom prst="rect">
-            <a:avLst/>
-          </a:prstGeom>
-          <a:solidFill>
-            <a:srgbClr val="3A2015"/>
-          </a:solidFill>
-          <a:ln/>
-        </p:spPr>
-      </p:sp>
-      <p:sp>
-        <p:nvSpPr>
-          <p:cNvPr id="16" name="Text 14"/>
-          <p:cNvSpPr/>
-          <p:nvPr/>
-        </p:nvSpPr>
-        <p:spPr>
-          <a:xfrm>
-            <a:off x="365760" y="3008376"/>
-            <a:ext cx="502920" cy="457200"/>
-          </a:xfrm>
-          <a:prstGeom prst="rect">
-            <a:avLst/>
-          </a:prstGeom>
-          <a:noFill/>
-          <a:ln/>
-        </p:spPr>
-        <p:txBody>
-          <a:bodyPr wrap="square" lIns="0" tIns="0" rIns="0" bIns="0" rtlCol="0" anchor="ctr"/>
-          <a:lstStyle/>
-          <a:p>
-            <a:pPr algn="ctr" indent="0" marL="0">
-              <a:buNone/>
-            </a:pPr>
-            <a:r>
-              <a:rPr lang="en-US" sz="2000" dirty="0">
-                <a:solidFill>
-                  <a:srgbClr val="000000"/>
-                </a:solidFill>
-              </a:rPr>
-              <a:t>🎶</a:t>
-            </a:r>
-            <a:endParaRPr lang="en-US" sz="2000" dirty="0"/>
-          </a:p>
-        </p:txBody>
-      </p:sp>
-      <p:sp>
-        <p:nvSpPr>
-          <p:cNvPr id="17" name="Text 15"/>
-          <p:cNvSpPr/>
-          <p:nvPr/>
-        </p:nvSpPr>
-        <p:spPr>
-          <a:xfrm>
-            <a:off x="960120" y="2980944"/>
-            <a:ext cx="7772400" cy="530352"/>
-          </a:xfrm>
-          <a:prstGeom prst="rect">
-            <a:avLst/>
-          </a:prstGeom>
-          <a:noFill/>
-          <a:ln/>
-        </p:spPr>
-        <p:txBody>
-          <a:bodyPr wrap="square" lIns="0" tIns="0" rIns="0" bIns="0" rtlCol="0" anchor="ctr"/>
-          <a:lstStyle/>
-          <a:p>
-            <a:pPr indent="0" marL="0">
-              <a:buNone/>
-            </a:pPr>
-            <a:r>
-              <a:rPr lang="en-US" sz="1150" dirty="0">
-                <a:solidFill>
-                  <a:srgbClr val="E8D8A8"/>
-                </a:solidFill>
-                <a:latin typeface="Calibri" pitchFamily="34" charset="0"/>
-                <a:ea typeface="Calibri" pitchFamily="34" charset="-122"/>
-                <a:cs typeface="Calibri" pitchFamily="34" charset="-120"/>
-              </a:rPr>
-              <a:t>格里高利聖詠在法蘭克王國支持下統一西歐禮拜音樂，成為西方音樂最重要的基礎</a:t>
-            </a:r>
-            <a:endParaRPr lang="en-US" sz="1150" dirty="0"/>
-          </a:p>
-          <a:p>
-            <a:pPr indent="0" marL="0">
-              <a:buNone/>
-            </a:pPr>
-            <a:r>
-              <a:rPr lang="en-US" sz="1150" dirty="0">
-                <a:solidFill>
-                  <a:srgbClr val="E8D8A8"/>
-                </a:solidFill>
-                <a:latin typeface="Calibri" pitchFamily="34" charset="0"/>
-                <a:ea typeface="Calibri" pitchFamily="34" charset="-122"/>
-                <a:cs typeface="Calibri" pitchFamily="34" charset="-120"/>
-              </a:rPr>
-              <a:t>Gregorian chant unified Western church music with Frankish support; became the foundation of Western music</a:t>
-            </a:r>
-            <a:endParaRPr lang="en-US" sz="1150" dirty="0"/>
-          </a:p>
-        </p:txBody>
-      </p:sp>
-      <p:sp>
-        <p:nvSpPr>
-          <p:cNvPr id="18" name="Shape 16"/>
-          <p:cNvSpPr/>
-          <p:nvPr/>
-        </p:nvSpPr>
-        <p:spPr>
-          <a:xfrm>
-            <a:off x="274320" y="3639312"/>
-            <a:ext cx="8595360" cy="603504"/>
-          </a:xfrm>
-          <a:prstGeom prst="rect">
-            <a:avLst/>
-          </a:prstGeom>
-          <a:solidFill>
-            <a:srgbClr val="3A2015"/>
-          </a:solidFill>
-          <a:ln/>
-        </p:spPr>
-      </p:sp>
-      <p:sp>
-        <p:nvSpPr>
-          <p:cNvPr id="19" name="Text 17"/>
-          <p:cNvSpPr/>
-          <p:nvPr/>
-        </p:nvSpPr>
-        <p:spPr>
-          <a:xfrm>
-            <a:off x="365760" y="3712464"/>
-            <a:ext cx="502920" cy="457200"/>
-          </a:xfrm>
-          <a:prstGeom prst="rect">
-            <a:avLst/>
-          </a:prstGeom>
-          <a:noFill/>
-          <a:ln/>
-        </p:spPr>
-        <p:txBody>
-          <a:bodyPr wrap="square" lIns="0" tIns="0" rIns="0" bIns="0" rtlCol="0" anchor="ctr"/>
-          <a:lstStyle/>
-          <a:p>
-            <a:pPr algn="ctr" indent="0" marL="0">
-              <a:buNone/>
-            </a:pPr>
-            <a:r>
-              <a:rPr lang="en-US" sz="2000" dirty="0">
-                <a:solidFill>
-                  <a:srgbClr val="000000"/>
-                </a:solidFill>
-              </a:rPr>
-              <a:t>🖊</a:t>
-            </a:r>
-            <a:endParaRPr lang="en-US" sz="2000" dirty="0"/>
-          </a:p>
-        </p:txBody>
-      </p:sp>
-      <p:sp>
-        <p:nvSpPr>
-          <p:cNvPr id="20" name="Text 18"/>
-          <p:cNvSpPr/>
-          <p:nvPr/>
-        </p:nvSpPr>
-        <p:spPr>
-          <a:xfrm>
-            <a:off x="960120" y="3685032"/>
-            <a:ext cx="7772400" cy="530352"/>
-          </a:xfrm>
-          <a:prstGeom prst="rect">
-            <a:avLst/>
-          </a:prstGeom>
-          <a:noFill/>
-          <a:ln/>
-        </p:spPr>
-        <p:txBody>
-          <a:bodyPr wrap="square" lIns="0" tIns="0" rIns="0" bIns="0" rtlCol="0" anchor="ctr"/>
-          <a:lstStyle/>
-          <a:p>
-            <a:pPr indent="0" marL="0">
-              <a:buNone/>
-            </a:pPr>
-            <a:r>
-              <a:rPr lang="en-US" sz="1150" dirty="0">
-                <a:solidFill>
-                  <a:srgbClr val="E8D8A8"/>
-                </a:solidFill>
-                <a:latin typeface="Calibri" pitchFamily="34" charset="0"/>
-                <a:ea typeface="Calibri" pitchFamily="34" charset="-122"/>
-                <a:cs typeface="Calibri" pitchFamily="34" charset="-120"/>
-              </a:rPr>
-              <a:t>記譜法從口傳→紐姆→有高度紐姆→四線譜；桂多的發明使音樂可以「視唱」</a:t>
-            </a:r>
-            <a:endParaRPr lang="en-US" sz="1150" dirty="0"/>
-          </a:p>
-          <a:p>
-            <a:pPr indent="0" marL="0">
-              <a:buNone/>
-            </a:pPr>
-            <a:r>
-              <a:rPr lang="en-US" sz="1150" dirty="0">
-                <a:solidFill>
-                  <a:srgbClr val="E8D8A8"/>
-                </a:solidFill>
-                <a:latin typeface="Calibri" pitchFamily="34" charset="0"/>
-                <a:ea typeface="Calibri" pitchFamily="34" charset="-122"/>
-                <a:cs typeface="Calibri" pitchFamily="34" charset="-120"/>
-              </a:rPr>
-              <a:t>Notation evolved from oral→neumes→heighted neumes→Guido's 4-line staff; sight-reading became possible</a:t>
-            </a:r>
-            <a:endParaRPr lang="en-US" sz="1150" dirty="0"/>
-          </a:p>
-        </p:txBody>
-      </p:sp>
-      <p:sp>
-        <p:nvSpPr>
-          <p:cNvPr id="21" name="Shape 19"/>
-          <p:cNvSpPr/>
-          <p:nvPr/>
-        </p:nvSpPr>
-        <p:spPr>
-          <a:xfrm>
-            <a:off x="274320" y="4343400"/>
-            <a:ext cx="8595360" cy="603504"/>
-          </a:xfrm>
-          <a:prstGeom prst="rect">
-            <a:avLst/>
-          </a:prstGeom>
-          <a:solidFill>
-            <a:srgbClr val="3A2015"/>
-          </a:solidFill>
-          <a:ln/>
-        </p:spPr>
-      </p:sp>
-      <p:sp>
-        <p:nvSpPr>
-          <p:cNvPr id="22" name="Text 20"/>
-          <p:cNvSpPr/>
-          <p:nvPr/>
-        </p:nvSpPr>
-        <p:spPr>
-          <a:xfrm>
-            <a:off x="365760" y="4416552"/>
-            <a:ext cx="502920" cy="457200"/>
-          </a:xfrm>
-          <a:prstGeom prst="rect">
-            <a:avLst/>
-          </a:prstGeom>
-          <a:noFill/>
-          <a:ln/>
-        </p:spPr>
-        <p:txBody>
-          <a:bodyPr wrap="square" lIns="0" tIns="0" rIns="0" bIns="0" rtlCol="0" anchor="ctr"/>
-          <a:lstStyle/>
-          <a:p>
-            <a:pPr algn="ctr" indent="0" marL="0">
-              <a:buNone/>
-            </a:pPr>
-            <a:r>
-              <a:rPr lang="en-US" sz="2000" dirty="0">
-                <a:solidFill>
-                  <a:srgbClr val="000000"/>
-                </a:solidFill>
-              </a:rPr>
-              <a:t>📐</a:t>
-            </a:r>
-            <a:endParaRPr lang="en-US" sz="2000" dirty="0"/>
-          </a:p>
-        </p:txBody>
-      </p:sp>
-      <p:sp>
-        <p:nvSpPr>
-          <p:cNvPr id="23" name="Text 21"/>
-          <p:cNvSpPr/>
-          <p:nvPr/>
-        </p:nvSpPr>
-        <p:spPr>
-          <a:xfrm>
-            <a:off x="960120" y="4389120"/>
-            <a:ext cx="7772400" cy="530352"/>
-          </a:xfrm>
-          <a:prstGeom prst="rect">
-            <a:avLst/>
-          </a:prstGeom>
-          <a:noFill/>
-          <a:ln/>
-        </p:spPr>
-        <p:txBody>
-          <a:bodyPr wrap="square" lIns="0" tIns="0" rIns="0" bIns="0" rtlCol="0" anchor="ctr"/>
-          <a:lstStyle/>
-          <a:p>
-            <a:pPr indent="0" marL="0">
-              <a:buNone/>
-            </a:pPr>
-            <a:r>
-              <a:rPr lang="en-US" sz="1150" dirty="0">
-                <a:solidFill>
-                  <a:srgbClr val="E8D8A8"/>
-                </a:solidFill>
-                <a:latin typeface="Calibri" pitchFamily="34" charset="0"/>
-                <a:ea typeface="Calibri" pitchFamily="34" charset="-122"/>
-                <a:cs typeface="Calibri" pitchFamily="34" charset="-120"/>
-              </a:rPr>
-              <a:t>波愛修斯的三種音樂分類與教會八種調式奠定了中世紀音樂理論的基礎，影響延續到文藝復興</a:t>
-            </a:r>
-            <a:endParaRPr lang="en-US" sz="1150" dirty="0"/>
-          </a:p>
-          <a:p>
-            <a:pPr indent="0" marL="0">
-              <a:buNone/>
-            </a:pPr>
-            <a:r>
-              <a:rPr lang="en-US" sz="1150" dirty="0">
-                <a:solidFill>
-                  <a:srgbClr val="E8D8A8"/>
-                </a:solidFill>
-                <a:latin typeface="Calibri" pitchFamily="34" charset="0"/>
-                <a:ea typeface="Calibri" pitchFamily="34" charset="-122"/>
-                <a:cs typeface="Calibri" pitchFamily="34" charset="-120"/>
-              </a:rPr>
               <a:t>Boethius's three types of music and the 8 church modes formed the basis of medieval theory into the Renaissance</a:t>
             </a:r>
-            <a:endParaRPr lang="en-US" sz="1150" dirty="0"/>
+            <a:endParaRPr lang="en-US" sz="1400" dirty="0"/>
           </a:p>
         </p:txBody>
       </p:sp>
@@ -9320,7 +9202,7 @@
         <p:spPr>
           <a:xfrm>
             <a:off x="365760" y="960120"/>
-            <a:ext cx="3931920" cy="2286000"/>
+            <a:ext cx="3931920" cy="2606040"/>
           </a:xfrm>
           <a:prstGeom prst="rect">
             <a:avLst/>
@@ -9339,7 +9221,7 @@
         </p:nvSpPr>
         <p:spPr>
           <a:xfrm>
-            <a:off x="502920" y="1024128"/>
+            <a:off x="502920" y="1051560"/>
             <a:ext cx="3657600" cy="365760"/>
           </a:xfrm>
           <a:prstGeom prst="rect">
@@ -9349,7 +9231,7 @@
           <a:ln/>
         </p:spPr>
         <p:txBody>
-          <a:bodyPr wrap="square" rtlCol="0" anchor="ctr"/>
+          <a:bodyPr wrap="square" lIns="0" tIns="0" rIns="0" bIns="0" rtlCol="0" anchor="ctr"/>
           <a:lstStyle/>
           <a:p>
             <a:pPr indent="0" marL="0">
@@ -9364,7 +9246,7 @@
                 <a:ea typeface="Georgia" pitchFamily="34" charset="-122"/>
                 <a:cs typeface="Georgia" pitchFamily="34" charset="-120"/>
               </a:rPr>
-              <a:t>🎧 聆聽 YouTube</a:t>
+              <a:t>■ 聆聽 YouTube</a:t>
             </a:r>
             <a:endParaRPr lang="en-US" sz="1400" dirty="0"/>
           </a:p>
@@ -9378,28 +9260,269 @@
         </p:nvSpPr>
         <p:spPr>
           <a:xfrm>
-            <a:off x="502920" y="1426464"/>
-            <a:ext cx="3657600" cy="1691640"/>
-          </a:xfrm>
-          <a:prstGeom prst="rect">
-            <a:avLst/>
-          </a:prstGeom>
-          <a:noFill/>
-          <a:ln/>
-        </p:spPr>
-        <p:txBody>
-          <a:bodyPr wrap="square" rtlCol="0" anchor="ctr"/>
+            <a:off x="502920" y="1508760"/>
+            <a:ext cx="3657600" cy="1965960"/>
+          </a:xfrm>
+          <a:prstGeom prst="rect">
+            <a:avLst/>
+          </a:prstGeom>
+          <a:noFill/>
+          <a:ln/>
+        </p:spPr>
+        <p:txBody>
+          <a:bodyPr wrap="square" lIns="0" tIns="0" rIns="0" bIns="0" rtlCol="0" anchor="t"/>
+          <a:lstStyle/>
+          <a:p>
+            <a:pPr indent="0" marL="0">
+              <a:spcAft>
+                <a:spcPts val="100"/>
+              </a:spcAft>
+              <a:buNone/>
+            </a:pPr>
+            <a:r>
+              <a:rPr lang="en-US" sz="1400" dirty="0">
+                <a:solidFill>
+                  <a:srgbClr val="FBF5E6"/>
+                </a:solidFill>
+                <a:latin typeface="Calibri" pitchFamily="34" charset="0"/>
+                <a:ea typeface="Calibri" pitchFamily="34" charset="-122"/>
+                <a:cs typeface="Calibri" pitchFamily="34" charset="-120"/>
+              </a:rPr>
+              <a:t>Gregorian — Viderunt omnes</a:t>
+            </a:r>
+            <a:endParaRPr lang="en-US" sz="1400" dirty="0"/>
+          </a:p>
+          <a:p>
+            <a:pPr indent="0" marL="0">
+              <a:spcAft>
+                <a:spcPts val="100"/>
+              </a:spcAft>
+              <a:buNone/>
+            </a:pPr>
+            <a:r>
+              <a:rPr lang="en-US" sz="1400" dirty="0">
+                <a:solidFill>
+                  <a:srgbClr val="FBF5E6"/>
+                </a:solidFill>
+                <a:latin typeface="Calibri" pitchFamily="34" charset="0"/>
+                <a:ea typeface="Calibri" pitchFamily="34" charset="-122"/>
+                <a:cs typeface="Calibri" pitchFamily="34" charset="-120"/>
+              </a:rPr>
+              <a:t>youtu.be/uvC0NGmpuFY</a:t>
+            </a:r>
+            <a:endParaRPr lang="en-US" sz="1400" dirty="0"/>
+          </a:p>
+          <a:p>
+            <a:pPr indent="0" marL="0">
+              <a:spcAft>
+                <a:spcPts val="100"/>
+              </a:spcAft>
+              <a:buNone/>
+            </a:pPr>
+            <a:r>
+              <a:rPr lang="en-US" sz="1400" dirty="0">
+                <a:solidFill>
+                  <a:srgbClr val="FBF5E6"/>
+                </a:solidFill>
+                <a:latin typeface="Calibri" pitchFamily="34" charset="0"/>
+                <a:ea typeface="Calibri" pitchFamily="34" charset="-122"/>
+                <a:cs typeface="Calibri" pitchFamily="34" charset="-120"/>
+              </a:rPr>
+              <a:t>Hildegard — O Virtus Sapientiae</a:t>
+            </a:r>
+            <a:endParaRPr lang="en-US" sz="1400" dirty="0"/>
+          </a:p>
+          <a:p>
+            <a:pPr indent="0" marL="0">
+              <a:spcAft>
+                <a:spcPts val="100"/>
+              </a:spcAft>
+              <a:buNone/>
+            </a:pPr>
+            <a:r>
+              <a:rPr lang="en-US" sz="1400" dirty="0">
+                <a:solidFill>
+                  <a:srgbClr val="FBF5E6"/>
+                </a:solidFill>
+                <a:latin typeface="Calibri" pitchFamily="34" charset="0"/>
+                <a:ea typeface="Calibri" pitchFamily="34" charset="-122"/>
+                <a:cs typeface="Calibri" pitchFamily="34" charset="-120"/>
+              </a:rPr>
+              <a:t>youtu.be/77M2pkkdH10</a:t>
+            </a:r>
+            <a:endParaRPr lang="en-US" sz="1400" dirty="0"/>
+          </a:p>
+          <a:p>
+            <a:pPr indent="0" marL="0">
+              <a:spcAft>
+                <a:spcPts val="100"/>
+              </a:spcAft>
+              <a:buNone/>
+            </a:pPr>
+            <a:r>
+              <a:rPr lang="en-US" sz="1400" dirty="0">
+                <a:solidFill>
+                  <a:srgbClr val="FBF5E6"/>
+                </a:solidFill>
+                <a:latin typeface="Calibri" pitchFamily="34" charset="0"/>
+                <a:ea typeface="Calibri" pitchFamily="34" charset="-122"/>
+                <a:cs typeface="Calibri" pitchFamily="34" charset="-120"/>
+              </a:rPr>
+              <a:t>Byzantine — Cherubic Hymn</a:t>
+            </a:r>
+            <a:endParaRPr lang="en-US" sz="1400" dirty="0"/>
+          </a:p>
+          <a:p>
+            <a:pPr indent="0" marL="0">
+              <a:spcAft>
+                <a:spcPts val="100"/>
+              </a:spcAft>
+              <a:buNone/>
+            </a:pPr>
+            <a:r>
+              <a:rPr lang="en-US" sz="1400" dirty="0">
+                <a:solidFill>
+                  <a:srgbClr val="FBF5E6"/>
+                </a:solidFill>
+                <a:latin typeface="Calibri" pitchFamily="34" charset="0"/>
+                <a:ea typeface="Calibri" pitchFamily="34" charset="-122"/>
+                <a:cs typeface="Calibri" pitchFamily="34" charset="-120"/>
+              </a:rPr>
+              <a:t>youtu.be/PqYUu7uGXjs</a:t>
+            </a:r>
+            <a:endParaRPr lang="en-US" sz="1400" dirty="0"/>
+          </a:p>
+          <a:p>
+            <a:pPr indent="0" marL="0">
+              <a:spcAft>
+                <a:spcPts val="100"/>
+              </a:spcAft>
+              <a:buNone/>
+            </a:pPr>
+            <a:r>
+              <a:rPr lang="en-US" sz="1400" dirty="0">
+                <a:solidFill>
+                  <a:srgbClr val="FBF5E6"/>
+                </a:solidFill>
+                <a:latin typeface="Calibri" pitchFamily="34" charset="0"/>
+                <a:ea typeface="Calibri" pitchFamily="34" charset="-122"/>
+                <a:cs typeface="Calibri" pitchFamily="34" charset="-120"/>
+              </a:rPr>
+              <a:t>Ambrosian — Lucernario</a:t>
+            </a:r>
+            <a:endParaRPr lang="en-US" sz="1400" dirty="0"/>
+          </a:p>
+          <a:p>
+            <a:pPr indent="0" marL="0">
+              <a:spcAft>
+                <a:spcPts val="100"/>
+              </a:spcAft>
+              <a:buNone/>
+            </a:pPr>
+            <a:r>
+              <a:rPr lang="en-US" sz="1400" dirty="0">
+                <a:solidFill>
+                  <a:srgbClr val="FBF5E6"/>
+                </a:solidFill>
+                <a:latin typeface="Calibri" pitchFamily="34" charset="0"/>
+                <a:ea typeface="Calibri" pitchFamily="34" charset="-122"/>
+                <a:cs typeface="Calibri" pitchFamily="34" charset="-120"/>
+              </a:rPr>
+              <a:t>Guido — Ut queant laxis</a:t>
+            </a:r>
+            <a:endParaRPr lang="en-US" sz="1400" dirty="0"/>
+          </a:p>
+        </p:txBody>
+      </p:sp>
+      <p:sp>
+        <p:nvSpPr>
+          <p:cNvPr id="9" name="Shape 7"/>
+          <p:cNvSpPr/>
+          <p:nvPr/>
+        </p:nvSpPr>
+        <p:spPr>
+          <a:xfrm>
+            <a:off x="4480560" y="960120"/>
+            <a:ext cx="4297680" cy="2606040"/>
+          </a:xfrm>
+          <a:prstGeom prst="rect">
+            <a:avLst/>
+          </a:prstGeom>
+          <a:solidFill>
+            <a:srgbClr val="A84030"/>
+          </a:solidFill>
+          <a:ln/>
+        </p:spPr>
+      </p:sp>
+      <p:sp>
+        <p:nvSpPr>
+          <p:cNvPr id="10" name="Text 8"/>
+          <p:cNvSpPr/>
+          <p:nvPr/>
+        </p:nvSpPr>
+        <p:spPr>
+          <a:xfrm>
+            <a:off x="4617720" y="1051560"/>
+            <a:ext cx="4023360" cy="365760"/>
+          </a:xfrm>
+          <a:prstGeom prst="rect">
+            <a:avLst/>
+          </a:prstGeom>
+          <a:noFill/>
+          <a:ln/>
+        </p:spPr>
+        <p:txBody>
+          <a:bodyPr wrap="square" lIns="0" tIns="0" rIns="0" bIns="0" rtlCol="0" anchor="ctr"/>
+          <a:lstStyle/>
+          <a:p>
+            <a:pPr indent="0" marL="0">
+              <a:buNone/>
+            </a:pPr>
+            <a:r>
+              <a:rPr lang="en-US" sz="1400" b="1" dirty="0">
+                <a:solidFill>
+                  <a:srgbClr val="C8A020"/>
+                </a:solidFill>
+                <a:latin typeface="Georgia" pitchFamily="34" charset="0"/>
+                <a:ea typeface="Georgia" pitchFamily="34" charset="-122"/>
+                <a:cs typeface="Georgia" pitchFamily="34" charset="-120"/>
+              </a:rPr>
+              <a:t>■ 閱讀 Read</a:t>
+            </a:r>
+            <a:endParaRPr lang="en-US" sz="1400" dirty="0"/>
+          </a:p>
+        </p:txBody>
+      </p:sp>
+      <p:sp>
+        <p:nvSpPr>
+          <p:cNvPr id="11" name="Text 9"/>
+          <p:cNvSpPr/>
+          <p:nvPr/>
+        </p:nvSpPr>
+        <p:spPr>
+          <a:xfrm>
+            <a:off x="4617720" y="1508760"/>
+            <a:ext cx="4023360" cy="1965960"/>
+          </a:xfrm>
+          <a:prstGeom prst="rect">
+            <a:avLst/>
+          </a:prstGeom>
+          <a:noFill/>
+          <a:ln/>
+        </p:spPr>
+        <p:txBody>
+          <a:bodyPr wrap="square" lIns="0" tIns="0" rIns="0" bIns="0" rtlCol="0" anchor="ctr"/>
           <a:lstStyle/>
           <a:p>
             <a:pPr marL="342900" indent="-342900">
               <a:spcAft>
-                <a:spcPts val="400"/>
+                <a:spcPts val="600"/>
               </a:spcAft>
               <a:buSzPct val="100000"/>
               <a:buChar char="•"/>
             </a:pPr>
             <a:r>
-              <a:rPr lang="en-US" sz="1100" dirty="0">
+              <a:rPr lang="en-US" sz="1400" dirty="0">
                 <a:solidFill>
                   <a:srgbClr val="FBF5E6"/>
                 </a:solidFill>
@@ -9407,20 +9530,20 @@
                 <a:ea typeface="Calibri" pitchFamily="34" charset="-122"/>
                 <a:cs typeface="Calibri" pitchFamily="34" charset="-120"/>
               </a:rPr>
-              <a:t>Gregorian — Viderunt omnes  youtu.be/EN73kO2_PZA</a:t>
-            </a:r>
-            <a:endParaRPr lang="en-US" sz="1100" dirty="0"/>
+              <a:t>Wikipedia: Gregorian chant</a:t>
+            </a:r>
+            <a:endParaRPr lang="en-US" sz="1400" dirty="0"/>
           </a:p>
           <a:p>
             <a:pPr marL="342900" indent="-342900">
               <a:spcAft>
-                <a:spcPts val="400"/>
+                <a:spcPts val="600"/>
               </a:spcAft>
               <a:buSzPct val="100000"/>
               <a:buChar char="•"/>
             </a:pPr>
             <a:r>
-              <a:rPr lang="en-US" sz="1100" dirty="0">
+              <a:rPr lang="en-US" sz="1400" dirty="0">
                 <a:solidFill>
                   <a:srgbClr val="FBF5E6"/>
                 </a:solidFill>
@@ -9428,20 +9551,20 @@
                 <a:ea typeface="Calibri" pitchFamily="34" charset="-122"/>
                 <a:cs typeface="Calibri" pitchFamily="34" charset="-120"/>
               </a:rPr>
-              <a:t>Hildegard — O Virtus Sapientiae (Sequentia)  youtu.be/77M2pkkdH10</a:t>
-            </a:r>
-            <a:endParaRPr lang="en-US" sz="1100" dirty="0"/>
+              <a:t>Stanford: Medieval Music Theory</a:t>
+            </a:r>
+            <a:endParaRPr lang="en-US" sz="1400" dirty="0"/>
           </a:p>
           <a:p>
             <a:pPr marL="342900" indent="-342900">
               <a:spcAft>
-                <a:spcPts val="400"/>
+                <a:spcPts val="600"/>
               </a:spcAft>
               <a:buSzPct val="100000"/>
               <a:buChar char="•"/>
             </a:pPr>
             <a:r>
-              <a:rPr lang="en-US" sz="1100" dirty="0">
+              <a:rPr lang="en-US" sz="1400" dirty="0">
                 <a:solidFill>
                   <a:srgbClr val="FBF5E6"/>
                 </a:solidFill>
@@ -9449,20 +9572,20 @@
                 <a:ea typeface="Calibri" pitchFamily="34" charset="-122"/>
                 <a:cs typeface="Calibri" pitchFamily="34" charset="-120"/>
               </a:rPr>
-              <a:t>Byzantine — Cherubic Hymn (Simonopetra)  youtu.be/GhnZY9qfi4s</a:t>
-            </a:r>
-            <a:endParaRPr lang="en-US" sz="1100" dirty="0"/>
+              <a:t>CPDL: chant scores</a:t>
+            </a:r>
+            <a:endParaRPr lang="en-US" sz="1400" dirty="0"/>
           </a:p>
           <a:p>
             <a:pPr marL="342900" indent="-342900">
               <a:spcAft>
-                <a:spcPts val="400"/>
+                <a:spcPts val="600"/>
               </a:spcAft>
               <a:buSzPct val="100000"/>
               <a:buChar char="•"/>
             </a:pPr>
             <a:r>
-              <a:rPr lang="en-US" sz="1100" dirty="0">
+              <a:rPr lang="en-US" sz="1400" dirty="0">
                 <a:solidFill>
                   <a:srgbClr val="FBF5E6"/>
                 </a:solidFill>
@@ -9470,20 +9593,20 @@
                 <a:ea typeface="Calibri" pitchFamily="34" charset="-122"/>
                 <a:cs typeface="Calibri" pitchFamily="34" charset="-120"/>
               </a:rPr>
-              <a:t>Ambrosian — Lucernario (Vianini)  youtu.be/vapN-nybyro</a:t>
-            </a:r>
-            <a:endParaRPr lang="en-US" sz="1100" dirty="0"/>
+              <a:t>Boethius, De institutione musica</a:t>
+            </a:r>
+            <a:endParaRPr lang="en-US" sz="1400" dirty="0"/>
           </a:p>
           <a:p>
             <a:pPr marL="342900" indent="-342900">
               <a:spcAft>
-                <a:spcPts val="400"/>
+                <a:spcPts val="600"/>
               </a:spcAft>
               <a:buSzPct val="100000"/>
               <a:buChar char="•"/>
             </a:pPr>
             <a:r>
-              <a:rPr lang="en-US" sz="1100" dirty="0">
+              <a:rPr lang="en-US" sz="1400" dirty="0">
                 <a:solidFill>
                   <a:srgbClr val="FBF5E6"/>
                 </a:solidFill>
@@ -9491,51 +9614,51 @@
                 <a:ea typeface="Calibri" pitchFamily="34" charset="-122"/>
                 <a:cs typeface="Calibri" pitchFamily="34" charset="-120"/>
               </a:rPr>
-              <a:t>Guido of Arezzo — Ut queant laxis  youtu.be/ghYLCqHimfc</a:t>
-            </a:r>
-            <a:endParaRPr lang="en-US" sz="1100" dirty="0"/>
-          </a:p>
-        </p:txBody>
-      </p:sp>
-      <p:sp>
-        <p:nvSpPr>
-          <p:cNvPr id="9" name="Shape 7"/>
-          <p:cNvSpPr/>
-          <p:nvPr/>
-        </p:nvSpPr>
-        <p:spPr>
-          <a:xfrm>
-            <a:off x="4480560" y="960120"/>
-            <a:ext cx="4297680" cy="2286000"/>
-          </a:xfrm>
-          <a:prstGeom prst="rect">
-            <a:avLst/>
-          </a:prstGeom>
-          <a:solidFill>
-            <a:srgbClr val="A84030"/>
-          </a:solidFill>
-          <a:ln/>
-        </p:spPr>
-      </p:sp>
-      <p:sp>
-        <p:nvSpPr>
-          <p:cNvPr id="10" name="Text 8"/>
-          <p:cNvSpPr/>
-          <p:nvPr/>
-        </p:nvSpPr>
-        <p:spPr>
-          <a:xfrm>
-            <a:off x="4617720" y="1024128"/>
-            <a:ext cx="4023360" cy="365760"/>
-          </a:xfrm>
-          <a:prstGeom prst="rect">
-            <a:avLst/>
-          </a:prstGeom>
-          <a:noFill/>
-          <a:ln/>
-        </p:spPr>
-        <p:txBody>
-          <a:bodyPr wrap="square" rtlCol="0" anchor="ctr"/>
+              <a:t>Guido of Arezzo, Micrologus</a:t>
+            </a:r>
+            <a:endParaRPr lang="en-US" sz="1400" dirty="0"/>
+          </a:p>
+        </p:txBody>
+      </p:sp>
+      <p:sp>
+        <p:nvSpPr>
+          <p:cNvPr id="12" name="Shape 10"/>
+          <p:cNvSpPr/>
+          <p:nvPr/>
+        </p:nvSpPr>
+        <p:spPr>
+          <a:xfrm>
+            <a:off x="365760" y="3657600"/>
+            <a:ext cx="8412480" cy="1280160"/>
+          </a:xfrm>
+          <a:prstGeom prst="rect">
+            <a:avLst/>
+          </a:prstGeom>
+          <a:solidFill>
+            <a:srgbClr val="5C3A28"/>
+          </a:solidFill>
+          <a:ln/>
+        </p:spPr>
+      </p:sp>
+      <p:sp>
+        <p:nvSpPr>
+          <p:cNvPr id="13" name="Text 11"/>
+          <p:cNvSpPr/>
+          <p:nvPr/>
+        </p:nvSpPr>
+        <p:spPr>
+          <a:xfrm>
+            <a:off x="548640" y="3703320"/>
+            <a:ext cx="8046720" cy="320040"/>
+          </a:xfrm>
+          <a:prstGeom prst="rect">
+            <a:avLst/>
+          </a:prstGeom>
+          <a:noFill/>
+          <a:ln/>
+        </p:spPr>
+        <p:txBody>
+          <a:bodyPr wrap="square" lIns="0" tIns="0" rIns="0" bIns="0" rtlCol="0" anchor="ctr"/>
           <a:lstStyle/>
           <a:p>
             <a:pPr indent="0" marL="0">
@@ -9550,42 +9673,38 @@
                 <a:ea typeface="Georgia" pitchFamily="34" charset="-122"/>
                 <a:cs typeface="Georgia" pitchFamily="34" charset="-120"/>
               </a:rPr>
-              <a:t>📖 閱讀 Read</a:t>
-            </a:r>
-            <a:endParaRPr lang="en-US" sz="1400" dirty="0"/>
-          </a:p>
-        </p:txBody>
-      </p:sp>
-      <p:sp>
-        <p:nvSpPr>
-          <p:cNvPr id="11" name="Text 9"/>
-          <p:cNvSpPr/>
-          <p:nvPr/>
-        </p:nvSpPr>
-        <p:spPr>
-          <a:xfrm>
-            <a:off x="4617720" y="1426464"/>
-            <a:ext cx="4023360" cy="1691640"/>
-          </a:xfrm>
-          <a:prstGeom prst="rect">
-            <a:avLst/>
-          </a:prstGeom>
-          <a:noFill/>
-          <a:ln/>
-        </p:spPr>
-        <p:txBody>
-          <a:bodyPr wrap="square" rtlCol="0" anchor="ctr"/>
-          <a:lstStyle/>
-          <a:p>
-            <a:pPr marL="342900" indent="-342900">
-              <a:spcAft>
-                <a:spcPts val="400"/>
-              </a:spcAft>
-              <a:buSzPct val="100000"/>
-              <a:buChar char="•"/>
-            </a:pPr>
-            <a:r>
-              <a:rPr lang="en-US" sz="1100" dirty="0">
+              <a:t>■ 本章關鍵術語 Key Terms</a:t>
+            </a:r>
+            <a:endParaRPr lang="en-US" sz="1400" dirty="0"/>
+          </a:p>
+        </p:txBody>
+      </p:sp>
+      <p:sp>
+        <p:nvSpPr>
+          <p:cNvPr id="14" name="Text 12"/>
+          <p:cNvSpPr/>
+          <p:nvPr/>
+        </p:nvSpPr>
+        <p:spPr>
+          <a:xfrm>
+            <a:off x="548640" y="4041648"/>
+            <a:ext cx="8046720" cy="868680"/>
+          </a:xfrm>
+          <a:prstGeom prst="rect">
+            <a:avLst/>
+          </a:prstGeom>
+          <a:noFill/>
+          <a:ln/>
+        </p:spPr>
+        <p:txBody>
+          <a:bodyPr wrap="square" lIns="0" tIns="0" rIns="0" bIns="0" rtlCol="0" anchor="t"/>
+          <a:lstStyle/>
+          <a:p>
+            <a:pPr indent="0" marL="0">
+              <a:buNone/>
+            </a:pPr>
+            <a:r>
+              <a:rPr lang="en-US" sz="1400" dirty="0">
                 <a:solidFill>
                   <a:srgbClr val="FBF5E6"/>
                 </a:solidFill>
@@ -9593,191 +9712,9 @@
                 <a:ea typeface="Calibri" pitchFamily="34" charset="-122"/>
                 <a:cs typeface="Calibri" pitchFamily="34" charset="-120"/>
               </a:rPr>
-              <a:t>Wikipedia: Gregorian chant — en.wikipedia.org</a:t>
-            </a:r>
-            <a:endParaRPr lang="en-US" sz="1100" dirty="0"/>
-          </a:p>
-          <a:p>
-            <a:pPr marL="342900" indent="-342900">
-              <a:spcAft>
-                <a:spcPts val="400"/>
-              </a:spcAft>
-              <a:buSzPct val="100000"/>
-              <a:buChar char="•"/>
-            </a:pPr>
-            <a:r>
-              <a:rPr lang="en-US" sz="1100" dirty="0">
-                <a:solidFill>
-                  <a:srgbClr val="FBF5E6"/>
-                </a:solidFill>
-                <a:latin typeface="Calibri" pitchFamily="34" charset="0"/>
-                <a:ea typeface="Calibri" pitchFamily="34" charset="-122"/>
-                <a:cs typeface="Calibri" pitchFamily="34" charset="-120"/>
-              </a:rPr>
-              <a:t>Stanford Encyclopedia: Medieval Music Theory</a:t>
-            </a:r>
-            <a:endParaRPr lang="en-US" sz="1100" dirty="0"/>
-          </a:p>
-          <a:p>
-            <a:pPr marL="342900" indent="-342900">
-              <a:spcAft>
-                <a:spcPts val="400"/>
-              </a:spcAft>
-              <a:buSzPct val="100000"/>
-              <a:buChar char="•"/>
-            </a:pPr>
-            <a:r>
-              <a:rPr lang="en-US" sz="1100" dirty="0">
-                <a:solidFill>
-                  <a:srgbClr val="FBF5E6"/>
-                </a:solidFill>
-                <a:latin typeface="Calibri" pitchFamily="34" charset="0"/>
-                <a:ea typeface="Calibri" pitchFamily="34" charset="-122"/>
-                <a:cs typeface="Calibri" pitchFamily="34" charset="-120"/>
-              </a:rPr>
-              <a:t>CPDL (Choral Public Domain Library): chant scores</a:t>
-            </a:r>
-            <a:endParaRPr lang="en-US" sz="1100" dirty="0"/>
-          </a:p>
-          <a:p>
-            <a:pPr marL="342900" indent="-342900">
-              <a:spcAft>
-                <a:spcPts val="400"/>
-              </a:spcAft>
-              <a:buSzPct val="100000"/>
-              <a:buChar char="•"/>
-            </a:pPr>
-            <a:r>
-              <a:rPr lang="en-US" sz="1100" dirty="0">
-                <a:solidFill>
-                  <a:srgbClr val="FBF5E6"/>
-                </a:solidFill>
-                <a:latin typeface="Calibri" pitchFamily="34" charset="0"/>
-                <a:ea typeface="Calibri" pitchFamily="34" charset="-122"/>
-                <a:cs typeface="Calibri" pitchFamily="34" charset="-120"/>
-              </a:rPr>
-              <a:t>Boethius, De institutione musica — Open Library</a:t>
-            </a:r>
-            <a:endParaRPr lang="en-US" sz="1100" dirty="0"/>
-          </a:p>
-          <a:p>
-            <a:pPr marL="342900" indent="-342900">
-              <a:spcAft>
-                <a:spcPts val="400"/>
-              </a:spcAft>
-              <a:buSzPct val="100000"/>
-              <a:buChar char="•"/>
-            </a:pPr>
-            <a:r>
-              <a:rPr lang="en-US" sz="1100" dirty="0">
-                <a:solidFill>
-                  <a:srgbClr val="FBF5E6"/>
-                </a:solidFill>
-                <a:latin typeface="Calibri" pitchFamily="34" charset="0"/>
-                <a:ea typeface="Calibri" pitchFamily="34" charset="-122"/>
-                <a:cs typeface="Calibri" pitchFamily="34" charset="-120"/>
-              </a:rPr>
-              <a:t>Guido of Arezzo, Micrologus — translated excerpts</a:t>
-            </a:r>
-            <a:endParaRPr lang="en-US" sz="1100" dirty="0"/>
-          </a:p>
-        </p:txBody>
-      </p:sp>
-      <p:sp>
-        <p:nvSpPr>
-          <p:cNvPr id="12" name="Shape 10"/>
-          <p:cNvSpPr/>
-          <p:nvPr/>
-        </p:nvSpPr>
-        <p:spPr>
-          <a:xfrm>
-            <a:off x="365760" y="3337560"/>
-            <a:ext cx="8412480" cy="1554480"/>
-          </a:xfrm>
-          <a:prstGeom prst="rect">
-            <a:avLst/>
-          </a:prstGeom>
-          <a:solidFill>
-            <a:srgbClr val="5C3A28"/>
-          </a:solidFill>
-          <a:ln/>
-        </p:spPr>
-      </p:sp>
-      <p:sp>
-        <p:nvSpPr>
-          <p:cNvPr id="13" name="Text 11"/>
-          <p:cNvSpPr/>
-          <p:nvPr/>
-        </p:nvSpPr>
-        <p:spPr>
-          <a:xfrm>
-            <a:off x="548640" y="3401568"/>
-            <a:ext cx="8046720" cy="365760"/>
-          </a:xfrm>
-          <a:prstGeom prst="rect">
-            <a:avLst/>
-          </a:prstGeom>
-          <a:noFill/>
-          <a:ln/>
-        </p:spPr>
-        <p:txBody>
-          <a:bodyPr wrap="square" rtlCol="0" anchor="ctr"/>
-          <a:lstStyle/>
-          <a:p>
-            <a:pPr indent="0" marL="0">
-              <a:buNone/>
-            </a:pPr>
-            <a:r>
-              <a:rPr lang="en-US" sz="1400" b="1" dirty="0">
-                <a:solidFill>
-                  <a:srgbClr val="C8A020"/>
-                </a:solidFill>
-                <a:latin typeface="Georgia" pitchFamily="34" charset="0"/>
-                <a:ea typeface="Georgia" pitchFamily="34" charset="-122"/>
-                <a:cs typeface="Georgia" pitchFamily="34" charset="-120"/>
-              </a:rPr>
-              <a:t>🔑 本章關鍵術語 Key Terms</a:t>
-            </a:r>
-            <a:endParaRPr lang="en-US" sz="1400" dirty="0"/>
-          </a:p>
-        </p:txBody>
-      </p:sp>
-      <p:sp>
-        <p:nvSpPr>
-          <p:cNvPr id="14" name="Text 12"/>
-          <p:cNvSpPr/>
-          <p:nvPr/>
-        </p:nvSpPr>
-        <p:spPr>
-          <a:xfrm>
-            <a:off x="548640" y="3822192"/>
-            <a:ext cx="8046720" cy="932688"/>
-          </a:xfrm>
-          <a:prstGeom prst="rect">
-            <a:avLst/>
-          </a:prstGeom>
-          <a:noFill/>
-          <a:ln/>
-        </p:spPr>
-        <p:txBody>
-          <a:bodyPr wrap="square" rtlCol="0" anchor="ctr"/>
-          <a:lstStyle/>
-          <a:p>
-            <a:pPr indent="0" marL="0">
-              <a:buNone/>
-            </a:pPr>
-            <a:r>
-              <a:rPr lang="en-US" sz="1200" dirty="0">
-                <a:solidFill>
-                  <a:srgbClr val="FBF5E6"/>
-                </a:solidFill>
-                <a:latin typeface="Calibri" pitchFamily="34" charset="0"/>
-                <a:ea typeface="Calibri" pitchFamily="34" charset="-122"/>
-                <a:cs typeface="Calibri" pitchFamily="34" charset="-120"/>
-              </a:rPr>
-              <a:t>Psalm 詩篇 · Cantillation 吟誦 · Gregorian Chant 格里高利聖詠 · Plainchant/Plainsong 平唱 · Rite 儀式 · Liturgy 禮拜儀式 · Neumes 紐姆符號 · Mode 調式 · Final 最終音 · Authentic 正格 · Plagal 變格 · Solmization 唱名法 · Musica mundana / humana / instrumentalis</a:t>
-            </a:r>
-            <a:endParaRPr lang="en-US" sz="1200" dirty="0"/>
+              <a:t>Psalm 詩篇 · Cantillation 吟誦 · Gregorian Chant 格里高利聖詠 · Plainchant 平唱 · Rite 儀式 · Liturgy 禮拜儀式 · Neumes 紐姆符號 · Mode 調式 · Final 最終音 · Authentic 正格 · Plagal 變格 · Solmization 唱名法</a:t>
+            </a:r>
+            <a:endParaRPr lang="en-US" sz="1400" dirty="0"/>
           </a:p>
         </p:txBody>
       </p:sp>
@@ -9962,7 +9899,7 @@
                   <a:srgbClr val="000000"/>
                 </a:solidFill>
               </a:rPr>
-              <a:t>✝</a:t>
+              <a:t>■</a:t>
             </a:r>
             <a:endParaRPr lang="en-US" sz="2000" dirty="0"/>
           </a:p>
@@ -10025,14 +9962,14 @@
           <a:ln/>
         </p:spPr>
         <p:txBody>
-          <a:bodyPr wrap="square" lIns="0" tIns="0" rIns="0" bIns="0" rtlCol="0" anchor="ctr"/>
-          <a:lstStyle/>
-          <a:p>
-            <a:pPr indent="0" marL="0">
-              <a:buNone/>
-            </a:pPr>
-            <a:r>
-              <a:rPr lang="en-US" sz="1100" dirty="0">
+          <a:bodyPr wrap="square" lIns="0" tIns="0" rIns="0" bIns="0" rtlCol="0" anchor="t"/>
+          <a:lstStyle/>
+          <a:p>
+            <a:pPr indent="0" marL="0">
+              <a:buNone/>
+            </a:pPr>
+            <a:r>
+              <a:rPr lang="en-US" sz="1400" dirty="0">
                 <a:solidFill>
                   <a:srgbClr val="5C3A28"/>
                 </a:solidFill>
@@ -10042,7 +9979,7 @@
               </a:rPr>
               <a:t>從耶穌到君士坦丁，基督教如何在羅馬帝國擴散</a:t>
             </a:r>
-            <a:endParaRPr lang="en-US" sz="1100" dirty="0"/>
+            <a:endParaRPr lang="en-US" sz="1400" dirty="0"/>
           </a:p>
         </p:txBody>
       </p:sp>
@@ -10096,7 +10033,7 @@
                   <a:srgbClr val="000000"/>
                 </a:solidFill>
               </a:rPr>
-              <a:t>📜</a:t>
+              <a:t>■</a:t>
             </a:r>
             <a:endParaRPr lang="en-US" sz="2000" dirty="0"/>
           </a:p>
@@ -10159,14 +10096,14 @@
           <a:ln/>
         </p:spPr>
         <p:txBody>
-          <a:bodyPr wrap="square" lIns="0" tIns="0" rIns="0" bIns="0" rtlCol="0" anchor="ctr"/>
-          <a:lstStyle/>
-          <a:p>
-            <a:pPr indent="0" marL="0">
-              <a:buNone/>
-            </a:pPr>
-            <a:r>
-              <a:rPr lang="en-US" sz="1100" dirty="0">
+          <a:bodyPr wrap="square" lIns="0" tIns="0" rIns="0" bIns="0" rtlCol="0" anchor="t"/>
+          <a:lstStyle/>
+          <a:p>
+            <a:pPr indent="0" marL="0">
+              <a:buNone/>
+            </a:pPr>
+            <a:r>
+              <a:rPr lang="en-US" sz="1400" dirty="0">
                 <a:solidFill>
                   <a:srgbClr val="5C3A28"/>
                 </a:solidFill>
@@ -10176,7 +10113,7 @@
               </a:rPr>
               <a:t>聖殿詩篇、吟誦、對早期基督教音樂的影響</a:t>
             </a:r>
-            <a:endParaRPr lang="en-US" sz="1100" dirty="0"/>
+            <a:endParaRPr lang="en-US" sz="1400" dirty="0"/>
           </a:p>
         </p:txBody>
       </p:sp>
@@ -10230,7 +10167,7 @@
                   <a:srgbClr val="000000"/>
                 </a:solidFill>
               </a:rPr>
-              <a:t>🎵</a:t>
+              <a:t>■</a:t>
             </a:r>
             <a:endParaRPr lang="en-US" sz="2000" dirty="0"/>
           </a:p>
@@ -10293,14 +10230,14 @@
           <a:ln/>
         </p:spPr>
         <p:txBody>
-          <a:bodyPr wrap="square" lIns="0" tIns="0" rIns="0" bIns="0" rtlCol="0" anchor="ctr"/>
-          <a:lstStyle/>
-          <a:p>
-            <a:pPr indent="0" marL="0">
-              <a:buNone/>
-            </a:pPr>
-            <a:r>
-              <a:rPr lang="en-US" sz="1100" dirty="0">
+          <a:bodyPr wrap="square" lIns="0" tIns="0" rIns="0" bIns="0" rtlCol="0" anchor="t"/>
+          <a:lstStyle/>
+          <a:p>
+            <a:pPr indent="0" marL="0">
+              <a:buNone/>
+            </a:pPr>
+            <a:r>
+              <a:rPr lang="en-US" sz="1400" dirty="0">
                 <a:solidFill>
                   <a:srgbClr val="5C3A28"/>
                 </a:solidFill>
@@ -10310,7 +10247,7 @@
               </a:rPr>
               <a:t>感恩詩篇、教父思想、單聲部演唱傳統</a:t>
             </a:r>
-            <a:endParaRPr lang="en-US" sz="1100" dirty="0"/>
+            <a:endParaRPr lang="en-US" sz="1400" dirty="0"/>
           </a:p>
         </p:txBody>
       </p:sp>
@@ -10364,7 +10301,7 @@
                   <a:srgbClr val="000000"/>
                 </a:solidFill>
               </a:rPr>
-              <a:t>✂</a:t>
+              <a:t>■</a:t>
             </a:r>
             <a:endParaRPr lang="en-US" sz="2000" dirty="0"/>
           </a:p>
@@ -10427,14 +10364,14 @@
           <a:ln/>
         </p:spPr>
         <p:txBody>
-          <a:bodyPr wrap="square" lIns="0" tIns="0" rIns="0" bIns="0" rtlCol="0" anchor="ctr"/>
-          <a:lstStyle/>
-          <a:p>
-            <a:pPr indent="0" marL="0">
-              <a:buNone/>
-            </a:pPr>
-            <a:r>
-              <a:rPr lang="en-US" sz="1100" dirty="0">
+          <a:bodyPr wrap="square" lIns="0" tIns="0" rIns="0" bIns="0" rtlCol="0" anchor="t"/>
+          <a:lstStyle/>
+          <a:p>
+            <a:pPr indent="0" marL="0">
+              <a:buNone/>
+            </a:pPr>
+            <a:r>
+              <a:rPr lang="en-US" sz="1400" dirty="0">
                 <a:solidFill>
                   <a:srgbClr val="5C3A28"/>
                 </a:solidFill>
@@ -10444,7 +10381,7 @@
               </a:rPr>
               <a:t>拜占庭、格里高利、安布羅西等聖詠傳統</a:t>
             </a:r>
-            <a:endParaRPr lang="en-US" sz="1100" dirty="0"/>
+            <a:endParaRPr lang="en-US" sz="1400" dirty="0"/>
           </a:p>
         </p:txBody>
       </p:sp>
@@ -10498,7 +10435,7 @@
                   <a:srgbClr val="000000"/>
                 </a:solidFill>
               </a:rPr>
-              <a:t>🖊</a:t>
+              <a:t>■</a:t>
             </a:r>
             <a:endParaRPr lang="en-US" sz="2000" dirty="0"/>
           </a:p>
@@ -10561,14 +10498,14 @@
           <a:ln/>
         </p:spPr>
         <p:txBody>
-          <a:bodyPr wrap="square" lIns="0" tIns="0" rIns="0" bIns="0" rtlCol="0" anchor="ctr"/>
-          <a:lstStyle/>
-          <a:p>
-            <a:pPr indent="0" marL="0">
-              <a:buNone/>
-            </a:pPr>
-            <a:r>
-              <a:rPr lang="en-US" sz="1100" dirty="0">
+          <a:bodyPr wrap="square" lIns="0" tIns="0" rIns="0" bIns="0" rtlCol="0" anchor="t"/>
+          <a:lstStyle/>
+          <a:p>
+            <a:pPr indent="0" marL="0">
+              <a:buNone/>
+            </a:pPr>
+            <a:r>
+              <a:rPr lang="en-US" sz="1400" dirty="0">
                 <a:solidFill>
                   <a:srgbClr val="5C3A28"/>
                 </a:solidFill>
@@ -10578,7 +10515,7 @@
               </a:rPr>
               <a:t>紐姆符號 → 有線譜 → 阿雷佐的桂多</a:t>
             </a:r>
-            <a:endParaRPr lang="en-US" sz="1100" dirty="0"/>
+            <a:endParaRPr lang="en-US" sz="1400" dirty="0"/>
           </a:p>
         </p:txBody>
       </p:sp>
@@ -10632,7 +10569,7 @@
                   <a:srgbClr val="000000"/>
                 </a:solidFill>
               </a:rPr>
-              <a:t>🎓</a:t>
+              <a:t>■</a:t>
             </a:r>
             <a:endParaRPr lang="en-US" sz="2000" dirty="0"/>
           </a:p>
@@ -10695,14 +10632,14 @@
           <a:ln/>
         </p:spPr>
         <p:txBody>
-          <a:bodyPr wrap="square" lIns="0" tIns="0" rIns="0" bIns="0" rtlCol="0" anchor="ctr"/>
-          <a:lstStyle/>
-          <a:p>
-            <a:pPr indent="0" marL="0">
-              <a:buNone/>
-            </a:pPr>
-            <a:r>
-              <a:rPr lang="en-US" sz="1100" dirty="0">
+          <a:bodyPr wrap="square" lIns="0" tIns="0" rIns="0" bIns="0" rtlCol="0" anchor="t"/>
+          <a:lstStyle/>
+          <a:p>
+            <a:pPr indent="0" marL="0">
+              <a:buNone/>
+            </a:pPr>
+            <a:r>
+              <a:rPr lang="en-US" sz="1400" dirty="0">
                 <a:solidFill>
                   <a:srgbClr val="5C3A28"/>
                 </a:solidFill>
@@ -10712,7 +10649,7 @@
               </a:rPr>
               <a:t>波愛修斯、調式體系、唱名法（ut re mi fa sol la）</a:t>
             </a:r>
-            <a:endParaRPr lang="en-US" sz="1100" dirty="0"/>
+            <a:endParaRPr lang="en-US" sz="1400" dirty="0"/>
           </a:p>
         </p:txBody>
       </p:sp>
@@ -10931,7 +10868,7 @@
               <a:buNone/>
             </a:pPr>
             <a:r>
-              <a:rPr lang="en-US" sz="1200" b="1" dirty="0">
+              <a:rPr lang="en-US" sz="1400" b="1" dirty="0">
                 <a:solidFill>
                   <a:srgbClr val="C8A020"/>
                 </a:solidFill>
@@ -10939,9 +10876,9 @@
                 <a:ea typeface="Georgia" pitchFamily="34" charset="-122"/>
                 <a:cs typeface="Georgia" pitchFamily="34" charset="-120"/>
               </a:rPr>
-              <a:t>✝ 起源 Origin</a:t>
-            </a:r>
-            <a:endParaRPr lang="en-US" sz="1200" dirty="0"/>
+              <a:t>■ 起源 Origin</a:t>
+            </a:r>
+            <a:endParaRPr lang="en-US" sz="1400" dirty="0"/>
           </a:p>
         </p:txBody>
       </p:sp>
@@ -10963,14 +10900,14 @@
           <a:ln/>
         </p:spPr>
         <p:txBody>
-          <a:bodyPr wrap="square" lIns="0" tIns="0" rIns="0" bIns="0" rtlCol="0" anchor="ctr"/>
-          <a:lstStyle/>
-          <a:p>
-            <a:pPr indent="0" marL="0">
-              <a:buNone/>
-            </a:pPr>
-            <a:r>
-              <a:rPr lang="en-US" sz="1150" dirty="0">
+          <a:bodyPr wrap="square" lIns="0" tIns="0" rIns="0" bIns="0" rtlCol="0" anchor="t"/>
+          <a:lstStyle/>
+          <a:p>
+            <a:pPr indent="0" marL="0">
+              <a:buNone/>
+            </a:pPr>
+            <a:r>
+              <a:rPr lang="en-US" sz="1400" dirty="0">
                 <a:solidFill>
                   <a:srgbClr val="E8D8A8"/>
                 </a:solidFill>
@@ -10980,14 +10917,14 @@
               </a:rPr>
               <a:t>拿撒勒耶穌（Jesus of Nazareth）—猶太人，羅馬帝國臣民；其教導催生基督教運動</a:t>
             </a:r>
-            <a:endParaRPr lang="en-US" sz="1150" dirty="0"/>
-          </a:p>
-          <a:p>
-            <a:pPr indent="0" marL="0">
-              <a:buNone/>
-            </a:pPr>
-            <a:r>
-              <a:rPr lang="en-US" sz="1150" dirty="0">
+            <a:endParaRPr lang="en-US" sz="1400" dirty="0"/>
+          </a:p>
+          <a:p>
+            <a:pPr indent="0" marL="0">
+              <a:buNone/>
+            </a:pPr>
+            <a:r>
+              <a:rPr lang="en-US" sz="1400" dirty="0">
                 <a:solidFill>
                   <a:srgbClr val="E8D8A8"/>
                 </a:solidFill>
@@ -10997,7 +10934,7 @@
               </a:rPr>
               <a:t>Jesus of Nazareth, a Jew and subject of Rome; his teachings sparked Christianity</a:t>
             </a:r>
-            <a:endParaRPr lang="en-US" sz="1150" dirty="0"/>
+            <a:endParaRPr lang="en-US" sz="1400" dirty="0"/>
           </a:p>
         </p:txBody>
       </p:sp>
@@ -11046,7 +10983,7 @@
               <a:buNone/>
             </a:pPr>
             <a:r>
-              <a:rPr lang="en-US" sz="1200" b="1" dirty="0">
+              <a:rPr lang="en-US" sz="1400" b="1" dirty="0">
                 <a:solidFill>
                   <a:srgbClr val="C8A020"/>
                 </a:solidFill>
@@ -11054,9 +10991,9 @@
                 <a:ea typeface="Georgia" pitchFamily="34" charset="-122"/>
                 <a:cs typeface="Georgia" pitchFamily="34" charset="-120"/>
               </a:rPr>
-              <a:t>🌍 傳播 Spread</a:t>
-            </a:r>
-            <a:endParaRPr lang="en-US" sz="1200" dirty="0"/>
+              <a:t>◆ 傳播 Spread</a:t>
+            </a:r>
+            <a:endParaRPr lang="en-US" sz="1400" dirty="0"/>
           </a:p>
         </p:txBody>
       </p:sp>
@@ -11078,14 +11015,14 @@
           <a:ln/>
         </p:spPr>
         <p:txBody>
-          <a:bodyPr wrap="square" lIns="0" tIns="0" rIns="0" bIns="0" rtlCol="0" anchor="ctr"/>
-          <a:lstStyle/>
-          <a:p>
-            <a:pPr indent="0" marL="0">
-              <a:buNone/>
-            </a:pPr>
-            <a:r>
-              <a:rPr lang="en-US" sz="1150" dirty="0">
+          <a:bodyPr wrap="square" lIns="0" tIns="0" rIns="0" bIns="0" rtlCol="0" anchor="t"/>
+          <a:lstStyle/>
+          <a:p>
+            <a:pPr indent="0" marL="0">
+              <a:buNone/>
+            </a:pPr>
+            <a:r>
+              <a:rPr lang="en-US" sz="1400" dirty="0">
                 <a:solidFill>
                   <a:srgbClr val="E8D8A8"/>
                 </a:solidFill>
@@ -11095,14 +11032,14 @@
               </a:rPr>
               <a:t>聖彼得、聖保羅等使徒將信仰帶至近東、希臘、義大利各地</a:t>
             </a:r>
-            <a:endParaRPr lang="en-US" sz="1150" dirty="0"/>
-          </a:p>
-          <a:p>
-            <a:pPr indent="0" marL="0">
-              <a:buNone/>
-            </a:pPr>
-            <a:r>
-              <a:rPr lang="en-US" sz="1150" dirty="0">
+            <a:endParaRPr lang="en-US" sz="1400" dirty="0"/>
+          </a:p>
+          <a:p>
+            <a:pPr indent="0" marL="0">
+              <a:buNone/>
+            </a:pPr>
+            <a:r>
+              <a:rPr lang="en-US" sz="1400" dirty="0">
                 <a:solidFill>
                   <a:srgbClr val="E8D8A8"/>
                 </a:solidFill>
@@ -11112,7 +11049,7 @@
               </a:rPr>
               <a:t>Apostles (St. Peter, St. Paul) spread the faith throughout the Near East, Greece, and Italy</a:t>
             </a:r>
-            <a:endParaRPr lang="en-US" sz="1150" dirty="0"/>
+            <a:endParaRPr lang="en-US" sz="1400" dirty="0"/>
           </a:p>
         </p:txBody>
       </p:sp>
@@ -11161,7 +11098,7 @@
               <a:buNone/>
             </a:pPr>
             <a:r>
-              <a:rPr lang="en-US" sz="1200" b="1" dirty="0">
+              <a:rPr lang="en-US" sz="1400" b="1" dirty="0">
                 <a:solidFill>
                   <a:srgbClr val="C8A020"/>
                 </a:solidFill>
@@ -11169,9 +11106,9 @@
                 <a:ea typeface="Georgia" pitchFamily="34" charset="-122"/>
                 <a:cs typeface="Georgia" pitchFamily="34" charset="-120"/>
               </a:rPr>
-              <a:t>⚖ 迫害到合法 Legal</a:t>
-            </a:r>
-            <a:endParaRPr lang="en-US" sz="1200" dirty="0"/>
+              <a:t>§ 迫害到合法 Legal</a:t>
+            </a:r>
+            <a:endParaRPr lang="en-US" sz="1400" dirty="0"/>
           </a:p>
         </p:txBody>
       </p:sp>
@@ -11193,14 +11130,14 @@
           <a:ln/>
         </p:spPr>
         <p:txBody>
-          <a:bodyPr wrap="square" lIns="0" tIns="0" rIns="0" bIns="0" rtlCol="0" anchor="ctr"/>
-          <a:lstStyle/>
-          <a:p>
-            <a:pPr indent="0" marL="0">
-              <a:buNone/>
-            </a:pPr>
-            <a:r>
-              <a:rPr lang="en-US" sz="1150" dirty="0">
+          <a:bodyPr wrap="square" lIns="0" tIns="0" rIns="0" bIns="0" rtlCol="0" anchor="t"/>
+          <a:lstStyle/>
+          <a:p>
+            <a:pPr indent="0" marL="0">
+              <a:buNone/>
+            </a:pPr>
+            <a:r>
+              <a:rPr lang="en-US" sz="1400" dirty="0">
                 <a:solidFill>
                   <a:srgbClr val="E8D8A8"/>
                 </a:solidFill>
@@ -11210,14 +11147,14 @@
               </a:rPr>
               <a:t>313 CE：君士坦丁一世頒布《米蘭勒令》，基督教合法化</a:t>
             </a:r>
-            <a:endParaRPr lang="en-US" sz="1150" dirty="0"/>
-          </a:p>
-          <a:p>
-            <a:pPr indent="0" marL="0">
-              <a:buNone/>
-            </a:pPr>
-            <a:r>
-              <a:rPr lang="en-US" sz="1150" dirty="0">
+            <a:endParaRPr lang="en-US" sz="1400" dirty="0"/>
+          </a:p>
+          <a:p>
+            <a:pPr indent="0" marL="0">
+              <a:buNone/>
+            </a:pPr>
+            <a:r>
+              <a:rPr lang="en-US" sz="1400" dirty="0">
                 <a:solidFill>
                   <a:srgbClr val="E8D8A8"/>
                 </a:solidFill>
@@ -11227,7 +11164,7 @@
               </a:rPr>
               <a:t>Constantine I issued the Edict of Milan (313 CE); Christianity legalized</a:t>
             </a:r>
-            <a:endParaRPr lang="en-US" sz="1150" dirty="0"/>
+            <a:endParaRPr lang="en-US" sz="1400" dirty="0"/>
           </a:p>
         </p:txBody>
       </p:sp>
@@ -11276,7 +11213,7 @@
               <a:buNone/>
             </a:pPr>
             <a:r>
-              <a:rPr lang="en-US" sz="1200" b="1" dirty="0">
+              <a:rPr lang="en-US" sz="1400" b="1" dirty="0">
                 <a:solidFill>
                   <a:srgbClr val="C8A020"/>
                 </a:solidFill>
@@ -11284,9 +11221,9 @@
                 <a:ea typeface="Georgia" pitchFamily="34" charset="-122"/>
                 <a:cs typeface="Georgia" pitchFamily="34" charset="-120"/>
               </a:rPr>
-              <a:t>🏛 國教 Official</a:t>
-            </a:r>
-            <a:endParaRPr lang="en-US" sz="1200" dirty="0"/>
+              <a:t>■ 國教 Official</a:t>
+            </a:r>
+            <a:endParaRPr lang="en-US" sz="1400" dirty="0"/>
           </a:p>
         </p:txBody>
       </p:sp>
@@ -11308,14 +11245,14 @@
           <a:ln/>
         </p:spPr>
         <p:txBody>
-          <a:bodyPr wrap="square" lIns="0" tIns="0" rIns="0" bIns="0" rtlCol="0" anchor="ctr"/>
-          <a:lstStyle/>
-          <a:p>
-            <a:pPr indent="0" marL="0">
-              <a:buNone/>
-            </a:pPr>
-            <a:r>
-              <a:rPr lang="en-US" sz="1150" dirty="0">
+          <a:bodyPr wrap="square" lIns="0" tIns="0" rIns="0" bIns="0" rtlCol="0" anchor="t"/>
+          <a:lstStyle/>
+          <a:p>
+            <a:pPr indent="0" marL="0">
+              <a:buNone/>
+            </a:pPr>
+            <a:r>
+              <a:rPr lang="en-US" sz="1400" dirty="0">
                 <a:solidFill>
                   <a:srgbClr val="E8D8A8"/>
                 </a:solidFill>
@@ -11325,14 +11262,14 @@
               </a:rPr>
               <a:t>392 CE：狄奧多西一世定基督教為羅馬帝國唯一官方宗教</a:t>
             </a:r>
-            <a:endParaRPr lang="en-US" sz="1150" dirty="0"/>
-          </a:p>
-          <a:p>
-            <a:pPr indent="0" marL="0">
-              <a:buNone/>
-            </a:pPr>
-            <a:r>
-              <a:rPr lang="en-US" sz="1150" dirty="0">
+            <a:endParaRPr lang="en-US" sz="1400" dirty="0"/>
+          </a:p>
+          <a:p>
+            <a:pPr indent="0" marL="0">
+              <a:buNone/>
+            </a:pPr>
+            <a:r>
+              <a:rPr lang="en-US" sz="1400" dirty="0">
                 <a:solidFill>
                   <a:srgbClr val="E8D8A8"/>
                 </a:solidFill>
@@ -11342,7 +11279,7 @@
               </a:rPr>
               <a:t>Emperor Theodosius I (392 CE) made Christianity the sole official religion</a:t>
             </a:r>
-            <a:endParaRPr lang="en-US" sz="1150" dirty="0"/>
+            <a:endParaRPr lang="en-US" sz="1400" dirty="0"/>
           </a:p>
         </p:txBody>
       </p:sp>
@@ -11391,7 +11328,7 @@
               <a:buNone/>
             </a:pPr>
             <a:r>
-              <a:rPr lang="en-US" sz="1200" b="1" dirty="0">
+              <a:rPr lang="en-US" sz="1400" b="1" dirty="0">
                 <a:solidFill>
                   <a:srgbClr val="C8A020"/>
                 </a:solidFill>
@@ -11399,9 +11336,9 @@
                 <a:ea typeface="Georgia" pitchFamily="34" charset="-122"/>
                 <a:cs typeface="Georgia" pitchFamily="34" charset="-120"/>
               </a:rPr>
-              <a:t>🗺 版圖 Reach</a:t>
-            </a:r>
-            <a:endParaRPr lang="en-US" sz="1200" dirty="0"/>
+              <a:t>■ 版圖 Reach</a:t>
+            </a:r>
+            <a:endParaRPr lang="en-US" sz="1400" dirty="0"/>
           </a:p>
         </p:txBody>
       </p:sp>
@@ -11423,14 +11360,14 @@
           <a:ln/>
         </p:spPr>
         <p:txBody>
-          <a:bodyPr wrap="square" lIns="0" tIns="0" rIns="0" bIns="0" rtlCol="0" anchor="ctr"/>
-          <a:lstStyle/>
-          <a:p>
-            <a:pPr indent="0" marL="0">
-              <a:buNone/>
-            </a:pPr>
-            <a:r>
-              <a:rPr lang="en-US" sz="1150" dirty="0">
+          <a:bodyPr wrap="square" lIns="0" tIns="0" rIns="0" bIns="0" rtlCol="0" anchor="t"/>
+          <a:lstStyle/>
+          <a:p>
+            <a:pPr indent="0" marL="0">
+              <a:buNone/>
+            </a:pPr>
+            <a:r>
+              <a:rPr lang="en-US" sz="1400" dirty="0">
                 <a:solidFill>
                   <a:srgbClr val="E8D8A8"/>
                 </a:solidFill>
@@ -11440,14 +11377,14 @@
               </a:rPr>
               <a:t>600 CE 前，前羅馬帝國幾乎全境皆已基督教化</a:t>
             </a:r>
-            <a:endParaRPr lang="en-US" sz="1150" dirty="0"/>
-          </a:p>
-          <a:p>
-            <a:pPr indent="0" marL="0">
-              <a:buNone/>
-            </a:pPr>
-            <a:r>
-              <a:rPr lang="en-US" sz="1150" dirty="0">
+            <a:endParaRPr lang="en-US" sz="1400" dirty="0"/>
+          </a:p>
+          <a:p>
+            <a:pPr indent="0" marL="0">
+              <a:buNone/>
+            </a:pPr>
+            <a:r>
+              <a:rPr lang="en-US" sz="1400" dirty="0">
                 <a:solidFill>
                   <a:srgbClr val="E8D8A8"/>
                 </a:solidFill>
@@ -11457,7 +11394,7 @@
               </a:rPr>
               <a:t>By 600 CE, virtually all of the former Roman Empire was Christian</a:t>
             </a:r>
-            <a:endParaRPr lang="en-US" sz="1150" dirty="0"/>
+            <a:endParaRPr lang="en-US" sz="1400" dirty="0"/>
           </a:p>
         </p:txBody>
       </p:sp>
@@ -11660,7 +11597,7 @@
               <a:buChar char="•"/>
             </a:pPr>
             <a:r>
-              <a:rPr lang="en-US" sz="1200" dirty="0">
+              <a:rPr lang="en-US" sz="1400" dirty="0">
                 <a:solidFill>
                   <a:srgbClr val="2C1810"/>
                 </a:solidFill>
@@ -11670,7 +11607,7 @@
               </a:rPr>
               <a:t>第二聖殿（ca. 516 BCE – 70 CE）：利未人唱詩班演唱詩篇，豎琴與聖詠相伴</a:t>
             </a:r>
-            <a:endParaRPr lang="en-US" sz="1200" dirty="0"/>
+            <a:endParaRPr lang="en-US" sz="1400" dirty="0"/>
           </a:p>
           <a:p>
             <a:pPr marL="342900" indent="-342900">
@@ -11681,7 +11618,7 @@
               <a:buChar char="•"/>
             </a:pPr>
             <a:r>
-              <a:rPr lang="en-US" sz="1200" dirty="0">
+              <a:rPr lang="en-US" sz="1400" dirty="0">
                 <a:solidFill>
                   <a:srgbClr val="2C1810"/>
                 </a:solidFill>
@@ -11691,7 +11628,7 @@
               </a:rPr>
               <a:t>Second Temple (ca. 516 BCE – 70 CE): Levite choirs sang psalms with harp and psaltery</a:t>
             </a:r>
-            <a:endParaRPr lang="en-US" sz="1200" dirty="0"/>
+            <a:endParaRPr lang="en-US" sz="1400" dirty="0"/>
           </a:p>
           <a:p>
             <a:pPr marL="342900" indent="-342900">
@@ -11702,7 +11639,7 @@
               <a:buChar char="•"/>
             </a:pPr>
             <a:r>
-              <a:rPr lang="en-US" sz="1200" dirty="0">
+              <a:rPr lang="en-US" sz="1400" dirty="0">
                 <a:solidFill>
                   <a:srgbClr val="2C1810"/>
                 </a:solidFill>
@@ -11712,7 +11649,7 @@
               </a:rPr>
               <a:t>節日與安息日舉行犧牲獻祭，配以吹號與銅鈸</a:t>
             </a:r>
-            <a:endParaRPr lang="en-US" sz="1200" dirty="0"/>
+            <a:endParaRPr lang="en-US" sz="1400" dirty="0"/>
           </a:p>
           <a:p>
             <a:pPr marL="342900" indent="-342900">
@@ -11723,7 +11660,7 @@
               <a:buChar char="•"/>
             </a:pPr>
             <a:r>
-              <a:rPr lang="en-US" sz="1200" dirty="0">
+              <a:rPr lang="en-US" sz="1400" dirty="0">
                 <a:solidFill>
                   <a:srgbClr val="2C1810"/>
                 </a:solidFill>
@@ -11733,7 +11670,7 @@
               </a:rPr>
               <a:t>Sacrifices on festivals and Sabbath accompanied by trumpets and cymbals</a:t>
             </a:r>
-            <a:endParaRPr lang="en-US" sz="1200" dirty="0"/>
+            <a:endParaRPr lang="en-US" sz="1400" dirty="0"/>
           </a:p>
           <a:p>
             <a:pPr marL="342900" indent="-342900">
@@ -11744,7 +11681,7 @@
               <a:buChar char="•"/>
             </a:pPr>
             <a:r>
-              <a:rPr lang="en-US" sz="1200" dirty="0">
+              <a:rPr lang="en-US" sz="1400" dirty="0">
                 <a:solidFill>
                   <a:srgbClr val="2C1810"/>
                 </a:solidFill>
@@ -11754,7 +11691,7 @@
               </a:rPr>
               <a:t>70 CE 羅馬摧毀聖殿 → 儀式轉移至會堂（synagogue）</a:t>
             </a:r>
-            <a:endParaRPr lang="en-US" sz="1200" dirty="0"/>
+            <a:endParaRPr lang="en-US" sz="1400" dirty="0"/>
           </a:p>
           <a:p>
             <a:pPr marL="342900" indent="-342900">
@@ -11765,7 +11702,7 @@
               <a:buChar char="•"/>
             </a:pPr>
             <a:r>
-              <a:rPr lang="en-US" sz="1200" dirty="0">
+              <a:rPr lang="en-US" sz="1400" dirty="0">
                 <a:solidFill>
                   <a:srgbClr val="2C1810"/>
                 </a:solidFill>
@@ -11775,7 +11712,7 @@
               </a:rPr>
               <a:t>Romans destroyed the Temple (70 CE) → worship moved to synagogues</a:t>
             </a:r>
-            <a:endParaRPr lang="en-US" sz="1200" dirty="0"/>
+            <a:endParaRPr lang="en-US" sz="1400" dirty="0"/>
           </a:p>
           <a:p>
             <a:pPr marL="342900" indent="-342900">
@@ -11786,7 +11723,7 @@
               <a:buChar char="•"/>
             </a:pPr>
             <a:r>
-              <a:rPr lang="en-US" sz="1200" dirty="0">
+              <a:rPr lang="en-US" sz="1400" dirty="0">
                 <a:solidFill>
                   <a:srgbClr val="2C1810"/>
                 </a:solidFill>
@@ -11796,7 +11733,7 @@
               </a:rPr>
               <a:t>會堂以誦讀聖經為主，採用吟誦（cantillation）公式</a:t>
             </a:r>
-            <a:endParaRPr lang="en-US" sz="1200" dirty="0"/>
+            <a:endParaRPr lang="en-US" sz="1400" dirty="0"/>
           </a:p>
           <a:p>
             <a:pPr marL="342900" indent="-342900">
@@ -11807,7 +11744,7 @@
               <a:buChar char="•"/>
             </a:pPr>
             <a:r>
-              <a:rPr lang="en-US" sz="1200" dirty="0">
+              <a:rPr lang="en-US" sz="1400" dirty="0">
                 <a:solidFill>
                   <a:srgbClr val="2C1810"/>
                 </a:solidFill>
@@ -11817,7 +11754,7 @@
               </a:rPr>
               <a:t>Synagogue centered on public reading of Scripture using cantillation (chanting formulas)</a:t>
             </a:r>
-            <a:endParaRPr lang="en-US" sz="1200" dirty="0"/>
+            <a:endParaRPr lang="en-US" sz="1400" dirty="0"/>
           </a:p>
         </p:txBody>
       </p:sp>
@@ -11874,7 +11811,7 @@
                 <a:ea typeface="Georgia" pitchFamily="34" charset="-122"/>
                 <a:cs typeface="Georgia" pitchFamily="34" charset="-120"/>
               </a:rPr>
-              <a:t>📜 關鍵詞 Key Terms</a:t>
+              <a:t>■ 關鍵詞 Key Terms</a:t>
             </a:r>
             <a:endParaRPr lang="en-US" sz="1400" dirty="0"/>
           </a:p>
@@ -11925,7 +11862,7 @@
               <a:buNone/>
             </a:pPr>
             <a:r>
-              <a:rPr lang="en-US" sz="1250" b="1" dirty="0">
+              <a:rPr lang="en-US" sz="1400" b="1" dirty="0">
                 <a:solidFill>
                   <a:srgbClr val="C8A020"/>
                 </a:solidFill>
@@ -11935,7 +11872,7 @@
               </a:rPr>
               <a:t>Psalms 詩篇</a:t>
             </a:r>
-            <a:endParaRPr lang="en-US" sz="1250" dirty="0"/>
+            <a:endParaRPr lang="en-US" sz="1400" dirty="0"/>
           </a:p>
         </p:txBody>
       </p:sp>
@@ -11957,14 +11894,14 @@
           <a:ln/>
         </p:spPr>
         <p:txBody>
-          <a:bodyPr wrap="square" lIns="0" tIns="0" rIns="0" bIns="0" rtlCol="0" anchor="ctr"/>
-          <a:lstStyle/>
-          <a:p>
-            <a:pPr indent="0" marL="0">
-              <a:buNone/>
-            </a:pPr>
-            <a:r>
-              <a:rPr lang="en-US" sz="1050" dirty="0">
+          <a:bodyPr wrap="square" lIns="0" tIns="0" rIns="0" bIns="0" rtlCol="0" anchor="t"/>
+          <a:lstStyle/>
+          <a:p>
+            <a:pPr indent="0" marL="0">
+              <a:buNone/>
+            </a:pPr>
+            <a:r>
+              <a:rPr lang="en-US" sz="1400" dirty="0">
                 <a:solidFill>
                   <a:srgbClr val="FBF5E6"/>
                 </a:solidFill>
@@ -11974,7 +11911,7 @@
               </a:rPr>
               <a:t>希伯來詩歌聖詩；基督教與猶太教皆用</a:t>
             </a:r>
-            <a:endParaRPr lang="en-US" sz="1050" dirty="0"/>
+            <a:endParaRPr lang="en-US" sz="1400" dirty="0"/>
           </a:p>
         </p:txBody>
       </p:sp>
@@ -12023,7 +11960,7 @@
               <a:buNone/>
             </a:pPr>
             <a:r>
-              <a:rPr lang="en-US" sz="1250" b="1" dirty="0">
+              <a:rPr lang="en-US" sz="1400" b="1" dirty="0">
                 <a:solidFill>
                   <a:srgbClr val="C8A020"/>
                 </a:solidFill>
@@ -12033,7 +11970,7 @@
               </a:rPr>
               <a:t>Cantillation 吟誦</a:t>
             </a:r>
-            <a:endParaRPr lang="en-US" sz="1250" dirty="0"/>
+            <a:endParaRPr lang="en-US" sz="1400" dirty="0"/>
           </a:p>
         </p:txBody>
       </p:sp>
@@ -12055,14 +11992,14 @@
           <a:ln/>
         </p:spPr>
         <p:txBody>
-          <a:bodyPr wrap="square" lIns="0" tIns="0" rIns="0" bIns="0" rtlCol="0" anchor="ctr"/>
-          <a:lstStyle/>
-          <a:p>
-            <a:pPr indent="0" marL="0">
-              <a:buNone/>
-            </a:pPr>
-            <a:r>
-              <a:rPr lang="en-US" sz="1050" dirty="0">
+          <a:bodyPr wrap="square" lIns="0" tIns="0" rIns="0" bIns="0" rtlCol="0" anchor="t"/>
+          <a:lstStyle/>
+          <a:p>
+            <a:pPr indent="0" marL="0">
+              <a:buNone/>
+            </a:pPr>
+            <a:r>
+              <a:rPr lang="en-US" sz="1400" dirty="0">
                 <a:solidFill>
                   <a:srgbClr val="FBF5E6"/>
                 </a:solidFill>
@@ -12072,7 +12009,7 @@
               </a:rPr>
               <a:t>以旋律公式演唱聖典，依句法分段</a:t>
             </a:r>
-            <a:endParaRPr lang="en-US" sz="1050" dirty="0"/>
+            <a:endParaRPr lang="en-US" sz="1400" dirty="0"/>
           </a:p>
         </p:txBody>
       </p:sp>
@@ -12121,7 +12058,7 @@
               <a:buNone/>
             </a:pPr>
             <a:r>
-              <a:rPr lang="en-US" sz="1250" b="1" dirty="0">
+              <a:rPr lang="en-US" sz="1400" b="1" dirty="0">
                 <a:solidFill>
                   <a:srgbClr val="C8A020"/>
                 </a:solidFill>
@@ -12131,7 +12068,7 @@
               </a:rPr>
               <a:t>Levites 利未人</a:t>
             </a:r>
-            <a:endParaRPr lang="en-US" sz="1250" dirty="0"/>
+            <a:endParaRPr lang="en-US" sz="1400" dirty="0"/>
           </a:p>
         </p:txBody>
       </p:sp>
@@ -12153,14 +12090,14 @@
           <a:ln/>
         </p:spPr>
         <p:txBody>
-          <a:bodyPr wrap="square" lIns="0" tIns="0" rIns="0" bIns="0" rtlCol="0" anchor="ctr"/>
-          <a:lstStyle/>
-          <a:p>
-            <a:pPr indent="0" marL="0">
-              <a:buNone/>
-            </a:pPr>
-            <a:r>
-              <a:rPr lang="en-US" sz="1050" dirty="0">
+          <a:bodyPr wrap="square" lIns="0" tIns="0" rIns="0" bIns="0" rtlCol="0" anchor="t"/>
+          <a:lstStyle/>
+          <a:p>
+            <a:pPr indent="0" marL="0">
+              <a:buNone/>
+            </a:pPr>
+            <a:r>
+              <a:rPr lang="en-US" sz="1400" dirty="0">
                 <a:solidFill>
                   <a:srgbClr val="FBF5E6"/>
                 </a:solidFill>
@@ -12170,7 +12107,7 @@
               </a:rPr>
               <a:t>聖殿中負責音樂的祭司階層</a:t>
             </a:r>
-            <a:endParaRPr lang="en-US" sz="1050" dirty="0"/>
+            <a:endParaRPr lang="en-US" sz="1400" dirty="0"/>
           </a:p>
         </p:txBody>
       </p:sp>
@@ -12219,7 +12156,7 @@
               <a:buNone/>
             </a:pPr>
             <a:r>
-              <a:rPr lang="en-US" sz="1250" b="1" dirty="0">
+              <a:rPr lang="en-US" sz="1400" b="1" dirty="0">
                 <a:solidFill>
                   <a:srgbClr val="C8A020"/>
                 </a:solidFill>
@@ -12229,7 +12166,7 @@
               </a:rPr>
               <a:t>Synagogue 會堂</a:t>
             </a:r>
-            <a:endParaRPr lang="en-US" sz="1250" dirty="0"/>
+            <a:endParaRPr lang="en-US" sz="1400" dirty="0"/>
           </a:p>
         </p:txBody>
       </p:sp>
@@ -12251,14 +12188,14 @@
           <a:ln/>
         </p:spPr>
         <p:txBody>
-          <a:bodyPr wrap="square" lIns="0" tIns="0" rIns="0" bIns="0" rtlCol="0" anchor="ctr"/>
-          <a:lstStyle/>
-          <a:p>
-            <a:pPr indent="0" marL="0">
-              <a:buNone/>
-            </a:pPr>
-            <a:r>
-              <a:rPr lang="en-US" sz="1050" dirty="0">
+          <a:bodyPr wrap="square" lIns="0" tIns="0" rIns="0" bIns="0" rtlCol="0" anchor="t"/>
+          <a:lstStyle/>
+          <a:p>
+            <a:pPr indent="0" marL="0">
+              <a:buNone/>
+            </a:pPr>
+            <a:r>
+              <a:rPr lang="en-US" sz="1400" dirty="0">
                 <a:solidFill>
                   <a:srgbClr val="FBF5E6"/>
                 </a:solidFill>
@@ -12268,7 +12205,7 @@
               </a:rPr>
               <a:t>猶太教聚會場所，聖殿崩毀後的禮拜中心</a:t>
             </a:r>
-            <a:endParaRPr lang="en-US" sz="1050" dirty="0"/>
+            <a:endParaRPr lang="en-US" sz="1400" dirty="0"/>
           </a:p>
         </p:txBody>
       </p:sp>
@@ -12421,14 +12358,14 @@
           <a:ln/>
         </p:spPr>
         <p:txBody>
-          <a:bodyPr wrap="square" rtlCol="0" anchor="ctr"/>
-          <a:lstStyle/>
-          <a:p>
-            <a:pPr indent="0" marL="0">
-              <a:buNone/>
-            </a:pPr>
-            <a:r>
-              <a:rPr lang="en-US" sz="1200" i="1" dirty="0">
+          <a:bodyPr wrap="square" rtlCol="0" anchor="t"/>
+          <a:lstStyle/>
+          <a:p>
+            <a:pPr indent="0" marL="0">
+              <a:buNone/>
+            </a:pPr>
+            <a:r>
+              <a:rPr lang="en-US" sz="1400" i="1" dirty="0">
                 <a:solidFill>
                   <a:srgbClr val="4A3828"/>
                 </a:solidFill>
@@ -12438,14 +12375,14 @@
               </a:rPr>
               <a:t>最早有文字記載的基督教音樂活動是演唱讚美詩與詩篇（馬太 26:30；馬可 14:26；以弗所書 5:19）</a:t>
             </a:r>
-            <a:endParaRPr lang="en-US" sz="1200" dirty="0"/>
-          </a:p>
-          <a:p>
-            <a:pPr indent="0" marL="0">
-              <a:buNone/>
-            </a:pPr>
-            <a:r>
-              <a:rPr lang="en-US" sz="1200" i="1" dirty="0">
+            <a:endParaRPr lang="en-US" sz="1400" dirty="0"/>
+          </a:p>
+          <a:p>
+            <a:pPr indent="0" marL="0">
+              <a:buNone/>
+            </a:pPr>
+            <a:r>
+              <a:rPr lang="en-US" sz="1400" i="1" dirty="0">
                 <a:solidFill>
                   <a:srgbClr val="4A3828"/>
                 </a:solidFill>
@@ -12455,7 +12392,7 @@
               </a:rPr>
               <a:t>Earliest recorded musical activity: singing hymns and psalms (Matthew 26:30; Ephesians 5:19)</a:t>
             </a:r>
-            <a:endParaRPr lang="en-US" sz="1200" dirty="0"/>
+            <a:endParaRPr lang="en-US" sz="1400" dirty="0"/>
           </a:p>
         </p:txBody>
       </p:sp>
@@ -12509,7 +12446,7 @@
                   <a:srgbClr val="000000"/>
                 </a:solidFill>
               </a:rPr>
-              <a:t>🏛</a:t>
+              <a:t>■</a:t>
             </a:r>
             <a:endParaRPr lang="en-US" sz="2200" dirty="0"/>
           </a:p>
@@ -12554,7 +12491,7 @@
               <a:buNone/>
             </a:pPr>
             <a:r>
-              <a:rPr lang="en-US" sz="1300" b="1" dirty="0">
+              <a:rPr lang="en-US" sz="1400" b="1" dirty="0">
                 <a:solidFill>
                   <a:srgbClr val="C8A020"/>
                 </a:solidFill>
@@ -12564,7 +12501,7 @@
               </a:rPr>
               <a:t>Basilica</a:t>
             </a:r>
-            <a:endParaRPr lang="en-US" sz="1300" dirty="0"/>
+            <a:endParaRPr lang="en-US" sz="1400" dirty="0"/>
           </a:p>
         </p:txBody>
       </p:sp>
@@ -12606,14 +12543,14 @@
           <a:ln/>
         </p:spPr>
         <p:txBody>
-          <a:bodyPr wrap="square" rtlCol="0" anchor="ctr"/>
+          <a:bodyPr wrap="square" rtlCol="0" anchor="t"/>
           <a:lstStyle/>
           <a:p>
             <a:pPr algn="ctr" indent="0" marL="0">
               <a:buNone/>
             </a:pPr>
             <a:r>
-              <a:rPr lang="en-US" sz="1050" dirty="0">
+              <a:rPr lang="en-US" sz="1400" dirty="0">
                 <a:solidFill>
                   <a:srgbClr val="FBF5E6"/>
                 </a:solidFill>
@@ -12621,16 +12558,16 @@
                 <a:ea typeface="Calibri" pitchFamily="34" charset="-122"/>
                 <a:cs typeface="Calibri" pitchFamily="34" charset="-120"/>
               </a:rPr>
-              <a:t>四世紀起，公開禮拜在大型長方形教堂（會堂式）舉行</a:t>
-            </a:r>
-            <a:endParaRPr lang="en-US" sz="1050" dirty="0"/>
+              <a:t>四世紀起公開禮拜在大型教堂舉行</a:t>
+            </a:r>
+            <a:endParaRPr lang="en-US" sz="1400" dirty="0"/>
           </a:p>
           <a:p>
             <a:pPr algn="ctr" indent="0" marL="0">
               <a:buNone/>
             </a:pPr>
             <a:r>
-              <a:rPr lang="en-US" sz="1050" dirty="0">
+              <a:rPr lang="en-US" sz="1400" dirty="0">
                 <a:solidFill>
                   <a:srgbClr val="FBF5E6"/>
                 </a:solidFill>
@@ -12638,9 +12575,9 @@
                 <a:ea typeface="Calibri" pitchFamily="34" charset="-122"/>
                 <a:cs typeface="Calibri" pitchFamily="34" charset="-120"/>
               </a:rPr>
-              <a:t>吟誦詩篇更有助於聲音傳播</a:t>
-            </a:r>
-            <a:endParaRPr lang="en-US" sz="1050" dirty="0"/>
+              <a:t>吟誦有助聲音傳播</a:t>
+            </a:r>
+            <a:endParaRPr lang="en-US" sz="1400" dirty="0"/>
           </a:p>
         </p:txBody>
       </p:sp>
@@ -12662,14 +12599,14 @@
           <a:ln/>
         </p:spPr>
         <p:txBody>
-          <a:bodyPr wrap="square" rtlCol="0" anchor="ctr"/>
+          <a:bodyPr wrap="square" rtlCol="0" anchor="t"/>
           <a:lstStyle/>
           <a:p>
             <a:pPr algn="ctr" indent="0" marL="0">
               <a:buNone/>
             </a:pPr>
             <a:r>
-              <a:rPr lang="en-US" sz="1000" i="1" dirty="0">
+              <a:rPr lang="en-US" sz="1400" i="1" dirty="0">
                 <a:solidFill>
                   <a:srgbClr val="E8D8A8"/>
                 </a:solidFill>
@@ -12679,14 +12616,14 @@
               </a:rPr>
               <a:t>Large basilica buildings</a:t>
             </a:r>
-            <a:endParaRPr lang="en-US" sz="1000" dirty="0"/>
+            <a:endParaRPr lang="en-US" sz="1400" dirty="0"/>
           </a:p>
           <a:p>
             <a:pPr algn="ctr" indent="0" marL="0">
               <a:buNone/>
             </a:pPr>
             <a:r>
-              <a:rPr lang="en-US" sz="1000" i="1" dirty="0">
+              <a:rPr lang="en-US" sz="1400" i="1" dirty="0">
                 <a:solidFill>
                   <a:srgbClr val="E8D8A8"/>
                 </a:solidFill>
@@ -12696,7 +12633,7 @@
               </a:rPr>
               <a:t>chanting carries clearly</a:t>
             </a:r>
-            <a:endParaRPr lang="en-US" sz="1000" dirty="0"/>
+            <a:endParaRPr lang="en-US" sz="1400" dirty="0"/>
           </a:p>
         </p:txBody>
       </p:sp>
@@ -12750,7 +12687,7 @@
                   <a:srgbClr val="000000"/>
                 </a:solidFill>
               </a:rPr>
-              <a:t>🙏</a:t>
+              <a:t>■</a:t>
             </a:r>
             <a:endParaRPr lang="en-US" sz="2200" dirty="0"/>
           </a:p>
@@ -12795,7 +12732,7 @@
               <a:buNone/>
             </a:pPr>
             <a:r>
-              <a:rPr lang="en-US" sz="1300" b="1" dirty="0">
+              <a:rPr lang="en-US" sz="1400" b="1" dirty="0">
                 <a:solidFill>
                   <a:srgbClr val="C8A020"/>
                 </a:solidFill>
@@ -12805,7 +12742,7 @@
               </a:rPr>
               <a:t>Monasteries</a:t>
             </a:r>
-            <a:endParaRPr lang="en-US" sz="1300" dirty="0"/>
+            <a:endParaRPr lang="en-US" sz="1400" dirty="0"/>
           </a:p>
         </p:txBody>
       </p:sp>
@@ -12847,14 +12784,14 @@
           <a:ln/>
         </p:spPr>
         <p:txBody>
-          <a:bodyPr wrap="square" rtlCol="0" anchor="ctr"/>
+          <a:bodyPr wrap="square" rtlCol="0" anchor="t"/>
           <a:lstStyle/>
           <a:p>
             <a:pPr algn="ctr" indent="0" marL="0">
               <a:buNone/>
             </a:pPr>
             <a:r>
-              <a:rPr lang="en-US" sz="1050" dirty="0">
+              <a:rPr lang="en-US" sz="1400" dirty="0">
                 <a:solidFill>
                   <a:srgbClr val="FBF5E6"/>
                 </a:solidFill>
@@ -12862,16 +12799,16 @@
                 <a:ea typeface="Calibri" pitchFamily="34" charset="-122"/>
                 <a:cs typeface="Calibri" pitchFamily="34" charset="-120"/>
               </a:rPr>
-              <a:t>修士每日數次吟誦詩篇，是靈性操練的核心</a:t>
-            </a:r>
-            <a:endParaRPr lang="en-US" sz="1050" dirty="0"/>
+              <a:t>修士每日數次吟誦詩篇</a:t>
+            </a:r>
+            <a:endParaRPr lang="en-US" sz="1400" dirty="0"/>
           </a:p>
           <a:p>
             <a:pPr algn="ctr" indent="0" marL="0">
               <a:buNone/>
             </a:pPr>
             <a:r>
-              <a:rPr lang="en-US" sz="1050" dirty="0">
+              <a:rPr lang="en-US" sz="1400" dirty="0">
                 <a:solidFill>
                   <a:srgbClr val="FBF5E6"/>
                 </a:solidFill>
@@ -12879,9 +12816,9 @@
                 <a:ea typeface="Calibri" pitchFamily="34" charset="-122"/>
                 <a:cs typeface="Calibri" pitchFamily="34" charset="-120"/>
               </a:rPr>
-              <a:t>Monastic life centered on regular psalm singing many times daily</a:t>
-            </a:r>
-            <a:endParaRPr lang="en-US" sz="1050" dirty="0"/>
+              <a:t>靈性操練的核心</a:t>
+            </a:r>
+            <a:endParaRPr lang="en-US" sz="1400" dirty="0"/>
           </a:p>
         </p:txBody>
       </p:sp>
@@ -12903,14 +12840,14 @@
           <a:ln/>
         </p:spPr>
         <p:txBody>
-          <a:bodyPr wrap="square" rtlCol="0" anchor="ctr"/>
+          <a:bodyPr wrap="square" rtlCol="0" anchor="t"/>
           <a:lstStyle/>
           <a:p>
             <a:pPr algn="ctr" indent="0" marL="0">
               <a:buNone/>
             </a:pPr>
             <a:r>
-              <a:rPr lang="en-US" sz="1000" i="1" dirty="0">
+              <a:rPr lang="en-US" sz="1400" i="1" dirty="0">
                 <a:solidFill>
                   <a:srgbClr val="E8D8A8"/>
                 </a:solidFill>
@@ -12920,14 +12857,14 @@
               </a:rPr>
               <a:t>Psalm singing</a:t>
             </a:r>
-            <a:endParaRPr lang="en-US" sz="1000" dirty="0"/>
+            <a:endParaRPr lang="en-US" sz="1400" dirty="0"/>
           </a:p>
           <a:p>
             <a:pPr algn="ctr" indent="0" marL="0">
               <a:buNone/>
             </a:pPr>
             <a:r>
-              <a:rPr lang="en-US" sz="1000" i="1" dirty="0">
+              <a:rPr lang="en-US" sz="1400" i="1" dirty="0">
                 <a:solidFill>
                   <a:srgbClr val="E8D8A8"/>
                 </a:solidFill>
@@ -12937,7 +12874,7 @@
               </a:rPr>
               <a:t>as spiritual discipline</a:t>
             </a:r>
-            <a:endParaRPr lang="en-US" sz="1000" dirty="0"/>
+            <a:endParaRPr lang="en-US" sz="1400" dirty="0"/>
           </a:p>
         </p:txBody>
       </p:sp>
@@ -12991,7 +12928,7 @@
                   <a:srgbClr val="000000"/>
                 </a:solidFill>
               </a:rPr>
-              <a:t>📖</a:t>
+              <a:t>■</a:t>
             </a:r>
             <a:endParaRPr lang="en-US" sz="2200" dirty="0"/>
           </a:p>
@@ -13036,7 +12973,7 @@
               <a:buNone/>
             </a:pPr>
             <a:r>
-              <a:rPr lang="en-US" sz="1300" b="1" dirty="0">
+              <a:rPr lang="en-US" sz="1400" b="1" dirty="0">
                 <a:solidFill>
                   <a:srgbClr val="C8A020"/>
                 </a:solidFill>
@@ -13046,7 +12983,7 @@
               </a:rPr>
               <a:t>Church Fathers</a:t>
             </a:r>
-            <a:endParaRPr lang="en-US" sz="1300" dirty="0"/>
+            <a:endParaRPr lang="en-US" sz="1400" dirty="0"/>
           </a:p>
         </p:txBody>
       </p:sp>
@@ -13088,14 +13025,14 @@
           <a:ln/>
         </p:spPr>
         <p:txBody>
-          <a:bodyPr wrap="square" rtlCol="0" anchor="ctr"/>
+          <a:bodyPr wrap="square" rtlCol="0" anchor="t"/>
           <a:lstStyle/>
           <a:p>
             <a:pPr algn="ctr" indent="0" marL="0">
               <a:buNone/>
             </a:pPr>
             <a:r>
-              <a:rPr lang="en-US" sz="1050" dirty="0">
+              <a:rPr lang="en-US" sz="1400" dirty="0">
                 <a:solidFill>
                   <a:srgbClr val="FBF5E6"/>
                 </a:solidFill>
@@ -13103,26 +13040,9 @@
                 <a:ea typeface="Calibri" pitchFamily="34" charset="-122"/>
                 <a:cs typeface="Calibri" pitchFamily="34" charset="-120"/>
               </a:rPr>
-              <a:t>聖巴西流、聖奧古斯丁等以希臘哲學觀詮釋音樂</a:t>
-            </a:r>
-            <a:endParaRPr lang="en-US" sz="1050" dirty="0"/>
-          </a:p>
-          <a:p>
-            <a:pPr algn="ctr" indent="0" marL="0">
-              <a:buNone/>
-            </a:pPr>
-            <a:r>
-              <a:rPr lang="en-US" sz="1050" dirty="0">
-                <a:solidFill>
-                  <a:srgbClr val="FBF5E6"/>
-                </a:solidFill>
-                <a:latin typeface="Calibri" pitchFamily="34" charset="0"/>
-                <a:ea typeface="Calibri" pitchFamily="34" charset="-122"/>
-                <a:cs typeface="Calibri" pitchFamily="34" charset="-120"/>
-              </a:rPr>
-              <a:t>Church Fathers interpreted music using Greek philosophy</a:t>
-            </a:r>
-            <a:endParaRPr lang="en-US" sz="1050" dirty="0"/>
+              <a:t>聖巴西流、聖奧古斯丁以希臘哲學詮釋音樂</a:t>
+            </a:r>
+            <a:endParaRPr lang="en-US" sz="1400" dirty="0"/>
           </a:p>
         </p:txBody>
       </p:sp>
@@ -13144,14 +13064,14 @@
           <a:ln/>
         </p:spPr>
         <p:txBody>
-          <a:bodyPr wrap="square" rtlCol="0" anchor="ctr"/>
+          <a:bodyPr wrap="square" rtlCol="0" anchor="t"/>
           <a:lstStyle/>
           <a:p>
             <a:pPr algn="ctr" indent="0" marL="0">
               <a:buNone/>
             </a:pPr>
             <a:r>
-              <a:rPr lang="en-US" sz="1000" i="1" dirty="0">
+              <a:rPr lang="en-US" sz="1400" i="1" dirty="0">
                 <a:solidFill>
                   <a:srgbClr val="E8D8A8"/>
                 </a:solidFill>
@@ -13161,14 +13081,14 @@
               </a:rPr>
               <a:t>Music shapes soul</a:t>
             </a:r>
-            <a:endParaRPr lang="en-US" sz="1000" dirty="0"/>
+            <a:endParaRPr lang="en-US" sz="1400" dirty="0"/>
           </a:p>
           <a:p>
             <a:pPr algn="ctr" indent="0" marL="0">
               <a:buNone/>
             </a:pPr>
             <a:r>
-              <a:rPr lang="en-US" sz="1000" i="1" dirty="0">
+              <a:rPr lang="en-US" sz="1400" i="1" dirty="0">
                 <a:solidFill>
                   <a:srgbClr val="E8D8A8"/>
                 </a:solidFill>
@@ -13176,9 +13096,9 @@
                 <a:ea typeface="Calibri" pitchFamily="34" charset="-122"/>
                 <a:cs typeface="Calibri" pitchFamily="34" charset="-120"/>
               </a:rPr>
-              <a:t>but pleasure is suspect</a:t>
-            </a:r>
-            <a:endParaRPr lang="en-US" sz="1000" dirty="0"/>
+              <a:t>but pleasure suspect</a:t>
+            </a:r>
+            <a:endParaRPr lang="en-US" sz="1400" dirty="0"/>
           </a:p>
         </p:txBody>
       </p:sp>
@@ -13232,7 +13152,7 @@
                   <a:srgbClr val="000000"/>
                 </a:solidFill>
               </a:rPr>
-              <a:t>🚫</a:t>
+              <a:t>■</a:t>
             </a:r>
             <a:endParaRPr lang="en-US" sz="2200" dirty="0"/>
           </a:p>
@@ -13277,7 +13197,7 @@
               <a:buNone/>
             </a:pPr>
             <a:r>
-              <a:rPr lang="en-US" sz="1300" b="1" dirty="0">
+              <a:rPr lang="en-US" sz="1400" b="1" dirty="0">
                 <a:solidFill>
                   <a:srgbClr val="C8A020"/>
                 </a:solidFill>
@@ -13287,7 +13207,7 @@
               </a:rPr>
               <a:t>Instruments</a:t>
             </a:r>
-            <a:endParaRPr lang="en-US" sz="1300" dirty="0"/>
+            <a:endParaRPr lang="en-US" sz="1400" dirty="0"/>
           </a:p>
         </p:txBody>
       </p:sp>
@@ -13329,14 +13249,14 @@
           <a:ln/>
         </p:spPr>
         <p:txBody>
-          <a:bodyPr wrap="square" rtlCol="0" anchor="ctr"/>
+          <a:bodyPr wrap="square" rtlCol="0" anchor="t"/>
           <a:lstStyle/>
           <a:p>
             <a:pPr algn="ctr" indent="0" marL="0">
               <a:buNone/>
             </a:pPr>
             <a:r>
-              <a:rPr lang="en-US" sz="1050" dirty="0">
+              <a:rPr lang="en-US" sz="1400" dirty="0">
                 <a:solidFill>
                   <a:srgbClr val="FBF5E6"/>
                 </a:solidFill>
@@ -13344,16 +13264,16 @@
                 <a:ea typeface="Calibri" pitchFamily="34" charset="-122"/>
                 <a:cs typeface="Calibri" pitchFamily="34" charset="-120"/>
               </a:rPr>
-              <a:t>早期教會禁用器樂——音樂只服侍語言，器樂沒有文字</a:t>
-            </a:r>
-            <a:endParaRPr lang="en-US" sz="1050" dirty="0"/>
+              <a:t>早期教會禁用器樂</a:t>
+            </a:r>
+            <a:endParaRPr lang="en-US" sz="1400" dirty="0"/>
           </a:p>
           <a:p>
             <a:pPr algn="ctr" indent="0" marL="0">
               <a:buNone/>
             </a:pPr>
             <a:r>
-              <a:rPr lang="en-US" sz="1050" dirty="0">
+              <a:rPr lang="en-US" sz="1400" dirty="0">
                 <a:solidFill>
                   <a:srgbClr val="FBF5E6"/>
                 </a:solidFill>
@@ -13361,9 +13281,9 @@
                 <a:ea typeface="Calibri" pitchFamily="34" charset="-122"/>
                 <a:cs typeface="Calibri" pitchFamily="34" charset="-120"/>
               </a:rPr>
-              <a:t>Instruments banned: music must serve words; instruments lack text</a:t>
-            </a:r>
-            <a:endParaRPr lang="en-US" sz="1050" dirty="0"/>
+              <a:t>音樂只服侍語言</a:t>
+            </a:r>
+            <a:endParaRPr lang="en-US" sz="1400" dirty="0"/>
           </a:p>
         </p:txBody>
       </p:sp>
@@ -13385,14 +13305,14 @@
           <a:ln/>
         </p:spPr>
         <p:txBody>
-          <a:bodyPr wrap="square" rtlCol="0" anchor="ctr"/>
+          <a:bodyPr wrap="square" rtlCol="0" anchor="t"/>
           <a:lstStyle/>
           <a:p>
             <a:pPr algn="ctr" indent="0" marL="0">
               <a:buNone/>
             </a:pPr>
             <a:r>
-              <a:rPr lang="en-US" sz="1000" i="1" dirty="0">
+              <a:rPr lang="en-US" sz="1400" i="1" dirty="0">
                 <a:solidFill>
                   <a:srgbClr val="E8D8A8"/>
                 </a:solidFill>
@@ -13402,14 +13322,14 @@
               </a:rPr>
               <a:t>Unaccompanied singing</a:t>
             </a:r>
-            <a:endParaRPr lang="en-US" sz="1000" dirty="0"/>
+            <a:endParaRPr lang="en-US" sz="1400" dirty="0"/>
           </a:p>
           <a:p>
             <a:pPr algn="ctr" indent="0" marL="0">
               <a:buNone/>
             </a:pPr>
             <a:r>
-              <a:rPr lang="en-US" sz="1000" i="1" dirty="0">
+              <a:rPr lang="en-US" sz="1400" i="1" dirty="0">
                 <a:solidFill>
                   <a:srgbClr val="E8D8A8"/>
                 </a:solidFill>
@@ -13417,9 +13337,9 @@
                 <a:ea typeface="Calibri" pitchFamily="34" charset="-122"/>
                 <a:cs typeface="Calibri" pitchFamily="34" charset="-120"/>
               </a:rPr>
-              <a:t>for over a millennium</a:t>
-            </a:r>
-            <a:endParaRPr lang="en-US" sz="1000" dirty="0"/>
+              <a:t>for a millennium</a:t>
+            </a:r>
+            <a:endParaRPr lang="en-US" sz="1400" dirty="0"/>
           </a:p>
         </p:txBody>
       </p:sp>
@@ -13707,14 +13627,14 @@
           <a:ln/>
         </p:spPr>
         <p:txBody>
-          <a:bodyPr wrap="square" rtlCol="0" anchor="ctr"/>
-          <a:lstStyle/>
-          <a:p>
-            <a:pPr indent="0" marL="0">
-              <a:buNone/>
-            </a:pPr>
-            <a:r>
-              <a:rPr lang="en-US" sz="1150" dirty="0">
+          <a:bodyPr wrap="square" rtlCol="0" anchor="t"/>
+          <a:lstStyle/>
+          <a:p>
+            <a:pPr indent="0" marL="0">
+              <a:buNone/>
+            </a:pPr>
+            <a:r>
+              <a:rPr lang="en-US" sz="1400" dirty="0">
                 <a:solidFill>
                   <a:srgbClr val="E8D8A8"/>
                 </a:solidFill>
@@ -13724,20 +13644,20 @@
               </a:rPr>
               <a:t>「聖靈見人心傾向罪惡，便將教義的甘甜與旋律融合，以使人在不知不覺中受到教化。」</a:t>
             </a:r>
-            <a:endParaRPr lang="en-US" sz="1150" dirty="0"/>
-          </a:p>
-          <a:p>
-            <a:pPr indent="0" marL="0">
-              <a:buNone/>
-            </a:pPr>
-            <a:endParaRPr lang="en-US" sz="1150" dirty="0"/>
-          </a:p>
-          <a:p>
-            <a:pPr indent="0" marL="0">
-              <a:buNone/>
-            </a:pPr>
-            <a:r>
-              <a:rPr lang="en-US" sz="1150" dirty="0">
+            <a:endParaRPr lang="en-US" sz="1400" dirty="0"/>
+          </a:p>
+          <a:p>
+            <a:pPr indent="0" marL="0">
+              <a:buNone/>
+            </a:pPr>
+            <a:endParaRPr lang="en-US" sz="1400" dirty="0"/>
+          </a:p>
+          <a:p>
+            <a:pPr indent="0" marL="0">
+              <a:buNone/>
+            </a:pPr>
+            <a:r>
+              <a:rPr lang="en-US" sz="1400" dirty="0">
                 <a:solidFill>
                   <a:srgbClr val="E8D8A8"/>
                 </a:solidFill>
@@ -13747,20 +13667,20 @@
               </a:rPr>
               <a:t>The Holy Spirit blended the delight of melody with doctrine, so that through the pleasantness of what is heard, we might unawares receive what is useful.</a:t>
             </a:r>
-            <a:endParaRPr lang="en-US" sz="1150" dirty="0"/>
-          </a:p>
-          <a:p>
-            <a:pPr indent="0" marL="0">
-              <a:buNone/>
-            </a:pPr>
-            <a:endParaRPr lang="en-US" sz="1150" dirty="0"/>
-          </a:p>
-          <a:p>
-            <a:pPr indent="0" marL="0">
-              <a:buNone/>
-            </a:pPr>
-            <a:r>
-              <a:rPr lang="en-US" sz="1150" dirty="0">
+            <a:endParaRPr lang="en-US" sz="1400" dirty="0"/>
+          </a:p>
+          <a:p>
+            <a:pPr indent="0" marL="0">
+              <a:buNone/>
+            </a:pPr>
+            <a:endParaRPr lang="en-US" sz="1400" dirty="0"/>
+          </a:p>
+          <a:p>
+            <a:pPr indent="0" marL="0">
+              <a:buNone/>
+            </a:pPr>
+            <a:r>
+              <a:rPr lang="en-US" sz="1400" dirty="0">
                 <a:solidFill>
                   <a:srgbClr val="E8D8A8"/>
                 </a:solidFill>
@@ -13770,14 +13690,14 @@
               </a:rPr>
               <a:t>讚美詩篇演唱：培育靈魂、凝聚社群、以音樂驅逐怒氣</a:t>
             </a:r>
-            <a:endParaRPr lang="en-US" sz="1150" dirty="0"/>
-          </a:p>
-          <a:p>
-            <a:pPr indent="0" marL="0">
-              <a:buNone/>
-            </a:pPr>
-            <a:r>
-              <a:rPr lang="en-US" sz="1150" dirty="0">
+            <a:endParaRPr lang="en-US" sz="1400" dirty="0"/>
+          </a:p>
+          <a:p>
+            <a:pPr indent="0" marL="0">
+              <a:buNone/>
+            </a:pPr>
+            <a:r>
+              <a:rPr lang="en-US" sz="1400" dirty="0">
                 <a:solidFill>
                   <a:srgbClr val="E8D8A8"/>
                 </a:solidFill>
@@ -13787,7 +13707,7 @@
               </a:rPr>
               <a:t>Psalm-singing: educates the soul, builds community, calms anger</a:t>
             </a:r>
-            <a:endParaRPr lang="en-US" sz="1150" dirty="0"/>
+            <a:endParaRPr lang="en-US" sz="1400" dirty="0"/>
           </a:p>
         </p:txBody>
       </p:sp>
@@ -13905,14 +13825,14 @@
           <a:ln/>
         </p:spPr>
         <p:txBody>
-          <a:bodyPr wrap="square" rtlCol="0" anchor="ctr"/>
-          <a:lstStyle/>
-          <a:p>
-            <a:pPr indent="0" marL="0">
-              <a:buNone/>
-            </a:pPr>
-            <a:r>
-              <a:rPr lang="en-US" sz="1150" dirty="0">
+          <a:bodyPr wrap="square" rtlCol="0" anchor="t"/>
+          <a:lstStyle/>
+          <a:p>
+            <a:pPr indent="0" marL="0">
+              <a:buNone/>
+            </a:pPr>
+            <a:r>
+              <a:rPr lang="en-US" sz="1400" dirty="0">
                 <a:solidFill>
                   <a:srgbClr val="E8D8A8"/>
                 </a:solidFill>
@@ -13922,20 +13842,20 @@
               </a:rPr>
               <a:t>「我在歌聲中所獲的感動……與歌詞的含意俱來；我承認這種做法是有益的。」</a:t>
             </a:r>
-            <a:endParaRPr lang="en-US" sz="1150" dirty="0"/>
-          </a:p>
-          <a:p>
-            <a:pPr indent="0" marL="0">
-              <a:buNone/>
-            </a:pPr>
-            <a:endParaRPr lang="en-US" sz="1150" dirty="0"/>
-          </a:p>
-          <a:p>
-            <a:pPr indent="0" marL="0">
-              <a:buNone/>
-            </a:pPr>
-            <a:r>
-              <a:rPr lang="en-US" sz="1150" dirty="0">
+            <a:endParaRPr lang="en-US" sz="1400" dirty="0"/>
+          </a:p>
+          <a:p>
+            <a:pPr indent="0" marL="0">
+              <a:buNone/>
+            </a:pPr>
+            <a:endParaRPr lang="en-US" sz="1400" dirty="0"/>
+          </a:p>
+          <a:p>
+            <a:pPr indent="0" marL="0">
+              <a:buNone/>
+            </a:pPr>
+            <a:r>
+              <a:rPr lang="en-US" sz="1400" dirty="0">
                 <a:solidFill>
                   <a:srgbClr val="E8D8A8"/>
                 </a:solidFill>
@@ -13945,20 +13865,20 @@
               </a:rPr>
               <a:t>I acknowledge the great benefit of singing in church, while wavering between the peril of pleasure and the benefit of my experience.</a:t>
             </a:r>
-            <a:endParaRPr lang="en-US" sz="1150" dirty="0"/>
-          </a:p>
-          <a:p>
-            <a:pPr indent="0" marL="0">
-              <a:buNone/>
-            </a:pPr>
-            <a:endParaRPr lang="en-US" sz="1150" dirty="0"/>
-          </a:p>
-          <a:p>
-            <a:pPr indent="0" marL="0">
-              <a:buNone/>
-            </a:pPr>
-            <a:r>
-              <a:rPr lang="en-US" sz="1150" dirty="0">
+            <a:endParaRPr lang="en-US" sz="1400" dirty="0"/>
+          </a:p>
+          <a:p>
+            <a:pPr indent="0" marL="0">
+              <a:buNone/>
+            </a:pPr>
+            <a:endParaRPr lang="en-US" sz="1400" dirty="0"/>
+          </a:p>
+          <a:p>
+            <a:pPr indent="0" marL="0">
+              <a:buNone/>
+            </a:pPr>
+            <a:r>
+              <a:rPr lang="en-US" sz="1400" dirty="0">
                 <a:solidFill>
                   <a:srgbClr val="E8D8A8"/>
                 </a:solidFill>
@@ -13968,14 +13888,14 @@
               </a:rPr>
               <a:t>態度：音樂有益於靈性，但若旋律比歌詞更動人，則視為罪</a:t>
             </a:r>
-            <a:endParaRPr lang="en-US" sz="1150" dirty="0"/>
-          </a:p>
-          <a:p>
-            <a:pPr indent="0" marL="0">
-              <a:buNone/>
-            </a:pPr>
-            <a:r>
-              <a:rPr lang="en-US" sz="1150" dirty="0">
+            <a:endParaRPr lang="en-US" sz="1400" dirty="0"/>
+          </a:p>
+          <a:p>
+            <a:pPr indent="0" marL="0">
+              <a:buNone/>
+            </a:pPr>
+            <a:r>
+              <a:rPr lang="en-US" sz="1400" dirty="0">
                 <a:solidFill>
                   <a:srgbClr val="E8D8A8"/>
                 </a:solidFill>
@@ -13985,7 +13905,7 @@
               </a:rPr>
               <a:t>Tension: music aids devotion, but if the song moves more than the text, it is sinful</a:t>
             </a:r>
-            <a:endParaRPr lang="en-US" sz="1150" dirty="0"/>
+            <a:endParaRPr lang="en-US" sz="1400" dirty="0"/>
           </a:p>
         </p:txBody>
       </p:sp>
@@ -14118,14 +14038,14 @@
           <a:ln/>
         </p:spPr>
         <p:txBody>
-          <a:bodyPr wrap="square" lIns="0" tIns="0" rIns="0" bIns="0" rtlCol="0" anchor="ctr"/>
-          <a:lstStyle/>
-          <a:p>
-            <a:pPr indent="0" marL="0">
-              <a:buNone/>
-            </a:pPr>
-            <a:r>
-              <a:rPr lang="en-US" sz="1300" i="1" dirty="0">
+          <a:bodyPr wrap="square" lIns="0" tIns="0" rIns="0" bIns="0" rtlCol="0" anchor="t"/>
+          <a:lstStyle/>
+          <a:p>
+            <a:pPr indent="0" marL="0">
+              <a:buNone/>
+            </a:pPr>
+            <a:r>
+              <a:rPr lang="en-US" sz="1400" i="1" dirty="0">
                 <a:solidFill>
                   <a:srgbClr val="5C3A28"/>
                 </a:solidFill>
@@ -14135,7 +14055,7 @@
               </a:rPr>
               <a:t>Divisions in the Church and Dialects of Chant</a:t>
             </a:r>
-            <a:endParaRPr lang="en-US" sz="1300" dirty="0"/>
+            <a:endParaRPr lang="en-US" sz="1400" dirty="0"/>
           </a:p>
         </p:txBody>
       </p:sp>
@@ -14267,7 +14187,7 @@
               <a:buChar char="•"/>
             </a:pPr>
             <a:r>
-              <a:rPr lang="en-US" sz="1100" dirty="0">
+              <a:rPr lang="en-US" sz="1400" dirty="0">
                 <a:solidFill>
                   <a:srgbClr val="FBF5E6"/>
                 </a:solidFill>
@@ -14277,7 +14197,7 @@
               </a:rPr>
               <a:t>東羅馬帝國（Constantinople）教會傳統</a:t>
             </a:r>
-            <a:endParaRPr lang="en-US" sz="1100" dirty="0"/>
+            <a:endParaRPr lang="en-US" sz="1400" dirty="0"/>
           </a:p>
           <a:p>
             <a:pPr marL="342900" indent="-342900">
@@ -14288,7 +14208,7 @@
               <a:buChar char="•"/>
             </a:pPr>
             <a:r>
-              <a:rPr lang="en-US" sz="1100" dirty="0">
+              <a:rPr lang="en-US" sz="1400" dirty="0">
                 <a:solidFill>
                   <a:srgbClr val="FBF5E6"/>
                 </a:solidFill>
@@ -14298,7 +14218,7 @@
               </a:rPr>
               <a:t>Eastern Roman Empire (Constantinople)</a:t>
             </a:r>
-            <a:endParaRPr lang="en-US" sz="1100" dirty="0"/>
+            <a:endParaRPr lang="en-US" sz="1400" dirty="0"/>
           </a:p>
           <a:p>
             <a:pPr marL="342900" indent="-342900">
@@ -14309,7 +14229,7 @@
               <a:buChar char="•"/>
             </a:pPr>
             <a:r>
-              <a:rPr lang="en-US" sz="1100" dirty="0">
+              <a:rPr lang="en-US" sz="1400" dirty="0">
                 <a:solidFill>
                   <a:srgbClr val="FBF5E6"/>
                 </a:solidFill>
@@ -14319,7 +14239,7 @@
               </a:rPr>
               <a:t>以希臘語演唱聖詠</a:t>
             </a:r>
-            <a:endParaRPr lang="en-US" sz="1100" dirty="0"/>
+            <a:endParaRPr lang="en-US" sz="1400" dirty="0"/>
           </a:p>
           <a:p>
             <a:pPr marL="342900" indent="-342900">
@@ -14330,7 +14250,7 @@
               <a:buChar char="•"/>
             </a:pPr>
             <a:r>
-              <a:rPr lang="en-US" sz="1100" dirty="0">
+              <a:rPr lang="en-US" sz="1400" dirty="0">
                 <a:solidFill>
                   <a:srgbClr val="FBF5E6"/>
                 </a:solidFill>
@@ -14340,7 +14260,7 @@
               </a:rPr>
               <a:t>Chanted in Greek</a:t>
             </a:r>
-            <a:endParaRPr lang="en-US" sz="1100" dirty="0"/>
+            <a:endParaRPr lang="en-US" sz="1400" dirty="0"/>
           </a:p>
           <a:p>
             <a:pPr marL="342900" indent="-342900">
@@ -14351,7 +14271,7 @@
               <a:buChar char="•"/>
             </a:pPr>
             <a:r>
-              <a:rPr lang="en-US" sz="1100" dirty="0">
+              <a:rPr lang="en-US" sz="1400" dirty="0">
                 <a:solidFill>
                   <a:srgbClr val="FBF5E6"/>
                 </a:solidFill>
@@ -14361,7 +14281,7 @@
               </a:rPr>
               <a:t>八種調式（echoi）——後成西方八種 modes 基礎</a:t>
             </a:r>
-            <a:endParaRPr lang="en-US" sz="1100" dirty="0"/>
+            <a:endParaRPr lang="en-US" sz="1400" dirty="0"/>
           </a:p>
           <a:p>
             <a:pPr marL="342900" indent="-342900">
@@ -14372,7 +14292,7 @@
               <a:buChar char="•"/>
             </a:pPr>
             <a:r>
-              <a:rPr lang="en-US" sz="1100" dirty="0">
+              <a:rPr lang="en-US" sz="1400" dirty="0">
                 <a:solidFill>
                   <a:srgbClr val="FBF5E6"/>
                 </a:solidFill>
@@ -14382,7 +14302,7 @@
               </a:rPr>
               <a:t>Eight echoi (modes) → basis of Western 8 modes</a:t>
             </a:r>
-            <a:endParaRPr lang="en-US" sz="1100" dirty="0"/>
+            <a:endParaRPr lang="en-US" sz="1400" dirty="0"/>
           </a:p>
           <a:p>
             <a:pPr marL="342900" indent="-342900">
@@ -14393,7 +14313,7 @@
               <a:buChar char="•"/>
             </a:pPr>
             <a:r>
-              <a:rPr lang="en-US" sz="1100" dirty="0">
+              <a:rPr lang="en-US" sz="1400" dirty="0">
                 <a:solidFill>
                   <a:srgbClr val="FBF5E6"/>
                 </a:solidFill>
@@ -14403,7 +14323,7 @@
               </a:rPr>
               <a:t>讚美詩（hymns）高度發展，現仍在希臘東正教使用</a:t>
             </a:r>
-            <a:endParaRPr lang="en-US" sz="1100" dirty="0"/>
+            <a:endParaRPr lang="en-US" sz="1400" dirty="0"/>
           </a:p>
           <a:p>
             <a:pPr marL="342900" indent="-342900">
@@ -14414,7 +14334,7 @@
               <a:buChar char="•"/>
             </a:pPr>
             <a:r>
-              <a:rPr lang="en-US" sz="1100" dirty="0">
+              <a:rPr lang="en-US" sz="1400" dirty="0">
                 <a:solidFill>
                   <a:srgbClr val="FBF5E6"/>
                 </a:solidFill>
@@ -14424,7 +14344,7 @@
               </a:rPr>
               <a:t>Hymns highly developed, still sung in Greek Orthodox services</a:t>
             </a:r>
-            <a:endParaRPr lang="en-US" sz="1100" dirty="0"/>
+            <a:endParaRPr lang="en-US" sz="1400" dirty="0"/>
           </a:p>
         </p:txBody>
       </p:sp>
@@ -14536,7 +14456,7 @@
               <a:buChar char="•"/>
             </a:pPr>
             <a:r>
-              <a:rPr lang="en-US" sz="1100" dirty="0">
+              <a:rPr lang="en-US" sz="1400" dirty="0">
                 <a:solidFill>
                   <a:srgbClr val="FBF5E6"/>
                 </a:solidFill>
@@ -14546,7 +14466,7 @@
               </a:rPr>
               <a:t>各地域發展獨立傳統（使用拉丁語）</a:t>
             </a:r>
-            <a:endParaRPr lang="en-US" sz="1100" dirty="0"/>
+            <a:endParaRPr lang="en-US" sz="1400" dirty="0"/>
           </a:p>
           <a:p>
             <a:pPr marL="342900" indent="-342900">
@@ -14557,7 +14477,7 @@
               <a:buChar char="•"/>
             </a:pPr>
             <a:r>
-              <a:rPr lang="en-US" sz="1100" dirty="0">
+              <a:rPr lang="en-US" sz="1400" dirty="0">
                 <a:solidFill>
                   <a:srgbClr val="FBF5E6"/>
                 </a:solidFill>
@@ -14567,7 +14487,7 @@
               </a:rPr>
               <a:t>Regional traditions developed (in Latin)</a:t>
             </a:r>
-            <a:endParaRPr lang="en-US" sz="1100" dirty="0"/>
+            <a:endParaRPr lang="en-US" sz="1400" dirty="0"/>
           </a:p>
           <a:p>
             <a:pPr indent="0" marL="0">
@@ -14577,7 +14497,7 @@
               <a:buNone/>
             </a:pPr>
             <a:r>
-              <a:rPr lang="en-US" sz="1100" dirty="0">
+              <a:rPr lang="en-US" sz="1400" dirty="0">
                 <a:solidFill>
                   <a:srgbClr val="FBF5E6"/>
                 </a:solidFill>
@@ -14587,7 +14507,7 @@
               </a:rPr>
               <a:t>• 高盧聖詠 Gallican (Gaul / France)</a:t>
             </a:r>
-            <a:endParaRPr lang="en-US" sz="1100" dirty="0"/>
+            <a:endParaRPr lang="en-US" sz="1400" dirty="0"/>
           </a:p>
           <a:p>
             <a:pPr indent="0" marL="0">
@@ -14597,7 +14517,7 @@
               <a:buNone/>
             </a:pPr>
             <a:r>
-              <a:rPr lang="en-US" sz="1100" dirty="0">
+              <a:rPr lang="en-US" sz="1400" dirty="0">
                 <a:solidFill>
                   <a:srgbClr val="FBF5E6"/>
                 </a:solidFill>
@@ -14607,7 +14527,7 @@
               </a:rPr>
               <a:t>• 塞爾特聖詠 Celtic (British Isles)</a:t>
             </a:r>
-            <a:endParaRPr lang="en-US" sz="1100" dirty="0"/>
+            <a:endParaRPr lang="en-US" sz="1400" dirty="0"/>
           </a:p>
           <a:p>
             <a:pPr indent="0" marL="0">
@@ -14617,7 +14537,7 @@
               <a:buNone/>
             </a:pPr>
             <a:r>
-              <a:rPr lang="en-US" sz="1100" dirty="0">
+              <a:rPr lang="en-US" sz="1400" dirty="0">
                 <a:solidFill>
                   <a:srgbClr val="FBF5E6"/>
                 </a:solidFill>
@@ -14627,7 +14547,7 @@
               </a:rPr>
               <a:t>• 莫扎拉伯聖詠 Mozarabic (Spain)</a:t>
             </a:r>
-            <a:endParaRPr lang="en-US" sz="1100" dirty="0"/>
+            <a:endParaRPr lang="en-US" sz="1400" dirty="0"/>
           </a:p>
           <a:p>
             <a:pPr indent="0" marL="0">
@@ -14637,7 +14557,7 @@
               <a:buNone/>
             </a:pPr>
             <a:r>
-              <a:rPr lang="en-US" sz="1100" dirty="0">
+              <a:rPr lang="en-US" sz="1400" dirty="0">
                 <a:solidFill>
                   <a:srgbClr val="FBF5E6"/>
                 </a:solidFill>
@@ -14647,7 +14567,7 @@
               </a:rPr>
               <a:t>• 安布羅西聖詠 Ambrosian (Milan)</a:t>
             </a:r>
-            <a:endParaRPr lang="en-US" sz="1100" dirty="0"/>
+            <a:endParaRPr lang="en-US" sz="1400" dirty="0"/>
           </a:p>
           <a:p>
             <a:pPr marL="342900" indent="-342900">
@@ -14658,7 +14578,7 @@
               <a:buChar char="•"/>
             </a:pPr>
             <a:r>
-              <a:rPr lang="en-US" sz="1100" dirty="0">
+              <a:rPr lang="en-US" sz="1400" dirty="0">
                 <a:solidFill>
                   <a:srgbClr val="FBF5E6"/>
                 </a:solidFill>
@@ -14668,7 +14588,7 @@
               </a:rPr>
               <a:t>8–11世紀：羅馬教廷與法蘭克王國逐步統一為格里高利聖詠</a:t>
             </a:r>
-            <a:endParaRPr lang="en-US" sz="1100" dirty="0"/>
+            <a:endParaRPr lang="en-US" sz="1400" dirty="0"/>
           </a:p>
           <a:p>
             <a:pPr marL="342900" indent="-342900">
@@ -14679,7 +14599,7 @@
               <a:buChar char="•"/>
             </a:pPr>
             <a:r>
-              <a:rPr lang="en-US" sz="1100" dirty="0">
+              <a:rPr lang="en-US" sz="1400" dirty="0">
                 <a:solidFill>
                   <a:srgbClr val="FBF5E6"/>
                 </a:solidFill>
@@ -14689,7 +14609,7 @@
               </a:rPr>
               <a:t>8th–11th c.: standardized as Gregorian chant under Rome &amp; Franks</a:t>
             </a:r>
-            <a:endParaRPr lang="en-US" sz="1100" dirty="0"/>
+            <a:endParaRPr lang="en-US" sz="1400" dirty="0"/>
           </a:p>
         </p:txBody>
       </p:sp>
@@ -14701,7 +14621,7 @@
         </p:nvSpPr>
         <p:spPr>
           <a:xfrm>
-            <a:off x="274320" y="4617720"/>
+            <a:off x="274320" y="4553712"/>
             <a:ext cx="8595360" cy="384048"/>
           </a:xfrm>
           <a:prstGeom prst="rect">
@@ -14711,14 +14631,14 @@
           <a:ln/>
         </p:spPr>
         <p:txBody>
-          <a:bodyPr wrap="square" rtlCol="0" anchor="ctr"/>
+          <a:bodyPr wrap="square" rtlCol="0" anchor="t"/>
           <a:lstStyle/>
           <a:p>
             <a:pPr algn="ctr" indent="0" marL="0">
               <a:buNone/>
             </a:pPr>
             <a:r>
-              <a:rPr lang="en-US" sz="1050" i="1" dirty="0">
+              <a:rPr lang="en-US" sz="1400" i="1" dirty="0">
                 <a:solidFill>
                   <a:srgbClr val="5C3A28"/>
                 </a:solidFill>
@@ -14728,14 +14648,14 @@
               </a:rPr>
               <a:t>1054 CE：東西教會正式分裂 → 羅馬天主教 vs 東正教（拜占庭）</a:t>
             </a:r>
-            <a:endParaRPr lang="en-US" sz="1050" dirty="0"/>
+            <a:endParaRPr lang="en-US" sz="1400" dirty="0"/>
           </a:p>
           <a:p>
             <a:pPr algn="ctr" indent="0" marL="0">
               <a:buNone/>
             </a:pPr>
             <a:r>
-              <a:rPr lang="en-US" sz="1050" i="1" dirty="0">
+              <a:rPr lang="en-US" sz="1400" i="1" dirty="0">
                 <a:solidFill>
                   <a:srgbClr val="5C3A28"/>
                 </a:solidFill>
@@ -14745,7 +14665,7 @@
               </a:rPr>
               <a:t>1054 CE: Final split — Roman Catholic Church vs. Eastern Orthodox (Byzantine) Church</a:t>
             </a:r>
-            <a:endParaRPr lang="en-US" sz="1050" dirty="0"/>
+            <a:endParaRPr lang="en-US" sz="1400" dirty="0"/>
           </a:p>
         </p:txBody>
       </p:sp>
@@ -14964,7 +14884,7 @@
               <a:buNone/>
             </a:pPr>
             <a:r>
-              <a:rPr lang="en-US" sz="1150" b="1" dirty="0">
+              <a:rPr lang="en-US" sz="1400" b="1" dirty="0">
                 <a:solidFill>
                   <a:srgbClr val="C8A020"/>
                 </a:solidFill>
@@ -14972,16 +14892,16 @@
                 <a:ea typeface="Georgia" pitchFamily="34" charset="-122"/>
                 <a:cs typeface="Georgia" pitchFamily="34" charset="-120"/>
               </a:rPr>
-              <a:t>🏛 教宗額我略一世</a:t>
-            </a:r>
-            <a:endParaRPr lang="en-US" sz="1150" dirty="0"/>
-          </a:p>
-          <a:p>
-            <a:pPr indent="0" marL="0">
-              <a:buNone/>
-            </a:pPr>
-            <a:r>
-              <a:rPr lang="en-US" sz="1150" b="1" dirty="0">
+              <a:t>■ 教宗額我略一世</a:t>
+            </a:r>
+            <a:endParaRPr lang="en-US" sz="1400" dirty="0"/>
+          </a:p>
+          <a:p>
+            <a:pPr indent="0" marL="0">
+              <a:buNone/>
+            </a:pPr>
+            <a:r>
+              <a:rPr lang="en-US" sz="1400" b="1" dirty="0">
                 <a:solidFill>
                   <a:srgbClr val="C8A020"/>
                 </a:solidFill>
@@ -14991,7 +14911,7 @@
               </a:rPr>
               <a:t>Pope Gregory I (r. 590–604)</a:t>
             </a:r>
-            <a:endParaRPr lang="en-US" sz="1150" dirty="0"/>
+            <a:endParaRPr lang="en-US" sz="1400" dirty="0"/>
           </a:p>
         </p:txBody>
       </p:sp>
@@ -15033,14 +14953,14 @@
           <a:ln/>
         </p:spPr>
         <p:txBody>
-          <a:bodyPr wrap="square" lIns="0" tIns="0" rIns="0" bIns="0" rtlCol="0" anchor="ctr"/>
-          <a:lstStyle/>
-          <a:p>
-            <a:pPr indent="0" marL="0">
-              <a:buNone/>
-            </a:pPr>
-            <a:r>
-              <a:rPr lang="en-US" sz="1200" dirty="0">
+          <a:bodyPr wrap="square" lIns="0" tIns="0" rIns="0" bIns="0" rtlCol="0" anchor="t"/>
+          <a:lstStyle/>
+          <a:p>
+            <a:pPr indent="0" marL="0">
+              <a:buNone/>
+            </a:pPr>
+            <a:r>
+              <a:rPr lang="en-US" sz="1400" dirty="0">
                 <a:solidFill>
                   <a:srgbClr val="E8D8A8"/>
                 </a:solidFill>
@@ -15050,14 +14970,14 @@
               </a:rPr>
               <a:t>建立詠唱學校（Schola Cantorum）；聖詠以「格里高利聖詠」之名流傳（實為後人追授）</a:t>
             </a:r>
-            <a:endParaRPr lang="en-US" sz="1200" dirty="0"/>
-          </a:p>
-          <a:p>
-            <a:pPr indent="0" marL="0">
-              <a:buNone/>
-            </a:pPr>
-            <a:r>
-              <a:rPr lang="en-US" sz="1200" dirty="0">
+            <a:endParaRPr lang="en-US" sz="1400" dirty="0"/>
+          </a:p>
+          <a:p>
+            <a:pPr indent="0" marL="0">
+              <a:buNone/>
+            </a:pPr>
+            <a:r>
+              <a:rPr lang="en-US" sz="1400" dirty="0">
                 <a:solidFill>
                   <a:srgbClr val="E8D8A8"/>
                 </a:solidFill>
@@ -15067,7 +14987,7 @@
               </a:rPr>
               <a:t>Founded Schola Cantorum; chant bears his name though he likely did not compose it</a:t>
             </a:r>
-            <a:endParaRPr lang="en-US" sz="1200" dirty="0"/>
+            <a:endParaRPr lang="en-US" sz="1400" dirty="0"/>
           </a:p>
         </p:txBody>
       </p:sp>
@@ -15116,7 +15036,7 @@
               <a:buNone/>
             </a:pPr>
             <a:r>
-              <a:rPr lang="en-US" sz="1150" b="1" dirty="0">
+              <a:rPr lang="en-US" sz="1400" b="1" dirty="0">
                 <a:solidFill>
                   <a:srgbClr val="C8A020"/>
                 </a:solidFill>
@@ -15124,16 +15044,16 @@
                 <a:ea typeface="Georgia" pitchFamily="34" charset="-122"/>
                 <a:cs typeface="Georgia" pitchFamily="34" charset="-120"/>
               </a:rPr>
-              <a:t>👑 矮子丕平 Pippin the Short</a:t>
-            </a:r>
-            <a:endParaRPr lang="en-US" sz="1150" dirty="0"/>
-          </a:p>
-          <a:p>
-            <a:pPr indent="0" marL="0">
-              <a:buNone/>
-            </a:pPr>
-            <a:r>
-              <a:rPr lang="en-US" sz="1150" b="1" dirty="0">
+              <a:t>■ 矮子丕平 Pippin the Short</a:t>
+            </a:r>
+            <a:endParaRPr lang="en-US" sz="1400" dirty="0"/>
+          </a:p>
+          <a:p>
+            <a:pPr indent="0" marL="0">
+              <a:buNone/>
+            </a:pPr>
+            <a:r>
+              <a:rPr lang="en-US" sz="1400" b="1" dirty="0">
                 <a:solidFill>
                   <a:srgbClr val="C8A020"/>
                 </a:solidFill>
@@ -15143,7 +15063,7 @@
               </a:rPr>
               <a:t>(r. 751–768)</a:t>
             </a:r>
-            <a:endParaRPr lang="en-US" sz="1150" dirty="0"/>
+            <a:endParaRPr lang="en-US" sz="1400" dirty="0"/>
           </a:p>
         </p:txBody>
       </p:sp>
@@ -15185,14 +15105,14 @@
           <a:ln/>
         </p:spPr>
         <p:txBody>
-          <a:bodyPr wrap="square" lIns="0" tIns="0" rIns="0" bIns="0" rtlCol="0" anchor="ctr"/>
-          <a:lstStyle/>
-          <a:p>
-            <a:pPr indent="0" marL="0">
-              <a:buNone/>
-            </a:pPr>
-            <a:r>
-              <a:rPr lang="en-US" sz="1200" dirty="0">
+          <a:bodyPr wrap="square" lIns="0" tIns="0" rIns="0" bIns="0" rtlCol="0" anchor="t"/>
+          <a:lstStyle/>
+          <a:p>
+            <a:pPr indent="0" marL="0">
+              <a:buNone/>
+            </a:pPr>
+            <a:r>
+              <a:rPr lang="en-US" sz="1400" dirty="0">
                 <a:solidFill>
                   <a:srgbClr val="E8D8A8"/>
                 </a:solidFill>
@@ -15202,14 +15122,14 @@
               </a:rPr>
               <a:t>法蘭克王授命全國採用羅馬禮儀與聖詠，以鞏固王權</a:t>
             </a:r>
-            <a:endParaRPr lang="en-US" sz="1200" dirty="0"/>
-          </a:p>
-          <a:p>
-            <a:pPr indent="0" marL="0">
-              <a:buNone/>
-            </a:pPr>
-            <a:r>
-              <a:rPr lang="en-US" sz="1200" dirty="0">
+            <a:endParaRPr lang="en-US" sz="1400" dirty="0"/>
+          </a:p>
+          <a:p>
+            <a:pPr indent="0" marL="0">
+              <a:buNone/>
+            </a:pPr>
+            <a:r>
+              <a:rPr lang="en-US" sz="1400" dirty="0">
                 <a:solidFill>
                   <a:srgbClr val="E8D8A8"/>
                 </a:solidFill>
@@ -15219,7 +15139,7 @@
               </a:rPr>
               <a:t>Frankish king ordered Roman liturgy and chant throughout his lands to consolidate authority</a:t>
             </a:r>
-            <a:endParaRPr lang="en-US" sz="1200" dirty="0"/>
+            <a:endParaRPr lang="en-US" sz="1400" dirty="0"/>
           </a:p>
         </p:txBody>
       </p:sp>
@@ -15268,7 +15188,7 @@
               <a:buNone/>
             </a:pPr>
             <a:r>
-              <a:rPr lang="en-US" sz="1150" b="1" dirty="0">
+              <a:rPr lang="en-US" sz="1400" b="1" dirty="0">
                 <a:solidFill>
                   <a:srgbClr val="C8A020"/>
                 </a:solidFill>
@@ -15276,16 +15196,16 @@
                 <a:ea typeface="Georgia" pitchFamily="34" charset="-122"/>
                 <a:cs typeface="Georgia" pitchFamily="34" charset="-120"/>
               </a:rPr>
-              <a:t>⚔ 查理曼 Charlemagne</a:t>
-            </a:r>
-            <a:endParaRPr lang="en-US" sz="1150" dirty="0"/>
-          </a:p>
-          <a:p>
-            <a:pPr indent="0" marL="0">
-              <a:buNone/>
-            </a:pPr>
-            <a:r>
-              <a:rPr lang="en-US" sz="1150" b="1" dirty="0">
+              <a:t>■ 查理曼 Charlemagne</a:t>
+            </a:r>
+            <a:endParaRPr lang="en-US" sz="1400" dirty="0"/>
+          </a:p>
+          <a:p>
+            <a:pPr indent="0" marL="0">
+              <a:buNone/>
+            </a:pPr>
+            <a:r>
+              <a:rPr lang="en-US" sz="1400" b="1" dirty="0">
                 <a:solidFill>
                   <a:srgbClr val="C8A020"/>
                 </a:solidFill>
@@ -15295,7 +15215,7 @@
               </a:rPr>
               <a:t>(r. 768–814)</a:t>
             </a:r>
-            <a:endParaRPr lang="en-US" sz="1150" dirty="0"/>
+            <a:endParaRPr lang="en-US" sz="1400" dirty="0"/>
           </a:p>
         </p:txBody>
       </p:sp>
@@ -15337,14 +15257,14 @@
           <a:ln/>
         </p:spPr>
         <p:txBody>
-          <a:bodyPr wrap="square" lIns="0" tIns="0" rIns="0" bIns="0" rtlCol="0" anchor="ctr"/>
-          <a:lstStyle/>
-          <a:p>
-            <a:pPr indent="0" marL="0">
-              <a:buNone/>
-            </a:pPr>
-            <a:r>
-              <a:rPr lang="en-US" sz="1200" dirty="0">
+          <a:bodyPr wrap="square" lIns="0" tIns="0" rIns="0" bIns="0" rtlCol="0" anchor="t"/>
+          <a:lstStyle/>
+          <a:p>
+            <a:pPr indent="0" marL="0">
+              <a:buNone/>
+            </a:pPr>
+            <a:r>
+              <a:rPr lang="en-US" sz="1400" dirty="0">
                 <a:solidFill>
                   <a:srgbClr val="E8D8A8"/>
                 </a:solidFill>
@@ -15354,14 +15274,14 @@
               </a:rPr>
               <a:t>繼續推廣政策；派遣羅馬歌手北上教授聖詠；800 CE 由教宗加冕為皇帝</a:t>
             </a:r>
-            <a:endParaRPr lang="en-US" sz="1200" dirty="0"/>
-          </a:p>
-          <a:p>
-            <a:pPr indent="0" marL="0">
-              <a:buNone/>
-            </a:pPr>
-            <a:r>
-              <a:rPr lang="en-US" sz="1200" dirty="0">
+            <a:endParaRPr lang="en-US" sz="1400" dirty="0"/>
+          </a:p>
+          <a:p>
+            <a:pPr indent="0" marL="0">
+              <a:buNone/>
+            </a:pPr>
+            <a:r>
+              <a:rPr lang="en-US" sz="1400" dirty="0">
                 <a:solidFill>
                   <a:srgbClr val="E8D8A8"/>
                 </a:solidFill>
@@ -15371,7 +15291,7 @@
               </a:rPr>
               <a:t>Continued promotion; sent Roman singers north; crowned Emperor by the pope in 800 CE</a:t>
             </a:r>
-            <a:endParaRPr lang="en-US" sz="1200" dirty="0"/>
+            <a:endParaRPr lang="en-US" sz="1400" dirty="0"/>
           </a:p>
         </p:txBody>
       </p:sp>
@@ -15420,7 +15340,7 @@
               <a:buNone/>
             </a:pPr>
             <a:r>
-              <a:rPr lang="en-US" sz="1150" b="1" dirty="0">
+              <a:rPr lang="en-US" sz="1400" b="1" dirty="0">
                 <a:solidFill>
                   <a:srgbClr val="C8A020"/>
                 </a:solidFill>
@@ -15428,16 +15348,16 @@
                 <a:ea typeface="Georgia" pitchFamily="34" charset="-122"/>
                 <a:cs typeface="Georgia" pitchFamily="34" charset="-120"/>
               </a:rPr>
-              <a:t>🗺 西歐標準化 Standardization</a:t>
-            </a:r>
-            <a:endParaRPr lang="en-US" sz="1150" dirty="0"/>
-          </a:p>
-          <a:p>
-            <a:pPr indent="0" marL="0">
-              <a:buNone/>
-            </a:pPr>
-            <a:r>
-              <a:rPr lang="en-US" sz="1150" b="1" dirty="0">
+              <a:t>■ 西歐標準化 Standardization</a:t>
+            </a:r>
+            <a:endParaRPr lang="en-US" sz="1400" dirty="0"/>
+          </a:p>
+          <a:p>
+            <a:pPr indent="0" marL="0">
+              <a:buNone/>
+            </a:pPr>
+            <a:r>
+              <a:rPr lang="en-US" sz="1400" b="1" dirty="0">
                 <a:solidFill>
                   <a:srgbClr val="C8A020"/>
                 </a:solidFill>
@@ -15447,7 +15367,7 @@
               </a:rPr>
               <a:t>(9th–11th centuries)</a:t>
             </a:r>
-            <a:endParaRPr lang="en-US" sz="1150" dirty="0"/>
+            <a:endParaRPr lang="en-US" sz="1400" dirty="0"/>
           </a:p>
         </p:txBody>
       </p:sp>
@@ -15489,14 +15409,14 @@
           <a:ln/>
         </p:spPr>
         <p:txBody>
-          <a:bodyPr wrap="square" lIns="0" tIns="0" rIns="0" bIns="0" rtlCol="0" anchor="ctr"/>
-          <a:lstStyle/>
-          <a:p>
-            <a:pPr indent="0" marL="0">
-              <a:buNone/>
-            </a:pPr>
-            <a:r>
-              <a:rPr lang="en-US" sz="1200" dirty="0">
+          <a:bodyPr wrap="square" lIns="0" tIns="0" rIns="0" bIns="0" rtlCol="0" anchor="t"/>
+          <a:lstStyle/>
+          <a:p>
+            <a:pPr indent="0" marL="0">
+              <a:buNone/>
+            </a:pPr>
+            <a:r>
+              <a:rPr lang="en-US" sz="1400" dirty="0">
                 <a:solidFill>
                   <a:srgbClr val="E8D8A8"/>
                 </a:solidFill>
@@ -15506,14 +15426,14 @@
               </a:rPr>
               <a:t>格里高利聖詠成為西歐共同音樂語言；記譜法的發明使旋律固定化</a:t>
             </a:r>
-            <a:endParaRPr lang="en-US" sz="1200" dirty="0"/>
-          </a:p>
-          <a:p>
-            <a:pPr indent="0" marL="0">
-              <a:buNone/>
-            </a:pPr>
-            <a:r>
-              <a:rPr lang="en-US" sz="1200" dirty="0">
+            <a:endParaRPr lang="en-US" sz="1400" dirty="0"/>
+          </a:p>
+          <a:p>
+            <a:pPr indent="0" marL="0">
+              <a:buNone/>
+            </a:pPr>
+            <a:r>
+              <a:rPr lang="en-US" sz="1400" dirty="0">
                 <a:solidFill>
                   <a:srgbClr val="E8D8A8"/>
                 </a:solidFill>
@@ -15523,7 +15443,7 @@
               </a:rPr>
               <a:t>Gregorian chant became the common musical language of Western Europe; notation fixed the melodies</a:t>
             </a:r>
-            <a:endParaRPr lang="en-US" sz="1200" dirty="0"/>
+            <a:endParaRPr lang="en-US" sz="1400" dirty="0"/>
           </a:p>
         </p:txBody>
       </p:sp>
@@ -15696,14 +15616,14 @@
           <a:ln/>
         </p:spPr>
         <p:txBody>
-          <a:bodyPr wrap="square" lIns="0" tIns="0" rIns="0" bIns="0" rtlCol="0" anchor="ctr"/>
+          <a:bodyPr wrap="square" lIns="0" tIns="0" rIns="0" bIns="0" rtlCol="0" anchor="t"/>
           <a:lstStyle/>
           <a:p>
             <a:pPr algn="r" indent="0" marL="0">
               <a:buNone/>
             </a:pPr>
             <a:r>
-              <a:rPr lang="en-US" sz="950" dirty="0">
+              <a:rPr lang="en-US" sz="1400" dirty="0">
                 <a:solidFill>
                   <a:srgbClr val="E8D8A8"/>
                 </a:solidFill>
@@ -15713,7 +15633,7 @@
               </a:rPr>
               <a:t>ca. 530s–516 BCE</a:t>
             </a:r>
-            <a:endParaRPr lang="en-US" sz="950" dirty="0"/>
+            <a:endParaRPr lang="en-US" sz="1400" dirty="0"/>
           </a:p>
         </p:txBody>
       </p:sp>
@@ -15735,14 +15655,14 @@
           <a:ln/>
         </p:spPr>
         <p:txBody>
-          <a:bodyPr wrap="square" lIns="0" tIns="0" rIns="0" bIns="0" rtlCol="0" anchor="ctr"/>
-          <a:lstStyle/>
-          <a:p>
-            <a:pPr indent="0" marL="0">
-              <a:buNone/>
-            </a:pPr>
-            <a:r>
-              <a:rPr lang="en-US" sz="1050" dirty="0">
+          <a:bodyPr wrap="square" lIns="0" tIns="0" rIns="0" bIns="0" rtlCol="0" anchor="t"/>
+          <a:lstStyle/>
+          <a:p>
+            <a:pPr indent="0" marL="0">
+              <a:buNone/>
+            </a:pPr>
+            <a:r>
+              <a:rPr lang="en-US" sz="1400" dirty="0">
                 <a:solidFill>
                   <a:srgbClr val="FBF5E6"/>
                 </a:solidFill>
@@ -15752,7 +15672,7 @@
               </a:rPr>
               <a:t>耶路撒冷第二聖殿建立 Second Temple built in Jerusalem</a:t>
             </a:r>
-            <a:endParaRPr lang="en-US" sz="1050" dirty="0"/>
+            <a:endParaRPr lang="en-US" sz="1400" dirty="0"/>
           </a:p>
         </p:txBody>
       </p:sp>
@@ -15794,14 +15714,14 @@
           <a:ln/>
         </p:spPr>
         <p:txBody>
-          <a:bodyPr wrap="square" lIns="0" tIns="0" rIns="0" bIns="0" rtlCol="0" anchor="ctr"/>
+          <a:bodyPr wrap="square" lIns="0" tIns="0" rIns="0" bIns="0" rtlCol="0" anchor="t"/>
           <a:lstStyle/>
           <a:p>
             <a:pPr algn="r" indent="0" marL="0">
               <a:buNone/>
             </a:pPr>
             <a:r>
-              <a:rPr lang="en-US" sz="950" dirty="0">
+              <a:rPr lang="en-US" sz="1400" dirty="0">
                 <a:solidFill>
                   <a:srgbClr val="E8D8A8"/>
                 </a:solidFill>
@@ -15811,7 +15731,7 @@
               </a:rPr>
               <a:t>33 CE</a:t>
             </a:r>
-            <a:endParaRPr lang="en-US" sz="950" dirty="0"/>
+            <a:endParaRPr lang="en-US" sz="1400" dirty="0"/>
           </a:p>
         </p:txBody>
       </p:sp>
@@ -15833,14 +15753,14 @@
           <a:ln/>
         </p:spPr>
         <p:txBody>
-          <a:bodyPr wrap="square" lIns="0" tIns="0" rIns="0" bIns="0" rtlCol="0" anchor="ctr"/>
-          <a:lstStyle/>
-          <a:p>
-            <a:pPr indent="0" marL="0">
-              <a:buNone/>
-            </a:pPr>
-            <a:r>
-              <a:rPr lang="en-US" sz="1050" dirty="0">
+          <a:bodyPr wrap="square" lIns="0" tIns="0" rIns="0" bIns="0" rtlCol="0" anchor="t"/>
+          <a:lstStyle/>
+          <a:p>
+            <a:pPr indent="0" marL="0">
+              <a:buNone/>
+            </a:pPr>
+            <a:r>
+              <a:rPr lang="en-US" sz="1400" dirty="0">
                 <a:solidFill>
                   <a:srgbClr val="FBF5E6"/>
                 </a:solidFill>
@@ -15850,7 +15770,7 @@
               </a:rPr>
               <a:t>耶穌被釘十字架 Jesus's crucifixion</a:t>
             </a:r>
-            <a:endParaRPr lang="en-US" sz="1050" dirty="0"/>
+            <a:endParaRPr lang="en-US" sz="1400" dirty="0"/>
           </a:p>
         </p:txBody>
       </p:sp>
@@ -15892,14 +15812,14 @@
           <a:ln/>
         </p:spPr>
         <p:txBody>
-          <a:bodyPr wrap="square" lIns="0" tIns="0" rIns="0" bIns="0" rtlCol="0" anchor="ctr"/>
+          <a:bodyPr wrap="square" lIns="0" tIns="0" rIns="0" bIns="0" rtlCol="0" anchor="t"/>
           <a:lstStyle/>
           <a:p>
             <a:pPr algn="r" indent="0" marL="0">
               <a:buNone/>
             </a:pPr>
             <a:r>
-              <a:rPr lang="en-US" sz="950" dirty="0">
+              <a:rPr lang="en-US" sz="1400" dirty="0">
                 <a:solidFill>
                   <a:srgbClr val="E8D8A8"/>
                 </a:solidFill>
@@ -15909,7 +15829,7 @@
               </a:rPr>
               <a:t>70 CE</a:t>
             </a:r>
-            <a:endParaRPr lang="en-US" sz="950" dirty="0"/>
+            <a:endParaRPr lang="en-US" sz="1400" dirty="0"/>
           </a:p>
         </p:txBody>
       </p:sp>
@@ -15931,14 +15851,14 @@
           <a:ln/>
         </p:spPr>
         <p:txBody>
-          <a:bodyPr wrap="square" lIns="0" tIns="0" rIns="0" bIns="0" rtlCol="0" anchor="ctr"/>
-          <a:lstStyle/>
-          <a:p>
-            <a:pPr indent="0" marL="0">
-              <a:buNone/>
-            </a:pPr>
-            <a:r>
-              <a:rPr lang="en-US" sz="1050" dirty="0">
+          <a:bodyPr wrap="square" lIns="0" tIns="0" rIns="0" bIns="0" rtlCol="0" anchor="t"/>
+          <a:lstStyle/>
+          <a:p>
+            <a:pPr indent="0" marL="0">
+              <a:buNone/>
+            </a:pPr>
+            <a:r>
+              <a:rPr lang="en-US" sz="1400" dirty="0">
                 <a:solidFill>
                   <a:srgbClr val="FBF5E6"/>
                 </a:solidFill>
@@ -15948,7 +15868,7 @@
               </a:rPr>
               <a:t>羅馬摧毀聖殿，驅逐猶太人 Romans destroy Temple, expel the Jews</a:t>
             </a:r>
-            <a:endParaRPr lang="en-US" sz="1050" dirty="0"/>
+            <a:endParaRPr lang="en-US" sz="1400" dirty="0"/>
           </a:p>
         </p:txBody>
       </p:sp>
@@ -15990,14 +15910,14 @@
           <a:ln/>
         </p:spPr>
         <p:txBody>
-          <a:bodyPr wrap="square" lIns="0" tIns="0" rIns="0" bIns="0" rtlCol="0" anchor="ctr"/>
+          <a:bodyPr wrap="square" lIns="0" tIns="0" rIns="0" bIns="0" rtlCol="0" anchor="t"/>
           <a:lstStyle/>
           <a:p>
             <a:pPr algn="r" indent="0" marL="0">
               <a:buNone/>
             </a:pPr>
             <a:r>
-              <a:rPr lang="en-US" sz="950" dirty="0">
+              <a:rPr lang="en-US" sz="1400" dirty="0">
                 <a:solidFill>
                   <a:srgbClr val="E8D8A8"/>
                 </a:solidFill>
@@ -16007,7 +15927,7 @@
               </a:rPr>
               <a:t>313 CE</a:t>
             </a:r>
-            <a:endParaRPr lang="en-US" sz="950" dirty="0"/>
+            <a:endParaRPr lang="en-US" sz="1400" dirty="0"/>
           </a:p>
         </p:txBody>
       </p:sp>
@@ -16029,14 +15949,14 @@
           <a:ln/>
         </p:spPr>
         <p:txBody>
-          <a:bodyPr wrap="square" lIns="0" tIns="0" rIns="0" bIns="0" rtlCol="0" anchor="ctr"/>
-          <a:lstStyle/>
-          <a:p>
-            <a:pPr indent="0" marL="0">
-              <a:buNone/>
-            </a:pPr>
-            <a:r>
-              <a:rPr lang="en-US" sz="1050" dirty="0">
+          <a:bodyPr wrap="square" lIns="0" tIns="0" rIns="0" bIns="0" rtlCol="0" anchor="t"/>
+          <a:lstStyle/>
+          <a:p>
+            <a:pPr indent="0" marL="0">
+              <a:buNone/>
+            </a:pPr>
+            <a:r>
+              <a:rPr lang="en-US" sz="1400" dirty="0">
                 <a:solidFill>
                   <a:srgbClr val="FBF5E6"/>
                 </a:solidFill>
@@ -16046,7 +15966,7 @@
               </a:rPr>
               <a:t>君士坦丁《米蘭勒令》合法化基督教 Edict of Milan legalizes Christianity</a:t>
             </a:r>
-            <a:endParaRPr lang="en-US" sz="1050" dirty="0"/>
+            <a:endParaRPr lang="en-US" sz="1400" dirty="0"/>
           </a:p>
         </p:txBody>
       </p:sp>
@@ -16088,14 +16008,14 @@
           <a:ln/>
         </p:spPr>
         <p:txBody>
-          <a:bodyPr wrap="square" lIns="0" tIns="0" rIns="0" bIns="0" rtlCol="0" anchor="ctr"/>
+          <a:bodyPr wrap="square" lIns="0" tIns="0" rIns="0" bIns="0" rtlCol="0" anchor="t"/>
           <a:lstStyle/>
           <a:p>
             <a:pPr algn="r" indent="0" marL="0">
               <a:buNone/>
             </a:pPr>
             <a:r>
-              <a:rPr lang="en-US" sz="950" dirty="0">
+              <a:rPr lang="en-US" sz="1400" dirty="0">
                 <a:solidFill>
                   <a:srgbClr val="E8D8A8"/>
                 </a:solidFill>
@@ -16105,7 +16025,7 @@
               </a:rPr>
               <a:t>392 CE</a:t>
             </a:r>
-            <a:endParaRPr lang="en-US" sz="950" dirty="0"/>
+            <a:endParaRPr lang="en-US" sz="1400" dirty="0"/>
           </a:p>
         </p:txBody>
       </p:sp>
@@ -16127,14 +16047,14 @@
           <a:ln/>
         </p:spPr>
         <p:txBody>
-          <a:bodyPr wrap="square" lIns="0" tIns="0" rIns="0" bIns="0" rtlCol="0" anchor="ctr"/>
-          <a:lstStyle/>
-          <a:p>
-            <a:pPr indent="0" marL="0">
-              <a:buNone/>
-            </a:pPr>
-            <a:r>
-              <a:rPr lang="en-US" sz="1050" dirty="0">
+          <a:bodyPr wrap="square" lIns="0" tIns="0" rIns="0" bIns="0" rtlCol="0" anchor="t"/>
+          <a:lstStyle/>
+          <a:p>
+            <a:pPr indent="0" marL="0">
+              <a:buNone/>
+            </a:pPr>
+            <a:r>
+              <a:rPr lang="en-US" sz="1400" dirty="0">
                 <a:solidFill>
                   <a:srgbClr val="FBF5E6"/>
                 </a:solidFill>
@@ -16144,7 +16064,7 @@
               </a:rPr>
               <a:t>基督教成為羅馬官方宗教 Christianity becomes official Roman religion</a:t>
             </a:r>
-            <a:endParaRPr lang="en-US" sz="1050" dirty="0"/>
+            <a:endParaRPr lang="en-US" sz="1400" dirty="0"/>
           </a:p>
         </p:txBody>
       </p:sp>
@@ -16186,14 +16106,14 @@
           <a:ln/>
         </p:spPr>
         <p:txBody>
-          <a:bodyPr wrap="square" lIns="0" tIns="0" rIns="0" bIns="0" rtlCol="0" anchor="ctr"/>
+          <a:bodyPr wrap="square" lIns="0" tIns="0" rIns="0" bIns="0" rtlCol="0" anchor="t"/>
           <a:lstStyle/>
           <a:p>
             <a:pPr algn="r" indent="0" marL="0">
               <a:buNone/>
             </a:pPr>
             <a:r>
-              <a:rPr lang="en-US" sz="950" dirty="0">
+              <a:rPr lang="en-US" sz="1400" dirty="0">
                 <a:solidFill>
                   <a:srgbClr val="E8D8A8"/>
                 </a:solidFill>
@@ -16203,7 +16123,7 @@
               </a:rPr>
               <a:t>ca. 500–10 CE</a:t>
             </a:r>
-            <a:endParaRPr lang="en-US" sz="950" dirty="0"/>
+            <a:endParaRPr lang="en-US" sz="1400" dirty="0"/>
           </a:p>
         </p:txBody>
       </p:sp>
@@ -16225,14 +16145,14 @@
           <a:ln/>
         </p:spPr>
         <p:txBody>
-          <a:bodyPr wrap="square" lIns="0" tIns="0" rIns="0" bIns="0" rtlCol="0" anchor="ctr"/>
-          <a:lstStyle/>
-          <a:p>
-            <a:pPr indent="0" marL="0">
-              <a:buNone/>
-            </a:pPr>
-            <a:r>
-              <a:rPr lang="en-US" sz="1050" dirty="0">
+          <a:bodyPr wrap="square" lIns="0" tIns="0" rIns="0" bIns="0" rtlCol="0" anchor="t"/>
+          <a:lstStyle/>
+          <a:p>
+            <a:pPr indent="0" marL="0">
+              <a:buNone/>
+            </a:pPr>
+            <a:r>
+              <a:rPr lang="en-US" sz="1400" dirty="0">
                 <a:solidFill>
                   <a:srgbClr val="FBF5E6"/>
                 </a:solidFill>
@@ -16242,7 +16162,7 @@
               </a:rPr>
               <a:t>波愛修斯《音樂基礎》De institutione musica (Boethius)</a:t>
             </a:r>
-            <a:endParaRPr lang="en-US" sz="1050" dirty="0"/>
+            <a:endParaRPr lang="en-US" sz="1400" dirty="0"/>
           </a:p>
         </p:txBody>
       </p:sp>
@@ -16284,14 +16204,14 @@
           <a:ln/>
         </p:spPr>
         <p:txBody>
-          <a:bodyPr wrap="square" lIns="0" tIns="0" rIns="0" bIns="0" rtlCol="0" anchor="ctr"/>
+          <a:bodyPr wrap="square" lIns="0" tIns="0" rIns="0" bIns="0" rtlCol="0" anchor="t"/>
           <a:lstStyle/>
           <a:p>
             <a:pPr algn="r" indent="0" marL="0">
               <a:buNone/>
             </a:pPr>
             <a:r>
-              <a:rPr lang="en-US" sz="950" dirty="0">
+              <a:rPr lang="en-US" sz="1400" dirty="0">
                 <a:solidFill>
                   <a:srgbClr val="E8D8A8"/>
                 </a:solidFill>
@@ -16301,7 +16221,7 @@
               </a:rPr>
               <a:t>590–604 CE</a:t>
             </a:r>
-            <a:endParaRPr lang="en-US" sz="950" dirty="0"/>
+            <a:endParaRPr lang="en-US" sz="1400" dirty="0"/>
           </a:p>
         </p:txBody>
       </p:sp>
@@ -16323,14 +16243,14 @@
           <a:ln/>
         </p:spPr>
         <p:txBody>
-          <a:bodyPr wrap="square" lIns="0" tIns="0" rIns="0" bIns="0" rtlCol="0" anchor="ctr"/>
-          <a:lstStyle/>
-          <a:p>
-            <a:pPr indent="0" marL="0">
-              <a:buNone/>
-            </a:pPr>
-            <a:r>
-              <a:rPr lang="en-US" sz="1050" dirty="0">
+          <a:bodyPr wrap="square" lIns="0" tIns="0" rIns="0" bIns="0" rtlCol="0" anchor="t"/>
+          <a:lstStyle/>
+          <a:p>
+            <a:pPr indent="0" marL="0">
+              <a:buNone/>
+            </a:pPr>
+            <a:r>
+              <a:rPr lang="en-US" sz="1400" dirty="0">
                 <a:solidFill>
                   <a:srgbClr val="FBF5E6"/>
                 </a:solidFill>
@@ -16340,7 +16260,7 @@
               </a:rPr>
               <a:t>教宗額我略一世 Reign of Pope Gregory I (the Great)</a:t>
             </a:r>
-            <a:endParaRPr lang="en-US" sz="1050" dirty="0"/>
+            <a:endParaRPr lang="en-US" sz="1400" dirty="0"/>
           </a:p>
         </p:txBody>
       </p:sp>
@@ -16382,14 +16302,14 @@
           <a:ln/>
         </p:spPr>
         <p:txBody>
-          <a:bodyPr wrap="square" lIns="0" tIns="0" rIns="0" bIns="0" rtlCol="0" anchor="ctr"/>
+          <a:bodyPr wrap="square" lIns="0" tIns="0" rIns="0" bIns="0" rtlCol="0" anchor="t"/>
           <a:lstStyle/>
           <a:p>
             <a:pPr algn="r" indent="0" marL="0">
               <a:buNone/>
             </a:pPr>
             <a:r>
-              <a:rPr lang="en-US" sz="950" dirty="0">
+              <a:rPr lang="en-US" sz="1400" dirty="0">
                 <a:solidFill>
                   <a:srgbClr val="E8D8A8"/>
                 </a:solidFill>
@@ -16399,7 +16319,7 @@
               </a:rPr>
               <a:t>ca. 754 CE</a:t>
             </a:r>
-            <a:endParaRPr lang="en-US" sz="950" dirty="0"/>
+            <a:endParaRPr lang="en-US" sz="1400" dirty="0"/>
           </a:p>
         </p:txBody>
       </p:sp>
@@ -16421,14 +16341,14 @@
           <a:ln/>
         </p:spPr>
         <p:txBody>
-          <a:bodyPr wrap="square" lIns="0" tIns="0" rIns="0" bIns="0" rtlCol="0" anchor="ctr"/>
-          <a:lstStyle/>
-          <a:p>
-            <a:pPr indent="0" marL="0">
-              <a:buNone/>
-            </a:pPr>
-            <a:r>
-              <a:rPr lang="en-US" sz="1050" dirty="0">
+          <a:bodyPr wrap="square" lIns="0" tIns="0" rIns="0" bIns="0" rtlCol="0" anchor="t"/>
+          <a:lstStyle/>
+          <a:p>
+            <a:pPr indent="0" marL="0">
+              <a:buNone/>
+            </a:pPr>
+            <a:r>
+              <a:rPr lang="en-US" sz="1400" dirty="0">
                 <a:solidFill>
                   <a:srgbClr val="FBF5E6"/>
                 </a:solidFill>
@@ -16438,7 +16358,7 @@
               </a:rPr>
               <a:t>丕平令全境採用羅馬禮儀 Pippin orders Roman liturgy and chant</a:t>
             </a:r>
-            <a:endParaRPr lang="en-US" sz="1050" dirty="0"/>
+            <a:endParaRPr lang="en-US" sz="1400" dirty="0"/>
           </a:p>
         </p:txBody>
       </p:sp>
@@ -16480,14 +16400,14 @@
           <a:ln/>
         </p:spPr>
         <p:txBody>
-          <a:bodyPr wrap="square" lIns="0" tIns="0" rIns="0" bIns="0" rtlCol="0" anchor="ctr"/>
+          <a:bodyPr wrap="square" lIns="0" tIns="0" rIns="0" bIns="0" rtlCol="0" anchor="t"/>
           <a:lstStyle/>
           <a:p>
             <a:pPr algn="r" indent="0" marL="0">
               <a:buNone/>
             </a:pPr>
             <a:r>
-              <a:rPr lang="en-US" sz="950" dirty="0">
+              <a:rPr lang="en-US" sz="1400" dirty="0">
                 <a:solidFill>
                   <a:srgbClr val="E8D8A8"/>
                 </a:solidFill>
@@ -16497,7 +16417,7 @@
               </a:rPr>
               <a:t>800 CE</a:t>
             </a:r>
-            <a:endParaRPr lang="en-US" sz="950" dirty="0"/>
+            <a:endParaRPr lang="en-US" sz="1400" dirty="0"/>
           </a:p>
         </p:txBody>
       </p:sp>
@@ -16519,14 +16439,14 @@
           <a:ln/>
         </p:spPr>
         <p:txBody>
-          <a:bodyPr wrap="square" lIns="0" tIns="0" rIns="0" bIns="0" rtlCol="0" anchor="ctr"/>
-          <a:lstStyle/>
-          <a:p>
-            <a:pPr indent="0" marL="0">
-              <a:buNone/>
-            </a:pPr>
-            <a:r>
-              <a:rPr lang="en-US" sz="1050" dirty="0">
+          <a:bodyPr wrap="square" lIns="0" tIns="0" rIns="0" bIns="0" rtlCol="0" anchor="t"/>
+          <a:lstStyle/>
+          <a:p>
+            <a:pPr indent="0" marL="0">
+              <a:buNone/>
+            </a:pPr>
+            <a:r>
+              <a:rPr lang="en-US" sz="1400" dirty="0">
                 <a:solidFill>
                   <a:srgbClr val="FBF5E6"/>
                 </a:solidFill>
@@ -16536,7 +16456,7 @@
               </a:rPr>
               <a:t>查理曼加冕為皇帝 Charlemagne crowned emperor by the pope</a:t>
             </a:r>
-            <a:endParaRPr lang="en-US" sz="1050" dirty="0"/>
+            <a:endParaRPr lang="en-US" sz="1400" dirty="0"/>
           </a:p>
         </p:txBody>
       </p:sp>
@@ -16578,14 +16498,14 @@
           <a:ln/>
         </p:spPr>
         <p:txBody>
-          <a:bodyPr wrap="square" lIns="0" tIns="0" rIns="0" bIns="0" rtlCol="0" anchor="ctr"/>
+          <a:bodyPr wrap="square" lIns="0" tIns="0" rIns="0" bIns="0" rtlCol="0" anchor="t"/>
           <a:lstStyle/>
           <a:p>
             <a:pPr algn="r" indent="0" marL="0">
               <a:buNone/>
             </a:pPr>
             <a:r>
-              <a:rPr lang="en-US" sz="950" dirty="0">
+              <a:rPr lang="en-US" sz="1400" dirty="0">
                 <a:solidFill>
                   <a:srgbClr val="E8D8A8"/>
                 </a:solidFill>
@@ -16595,7 +16515,7 @@
               </a:rPr>
               <a:t>ca. 850–900 CE</a:t>
             </a:r>
-            <a:endParaRPr lang="en-US" sz="950" dirty="0"/>
+            <a:endParaRPr lang="en-US" sz="1400" dirty="0"/>
           </a:p>
         </p:txBody>
       </p:sp>
@@ -16617,14 +16537,14 @@
           <a:ln/>
         </p:spPr>
         <p:txBody>
-          <a:bodyPr wrap="square" lIns="0" tIns="0" rIns="0" bIns="0" rtlCol="0" anchor="ctr"/>
-          <a:lstStyle/>
-          <a:p>
-            <a:pPr indent="0" marL="0">
-              <a:buNone/>
-            </a:pPr>
-            <a:r>
-              <a:rPr lang="en-US" sz="1050" dirty="0">
+          <a:bodyPr wrap="square" lIns="0" tIns="0" rIns="0" bIns="0" rtlCol="0" anchor="t"/>
+          <a:lstStyle/>
+          <a:p>
+            <a:pPr indent="0" marL="0">
+              <a:buNone/>
+            </a:pPr>
+            <a:r>
+              <a:rPr lang="en-US" sz="1400" dirty="0">
                 <a:solidFill>
                   <a:srgbClr val="FBF5E6"/>
                 </a:solidFill>
@@ -16634,7 +16554,7 @@
               </a:rPr>
               <a:t>《音樂手冊》Musica enchiriadis and Scelica enchiriadis</a:t>
             </a:r>
-            <a:endParaRPr lang="en-US" sz="1050" dirty="0"/>
+            <a:endParaRPr lang="en-US" sz="1400" dirty="0"/>
           </a:p>
         </p:txBody>
       </p:sp>
@@ -16676,14 +16596,14 @@
           <a:ln/>
         </p:spPr>
         <p:txBody>
-          <a:bodyPr wrap="square" lIns="0" tIns="0" rIns="0" bIns="0" rtlCol="0" anchor="ctr"/>
+          <a:bodyPr wrap="square" lIns="0" tIns="0" rIns="0" bIns="0" rtlCol="0" anchor="t"/>
           <a:lstStyle/>
           <a:p>
             <a:pPr algn="r" indent="0" marL="0">
               <a:buNone/>
             </a:pPr>
             <a:r>
-              <a:rPr lang="en-US" sz="950" dirty="0">
+              <a:rPr lang="en-US" sz="1400" dirty="0">
                 <a:solidFill>
                   <a:srgbClr val="E8D8A8"/>
                 </a:solidFill>
@@ -16693,7 +16613,7 @@
               </a:rPr>
               <a:t>1025–28 CE</a:t>
             </a:r>
-            <a:endParaRPr lang="en-US" sz="950" dirty="0"/>
+            <a:endParaRPr lang="en-US" sz="1400" dirty="0"/>
           </a:p>
         </p:txBody>
       </p:sp>
@@ -16715,14 +16635,14 @@
           <a:ln/>
         </p:spPr>
         <p:txBody>
-          <a:bodyPr wrap="square" lIns="0" tIns="0" rIns="0" bIns="0" rtlCol="0" anchor="ctr"/>
-          <a:lstStyle/>
-          <a:p>
-            <a:pPr indent="0" marL="0">
-              <a:buNone/>
-            </a:pPr>
-            <a:r>
-              <a:rPr lang="en-US" sz="1050" dirty="0">
+          <a:bodyPr wrap="square" lIns="0" tIns="0" rIns="0" bIns="0" rtlCol="0" anchor="t"/>
+          <a:lstStyle/>
+          <a:p>
+            <a:pPr indent="0" marL="0">
+              <a:buNone/>
+            </a:pPr>
+            <a:r>
+              <a:rPr lang="en-US" sz="1400" dirty="0">
                 <a:solidFill>
                   <a:srgbClr val="FBF5E6"/>
                 </a:solidFill>
@@ -16732,7 +16652,7 @@
               </a:rPr>
               <a:t>阿雷佐的桂多《小論文》Guido of Arezzo, Micrologus</a:t>
             </a:r>
-            <a:endParaRPr lang="en-US" sz="1050" dirty="0"/>
+            <a:endParaRPr lang="en-US" sz="1400" dirty="0"/>
           </a:p>
         </p:txBody>
       </p:sp>
@@ -16774,14 +16694,14 @@
           <a:ln/>
         </p:spPr>
         <p:txBody>
-          <a:bodyPr wrap="square" lIns="0" tIns="0" rIns="0" bIns="0" rtlCol="0" anchor="ctr"/>
+          <a:bodyPr wrap="square" lIns="0" tIns="0" rIns="0" bIns="0" rtlCol="0" anchor="t"/>
           <a:lstStyle/>
           <a:p>
             <a:pPr algn="r" indent="0" marL="0">
               <a:buNone/>
             </a:pPr>
             <a:r>
-              <a:rPr lang="en-US" sz="950" dirty="0">
+              <a:rPr lang="en-US" sz="1400" dirty="0">
                 <a:solidFill>
                   <a:srgbClr val="E8D8A8"/>
                 </a:solidFill>
@@ -16791,7 +16711,7 @@
               </a:rPr>
               <a:t>1054 CE</a:t>
             </a:r>
-            <a:endParaRPr lang="en-US" sz="950" dirty="0"/>
+            <a:endParaRPr lang="en-US" sz="1400" dirty="0"/>
           </a:p>
         </p:txBody>
       </p:sp>
@@ -16813,14 +16733,14 @@
           <a:ln/>
         </p:spPr>
         <p:txBody>
-          <a:bodyPr wrap="square" lIns="0" tIns="0" rIns="0" bIns="0" rtlCol="0" anchor="ctr"/>
-          <a:lstStyle/>
-          <a:p>
-            <a:pPr indent="0" marL="0">
-              <a:buNone/>
-            </a:pPr>
-            <a:r>
-              <a:rPr lang="en-US" sz="1050" dirty="0">
+          <a:bodyPr wrap="square" lIns="0" tIns="0" rIns="0" bIns="0" rtlCol="0" anchor="t"/>
+          <a:lstStyle/>
+          <a:p>
+            <a:pPr indent="0" marL="0">
+              <a:buNone/>
+            </a:pPr>
+            <a:r>
+              <a:rPr lang="en-US" sz="1400" dirty="0">
                 <a:solidFill>
                   <a:srgbClr val="FBF5E6"/>
                 </a:solidFill>
@@ -16830,7 +16750,7 @@
               </a:rPr>
               <a:t>東西教會正式分裂 Final split of Roman and Byzantine churches</a:t>
             </a:r>
-            <a:endParaRPr lang="en-US" sz="1050" dirty="0"/>
+            <a:endParaRPr lang="en-US" sz="1400" dirty="0"/>
           </a:p>
         </p:txBody>
       </p:sp>

--- a/Ch02_Christian_Church.pptx
+++ b/Ch02_Christian_Church.pptx
@@ -2588,8 +2588,8 @@
         </p:nvSpPr>
         <p:spPr>
           <a:xfrm>
-            <a:off x="274320" y="1298448"/>
-            <a:ext cx="8595360" cy="786384"/>
+            <a:off x="274320" y="1261872"/>
+            <a:ext cx="8595360" cy="859536"/>
           </a:xfrm>
           <a:prstGeom prst="rect">
             <a:avLst/>
@@ -2608,17 +2608,17 @@
         </p:nvSpPr>
         <p:spPr>
           <a:xfrm>
-            <a:off x="411480" y="1353312"/>
-            <a:ext cx="2194560" cy="658368"/>
-          </a:xfrm>
-          <a:prstGeom prst="rect">
-            <a:avLst/>
-          </a:prstGeom>
-          <a:noFill/>
-          <a:ln/>
-        </p:spPr>
-        <p:txBody>
-          <a:bodyPr wrap="square" lIns="0" tIns="0" rIns="0" bIns="0" rtlCol="0" anchor="ctr"/>
+            <a:off x="411480" y="1325880"/>
+            <a:ext cx="2377440" cy="731520"/>
+          </a:xfrm>
+          <a:prstGeom prst="rect">
+            <a:avLst/>
+          </a:prstGeom>
+          <a:noFill/>
+          <a:ln/>
+        </p:spPr>
+        <p:txBody>
+          <a:bodyPr wrap="square" lIns="0" tIns="0" rIns="0" bIns="0" rtlCol="0" anchor="t"/>
           <a:lstStyle/>
           <a:p>
             <a:pPr indent="0" marL="0">
@@ -2664,8 +2664,8 @@
         </p:nvSpPr>
         <p:spPr>
           <a:xfrm>
-            <a:off x="2697480" y="1408176"/>
-            <a:ext cx="36576" cy="548640"/>
+            <a:off x="2880360" y="1353312"/>
+            <a:ext cx="36576" cy="658368"/>
           </a:xfrm>
           <a:prstGeom prst="rect">
             <a:avLst/>
@@ -2684,8 +2684,8 @@
         </p:nvSpPr>
         <p:spPr>
           <a:xfrm>
-            <a:off x="2816352" y="1362456"/>
-            <a:ext cx="5943600" cy="658368"/>
+            <a:off x="2999232" y="1307592"/>
+            <a:ext cx="5715000" cy="804672"/>
           </a:xfrm>
           <a:prstGeom prst="rect">
             <a:avLst/>
@@ -2709,7 +2709,7 @@
                 <a:ea typeface="Calibri" pitchFamily="34" charset="-122"/>
                 <a:cs typeface="Calibri" pitchFamily="34" charset="-120"/>
               </a:rPr>
-              <a:t>記譜法出現前，聖詠靠口傳記憶；歌手學習數以百計的旋律，全靠記憶</a:t>
+              <a:t>記譜法出現前，聖詠靠口傳記憶；歌手須記數百旋律</a:t>
             </a:r>
             <a:endParaRPr lang="en-US" sz="1400" dirty="0"/>
           </a:p>
@@ -2726,7 +2726,7 @@
                 <a:ea typeface="Calibri" pitchFamily="34" charset="-122"/>
                 <a:cs typeface="Calibri" pitchFamily="34" charset="-120"/>
               </a:rPr>
-              <a:t>Before notation, chants were memorized through oral transmission; singers memorized hundreds of melodies</a:t>
+              <a:t>Before notation, chants memorized orally; hundreds of melodies</a:t>
             </a:r>
             <a:endParaRPr lang="en-US" sz="1400" dirty="0"/>
           </a:p>
@@ -2740,8 +2740,8 @@
         </p:nvSpPr>
         <p:spPr>
           <a:xfrm>
-            <a:off x="274320" y="2194560"/>
-            <a:ext cx="8595360" cy="786384"/>
+            <a:off x="274320" y="2176272"/>
+            <a:ext cx="8595360" cy="859536"/>
           </a:xfrm>
           <a:prstGeom prst="rect">
             <a:avLst/>
@@ -2760,17 +2760,17 @@
         </p:nvSpPr>
         <p:spPr>
           <a:xfrm>
-            <a:off x="411480" y="2249424"/>
-            <a:ext cx="2194560" cy="658368"/>
-          </a:xfrm>
-          <a:prstGeom prst="rect">
-            <a:avLst/>
-          </a:prstGeom>
-          <a:noFill/>
-          <a:ln/>
-        </p:spPr>
-        <p:txBody>
-          <a:bodyPr wrap="square" lIns="0" tIns="0" rIns="0" bIns="0" rtlCol="0" anchor="ctr"/>
+            <a:off x="411480" y="2240280"/>
+            <a:ext cx="2377440" cy="731520"/>
+          </a:xfrm>
+          <a:prstGeom prst="rect">
+            <a:avLst/>
+          </a:prstGeom>
+          <a:noFill/>
+          <a:ln/>
+        </p:spPr>
+        <p:txBody>
+          <a:bodyPr wrap="square" lIns="0" tIns="0" rIns="0" bIns="0" rtlCol="0" anchor="t"/>
           <a:lstStyle/>
           <a:p>
             <a:pPr indent="0" marL="0">
@@ -2816,8 +2816,8 @@
         </p:nvSpPr>
         <p:spPr>
           <a:xfrm>
-            <a:off x="2697480" y="2304288"/>
-            <a:ext cx="36576" cy="548640"/>
+            <a:off x="2880360" y="2267712"/>
+            <a:ext cx="36576" cy="658368"/>
           </a:xfrm>
           <a:prstGeom prst="rect">
             <a:avLst/>
@@ -2836,8 +2836,8 @@
         </p:nvSpPr>
         <p:spPr>
           <a:xfrm>
-            <a:off x="2816352" y="2258568"/>
-            <a:ext cx="5943600" cy="658368"/>
+            <a:off x="2999232" y="2221992"/>
+            <a:ext cx="5715000" cy="804672"/>
           </a:xfrm>
           <a:prstGeom prst="rect">
             <a:avLst/>
@@ -2861,7 +2861,7 @@
                 <a:ea typeface="Calibri" pitchFamily="34" charset="-122"/>
                 <a:cs typeface="Calibri" pitchFamily="34" charset="-120"/>
               </a:rPr>
-              <a:t>寫在文字上方的記號（gesture/shape），提示旋律輪廓——但不指定確切音高</a:t>
+              <a:t>文字上方記號（gesture/shape），提示旋律輪廓但不定音高</a:t>
             </a:r>
             <a:endParaRPr lang="en-US" sz="1400" dirty="0"/>
           </a:p>
@@ -2878,7 +2878,7 @@
                 <a:ea typeface="Calibri" pitchFamily="34" charset="-122"/>
                 <a:cs typeface="Calibri" pitchFamily="34" charset="-120"/>
               </a:rPr>
-              <a:t>Signs placed above text to indicate melodic contour—direction, shape—but not precise pitches or intervals</a:t>
+              <a:t>Signs above text show melodic contour — no precise pitch</a:t>
             </a:r>
             <a:endParaRPr lang="en-US" sz="1400" dirty="0"/>
           </a:p>
@@ -2893,7 +2893,7 @@
         <p:spPr>
           <a:xfrm>
             <a:off x="274320" y="3090672"/>
-            <a:ext cx="8595360" cy="786384"/>
+            <a:ext cx="8595360" cy="859536"/>
           </a:xfrm>
           <a:prstGeom prst="rect">
             <a:avLst/>
@@ -2912,17 +2912,17 @@
         </p:nvSpPr>
         <p:spPr>
           <a:xfrm>
-            <a:off x="411480" y="3145536"/>
-            <a:ext cx="2194560" cy="658368"/>
-          </a:xfrm>
-          <a:prstGeom prst="rect">
-            <a:avLst/>
-          </a:prstGeom>
-          <a:noFill/>
-          <a:ln/>
-        </p:spPr>
-        <p:txBody>
-          <a:bodyPr wrap="square" lIns="0" tIns="0" rIns="0" bIns="0" rtlCol="0" anchor="ctr"/>
+            <a:off x="411480" y="3154680"/>
+            <a:ext cx="2377440" cy="731520"/>
+          </a:xfrm>
+          <a:prstGeom prst="rect">
+            <a:avLst/>
+          </a:prstGeom>
+          <a:noFill/>
+          <a:ln/>
+        </p:spPr>
+        <p:txBody>
+          <a:bodyPr wrap="square" lIns="0" tIns="0" rIns="0" bIns="0" rtlCol="0" anchor="t"/>
           <a:lstStyle/>
           <a:p>
             <a:pPr indent="0" marL="0">
@@ -2968,8 +2968,8 @@
         </p:nvSpPr>
         <p:spPr>
           <a:xfrm>
-            <a:off x="2697480" y="3200400"/>
-            <a:ext cx="36576" cy="548640"/>
+            <a:off x="2880360" y="3182112"/>
+            <a:ext cx="36576" cy="658368"/>
           </a:xfrm>
           <a:prstGeom prst="rect">
             <a:avLst/>
@@ -2988,8 +2988,8 @@
         </p:nvSpPr>
         <p:spPr>
           <a:xfrm>
-            <a:off x="2816352" y="3154680"/>
-            <a:ext cx="5943600" cy="658368"/>
+            <a:off x="2999232" y="3136392"/>
+            <a:ext cx="5715000" cy="804672"/>
           </a:xfrm>
           <a:prstGeom prst="rect">
             <a:avLst/>
@@ -3013,7 +3013,7 @@
                 <a:ea typeface="Calibri" pitchFamily="34" charset="-122"/>
                 <a:cs typeface="Calibri" pitchFamily="34" charset="-120"/>
               </a:rPr>
-              <a:t>紐姆符號寫在不同高度以指示音高；加一條橫線輔助辨識音高（音高相對但仍不確定）</a:t>
+              <a:t>紐姆寫在不同高度以指示音高；加一條橫線輔助辨識</a:t>
             </a:r>
             <a:endParaRPr lang="en-US" sz="1400" dirty="0"/>
           </a:p>
@@ -3030,7 +3030,7 @@
                 <a:ea typeface="Calibri" pitchFamily="34" charset="-122"/>
                 <a:cs typeface="Calibri" pitchFamily="34" charset="-120"/>
               </a:rPr>
-              <a:t>Neumes placed at varying heights above text to indicate relative pitch; a scratched line helped identify one note</a:t>
+              <a:t>Neumes at varying heights show relative pitch; one scratched line added</a:t>
             </a:r>
             <a:endParaRPr lang="en-US" sz="1400" dirty="0"/>
           </a:p>
@@ -3044,8 +3044,8 @@
         </p:nvSpPr>
         <p:spPr>
           <a:xfrm>
-            <a:off x="274320" y="3986784"/>
-            <a:ext cx="8595360" cy="786384"/>
+            <a:off x="274320" y="4005072"/>
+            <a:ext cx="8595360" cy="859536"/>
           </a:xfrm>
           <a:prstGeom prst="rect">
             <a:avLst/>
@@ -3064,17 +3064,17 @@
         </p:nvSpPr>
         <p:spPr>
           <a:xfrm>
-            <a:off x="411480" y="4041648"/>
-            <a:ext cx="2194560" cy="658368"/>
-          </a:xfrm>
-          <a:prstGeom prst="rect">
-            <a:avLst/>
-          </a:prstGeom>
-          <a:noFill/>
-          <a:ln/>
-        </p:spPr>
-        <p:txBody>
-          <a:bodyPr wrap="square" lIns="0" tIns="0" rIns="0" bIns="0" rtlCol="0" anchor="ctr"/>
+            <a:off x="411480" y="4069080"/>
+            <a:ext cx="2377440" cy="731520"/>
+          </a:xfrm>
+          <a:prstGeom prst="rect">
+            <a:avLst/>
+          </a:prstGeom>
+          <a:noFill/>
+          <a:ln/>
+        </p:spPr>
+        <p:txBody>
+          <a:bodyPr wrap="square" lIns="0" tIns="0" rIns="0" bIns="0" rtlCol="0" anchor="t"/>
           <a:lstStyle/>
           <a:p>
             <a:pPr indent="0" marL="0">
@@ -3120,8 +3120,8 @@
         </p:nvSpPr>
         <p:spPr>
           <a:xfrm>
-            <a:off x="2697480" y="4096512"/>
-            <a:ext cx="36576" cy="548640"/>
+            <a:off x="2880360" y="4096512"/>
+            <a:ext cx="36576" cy="658368"/>
           </a:xfrm>
           <a:prstGeom prst="rect">
             <a:avLst/>
@@ -3140,8 +3140,8 @@
         </p:nvSpPr>
         <p:spPr>
           <a:xfrm>
-            <a:off x="2816352" y="4050792"/>
-            <a:ext cx="5943600" cy="658368"/>
+            <a:off x="2999232" y="4050792"/>
+            <a:ext cx="5715000" cy="804672"/>
           </a:xfrm>
           <a:prstGeom prst="rect">
             <a:avLst/>
@@ -3165,7 +3165,7 @@
                 <a:ea typeface="Calibri" pitchFamily="34" charset="-122"/>
                 <a:cs typeface="Calibri" pitchFamily="34" charset="-120"/>
               </a:rPr>
-              <a:t>阿雷佐的桂多（ca. 991–1033）：四線譜，F、C 譜號，紐姆符號改良為精確音符</a:t>
+              <a:t>阿雷佐桂多（ca. 991–1033）：四線譜，F、C 譜號，精確音符</a:t>
             </a:r>
             <a:endParaRPr lang="en-US" sz="1400" dirty="0"/>
           </a:p>
@@ -3182,7 +3182,7 @@
                 <a:ea typeface="Calibri" pitchFamily="34" charset="-122"/>
                 <a:cs typeface="Calibri" pitchFamily="34" charset="-120"/>
               </a:rPr>
-              <a:t>Guido of Arezzo: four-line staff with F and C clefs; neumes reshaped to indicate pitch exactly; music could now be read at sight</a:t>
+              <a:t>Guido of Arezzo: four-line staff with F/C clefs — precise pitch</a:t>
             </a:r>
             <a:endParaRPr lang="en-US" sz="1400" dirty="0"/>
           </a:p>
@@ -3367,7 +3367,7 @@
         <p:spPr>
           <a:xfrm>
             <a:off x="365760" y="1078992"/>
-            <a:ext cx="8412480" cy="685800"/>
+            <a:ext cx="8412480" cy="658368"/>
           </a:xfrm>
           <a:prstGeom prst="rect">
             <a:avLst/>
@@ -3391,7 +3391,7 @@
                 <a:ea typeface="Calibri" pitchFamily="34" charset="-122"/>
                 <a:cs typeface="Calibri" pitchFamily="34" charset="-120"/>
               </a:rPr>
-              <a:t>波愛修斯生於羅馬貴族，後受哥德統治者狄奧多里克任命，依據希臘文獻（畢達哥拉斯、托勒密）撰寫《音樂基礎》。此書在中世紀被奉為最高音樂理論權威超過一千年。</a:t>
+              <a:t>波愛修斯依據希臘文獻（畢達哥拉斯、托勒密）撰寫《音樂基礎》，在中世紀被奉為最高音樂理論權威</a:t>
             </a:r>
             <a:endParaRPr lang="en-US" sz="1400" dirty="0"/>
           </a:p>
@@ -3408,7 +3408,7 @@
                 <a:ea typeface="Calibri" pitchFamily="34" charset="-122"/>
                 <a:cs typeface="Calibri" pitchFamily="34" charset="-120"/>
               </a:rPr>
-              <a:t>Boethius, born into Roman nobility, compiled De institutione musica from Greek sources (Pythagoras, Ptolemy). It was the authoritative text on music theory for over a thousand years.</a:t>
+              <a:t>Boethius compiled De institutione musica from Greek sources; authoritative medieval music theory text for a millennium</a:t>
             </a:r>
             <a:endParaRPr lang="en-US" sz="1400" dirty="0"/>
           </a:p>
@@ -3422,8 +3422,8 @@
         </p:nvSpPr>
         <p:spPr>
           <a:xfrm>
-            <a:off x="274320" y="1874520"/>
-            <a:ext cx="2788920" cy="2514600"/>
+            <a:off x="274320" y="1901952"/>
+            <a:ext cx="2788920" cy="2395728"/>
           </a:xfrm>
           <a:prstGeom prst="rect">
             <a:avLst/>
@@ -3442,7 +3442,7 @@
         </p:nvSpPr>
         <p:spPr>
           <a:xfrm>
-            <a:off x="274320" y="1920240"/>
+            <a:off x="274320" y="1947672"/>
             <a:ext cx="2788920" cy="411480"/>
           </a:xfrm>
           <a:prstGeom prst="rect">
@@ -3478,7 +3478,7 @@
         </p:nvSpPr>
         <p:spPr>
           <a:xfrm>
-            <a:off x="365760" y="2331720"/>
+            <a:off x="365760" y="2359152"/>
             <a:ext cx="2606040" cy="548640"/>
           </a:xfrm>
           <a:prstGeom prst="rect">
@@ -3554,8 +3554,8 @@
         </p:nvSpPr>
         <p:spPr>
           <a:xfrm>
-            <a:off x="365760" y="3017520"/>
-            <a:ext cx="2606040" cy="1280160"/>
+            <a:off x="365760" y="2999232"/>
+            <a:ext cx="2606040" cy="1234440"/>
           </a:xfrm>
           <a:prstGeom prst="rect">
             <a:avLst/>
@@ -3610,8 +3610,8 @@
         </p:nvSpPr>
         <p:spPr>
           <a:xfrm>
-            <a:off x="3246120" y="1874520"/>
-            <a:ext cx="2788920" cy="2514600"/>
+            <a:off x="3246120" y="1901952"/>
+            <a:ext cx="2788920" cy="2395728"/>
           </a:xfrm>
           <a:prstGeom prst="rect">
             <a:avLst/>
@@ -3630,7 +3630,7 @@
         </p:nvSpPr>
         <p:spPr>
           <a:xfrm>
-            <a:off x="3246120" y="1920240"/>
+            <a:off x="3246120" y="1947672"/>
             <a:ext cx="2788920" cy="411480"/>
           </a:xfrm>
           <a:prstGeom prst="rect">
@@ -3666,7 +3666,7 @@
         </p:nvSpPr>
         <p:spPr>
           <a:xfrm>
-            <a:off x="3337560" y="2331720"/>
+            <a:off x="3337560" y="2359152"/>
             <a:ext cx="2606040" cy="548640"/>
           </a:xfrm>
           <a:prstGeom prst="rect">
@@ -3742,8 +3742,8 @@
         </p:nvSpPr>
         <p:spPr>
           <a:xfrm>
-            <a:off x="3337560" y="3017520"/>
-            <a:ext cx="2606040" cy="1280160"/>
+            <a:off x="3337560" y="2999232"/>
+            <a:ext cx="2606040" cy="1234440"/>
           </a:xfrm>
           <a:prstGeom prst="rect">
             <a:avLst/>
@@ -3798,8 +3798,8 @@
         </p:nvSpPr>
         <p:spPr>
           <a:xfrm>
-            <a:off x="6217920" y="1874520"/>
-            <a:ext cx="2788920" cy="2514600"/>
+            <a:off x="6217920" y="1901952"/>
+            <a:ext cx="2788920" cy="2395728"/>
           </a:xfrm>
           <a:prstGeom prst="rect">
             <a:avLst/>
@@ -3818,7 +3818,7 @@
         </p:nvSpPr>
         <p:spPr>
           <a:xfrm>
-            <a:off x="6217920" y="1920240"/>
+            <a:off x="6217920" y="1947672"/>
             <a:ext cx="2788920" cy="411480"/>
           </a:xfrm>
           <a:prstGeom prst="rect">
@@ -3854,7 +3854,7 @@
         </p:nvSpPr>
         <p:spPr>
           <a:xfrm>
-            <a:off x="6309360" y="2331720"/>
+            <a:off x="6309360" y="2359152"/>
             <a:ext cx="2606040" cy="548640"/>
           </a:xfrm>
           <a:prstGeom prst="rect">
@@ -3930,8 +3930,8 @@
         </p:nvSpPr>
         <p:spPr>
           <a:xfrm>
-            <a:off x="6309360" y="3017520"/>
-            <a:ext cx="2606040" cy="1280160"/>
+            <a:off x="6309360" y="2999232"/>
+            <a:ext cx="2606040" cy="1234440"/>
           </a:xfrm>
           <a:prstGeom prst="rect">
             <a:avLst/>
@@ -3986,8 +3986,8 @@
         </p:nvSpPr>
         <p:spPr>
           <a:xfrm>
-            <a:off x="365760" y="4498848"/>
-            <a:ext cx="8412480" cy="457200"/>
+            <a:off x="365760" y="4407408"/>
+            <a:ext cx="8412480" cy="530352"/>
           </a:xfrm>
           <a:prstGeom prst="rect">
             <a:avLst/>
@@ -4028,7 +4028,7 @@
                 <a:ea typeface="Calibri" pitchFamily="34" charset="-122"/>
                 <a:cs typeface="Calibri" pitchFamily="34" charset="-120"/>
               </a:rPr>
-              <a:t>For Boethius, music is knowledge, not practice; the true musician understands, not plays</a:t>
+              <a:t>For Boethius, music is knowledge; the true musician understands, not plays</a:t>
             </a:r>
             <a:endParaRPr lang="en-US" sz="1400" dirty="0"/>
           </a:p>
@@ -4154,7 +4154,7 @@
         <p:spPr>
           <a:xfrm>
             <a:off x="365760" y="640080"/>
-            <a:ext cx="8412480" cy="320040"/>
+            <a:ext cx="8412480" cy="475488"/>
           </a:xfrm>
           <a:prstGeom prst="rect">
             <a:avLst/>
@@ -4178,7 +4178,24 @@
                 <a:ea typeface="Calibri" pitchFamily="34" charset="-122"/>
                 <a:cs typeface="Calibri" pitchFamily="34" charset="-120"/>
               </a:rPr>
-              <a:t>源自拜占庭的八種 echoi，是組織與記憶格里高利聖詠的核心工具 · Adapted from Byzantine echoi; central tool for classifying and memorizing Gregorian chant</a:t>
+              <a:t>源自拜占庭的八種 echoi · 組織與記憶格里高利聖詠的核心工具</a:t>
+            </a:r>
+            <a:endParaRPr lang="en-US" sz="1400" dirty="0"/>
+          </a:p>
+          <a:p>
+            <a:pPr indent="0" marL="0">
+              <a:buNone/>
+            </a:pPr>
+            <a:r>
+              <a:rPr lang="en-US" sz="1400" i="1" dirty="0">
+                <a:solidFill>
+                  <a:srgbClr val="5C3A28"/>
+                </a:solidFill>
+                <a:latin typeface="Calibri" pitchFamily="34" charset="0"/>
+                <a:ea typeface="Calibri" pitchFamily="34" charset="-122"/>
+                <a:cs typeface="Calibri" pitchFamily="34" charset="-120"/>
+              </a:rPr>
+              <a:t>Based on Byzantine echoi · central tool for classifying Gregorian chant</a:t>
             </a:r>
             <a:endParaRPr lang="en-US" sz="1400" dirty="0"/>
           </a:p>
@@ -4192,7 +4209,7 @@
         </p:nvSpPr>
         <p:spPr>
           <a:xfrm>
-            <a:off x="365760" y="969264"/>
+            <a:off x="365760" y="1133856"/>
             <a:ext cx="8412480" cy="27432"/>
           </a:xfrm>
           <a:prstGeom prst="rect">
@@ -4212,8 +4229,8 @@
         </p:nvSpPr>
         <p:spPr>
           <a:xfrm>
-            <a:off x="320040" y="1024128"/>
-            <a:ext cx="1920240" cy="365760"/>
+            <a:off x="320040" y="1188720"/>
+            <a:ext cx="1920240" cy="347472"/>
           </a:xfrm>
           <a:prstGeom prst="rect">
             <a:avLst/>
@@ -4232,8 +4249,8 @@
         </p:nvSpPr>
         <p:spPr>
           <a:xfrm>
-            <a:off x="365760" y="1042416"/>
-            <a:ext cx="1874520" cy="329184"/>
+            <a:off x="365760" y="1207008"/>
+            <a:ext cx="1874520" cy="310896"/>
           </a:xfrm>
           <a:prstGeom prst="rect">
             <a:avLst/>
@@ -4271,8 +4288,8 @@
         </p:nvSpPr>
         <p:spPr>
           <a:xfrm>
-            <a:off x="2286000" y="1024128"/>
-            <a:ext cx="960120" cy="365760"/>
+            <a:off x="2286000" y="1188720"/>
+            <a:ext cx="960120" cy="347472"/>
           </a:xfrm>
           <a:prstGeom prst="rect">
             <a:avLst/>
@@ -4291,8 +4308,8 @@
         </p:nvSpPr>
         <p:spPr>
           <a:xfrm>
-            <a:off x="2331720" y="1042416"/>
-            <a:ext cx="914400" cy="329184"/>
+            <a:off x="2331720" y="1207008"/>
+            <a:ext cx="914400" cy="310896"/>
           </a:xfrm>
           <a:prstGeom prst="rect">
             <a:avLst/>
@@ -4330,8 +4347,8 @@
         </p:nvSpPr>
         <p:spPr>
           <a:xfrm>
-            <a:off x="3291840" y="1024128"/>
-            <a:ext cx="1280160" cy="365760"/>
+            <a:off x="3291840" y="1188720"/>
+            <a:ext cx="1280160" cy="347472"/>
           </a:xfrm>
           <a:prstGeom prst="rect">
             <a:avLst/>
@@ -4350,8 +4367,8 @@
         </p:nvSpPr>
         <p:spPr>
           <a:xfrm>
-            <a:off x="3337560" y="1042416"/>
-            <a:ext cx="1234440" cy="329184"/>
+            <a:off x="3337560" y="1207008"/>
+            <a:ext cx="1234440" cy="310896"/>
           </a:xfrm>
           <a:prstGeom prst="rect">
             <a:avLst/>
@@ -4389,8 +4406,8 @@
         </p:nvSpPr>
         <p:spPr>
           <a:xfrm>
-            <a:off x="4617720" y="1024128"/>
-            <a:ext cx="2057400" cy="365760"/>
+            <a:off x="4617720" y="1188720"/>
+            <a:ext cx="2057400" cy="347472"/>
           </a:xfrm>
           <a:prstGeom prst="rect">
             <a:avLst/>
@@ -4409,8 +4426,8 @@
         </p:nvSpPr>
         <p:spPr>
           <a:xfrm>
-            <a:off x="4663440" y="1042416"/>
-            <a:ext cx="2011680" cy="329184"/>
+            <a:off x="4663440" y="1207008"/>
+            <a:ext cx="2011680" cy="310896"/>
           </a:xfrm>
           <a:prstGeom prst="rect">
             <a:avLst/>
@@ -4448,8 +4465,8 @@
         </p:nvSpPr>
         <p:spPr>
           <a:xfrm>
-            <a:off x="6720840" y="1024128"/>
-            <a:ext cx="1965960" cy="365760"/>
+            <a:off x="6720840" y="1188720"/>
+            <a:ext cx="1965960" cy="347472"/>
           </a:xfrm>
           <a:prstGeom prst="rect">
             <a:avLst/>
@@ -4468,8 +4485,8 @@
         </p:nvSpPr>
         <p:spPr>
           <a:xfrm>
-            <a:off x="6766560" y="1042416"/>
-            <a:ext cx="1920240" cy="329184"/>
+            <a:off x="6766560" y="1207008"/>
+            <a:ext cx="1920240" cy="310896"/>
           </a:xfrm>
           <a:prstGeom prst="rect">
             <a:avLst/>
@@ -4507,8 +4524,8 @@
         </p:nvSpPr>
         <p:spPr>
           <a:xfrm>
-            <a:off x="320040" y="1417320"/>
-            <a:ext cx="1920240" cy="365760"/>
+            <a:off x="320040" y="1572768"/>
+            <a:ext cx="1920240" cy="347472"/>
           </a:xfrm>
           <a:prstGeom prst="rect">
             <a:avLst/>
@@ -4527,8 +4544,8 @@
         </p:nvSpPr>
         <p:spPr>
           <a:xfrm>
-            <a:off x="365760" y="1435608"/>
-            <a:ext cx="1874520" cy="329184"/>
+            <a:off x="365760" y="1591056"/>
+            <a:ext cx="1874520" cy="310896"/>
           </a:xfrm>
           <a:prstGeom prst="rect">
             <a:avLst/>
@@ -4566,8 +4583,8 @@
         </p:nvSpPr>
         <p:spPr>
           <a:xfrm>
-            <a:off x="2286000" y="1417320"/>
-            <a:ext cx="960120" cy="365760"/>
+            <a:off x="2286000" y="1572768"/>
+            <a:ext cx="960120" cy="347472"/>
           </a:xfrm>
           <a:prstGeom prst="rect">
             <a:avLst/>
@@ -4586,8 +4603,8 @@
         </p:nvSpPr>
         <p:spPr>
           <a:xfrm>
-            <a:off x="2331720" y="1435608"/>
-            <a:ext cx="914400" cy="329184"/>
+            <a:off x="2331720" y="1591056"/>
+            <a:ext cx="914400" cy="310896"/>
           </a:xfrm>
           <a:prstGeom prst="rect">
             <a:avLst/>
@@ -4625,8 +4642,8 @@
         </p:nvSpPr>
         <p:spPr>
           <a:xfrm>
-            <a:off x="3291840" y="1417320"/>
-            <a:ext cx="1280160" cy="365760"/>
+            <a:off x="3291840" y="1572768"/>
+            <a:ext cx="1280160" cy="347472"/>
           </a:xfrm>
           <a:prstGeom prst="rect">
             <a:avLst/>
@@ -4645,8 +4662,8 @@
         </p:nvSpPr>
         <p:spPr>
           <a:xfrm>
-            <a:off x="3337560" y="1435608"/>
-            <a:ext cx="1234440" cy="329184"/>
+            <a:off x="3337560" y="1591056"/>
+            <a:ext cx="1234440" cy="310896"/>
           </a:xfrm>
           <a:prstGeom prst="rect">
             <a:avLst/>
@@ -4684,8 +4701,8 @@
         </p:nvSpPr>
         <p:spPr>
           <a:xfrm>
-            <a:off x="4617720" y="1417320"/>
-            <a:ext cx="2057400" cy="365760"/>
+            <a:off x="4617720" y="1572768"/>
+            <a:ext cx="2057400" cy="347472"/>
           </a:xfrm>
           <a:prstGeom prst="rect">
             <a:avLst/>
@@ -4704,8 +4721,8 @@
         </p:nvSpPr>
         <p:spPr>
           <a:xfrm>
-            <a:off x="4663440" y="1435608"/>
-            <a:ext cx="2011680" cy="329184"/>
+            <a:off x="4663440" y="1591056"/>
+            <a:ext cx="2011680" cy="310896"/>
           </a:xfrm>
           <a:prstGeom prst="rect">
             <a:avLst/>
@@ -4743,8 +4760,8 @@
         </p:nvSpPr>
         <p:spPr>
           <a:xfrm>
-            <a:off x="6720840" y="1417320"/>
-            <a:ext cx="1965960" cy="365760"/>
+            <a:off x="6720840" y="1572768"/>
+            <a:ext cx="1965960" cy="347472"/>
           </a:xfrm>
           <a:prstGeom prst="rect">
             <a:avLst/>
@@ -4763,8 +4780,8 @@
         </p:nvSpPr>
         <p:spPr>
           <a:xfrm>
-            <a:off x="6766560" y="1435608"/>
-            <a:ext cx="1920240" cy="329184"/>
+            <a:off x="6766560" y="1591056"/>
+            <a:ext cx="1920240" cy="310896"/>
           </a:xfrm>
           <a:prstGeom prst="rect">
             <a:avLst/>
@@ -4802,8 +4819,8 @@
         </p:nvSpPr>
         <p:spPr>
           <a:xfrm>
-            <a:off x="320040" y="1801368"/>
-            <a:ext cx="1920240" cy="365760"/>
+            <a:off x="320040" y="1938528"/>
+            <a:ext cx="1920240" cy="347472"/>
           </a:xfrm>
           <a:prstGeom prst="rect">
             <a:avLst/>
@@ -4822,8 +4839,8 @@
         </p:nvSpPr>
         <p:spPr>
           <a:xfrm>
-            <a:off x="365760" y="1819656"/>
-            <a:ext cx="1874520" cy="329184"/>
+            <a:off x="365760" y="1956816"/>
+            <a:ext cx="1874520" cy="310896"/>
           </a:xfrm>
           <a:prstGeom prst="rect">
             <a:avLst/>
@@ -4861,8 +4878,8 @@
         </p:nvSpPr>
         <p:spPr>
           <a:xfrm>
-            <a:off x="2286000" y="1801368"/>
-            <a:ext cx="960120" cy="365760"/>
+            <a:off x="2286000" y="1938528"/>
+            <a:ext cx="960120" cy="347472"/>
           </a:xfrm>
           <a:prstGeom prst="rect">
             <a:avLst/>
@@ -4881,8 +4898,8 @@
         </p:nvSpPr>
         <p:spPr>
           <a:xfrm>
-            <a:off x="2331720" y="1819656"/>
-            <a:ext cx="914400" cy="329184"/>
+            <a:off x="2331720" y="1956816"/>
+            <a:ext cx="914400" cy="310896"/>
           </a:xfrm>
           <a:prstGeom prst="rect">
             <a:avLst/>
@@ -4920,8 +4937,8 @@
         </p:nvSpPr>
         <p:spPr>
           <a:xfrm>
-            <a:off x="3291840" y="1801368"/>
-            <a:ext cx="1280160" cy="365760"/>
+            <a:off x="3291840" y="1938528"/>
+            <a:ext cx="1280160" cy="347472"/>
           </a:xfrm>
           <a:prstGeom prst="rect">
             <a:avLst/>
@@ -4940,8 +4957,8 @@
         </p:nvSpPr>
         <p:spPr>
           <a:xfrm>
-            <a:off x="3337560" y="1819656"/>
-            <a:ext cx="1234440" cy="329184"/>
+            <a:off x="3337560" y="1956816"/>
+            <a:ext cx="1234440" cy="310896"/>
           </a:xfrm>
           <a:prstGeom prst="rect">
             <a:avLst/>
@@ -4979,8 +4996,8 @@
         </p:nvSpPr>
         <p:spPr>
           <a:xfrm>
-            <a:off x="4617720" y="1801368"/>
-            <a:ext cx="2057400" cy="365760"/>
+            <a:off x="4617720" y="1938528"/>
+            <a:ext cx="2057400" cy="347472"/>
           </a:xfrm>
           <a:prstGeom prst="rect">
             <a:avLst/>
@@ -4999,8 +5016,8 @@
         </p:nvSpPr>
         <p:spPr>
           <a:xfrm>
-            <a:off x="4663440" y="1819656"/>
-            <a:ext cx="2011680" cy="329184"/>
+            <a:off x="4663440" y="1956816"/>
+            <a:ext cx="2011680" cy="310896"/>
           </a:xfrm>
           <a:prstGeom prst="rect">
             <a:avLst/>
@@ -5038,8 +5055,8 @@
         </p:nvSpPr>
         <p:spPr>
           <a:xfrm>
-            <a:off x="6720840" y="1801368"/>
-            <a:ext cx="1965960" cy="365760"/>
+            <a:off x="6720840" y="1938528"/>
+            <a:ext cx="1965960" cy="347472"/>
           </a:xfrm>
           <a:prstGeom prst="rect">
             <a:avLst/>
@@ -5058,8 +5075,8 @@
         </p:nvSpPr>
         <p:spPr>
           <a:xfrm>
-            <a:off x="6766560" y="1819656"/>
-            <a:ext cx="1920240" cy="329184"/>
+            <a:off x="6766560" y="1956816"/>
+            <a:ext cx="1920240" cy="310896"/>
           </a:xfrm>
           <a:prstGeom prst="rect">
             <a:avLst/>
@@ -5097,8 +5114,8 @@
         </p:nvSpPr>
         <p:spPr>
           <a:xfrm>
-            <a:off x="320040" y="2185416"/>
-            <a:ext cx="1920240" cy="365760"/>
+            <a:off x="320040" y="2304288"/>
+            <a:ext cx="1920240" cy="347472"/>
           </a:xfrm>
           <a:prstGeom prst="rect">
             <a:avLst/>
@@ -5117,8 +5134,8 @@
         </p:nvSpPr>
         <p:spPr>
           <a:xfrm>
-            <a:off x="365760" y="2203704"/>
-            <a:ext cx="1874520" cy="329184"/>
+            <a:off x="365760" y="2322576"/>
+            <a:ext cx="1874520" cy="310896"/>
           </a:xfrm>
           <a:prstGeom prst="rect">
             <a:avLst/>
@@ -5156,8 +5173,8 @@
         </p:nvSpPr>
         <p:spPr>
           <a:xfrm>
-            <a:off x="2286000" y="2185416"/>
-            <a:ext cx="960120" cy="365760"/>
+            <a:off x="2286000" y="2304288"/>
+            <a:ext cx="960120" cy="347472"/>
           </a:xfrm>
           <a:prstGeom prst="rect">
             <a:avLst/>
@@ -5176,8 +5193,8 @@
         </p:nvSpPr>
         <p:spPr>
           <a:xfrm>
-            <a:off x="2331720" y="2203704"/>
-            <a:ext cx="914400" cy="329184"/>
+            <a:off x="2331720" y="2322576"/>
+            <a:ext cx="914400" cy="310896"/>
           </a:xfrm>
           <a:prstGeom prst="rect">
             <a:avLst/>
@@ -5215,8 +5232,8 @@
         </p:nvSpPr>
         <p:spPr>
           <a:xfrm>
-            <a:off x="3291840" y="2185416"/>
-            <a:ext cx="1280160" cy="365760"/>
+            <a:off x="3291840" y="2304288"/>
+            <a:ext cx="1280160" cy="347472"/>
           </a:xfrm>
           <a:prstGeom prst="rect">
             <a:avLst/>
@@ -5235,8 +5252,8 @@
         </p:nvSpPr>
         <p:spPr>
           <a:xfrm>
-            <a:off x="3337560" y="2203704"/>
-            <a:ext cx="1234440" cy="329184"/>
+            <a:off x="3337560" y="2322576"/>
+            <a:ext cx="1234440" cy="310896"/>
           </a:xfrm>
           <a:prstGeom prst="rect">
             <a:avLst/>
@@ -5274,8 +5291,8 @@
         </p:nvSpPr>
         <p:spPr>
           <a:xfrm>
-            <a:off x="4617720" y="2185416"/>
-            <a:ext cx="2057400" cy="365760"/>
+            <a:off x="4617720" y="2304288"/>
+            <a:ext cx="2057400" cy="347472"/>
           </a:xfrm>
           <a:prstGeom prst="rect">
             <a:avLst/>
@@ -5294,8 +5311,8 @@
         </p:nvSpPr>
         <p:spPr>
           <a:xfrm>
-            <a:off x="4663440" y="2203704"/>
-            <a:ext cx="2011680" cy="329184"/>
+            <a:off x="4663440" y="2322576"/>
+            <a:ext cx="2011680" cy="310896"/>
           </a:xfrm>
           <a:prstGeom prst="rect">
             <a:avLst/>
@@ -5333,8 +5350,8 @@
         </p:nvSpPr>
         <p:spPr>
           <a:xfrm>
-            <a:off x="6720840" y="2185416"/>
-            <a:ext cx="1965960" cy="365760"/>
+            <a:off x="6720840" y="2304288"/>
+            <a:ext cx="1965960" cy="347472"/>
           </a:xfrm>
           <a:prstGeom prst="rect">
             <a:avLst/>
@@ -5353,8 +5370,8 @@
         </p:nvSpPr>
         <p:spPr>
           <a:xfrm>
-            <a:off x="6766560" y="2203704"/>
-            <a:ext cx="1920240" cy="329184"/>
+            <a:off x="6766560" y="2322576"/>
+            <a:ext cx="1920240" cy="310896"/>
           </a:xfrm>
           <a:prstGeom prst="rect">
             <a:avLst/>
@@ -5392,8 +5409,8 @@
         </p:nvSpPr>
         <p:spPr>
           <a:xfrm>
-            <a:off x="320040" y="2569464"/>
-            <a:ext cx="1920240" cy="365760"/>
+            <a:off x="320040" y="2670048"/>
+            <a:ext cx="1920240" cy="347472"/>
           </a:xfrm>
           <a:prstGeom prst="rect">
             <a:avLst/>
@@ -5412,8 +5429,8 @@
         </p:nvSpPr>
         <p:spPr>
           <a:xfrm>
-            <a:off x="365760" y="2587752"/>
-            <a:ext cx="1874520" cy="329184"/>
+            <a:off x="365760" y="2688336"/>
+            <a:ext cx="1874520" cy="310896"/>
           </a:xfrm>
           <a:prstGeom prst="rect">
             <a:avLst/>
@@ -5451,8 +5468,8 @@
         </p:nvSpPr>
         <p:spPr>
           <a:xfrm>
-            <a:off x="2286000" y="2569464"/>
-            <a:ext cx="960120" cy="365760"/>
+            <a:off x="2286000" y="2670048"/>
+            <a:ext cx="960120" cy="347472"/>
           </a:xfrm>
           <a:prstGeom prst="rect">
             <a:avLst/>
@@ -5471,8 +5488,8 @@
         </p:nvSpPr>
         <p:spPr>
           <a:xfrm>
-            <a:off x="2331720" y="2587752"/>
-            <a:ext cx="914400" cy="329184"/>
+            <a:off x="2331720" y="2688336"/>
+            <a:ext cx="914400" cy="310896"/>
           </a:xfrm>
           <a:prstGeom prst="rect">
             <a:avLst/>
@@ -5510,8 +5527,8 @@
         </p:nvSpPr>
         <p:spPr>
           <a:xfrm>
-            <a:off x="3291840" y="2569464"/>
-            <a:ext cx="1280160" cy="365760"/>
+            <a:off x="3291840" y="2670048"/>
+            <a:ext cx="1280160" cy="347472"/>
           </a:xfrm>
           <a:prstGeom prst="rect">
             <a:avLst/>
@@ -5530,8 +5547,8 @@
         </p:nvSpPr>
         <p:spPr>
           <a:xfrm>
-            <a:off x="3337560" y="2587752"/>
-            <a:ext cx="1234440" cy="329184"/>
+            <a:off x="3337560" y="2688336"/>
+            <a:ext cx="1234440" cy="310896"/>
           </a:xfrm>
           <a:prstGeom prst="rect">
             <a:avLst/>
@@ -5569,8 +5586,8 @@
         </p:nvSpPr>
         <p:spPr>
           <a:xfrm>
-            <a:off x="4617720" y="2569464"/>
-            <a:ext cx="2057400" cy="365760"/>
+            <a:off x="4617720" y="2670048"/>
+            <a:ext cx="2057400" cy="347472"/>
           </a:xfrm>
           <a:prstGeom prst="rect">
             <a:avLst/>
@@ -5589,8 +5606,8 @@
         </p:nvSpPr>
         <p:spPr>
           <a:xfrm>
-            <a:off x="4663440" y="2587752"/>
-            <a:ext cx="2011680" cy="329184"/>
+            <a:off x="4663440" y="2688336"/>
+            <a:ext cx="2011680" cy="310896"/>
           </a:xfrm>
           <a:prstGeom prst="rect">
             <a:avLst/>
@@ -5628,8 +5645,8 @@
         </p:nvSpPr>
         <p:spPr>
           <a:xfrm>
-            <a:off x="6720840" y="2569464"/>
-            <a:ext cx="1965960" cy="365760"/>
+            <a:off x="6720840" y="2670048"/>
+            <a:ext cx="1965960" cy="347472"/>
           </a:xfrm>
           <a:prstGeom prst="rect">
             <a:avLst/>
@@ -5648,8 +5665,8 @@
         </p:nvSpPr>
         <p:spPr>
           <a:xfrm>
-            <a:off x="6766560" y="2587752"/>
-            <a:ext cx="1920240" cy="329184"/>
+            <a:off x="6766560" y="2688336"/>
+            <a:ext cx="1920240" cy="310896"/>
           </a:xfrm>
           <a:prstGeom prst="rect">
             <a:avLst/>
@@ -5687,8 +5704,8 @@
         </p:nvSpPr>
         <p:spPr>
           <a:xfrm>
-            <a:off x="320040" y="2953512"/>
-            <a:ext cx="1920240" cy="365760"/>
+            <a:off x="320040" y="3035808"/>
+            <a:ext cx="1920240" cy="347472"/>
           </a:xfrm>
           <a:prstGeom prst="rect">
             <a:avLst/>
@@ -5707,8 +5724,8 @@
         </p:nvSpPr>
         <p:spPr>
           <a:xfrm>
-            <a:off x="365760" y="2971800"/>
-            <a:ext cx="1874520" cy="329184"/>
+            <a:off x="365760" y="3054096"/>
+            <a:ext cx="1874520" cy="310896"/>
           </a:xfrm>
           <a:prstGeom prst="rect">
             <a:avLst/>
@@ -5746,8 +5763,8 @@
         </p:nvSpPr>
         <p:spPr>
           <a:xfrm>
-            <a:off x="2286000" y="2953512"/>
-            <a:ext cx="960120" cy="365760"/>
+            <a:off x="2286000" y="3035808"/>
+            <a:ext cx="960120" cy="347472"/>
           </a:xfrm>
           <a:prstGeom prst="rect">
             <a:avLst/>
@@ -5766,8 +5783,8 @@
         </p:nvSpPr>
         <p:spPr>
           <a:xfrm>
-            <a:off x="2331720" y="2971800"/>
-            <a:ext cx="914400" cy="329184"/>
+            <a:off x="2331720" y="3054096"/>
+            <a:ext cx="914400" cy="310896"/>
           </a:xfrm>
           <a:prstGeom prst="rect">
             <a:avLst/>
@@ -5805,8 +5822,8 @@
         </p:nvSpPr>
         <p:spPr>
           <a:xfrm>
-            <a:off x="3291840" y="2953512"/>
-            <a:ext cx="1280160" cy="365760"/>
+            <a:off x="3291840" y="3035808"/>
+            <a:ext cx="1280160" cy="347472"/>
           </a:xfrm>
           <a:prstGeom prst="rect">
             <a:avLst/>
@@ -5825,8 +5842,8 @@
         </p:nvSpPr>
         <p:spPr>
           <a:xfrm>
-            <a:off x="3337560" y="2971800"/>
-            <a:ext cx="1234440" cy="329184"/>
+            <a:off x="3337560" y="3054096"/>
+            <a:ext cx="1234440" cy="310896"/>
           </a:xfrm>
           <a:prstGeom prst="rect">
             <a:avLst/>
@@ -5864,8 +5881,8 @@
         </p:nvSpPr>
         <p:spPr>
           <a:xfrm>
-            <a:off x="4617720" y="2953512"/>
-            <a:ext cx="2057400" cy="365760"/>
+            <a:off x="4617720" y="3035808"/>
+            <a:ext cx="2057400" cy="347472"/>
           </a:xfrm>
           <a:prstGeom prst="rect">
             <a:avLst/>
@@ -5884,8 +5901,8 @@
         </p:nvSpPr>
         <p:spPr>
           <a:xfrm>
-            <a:off x="4663440" y="2971800"/>
-            <a:ext cx="2011680" cy="329184"/>
+            <a:off x="4663440" y="3054096"/>
+            <a:ext cx="2011680" cy="310896"/>
           </a:xfrm>
           <a:prstGeom prst="rect">
             <a:avLst/>
@@ -5923,8 +5940,8 @@
         </p:nvSpPr>
         <p:spPr>
           <a:xfrm>
-            <a:off x="6720840" y="2953512"/>
-            <a:ext cx="1965960" cy="365760"/>
+            <a:off x="6720840" y="3035808"/>
+            <a:ext cx="1965960" cy="347472"/>
           </a:xfrm>
           <a:prstGeom prst="rect">
             <a:avLst/>
@@ -5943,8 +5960,8 @@
         </p:nvSpPr>
         <p:spPr>
           <a:xfrm>
-            <a:off x="6766560" y="2971800"/>
-            <a:ext cx="1920240" cy="329184"/>
+            <a:off x="6766560" y="3054096"/>
+            <a:ext cx="1920240" cy="310896"/>
           </a:xfrm>
           <a:prstGeom prst="rect">
             <a:avLst/>
@@ -5982,8 +5999,8 @@
         </p:nvSpPr>
         <p:spPr>
           <a:xfrm>
-            <a:off x="320040" y="3337560"/>
-            <a:ext cx="1920240" cy="365760"/>
+            <a:off x="320040" y="3401568"/>
+            <a:ext cx="1920240" cy="347472"/>
           </a:xfrm>
           <a:prstGeom prst="rect">
             <a:avLst/>
@@ -6002,8 +6019,8 @@
         </p:nvSpPr>
         <p:spPr>
           <a:xfrm>
-            <a:off x="365760" y="3355848"/>
-            <a:ext cx="1874520" cy="329184"/>
+            <a:off x="365760" y="3419856"/>
+            <a:ext cx="1874520" cy="310896"/>
           </a:xfrm>
           <a:prstGeom prst="rect">
             <a:avLst/>
@@ -6041,8 +6058,8 @@
         </p:nvSpPr>
         <p:spPr>
           <a:xfrm>
-            <a:off x="2286000" y="3337560"/>
-            <a:ext cx="960120" cy="365760"/>
+            <a:off x="2286000" y="3401568"/>
+            <a:ext cx="960120" cy="347472"/>
           </a:xfrm>
           <a:prstGeom prst="rect">
             <a:avLst/>
@@ -6061,8 +6078,8 @@
         </p:nvSpPr>
         <p:spPr>
           <a:xfrm>
-            <a:off x="2331720" y="3355848"/>
-            <a:ext cx="914400" cy="329184"/>
+            <a:off x="2331720" y="3419856"/>
+            <a:ext cx="914400" cy="310896"/>
           </a:xfrm>
           <a:prstGeom prst="rect">
             <a:avLst/>
@@ -6100,8 +6117,8 @@
         </p:nvSpPr>
         <p:spPr>
           <a:xfrm>
-            <a:off x="3291840" y="3337560"/>
-            <a:ext cx="1280160" cy="365760"/>
+            <a:off x="3291840" y="3401568"/>
+            <a:ext cx="1280160" cy="347472"/>
           </a:xfrm>
           <a:prstGeom prst="rect">
             <a:avLst/>
@@ -6120,8 +6137,8 @@
         </p:nvSpPr>
         <p:spPr>
           <a:xfrm>
-            <a:off x="3337560" y="3355848"/>
-            <a:ext cx="1234440" cy="329184"/>
+            <a:off x="3337560" y="3419856"/>
+            <a:ext cx="1234440" cy="310896"/>
           </a:xfrm>
           <a:prstGeom prst="rect">
             <a:avLst/>
@@ -6159,8 +6176,8 @@
         </p:nvSpPr>
         <p:spPr>
           <a:xfrm>
-            <a:off x="4617720" y="3337560"/>
-            <a:ext cx="2057400" cy="365760"/>
+            <a:off x="4617720" y="3401568"/>
+            <a:ext cx="2057400" cy="347472"/>
           </a:xfrm>
           <a:prstGeom prst="rect">
             <a:avLst/>
@@ -6179,8 +6196,8 @@
         </p:nvSpPr>
         <p:spPr>
           <a:xfrm>
-            <a:off x="4663440" y="3355848"/>
-            <a:ext cx="2011680" cy="329184"/>
+            <a:off x="4663440" y="3419856"/>
+            <a:ext cx="2011680" cy="310896"/>
           </a:xfrm>
           <a:prstGeom prst="rect">
             <a:avLst/>
@@ -6218,8 +6235,8 @@
         </p:nvSpPr>
         <p:spPr>
           <a:xfrm>
-            <a:off x="6720840" y="3337560"/>
-            <a:ext cx="1965960" cy="365760"/>
+            <a:off x="6720840" y="3401568"/>
+            <a:ext cx="1965960" cy="347472"/>
           </a:xfrm>
           <a:prstGeom prst="rect">
             <a:avLst/>
@@ -6238,8 +6255,8 @@
         </p:nvSpPr>
         <p:spPr>
           <a:xfrm>
-            <a:off x="6766560" y="3355848"/>
-            <a:ext cx="1920240" cy="329184"/>
+            <a:off x="6766560" y="3419856"/>
+            <a:ext cx="1920240" cy="310896"/>
           </a:xfrm>
           <a:prstGeom prst="rect">
             <a:avLst/>
@@ -6277,8 +6294,8 @@
         </p:nvSpPr>
         <p:spPr>
           <a:xfrm>
-            <a:off x="320040" y="3721608"/>
-            <a:ext cx="1920240" cy="365760"/>
+            <a:off x="320040" y="3767328"/>
+            <a:ext cx="1920240" cy="347472"/>
           </a:xfrm>
           <a:prstGeom prst="rect">
             <a:avLst/>
@@ -6297,8 +6314,8 @@
         </p:nvSpPr>
         <p:spPr>
           <a:xfrm>
-            <a:off x="365760" y="3739896"/>
-            <a:ext cx="1874520" cy="329184"/>
+            <a:off x="365760" y="3785616"/>
+            <a:ext cx="1874520" cy="310896"/>
           </a:xfrm>
           <a:prstGeom prst="rect">
             <a:avLst/>
@@ -6336,8 +6353,8 @@
         </p:nvSpPr>
         <p:spPr>
           <a:xfrm>
-            <a:off x="2286000" y="3721608"/>
-            <a:ext cx="960120" cy="365760"/>
+            <a:off x="2286000" y="3767328"/>
+            <a:ext cx="960120" cy="347472"/>
           </a:xfrm>
           <a:prstGeom prst="rect">
             <a:avLst/>
@@ -6356,8 +6373,8 @@
         </p:nvSpPr>
         <p:spPr>
           <a:xfrm>
-            <a:off x="2331720" y="3739896"/>
-            <a:ext cx="914400" cy="329184"/>
+            <a:off x="2331720" y="3785616"/>
+            <a:ext cx="914400" cy="310896"/>
           </a:xfrm>
           <a:prstGeom prst="rect">
             <a:avLst/>
@@ -6395,8 +6412,8 @@
         </p:nvSpPr>
         <p:spPr>
           <a:xfrm>
-            <a:off x="3291840" y="3721608"/>
-            <a:ext cx="1280160" cy="365760"/>
+            <a:off x="3291840" y="3767328"/>
+            <a:ext cx="1280160" cy="347472"/>
           </a:xfrm>
           <a:prstGeom prst="rect">
             <a:avLst/>
@@ -6415,8 +6432,8 @@
         </p:nvSpPr>
         <p:spPr>
           <a:xfrm>
-            <a:off x="3337560" y="3739896"/>
-            <a:ext cx="1234440" cy="329184"/>
+            <a:off x="3337560" y="3785616"/>
+            <a:ext cx="1234440" cy="310896"/>
           </a:xfrm>
           <a:prstGeom prst="rect">
             <a:avLst/>
@@ -6454,8 +6471,8 @@
         </p:nvSpPr>
         <p:spPr>
           <a:xfrm>
-            <a:off x="4617720" y="3721608"/>
-            <a:ext cx="2057400" cy="365760"/>
+            <a:off x="4617720" y="3767328"/>
+            <a:ext cx="2057400" cy="347472"/>
           </a:xfrm>
           <a:prstGeom prst="rect">
             <a:avLst/>
@@ -6474,8 +6491,8 @@
         </p:nvSpPr>
         <p:spPr>
           <a:xfrm>
-            <a:off x="4663440" y="3739896"/>
-            <a:ext cx="2011680" cy="329184"/>
+            <a:off x="4663440" y="3785616"/>
+            <a:ext cx="2011680" cy="310896"/>
           </a:xfrm>
           <a:prstGeom prst="rect">
             <a:avLst/>
@@ -6513,8 +6530,8 @@
         </p:nvSpPr>
         <p:spPr>
           <a:xfrm>
-            <a:off x="6720840" y="3721608"/>
-            <a:ext cx="1965960" cy="365760"/>
+            <a:off x="6720840" y="3767328"/>
+            <a:ext cx="1965960" cy="347472"/>
           </a:xfrm>
           <a:prstGeom prst="rect">
             <a:avLst/>
@@ -6533,8 +6550,8 @@
         </p:nvSpPr>
         <p:spPr>
           <a:xfrm>
-            <a:off x="6766560" y="3739896"/>
-            <a:ext cx="1920240" cy="329184"/>
+            <a:off x="6766560" y="3785616"/>
+            <a:ext cx="1920240" cy="310896"/>
           </a:xfrm>
           <a:prstGeom prst="rect">
             <a:avLst/>
@@ -6572,8 +6589,8 @@
         </p:nvSpPr>
         <p:spPr>
           <a:xfrm>
-            <a:off x="320040" y="4105656"/>
-            <a:ext cx="1920240" cy="365760"/>
+            <a:off x="320040" y="4133088"/>
+            <a:ext cx="1920240" cy="347472"/>
           </a:xfrm>
           <a:prstGeom prst="rect">
             <a:avLst/>
@@ -6592,8 +6609,8 @@
         </p:nvSpPr>
         <p:spPr>
           <a:xfrm>
-            <a:off x="365760" y="4123944"/>
-            <a:ext cx="1874520" cy="329184"/>
+            <a:off x="365760" y="4151376"/>
+            <a:ext cx="1874520" cy="310896"/>
           </a:xfrm>
           <a:prstGeom prst="rect">
             <a:avLst/>
@@ -6631,8 +6648,8 @@
         </p:nvSpPr>
         <p:spPr>
           <a:xfrm>
-            <a:off x="2286000" y="4105656"/>
-            <a:ext cx="960120" cy="365760"/>
+            <a:off x="2286000" y="4133088"/>
+            <a:ext cx="960120" cy="347472"/>
           </a:xfrm>
           <a:prstGeom prst="rect">
             <a:avLst/>
@@ -6651,8 +6668,8 @@
         </p:nvSpPr>
         <p:spPr>
           <a:xfrm>
-            <a:off x="2331720" y="4123944"/>
-            <a:ext cx="914400" cy="329184"/>
+            <a:off x="2331720" y="4151376"/>
+            <a:ext cx="914400" cy="310896"/>
           </a:xfrm>
           <a:prstGeom prst="rect">
             <a:avLst/>
@@ -6690,8 +6707,8 @@
         </p:nvSpPr>
         <p:spPr>
           <a:xfrm>
-            <a:off x="3291840" y="4105656"/>
-            <a:ext cx="1280160" cy="365760"/>
+            <a:off x="3291840" y="4133088"/>
+            <a:ext cx="1280160" cy="347472"/>
           </a:xfrm>
           <a:prstGeom prst="rect">
             <a:avLst/>
@@ -6710,8 +6727,8 @@
         </p:nvSpPr>
         <p:spPr>
           <a:xfrm>
-            <a:off x="3337560" y="4123944"/>
-            <a:ext cx="1234440" cy="329184"/>
+            <a:off x="3337560" y="4151376"/>
+            <a:ext cx="1234440" cy="310896"/>
           </a:xfrm>
           <a:prstGeom prst="rect">
             <a:avLst/>
@@ -6749,8 +6766,8 @@
         </p:nvSpPr>
         <p:spPr>
           <a:xfrm>
-            <a:off x="4617720" y="4105656"/>
-            <a:ext cx="2057400" cy="365760"/>
+            <a:off x="4617720" y="4133088"/>
+            <a:ext cx="2057400" cy="347472"/>
           </a:xfrm>
           <a:prstGeom prst="rect">
             <a:avLst/>
@@ -6769,8 +6786,8 @@
         </p:nvSpPr>
         <p:spPr>
           <a:xfrm>
-            <a:off x="4663440" y="4123944"/>
-            <a:ext cx="2011680" cy="329184"/>
+            <a:off x="4663440" y="4151376"/>
+            <a:ext cx="2011680" cy="310896"/>
           </a:xfrm>
           <a:prstGeom prst="rect">
             <a:avLst/>
@@ -6808,8 +6825,8 @@
         </p:nvSpPr>
         <p:spPr>
           <a:xfrm>
-            <a:off x="6720840" y="4105656"/>
-            <a:ext cx="1965960" cy="365760"/>
+            <a:off x="6720840" y="4133088"/>
+            <a:ext cx="1965960" cy="347472"/>
           </a:xfrm>
           <a:prstGeom prst="rect">
             <a:avLst/>
@@ -6828,8 +6845,8 @@
         </p:nvSpPr>
         <p:spPr>
           <a:xfrm>
-            <a:off x="6766560" y="4123944"/>
-            <a:ext cx="1920240" cy="329184"/>
+            <a:off x="6766560" y="4151376"/>
+            <a:ext cx="1920240" cy="310896"/>
           </a:xfrm>
           <a:prstGeom prst="rect">
             <a:avLst/>
@@ -6909,7 +6926,7 @@
                 <a:ea typeface="Calibri" pitchFamily="34" charset="-122"/>
                 <a:cs typeface="Calibri" pitchFamily="34" charset="-120"/>
               </a:rPr>
-              <a:t>Authentic: range extends up an octave from final; Plagal: range spans both sides of final</a:t>
+              <a:t>Authentic: range extends octave up from final; Plagal: range spans both sides</a:t>
             </a:r>
             <a:endParaRPr lang="en-US" sz="1400" dirty="0"/>
           </a:p>
@@ -7153,7 +7170,7 @@
         <p:spPr>
           <a:xfrm>
             <a:off x="411480" y="1591056"/>
-            <a:ext cx="4389120" cy="502920"/>
+            <a:ext cx="4389120" cy="658368"/>
           </a:xfrm>
           <a:prstGeom prst="rect">
             <a:avLst/>
@@ -7208,8 +7225,8 @@
         </p:nvSpPr>
         <p:spPr>
           <a:xfrm>
-            <a:off x="502920" y="2148840"/>
-            <a:ext cx="621792" cy="822960"/>
+            <a:off x="502920" y="2304288"/>
+            <a:ext cx="621792" cy="749808"/>
           </a:xfrm>
           <a:prstGeom prst="rect">
             <a:avLst/>
@@ -7228,7 +7245,7 @@
         </p:nvSpPr>
         <p:spPr>
           <a:xfrm>
-            <a:off x="502920" y="2194560"/>
+            <a:off x="502920" y="2350008"/>
             <a:ext cx="621792" cy="384048"/>
           </a:xfrm>
           <a:prstGeom prst="rect">
@@ -7267,8 +7284,8 @@
         </p:nvSpPr>
         <p:spPr>
           <a:xfrm>
-            <a:off x="502920" y="2578608"/>
-            <a:ext cx="621792" cy="347472"/>
+            <a:off x="502920" y="2706624"/>
+            <a:ext cx="621792" cy="329184"/>
           </a:xfrm>
           <a:prstGeom prst="rect">
             <a:avLst/>
@@ -7306,8 +7323,8 @@
         </p:nvSpPr>
         <p:spPr>
           <a:xfrm>
-            <a:off x="1234440" y="2148840"/>
-            <a:ext cx="621792" cy="822960"/>
+            <a:off x="1234440" y="2304288"/>
+            <a:ext cx="621792" cy="749808"/>
           </a:xfrm>
           <a:prstGeom prst="rect">
             <a:avLst/>
@@ -7326,7 +7343,7 @@
         </p:nvSpPr>
         <p:spPr>
           <a:xfrm>
-            <a:off x="1234440" y="2194560"/>
+            <a:off x="1234440" y="2350008"/>
             <a:ext cx="621792" cy="384048"/>
           </a:xfrm>
           <a:prstGeom prst="rect">
@@ -7365,8 +7382,8 @@
         </p:nvSpPr>
         <p:spPr>
           <a:xfrm>
-            <a:off x="1234440" y="2578608"/>
-            <a:ext cx="621792" cy="347472"/>
+            <a:off x="1234440" y="2706624"/>
+            <a:ext cx="621792" cy="329184"/>
           </a:xfrm>
           <a:prstGeom prst="rect">
             <a:avLst/>
@@ -7404,8 +7421,8 @@
         </p:nvSpPr>
         <p:spPr>
           <a:xfrm>
-            <a:off x="1965960" y="2148840"/>
-            <a:ext cx="621792" cy="822960"/>
+            <a:off x="1965960" y="2304288"/>
+            <a:ext cx="621792" cy="749808"/>
           </a:xfrm>
           <a:prstGeom prst="rect">
             <a:avLst/>
@@ -7424,7 +7441,7 @@
         </p:nvSpPr>
         <p:spPr>
           <a:xfrm>
-            <a:off x="1965960" y="2194560"/>
+            <a:off x="1965960" y="2350008"/>
             <a:ext cx="621792" cy="384048"/>
           </a:xfrm>
           <a:prstGeom prst="rect">
@@ -7463,8 +7480,8 @@
         </p:nvSpPr>
         <p:spPr>
           <a:xfrm>
-            <a:off x="1965960" y="2578608"/>
-            <a:ext cx="621792" cy="347472"/>
+            <a:off x="1965960" y="2706624"/>
+            <a:ext cx="621792" cy="329184"/>
           </a:xfrm>
           <a:prstGeom prst="rect">
             <a:avLst/>
@@ -7502,8 +7519,8 @@
         </p:nvSpPr>
         <p:spPr>
           <a:xfrm>
-            <a:off x="2697480" y="2148840"/>
-            <a:ext cx="621792" cy="822960"/>
+            <a:off x="2697480" y="2304288"/>
+            <a:ext cx="621792" cy="749808"/>
           </a:xfrm>
           <a:prstGeom prst="rect">
             <a:avLst/>
@@ -7522,7 +7539,7 @@
         </p:nvSpPr>
         <p:spPr>
           <a:xfrm>
-            <a:off x="2697480" y="2194560"/>
+            <a:off x="2697480" y="2350008"/>
             <a:ext cx="621792" cy="384048"/>
           </a:xfrm>
           <a:prstGeom prst="rect">
@@ -7561,8 +7578,8 @@
         </p:nvSpPr>
         <p:spPr>
           <a:xfrm>
-            <a:off x="2697480" y="2578608"/>
-            <a:ext cx="621792" cy="347472"/>
+            <a:off x="2697480" y="2706624"/>
+            <a:ext cx="621792" cy="329184"/>
           </a:xfrm>
           <a:prstGeom prst="rect">
             <a:avLst/>
@@ -7600,8 +7617,8 @@
         </p:nvSpPr>
         <p:spPr>
           <a:xfrm>
-            <a:off x="3429000" y="2148840"/>
-            <a:ext cx="621792" cy="822960"/>
+            <a:off x="3429000" y="2304288"/>
+            <a:ext cx="621792" cy="749808"/>
           </a:xfrm>
           <a:prstGeom prst="rect">
             <a:avLst/>
@@ -7620,7 +7637,7 @@
         </p:nvSpPr>
         <p:spPr>
           <a:xfrm>
-            <a:off x="3429000" y="2194560"/>
+            <a:off x="3429000" y="2350008"/>
             <a:ext cx="621792" cy="384048"/>
           </a:xfrm>
           <a:prstGeom prst="rect">
@@ -7659,8 +7676,8 @@
         </p:nvSpPr>
         <p:spPr>
           <a:xfrm>
-            <a:off x="3429000" y="2578608"/>
-            <a:ext cx="621792" cy="347472"/>
+            <a:off x="3429000" y="2706624"/>
+            <a:ext cx="621792" cy="329184"/>
           </a:xfrm>
           <a:prstGeom prst="rect">
             <a:avLst/>
@@ -7698,8 +7715,8 @@
         </p:nvSpPr>
         <p:spPr>
           <a:xfrm>
-            <a:off x="4160520" y="2148840"/>
-            <a:ext cx="621792" cy="822960"/>
+            <a:off x="4160520" y="2304288"/>
+            <a:ext cx="621792" cy="749808"/>
           </a:xfrm>
           <a:prstGeom prst="rect">
             <a:avLst/>
@@ -7718,7 +7735,7 @@
         </p:nvSpPr>
         <p:spPr>
           <a:xfrm>
-            <a:off x="4160520" y="2194560"/>
+            <a:off x="4160520" y="2350008"/>
             <a:ext cx="621792" cy="384048"/>
           </a:xfrm>
           <a:prstGeom prst="rect">
@@ -7757,8 +7774,8 @@
         </p:nvSpPr>
         <p:spPr>
           <a:xfrm>
-            <a:off x="4160520" y="2578608"/>
-            <a:ext cx="621792" cy="347472"/>
+            <a:off x="4160520" y="2706624"/>
+            <a:ext cx="621792" cy="329184"/>
           </a:xfrm>
           <a:prstGeom prst="rect">
             <a:avLst/>
@@ -7796,8 +7813,8 @@
         </p:nvSpPr>
         <p:spPr>
           <a:xfrm>
-            <a:off x="411480" y="3063240"/>
-            <a:ext cx="4389120" cy="1600200"/>
+            <a:off x="411480" y="3154680"/>
+            <a:ext cx="4389120" cy="1572768"/>
           </a:xfrm>
           <a:prstGeom prst="rect">
             <a:avLst/>
